--- a/deck/ACAPE_2026.pptx
+++ b/deck/ACAPE_2026.pptx
@@ -1574,7 +1574,7 @@
           <a:p>
             <a:r>
               <a:rPr lang="en-US" dirty="0"/>
-              <a:t>We also raised the probe rate from 5 Hz to 20 Hz so the p99 is stable.</a:t>
+              <a:t>The probe-to-bulk ratio is a discipline signature. Any AQM paper quoting a single ping number may be ranking systems backwards.</a:t>
             </a:r>
             <a:endParaRPr lang="en-US" dirty="0"/>
           </a:p>
@@ -9321,8 +9321,8 @@
         </p:nvSpPr>
         <p:spPr>
           <a:xfrm>
-            <a:off x="640080" y="1097280"/>
-            <a:ext cx="10881360" cy="365760"/>
+            <a:off x="640080" y="1051560"/>
+            <a:ext cx="10881360" cy="347472"/>
           </a:xfrm>
           <a:prstGeom prst="rect">
             <a:avLst/>
@@ -9360,8 +9360,8 @@
         </p:nvSpPr>
         <p:spPr>
           <a:xfrm>
-            <a:off x="640080" y="1554480"/>
-            <a:ext cx="10881360" cy="548640"/>
+            <a:off x="640080" y="1444752"/>
+            <a:ext cx="10881360" cy="457200"/>
           </a:xfrm>
           <a:prstGeom prst="rect">
             <a:avLst/>
@@ -9377,7 +9377,7 @@
               <a:buNone/>
             </a:pPr>
             <a:r>
-              <a:rPr lang="en-US" sz="1500" dirty="0">
+              <a:rPr lang="en-US" sz="1450" dirty="0">
                 <a:solidFill>
                   <a:srgbClr val="3A4A5F"/>
                 </a:solidFill>
@@ -9385,72 +9385,587 @@
                 <a:ea typeface="Calibri" pitchFamily="34" charset="-122"/>
                 <a:cs typeface="Calibri" pitchFamily="34" charset="-120"/>
               </a:rPr>
-              <a:t>fq_codel's new-flow heuristic deliberately privileges sparse flows. A ping is a sparse flow. So a ping measures the best case, not what the bulk traffic sees.</a:t>
-            </a:r>
-            <a:endParaRPr lang="en-US" sz="1500" dirty="0"/>
-          </a:p>
-        </p:txBody>
-      </p:sp>
-      <p:sp>
-        <p:nvSpPr>
-          <p:cNvPr id="5" name="Shape 3"/>
+              <a:t>fq_codel's new-flow heuristic deliberately privileges sparse flows. A ping is a sparse flow, so it measures the best case — not what the bulk traffic sees.</a:t>
+            </a:r>
+            <a:endParaRPr lang="en-US" sz="1450" dirty="0"/>
+          </a:p>
+        </p:txBody>
+      </p:sp>
+      <p:sp>
+        <p:nvSpPr>
+          <p:cNvPr id="5" name="Text 3"/>
+          <p:cNvSpPr txBox="1"/>
+          <p:nvPr/>
+        </p:nvSpPr>
+        <p:spPr>
+          <a:xfrm>
+            <a:off x="914400" y="1993392"/>
+            <a:ext cx="2103120" cy="274320"/>
+          </a:xfrm>
+          <a:prstGeom prst="rect">
+            <a:avLst/>
+          </a:prstGeom>
+          <a:noFill/>
+          <a:ln/>
+        </p:spPr>
+        <p:txBody>
+          <a:bodyPr wrap="square" lIns="0" tIns="0" rIns="0" bIns="0" rtlCol="0" anchor="ctr"/>
+          <a:lstStyle/>
+          <a:p>
+            <a:pPr indent="0" marL="0">
+              <a:buNone/>
+            </a:pPr>
+            <a:r>
+              <a:rPr lang="en-US" sz="1150" b="1" spc="100" kern="0" dirty="0">
+                <a:solidFill>
+                  <a:srgbClr val="7B8A9C"/>
+                </a:solidFill>
+                <a:latin typeface="Calibri" pitchFamily="34" charset="0"/>
+                <a:ea typeface="Calibri" pitchFamily="34" charset="-122"/>
+                <a:cs typeface="Calibri" pitchFamily="34" charset="-120"/>
+              </a:rPr>
+              <a:t>Discipline</a:t>
+            </a:r>
+            <a:endParaRPr lang="en-US" sz="1150" dirty="0"/>
+          </a:p>
+        </p:txBody>
+      </p:sp>
+      <p:sp>
+        <p:nvSpPr>
+          <p:cNvPr id="6" name="Text 4"/>
+          <p:cNvSpPr txBox="1"/>
+          <p:nvPr/>
+        </p:nvSpPr>
+        <p:spPr>
+          <a:xfrm>
+            <a:off x="5486400" y="1993392"/>
+            <a:ext cx="2103120" cy="274320"/>
+          </a:xfrm>
+          <a:prstGeom prst="rect">
+            <a:avLst/>
+          </a:prstGeom>
+          <a:noFill/>
+          <a:ln/>
+        </p:spPr>
+        <p:txBody>
+          <a:bodyPr wrap="square" lIns="0" tIns="0" rIns="0" bIns="0" rtlCol="0" anchor="ctr"/>
+          <a:lstStyle/>
+          <a:p>
+            <a:pPr indent="0" marL="0">
+              <a:buNone/>
+            </a:pPr>
+            <a:r>
+              <a:rPr lang="en-US" sz="1150" b="1" spc="100" kern="0" dirty="0">
+                <a:solidFill>
+                  <a:srgbClr val="7B8A9C"/>
+                </a:solidFill>
+                <a:latin typeface="Calibri" pitchFamily="34" charset="0"/>
+                <a:ea typeface="Calibri" pitchFamily="34" charset="-122"/>
+                <a:cs typeface="Calibri" pitchFamily="34" charset="-120"/>
+              </a:rPr>
+              <a:t>Sparse probe</a:t>
+            </a:r>
+            <a:endParaRPr lang="en-US" sz="1150" dirty="0"/>
+          </a:p>
+        </p:txBody>
+      </p:sp>
+      <p:sp>
+        <p:nvSpPr>
+          <p:cNvPr id="7" name="Text 5"/>
+          <p:cNvSpPr txBox="1"/>
+          <p:nvPr/>
+        </p:nvSpPr>
+        <p:spPr>
+          <a:xfrm>
+            <a:off x="7498080" y="1993392"/>
+            <a:ext cx="2103120" cy="274320"/>
+          </a:xfrm>
+          <a:prstGeom prst="rect">
+            <a:avLst/>
+          </a:prstGeom>
+          <a:noFill/>
+          <a:ln/>
+        </p:spPr>
+        <p:txBody>
+          <a:bodyPr wrap="square" lIns="0" tIns="0" rIns="0" bIns="0" rtlCol="0" anchor="ctr"/>
+          <a:lstStyle/>
+          <a:p>
+            <a:pPr indent="0" marL="0">
+              <a:buNone/>
+            </a:pPr>
+            <a:r>
+              <a:rPr lang="en-US" sz="1150" b="1" spc="100" kern="0" dirty="0">
+                <a:solidFill>
+                  <a:srgbClr val="7B8A9C"/>
+                </a:solidFill>
+                <a:latin typeface="Calibri" pitchFamily="34" charset="0"/>
+                <a:ea typeface="Calibri" pitchFamily="34" charset="-122"/>
+                <a:cs typeface="Calibri" pitchFamily="34" charset="-120"/>
+              </a:rPr>
+              <a:t>Bulk flows</a:t>
+            </a:r>
+            <a:endParaRPr lang="en-US" sz="1150" dirty="0"/>
+          </a:p>
+        </p:txBody>
+      </p:sp>
+      <p:sp>
+        <p:nvSpPr>
+          <p:cNvPr id="8" name="Text 6"/>
+          <p:cNvSpPr txBox="1"/>
+          <p:nvPr/>
+        </p:nvSpPr>
+        <p:spPr>
+          <a:xfrm>
+            <a:off x="9601200" y="1993392"/>
+            <a:ext cx="2103120" cy="274320"/>
+          </a:xfrm>
+          <a:prstGeom prst="rect">
+            <a:avLst/>
+          </a:prstGeom>
+          <a:noFill/>
+          <a:ln/>
+        </p:spPr>
+        <p:txBody>
+          <a:bodyPr wrap="square" lIns="0" tIns="0" rIns="0" bIns="0" rtlCol="0" anchor="ctr"/>
+          <a:lstStyle/>
+          <a:p>
+            <a:pPr indent="0" marL="0">
+              <a:buNone/>
+            </a:pPr>
+            <a:r>
+              <a:rPr lang="en-US" sz="1150" b="1" spc="100" kern="0" dirty="0">
+                <a:solidFill>
+                  <a:srgbClr val="7B8A9C"/>
+                </a:solidFill>
+                <a:latin typeface="Calibri" pitchFamily="34" charset="0"/>
+                <a:ea typeface="Calibri" pitchFamily="34" charset="-122"/>
+                <a:cs typeface="Calibri" pitchFamily="34" charset="-120"/>
+              </a:rPr>
+              <a:t>Ratio</a:t>
+            </a:r>
+            <a:endParaRPr lang="en-US" sz="1150" dirty="0"/>
+          </a:p>
+        </p:txBody>
+      </p:sp>
+      <p:sp>
+        <p:nvSpPr>
+          <p:cNvPr id="9" name="Shape 7"/>
           <p:cNvSpPr/>
           <p:nvPr/>
         </p:nvSpPr>
         <p:spPr>
           <a:xfrm>
-            <a:off x="640080" y="2331720"/>
-            <a:ext cx="10881360" cy="960120"/>
+            <a:off x="640080" y="2304288"/>
+            <a:ext cx="10881360" cy="475488"/>
           </a:xfrm>
           <a:prstGeom prst="roundRect">
             <a:avLst>
-              <a:gd name="adj" fmla="val 7619"/>
+              <a:gd name="adj" fmla="val 9615"/>
+            </a:avLst>
+          </a:prstGeom>
+          <a:solidFill>
+            <a:srgbClr val="FBEEF0"/>
+          </a:solidFill>
+          <a:ln w="6350">
+            <a:solidFill>
+              <a:srgbClr val="E2ECF2"/>
+            </a:solidFill>
+            <a:prstDash val="solid"/>
+          </a:ln>
+        </p:spPr>
+      </p:sp>
+      <p:sp>
+        <p:nvSpPr>
+          <p:cNvPr id="10" name="Text 8"/>
+          <p:cNvSpPr txBox="1"/>
+          <p:nvPr/>
+        </p:nvSpPr>
+        <p:spPr>
+          <a:xfrm>
+            <a:off x="914400" y="2404872"/>
+            <a:ext cx="4480560" cy="292608"/>
+          </a:xfrm>
+          <a:prstGeom prst="rect">
+            <a:avLst/>
+          </a:prstGeom>
+          <a:noFill/>
+          <a:ln/>
+        </p:spPr>
+        <p:txBody>
+          <a:bodyPr wrap="square" lIns="0" tIns="0" rIns="0" bIns="0" rtlCol="0" anchor="ctr"/>
+          <a:lstStyle/>
+          <a:p>
+            <a:pPr indent="0" marL="0">
+              <a:buNone/>
+            </a:pPr>
+            <a:r>
+              <a:rPr lang="en-US" sz="1300" b="1" dirty="0">
+                <a:solidFill>
+                  <a:srgbClr val="13233B"/>
+                </a:solidFill>
+                <a:latin typeface="Calibri" pitchFamily="34" charset="0"/>
+                <a:ea typeface="Calibri" pitchFamily="34" charset="-122"/>
+                <a:cs typeface="Calibri" pitchFamily="34" charset="-120"/>
+              </a:rPr>
+              <a:t>SFQ  (fair queueing, no AQM)</a:t>
+            </a:r>
+            <a:endParaRPr lang="en-US" sz="1300" dirty="0"/>
+          </a:p>
+        </p:txBody>
+      </p:sp>
+      <p:sp>
+        <p:nvSpPr>
+          <p:cNvPr id="11" name="Text 9"/>
+          <p:cNvSpPr txBox="1"/>
+          <p:nvPr/>
+        </p:nvSpPr>
+        <p:spPr>
+          <a:xfrm>
+            <a:off x="5486400" y="2386584"/>
+            <a:ext cx="1828800" cy="329184"/>
+          </a:xfrm>
+          <a:prstGeom prst="rect">
+            <a:avLst/>
+          </a:prstGeom>
+          <a:noFill/>
+          <a:ln/>
+        </p:spPr>
+        <p:txBody>
+          <a:bodyPr wrap="square" lIns="0" tIns="0" rIns="0" bIns="0" rtlCol="0" anchor="ctr"/>
+          <a:lstStyle/>
+          <a:p>
+            <a:pPr indent="0" marL="0">
+              <a:buNone/>
+            </a:pPr>
+            <a:r>
+              <a:rPr lang="en-US" sz="1400" dirty="0">
+                <a:solidFill>
+                  <a:srgbClr val="1C7293"/>
+                </a:solidFill>
+                <a:latin typeface="Cambria" pitchFamily="34" charset="0"/>
+                <a:ea typeface="Cambria" pitchFamily="34" charset="-122"/>
+                <a:cs typeface="Cambria" pitchFamily="34" charset="-120"/>
+              </a:rPr>
+              <a:t>30.7 ms</a:t>
+            </a:r>
+            <a:endParaRPr lang="en-US" sz="1400" dirty="0"/>
+          </a:p>
+        </p:txBody>
+      </p:sp>
+      <p:sp>
+        <p:nvSpPr>
+          <p:cNvPr id="12" name="Text 10"/>
+          <p:cNvSpPr txBox="1"/>
+          <p:nvPr/>
+        </p:nvSpPr>
+        <p:spPr>
+          <a:xfrm>
+            <a:off x="7498080" y="2386584"/>
+            <a:ext cx="1828800" cy="329184"/>
+          </a:xfrm>
+          <a:prstGeom prst="rect">
+            <a:avLst/>
+          </a:prstGeom>
+          <a:noFill/>
+          <a:ln/>
+        </p:spPr>
+        <p:txBody>
+          <a:bodyPr wrap="square" lIns="0" tIns="0" rIns="0" bIns="0" rtlCol="0" anchor="ctr"/>
+          <a:lstStyle/>
+          <a:p>
+            <a:pPr indent="0" marL="0">
+              <a:buNone/>
+            </a:pPr>
+            <a:r>
+              <a:rPr lang="en-US" sz="1400" b="1" dirty="0">
+                <a:solidFill>
+                  <a:srgbClr val="B23A48"/>
+                </a:solidFill>
+                <a:latin typeface="Cambria" pitchFamily="34" charset="0"/>
+                <a:ea typeface="Cambria" pitchFamily="34" charset="-122"/>
+                <a:cs typeface="Cambria" pitchFamily="34" charset="-120"/>
+              </a:rPr>
+              <a:t>294.3 ms</a:t>
+            </a:r>
+            <a:endParaRPr lang="en-US" sz="1400" dirty="0"/>
+          </a:p>
+        </p:txBody>
+      </p:sp>
+      <p:sp>
+        <p:nvSpPr>
+          <p:cNvPr id="13" name="Text 11"/>
+          <p:cNvSpPr txBox="1"/>
+          <p:nvPr/>
+        </p:nvSpPr>
+        <p:spPr>
+          <a:xfrm>
+            <a:off x="9601200" y="2404872"/>
+            <a:ext cx="1463040" cy="292608"/>
+          </a:xfrm>
+          <a:prstGeom prst="rect">
+            <a:avLst/>
+          </a:prstGeom>
+          <a:noFill/>
+          <a:ln/>
+        </p:spPr>
+        <p:txBody>
+          <a:bodyPr wrap="square" lIns="0" tIns="0" rIns="0" bIns="0" rtlCol="0" anchor="ctr"/>
+          <a:lstStyle/>
+          <a:p>
+            <a:pPr indent="0" marL="0">
+              <a:buNone/>
+            </a:pPr>
+            <a:r>
+              <a:rPr lang="en-US" sz="1300" b="1" dirty="0">
+                <a:solidFill>
+                  <a:srgbClr val="B23A48"/>
+                </a:solidFill>
+                <a:latin typeface="Calibri" pitchFamily="34" charset="0"/>
+                <a:ea typeface="Calibri" pitchFamily="34" charset="-122"/>
+                <a:cs typeface="Calibri" pitchFamily="34" charset="-120"/>
+              </a:rPr>
+              <a:t>9.6x</a:t>
+            </a:r>
+            <a:endParaRPr lang="en-US" sz="1300" dirty="0"/>
+          </a:p>
+        </p:txBody>
+      </p:sp>
+      <p:sp>
+        <p:nvSpPr>
+          <p:cNvPr id="14" name="Shape 12"/>
+          <p:cNvSpPr/>
+          <p:nvPr/>
+        </p:nvSpPr>
+        <p:spPr>
+          <a:xfrm>
+            <a:off x="640080" y="2852928"/>
+            <a:ext cx="10881360" cy="475488"/>
+          </a:xfrm>
+          <a:prstGeom prst="roundRect">
+            <a:avLst>
+              <a:gd name="adj" fmla="val 9615"/>
+            </a:avLst>
+          </a:prstGeom>
+          <a:solidFill>
+            <a:srgbClr val="F6FAFC"/>
+          </a:solidFill>
+          <a:ln w="6350">
+            <a:solidFill>
+              <a:srgbClr val="E2ECF2"/>
+            </a:solidFill>
+            <a:prstDash val="solid"/>
+          </a:ln>
+        </p:spPr>
+      </p:sp>
+      <p:sp>
+        <p:nvSpPr>
+          <p:cNvPr id="15" name="Text 13"/>
+          <p:cNvSpPr txBox="1"/>
+          <p:nvPr/>
+        </p:nvSpPr>
+        <p:spPr>
+          <a:xfrm>
+            <a:off x="914400" y="2953512"/>
+            <a:ext cx="4480560" cy="292608"/>
+          </a:xfrm>
+          <a:prstGeom prst="rect">
+            <a:avLst/>
+          </a:prstGeom>
+          <a:noFill/>
+          <a:ln/>
+        </p:spPr>
+        <p:txBody>
+          <a:bodyPr wrap="square" lIns="0" tIns="0" rIns="0" bIns="0" rtlCol="0" anchor="ctr"/>
+          <a:lstStyle/>
+          <a:p>
+            <a:pPr indent="0" marL="0">
+              <a:buNone/>
+            </a:pPr>
+            <a:r>
+              <a:rPr lang="en-US" sz="1300" dirty="0">
+                <a:solidFill>
+                  <a:srgbClr val="13233B"/>
+                </a:solidFill>
+                <a:latin typeface="Calibri" pitchFamily="34" charset="0"/>
+                <a:ea typeface="Calibri" pitchFamily="34" charset="-122"/>
+                <a:cs typeface="Calibri" pitchFamily="34" charset="-120"/>
+              </a:rPr>
+              <a:t>FQ-PIE</a:t>
+            </a:r>
+            <a:endParaRPr lang="en-US" sz="1300" dirty="0"/>
+          </a:p>
+        </p:txBody>
+      </p:sp>
+      <p:sp>
+        <p:nvSpPr>
+          <p:cNvPr id="16" name="Text 14"/>
+          <p:cNvSpPr txBox="1"/>
+          <p:nvPr/>
+        </p:nvSpPr>
+        <p:spPr>
+          <a:xfrm>
+            <a:off x="5486400" y="2935224"/>
+            <a:ext cx="1828800" cy="329184"/>
+          </a:xfrm>
+          <a:prstGeom prst="rect">
+            <a:avLst/>
+          </a:prstGeom>
+          <a:noFill/>
+          <a:ln/>
+        </p:spPr>
+        <p:txBody>
+          <a:bodyPr wrap="square" lIns="0" tIns="0" rIns="0" bIns="0" rtlCol="0" anchor="ctr"/>
+          <a:lstStyle/>
+          <a:p>
+            <a:pPr indent="0" marL="0">
+              <a:buNone/>
+            </a:pPr>
+            <a:r>
+              <a:rPr lang="en-US" sz="1400" dirty="0">
+                <a:solidFill>
+                  <a:srgbClr val="1C7293"/>
+                </a:solidFill>
+                <a:latin typeface="Cambria" pitchFamily="34" charset="0"/>
+                <a:ea typeface="Cambria" pitchFamily="34" charset="-122"/>
+                <a:cs typeface="Cambria" pitchFamily="34" charset="-120"/>
+              </a:rPr>
+              <a:t>22.0 ms</a:t>
+            </a:r>
+            <a:endParaRPr lang="en-US" sz="1400" dirty="0"/>
+          </a:p>
+        </p:txBody>
+      </p:sp>
+      <p:sp>
+        <p:nvSpPr>
+          <p:cNvPr id="17" name="Text 15"/>
+          <p:cNvSpPr txBox="1"/>
+          <p:nvPr/>
+        </p:nvSpPr>
+        <p:spPr>
+          <a:xfrm>
+            <a:off x="7498080" y="2935224"/>
+            <a:ext cx="1828800" cy="329184"/>
+          </a:xfrm>
+          <a:prstGeom prst="rect">
+            <a:avLst/>
+          </a:prstGeom>
+          <a:noFill/>
+          <a:ln/>
+        </p:spPr>
+        <p:txBody>
+          <a:bodyPr wrap="square" lIns="0" tIns="0" rIns="0" bIns="0" rtlCol="0" anchor="ctr"/>
+          <a:lstStyle/>
+          <a:p>
+            <a:pPr indent="0" marL="0">
+              <a:buNone/>
+            </a:pPr>
+            <a:r>
+              <a:rPr lang="en-US" sz="1400" b="1" dirty="0">
+                <a:solidFill>
+                  <a:srgbClr val="3A4A5F"/>
+                </a:solidFill>
+                <a:latin typeface="Cambria" pitchFamily="34" charset="0"/>
+                <a:ea typeface="Cambria" pitchFamily="34" charset="-122"/>
+                <a:cs typeface="Cambria" pitchFamily="34" charset="-120"/>
+              </a:rPr>
+              <a:t>55.2 ms</a:t>
+            </a:r>
+            <a:endParaRPr lang="en-US" sz="1400" dirty="0"/>
+          </a:p>
+        </p:txBody>
+      </p:sp>
+      <p:sp>
+        <p:nvSpPr>
+          <p:cNvPr id="18" name="Text 16"/>
+          <p:cNvSpPr txBox="1"/>
+          <p:nvPr/>
+        </p:nvSpPr>
+        <p:spPr>
+          <a:xfrm>
+            <a:off x="9601200" y="2953512"/>
+            <a:ext cx="1463040" cy="292608"/>
+          </a:xfrm>
+          <a:prstGeom prst="rect">
+            <a:avLst/>
+          </a:prstGeom>
+          <a:noFill/>
+          <a:ln/>
+        </p:spPr>
+        <p:txBody>
+          <a:bodyPr wrap="square" lIns="0" tIns="0" rIns="0" bIns="0" rtlCol="0" anchor="ctr"/>
+          <a:lstStyle/>
+          <a:p>
+            <a:pPr indent="0" marL="0">
+              <a:buNone/>
+            </a:pPr>
+            <a:r>
+              <a:rPr lang="en-US" sz="1300" b="1" dirty="0">
+                <a:solidFill>
+                  <a:srgbClr val="3A4A5F"/>
+                </a:solidFill>
+                <a:latin typeface="Calibri" pitchFamily="34" charset="0"/>
+                <a:ea typeface="Calibri" pitchFamily="34" charset="-122"/>
+                <a:cs typeface="Calibri" pitchFamily="34" charset="-120"/>
+              </a:rPr>
+              <a:t>2.5x</a:t>
+            </a:r>
+            <a:endParaRPr lang="en-US" sz="1300" dirty="0"/>
+          </a:p>
+        </p:txBody>
+      </p:sp>
+      <p:sp>
+        <p:nvSpPr>
+          <p:cNvPr id="19" name="Shape 17"/>
+          <p:cNvSpPr/>
+          <p:nvPr/>
+        </p:nvSpPr>
+        <p:spPr>
+          <a:xfrm>
+            <a:off x="640080" y="3401568"/>
+            <a:ext cx="10881360" cy="475488"/>
+          </a:xfrm>
+          <a:prstGeom prst="roundRect">
+            <a:avLst>
+              <a:gd name="adj" fmla="val 9615"/>
             </a:avLst>
           </a:prstGeom>
           <a:solidFill>
             <a:srgbClr val="EEF4F8"/>
           </a:solidFill>
-          <a:ln w="9525">
+          <a:ln w="6350">
             <a:solidFill>
-              <a:srgbClr val="D8E4EC"/>
+              <a:srgbClr val="E2ECF2"/>
             </a:solidFill>
             <a:prstDash val="solid"/>
           </a:ln>
-          <a:effectLst>
-            <a:outerShdw sx="100000" sy="100000" kx="0" ky="0" algn="bl" rotWithShape="0" blurRad="50800" dist="12700" dir="5400000">
-              <a:srgbClr val="BFCEDA">
-                <a:alpha val="35000"/>
-              </a:srgbClr>
-            </a:outerShdw>
-          </a:effectLst>
-        </p:spPr>
-      </p:sp>
-      <p:sp>
-        <p:nvSpPr>
-          <p:cNvPr id="6" name="Text 4"/>
-          <p:cNvSpPr txBox="1"/>
-          <p:nvPr/>
-        </p:nvSpPr>
-        <p:spPr>
-          <a:xfrm>
-            <a:off x="960120" y="2441448"/>
-            <a:ext cx="3291840" cy="365760"/>
-          </a:xfrm>
-          <a:prstGeom prst="rect">
-            <a:avLst/>
-          </a:prstGeom>
-          <a:noFill/>
-          <a:ln/>
-        </p:spPr>
-        <p:txBody>
-          <a:bodyPr wrap="square" lIns="0" tIns="0" rIns="0" bIns="0" rtlCol="0" anchor="ctr"/>
-          <a:lstStyle/>
-          <a:p>
-            <a:pPr indent="0" marL="0">
-              <a:buNone/>
-            </a:pPr>
-            <a:r>
-              <a:rPr lang="en-US" sz="1500" b="1" dirty="0">
+        </p:spPr>
+      </p:sp>
+      <p:sp>
+        <p:nvSpPr>
+          <p:cNvPr id="20" name="Text 18"/>
+          <p:cNvSpPr txBox="1"/>
+          <p:nvPr/>
+        </p:nvSpPr>
+        <p:spPr>
+          <a:xfrm>
+            <a:off x="914400" y="3502152"/>
+            <a:ext cx="4480560" cy="292608"/>
+          </a:xfrm>
+          <a:prstGeom prst="rect">
+            <a:avLst/>
+          </a:prstGeom>
+          <a:noFill/>
+          <a:ln/>
+        </p:spPr>
+        <p:txBody>
+          <a:bodyPr wrap="square" lIns="0" tIns="0" rIns="0" bIns="0" rtlCol="0" anchor="ctr"/>
+          <a:lstStyle/>
+          <a:p>
+            <a:pPr indent="0" marL="0">
+              <a:buNone/>
+            </a:pPr>
+            <a:r>
+              <a:rPr lang="en-US" sz="1300" dirty="0">
                 <a:solidFill>
                   <a:srgbClr val="13233B"/>
                 </a:solidFill>
@@ -9458,38 +9973,38 @@
                 <a:ea typeface="Calibri" pitchFamily="34" charset="-122"/>
                 <a:cs typeface="Calibri" pitchFamily="34" charset="-120"/>
               </a:rPr>
-              <a:t>Sparse ICMP probe</a:t>
-            </a:r>
-            <a:endParaRPr lang="en-US" sz="1500" dirty="0"/>
-          </a:p>
-        </p:txBody>
-      </p:sp>
-      <p:sp>
-        <p:nvSpPr>
-          <p:cNvPr id="7" name="Text 5"/>
-          <p:cNvSpPr txBox="1"/>
-          <p:nvPr/>
-        </p:nvSpPr>
-        <p:spPr>
-          <a:xfrm>
-            <a:off x="4389120" y="2423160"/>
-            <a:ext cx="1828800" cy="548640"/>
-          </a:xfrm>
-          <a:prstGeom prst="rect">
-            <a:avLst/>
-          </a:prstGeom>
-          <a:noFill/>
-          <a:ln/>
-        </p:spPr>
-        <p:txBody>
-          <a:bodyPr wrap="square" lIns="0" tIns="0" rIns="0" bIns="0" rtlCol="0" anchor="ctr"/>
-          <a:lstStyle/>
-          <a:p>
-            <a:pPr indent="0" marL="0">
-              <a:buNone/>
-            </a:pPr>
-            <a:r>
-              <a:rPr lang="en-US" sz="2800" b="1" dirty="0">
+              <a:t>fq_codel</a:t>
+            </a:r>
+            <a:endParaRPr lang="en-US" sz="1300" dirty="0"/>
+          </a:p>
+        </p:txBody>
+      </p:sp>
+      <p:sp>
+        <p:nvSpPr>
+          <p:cNvPr id="21" name="Text 19"/>
+          <p:cNvSpPr txBox="1"/>
+          <p:nvPr/>
+        </p:nvSpPr>
+        <p:spPr>
+          <a:xfrm>
+            <a:off x="5486400" y="3483864"/>
+            <a:ext cx="1828800" cy="329184"/>
+          </a:xfrm>
+          <a:prstGeom prst="rect">
+            <a:avLst/>
+          </a:prstGeom>
+          <a:noFill/>
+          <a:ln/>
+        </p:spPr>
+        <p:txBody>
+          <a:bodyPr wrap="square" lIns="0" tIns="0" rIns="0" bIns="0" rtlCol="0" anchor="ctr"/>
+          <a:lstStyle/>
+          <a:p>
+            <a:pPr indent="0" marL="0">
+              <a:buNone/>
+            </a:pPr>
+            <a:r>
+              <a:rPr lang="en-US" sz="1400" dirty="0">
                 <a:solidFill>
                   <a:srgbClr val="1C7293"/>
                 </a:solidFill>
@@ -9499,44 +10014,83 @@
               </a:rPr>
               <a:t>22.4 ms</a:t>
             </a:r>
-            <a:endParaRPr lang="en-US" sz="2800" dirty="0"/>
-          </a:p>
-        </p:txBody>
-      </p:sp>
-      <p:sp>
-        <p:nvSpPr>
-          <p:cNvPr id="8" name="Text 6"/>
-          <p:cNvSpPr txBox="1"/>
-          <p:nvPr/>
-        </p:nvSpPr>
-        <p:spPr>
-          <a:xfrm>
-            <a:off x="6400800" y="2560320"/>
-            <a:ext cx="4754880" cy="365760"/>
-          </a:xfrm>
-          <a:prstGeom prst="rect">
-            <a:avLst/>
-          </a:prstGeom>
-          <a:noFill/>
-          <a:ln/>
-        </p:spPr>
-        <p:txBody>
-          <a:bodyPr wrap="square" lIns="0" tIns="0" rIns="0" bIns="0" rtlCol="0" anchor="ctr"/>
-          <a:lstStyle/>
-          <a:p>
-            <a:pPr indent="0" marL="0">
-              <a:buNone/>
-            </a:pPr>
-            <a:r>
-              <a:rPr lang="en-US" sz="1300" dirty="0">
-                <a:solidFill>
-                  <a:srgbClr val="7B8A9C"/>
-                </a:solidFill>
-                <a:latin typeface="Calibri" pitchFamily="34" charset="0"/>
-                <a:ea typeface="Calibri" pitchFamily="34" charset="-122"/>
-                <a:cs typeface="Calibri" pitchFamily="34" charset="-120"/>
-              </a:rPr>
-              <a:t>what an interactive flow sees</a:t>
+            <a:endParaRPr lang="en-US" sz="1400" dirty="0"/>
+          </a:p>
+        </p:txBody>
+      </p:sp>
+      <p:sp>
+        <p:nvSpPr>
+          <p:cNvPr id="22" name="Text 20"/>
+          <p:cNvSpPr txBox="1"/>
+          <p:nvPr/>
+        </p:nvSpPr>
+        <p:spPr>
+          <a:xfrm>
+            <a:off x="7498080" y="3483864"/>
+            <a:ext cx="1828800" cy="329184"/>
+          </a:xfrm>
+          <a:prstGeom prst="rect">
+            <a:avLst/>
+          </a:prstGeom>
+          <a:noFill/>
+          <a:ln/>
+        </p:spPr>
+        <p:txBody>
+          <a:bodyPr wrap="square" lIns="0" tIns="0" rIns="0" bIns="0" rtlCol="0" anchor="ctr"/>
+          <a:lstStyle/>
+          <a:p>
+            <a:pPr indent="0" marL="0">
+              <a:buNone/>
+            </a:pPr>
+            <a:r>
+              <a:rPr lang="en-US" sz="1400" b="1" dirty="0">
+                <a:solidFill>
+                  <a:srgbClr val="3A4A5F"/>
+                </a:solidFill>
+                <a:latin typeface="Cambria" pitchFamily="34" charset="0"/>
+                <a:ea typeface="Cambria" pitchFamily="34" charset="-122"/>
+                <a:cs typeface="Cambria" pitchFamily="34" charset="-120"/>
+              </a:rPr>
+              <a:t>36.4 ms</a:t>
+            </a:r>
+            <a:endParaRPr lang="en-US" sz="1400" dirty="0"/>
+          </a:p>
+        </p:txBody>
+      </p:sp>
+      <p:sp>
+        <p:nvSpPr>
+          <p:cNvPr id="23" name="Text 21"/>
+          <p:cNvSpPr txBox="1"/>
+          <p:nvPr/>
+        </p:nvSpPr>
+        <p:spPr>
+          <a:xfrm>
+            <a:off x="9601200" y="3502152"/>
+            <a:ext cx="1463040" cy="292608"/>
+          </a:xfrm>
+          <a:prstGeom prst="rect">
+            <a:avLst/>
+          </a:prstGeom>
+          <a:noFill/>
+          <a:ln/>
+        </p:spPr>
+        <p:txBody>
+          <a:bodyPr wrap="square" lIns="0" tIns="0" rIns="0" bIns="0" rtlCol="0" anchor="ctr"/>
+          <a:lstStyle/>
+          <a:p>
+            <a:pPr indent="0" marL="0">
+              <a:buNone/>
+            </a:pPr>
+            <a:r>
+              <a:rPr lang="en-US" sz="1300" b="1" dirty="0">
+                <a:solidFill>
+                  <a:srgbClr val="3A4A5F"/>
+                </a:solidFill>
+                <a:latin typeface="Calibri" pitchFamily="34" charset="0"/>
+                <a:ea typeface="Calibri" pitchFamily="34" charset="-122"/>
+                <a:cs typeface="Calibri" pitchFamily="34" charset="-120"/>
+              </a:rPr>
+              <a:t>1.6x</a:t>
             </a:r>
             <a:endParaRPr lang="en-US" sz="1300" dirty="0"/>
           </a:p>
@@ -9544,64 +10098,240 @@
       </p:sp>
       <p:sp>
         <p:nvSpPr>
-          <p:cNvPr id="9" name="Shape 7"/>
+          <p:cNvPr id="24" name="Shape 22"/>
           <p:cNvSpPr/>
           <p:nvPr/>
         </p:nvSpPr>
         <p:spPr>
           <a:xfrm>
-            <a:off x="640080" y="3474720"/>
-            <a:ext cx="10881360" cy="960120"/>
+            <a:off x="640080" y="3950208"/>
+            <a:ext cx="10881360" cy="475488"/>
           </a:xfrm>
           <a:prstGeom prst="roundRect">
             <a:avLst>
-              <a:gd name="adj" fmla="val 7619"/>
+              <a:gd name="adj" fmla="val 9615"/>
+            </a:avLst>
+          </a:prstGeom>
+          <a:solidFill>
+            <a:srgbClr val="F6FAFC"/>
+          </a:solidFill>
+          <a:ln w="6350">
+            <a:solidFill>
+              <a:srgbClr val="E2ECF2"/>
+            </a:solidFill>
+            <a:prstDash val="solid"/>
+          </a:ln>
+        </p:spPr>
+      </p:sp>
+      <p:sp>
+        <p:nvSpPr>
+          <p:cNvPr id="25" name="Text 23"/>
+          <p:cNvSpPr txBox="1"/>
+          <p:nvPr/>
+        </p:nvSpPr>
+        <p:spPr>
+          <a:xfrm>
+            <a:off x="914400" y="4050792"/>
+            <a:ext cx="4480560" cy="292608"/>
+          </a:xfrm>
+          <a:prstGeom prst="rect">
+            <a:avLst/>
+          </a:prstGeom>
+          <a:noFill/>
+          <a:ln/>
+        </p:spPr>
+        <p:txBody>
+          <a:bodyPr wrap="square" lIns="0" tIns="0" rIns="0" bIns="0" rtlCol="0" anchor="ctr"/>
+          <a:lstStyle/>
+          <a:p>
+            <a:pPr indent="0" marL="0">
+              <a:buNone/>
+            </a:pPr>
+            <a:r>
+              <a:rPr lang="en-US" sz="1300" dirty="0">
+                <a:solidFill>
+                  <a:srgbClr val="13233B"/>
+                </a:solidFill>
+                <a:latin typeface="Calibri" pitchFamily="34" charset="0"/>
+                <a:ea typeface="Calibri" pitchFamily="34" charset="-122"/>
+                <a:cs typeface="Calibri" pitchFamily="34" charset="-120"/>
+              </a:rPr>
+              <a:t>CAKE</a:t>
+            </a:r>
+            <a:endParaRPr lang="en-US" sz="1300" dirty="0"/>
+          </a:p>
+        </p:txBody>
+      </p:sp>
+      <p:sp>
+        <p:nvSpPr>
+          <p:cNvPr id="26" name="Text 24"/>
+          <p:cNvSpPr txBox="1"/>
+          <p:nvPr/>
+        </p:nvSpPr>
+        <p:spPr>
+          <a:xfrm>
+            <a:off x="5486400" y="4032504"/>
+            <a:ext cx="1828800" cy="329184"/>
+          </a:xfrm>
+          <a:prstGeom prst="rect">
+            <a:avLst/>
+          </a:prstGeom>
+          <a:noFill/>
+          <a:ln/>
+        </p:spPr>
+        <p:txBody>
+          <a:bodyPr wrap="square" lIns="0" tIns="0" rIns="0" bIns="0" rtlCol="0" anchor="ctr"/>
+          <a:lstStyle/>
+          <a:p>
+            <a:pPr indent="0" marL="0">
+              <a:buNone/>
+            </a:pPr>
+            <a:r>
+              <a:rPr lang="en-US" sz="1400" dirty="0">
+                <a:solidFill>
+                  <a:srgbClr val="1C7293"/>
+                </a:solidFill>
+                <a:latin typeface="Cambria" pitchFamily="34" charset="0"/>
+                <a:ea typeface="Cambria" pitchFamily="34" charset="-122"/>
+                <a:cs typeface="Cambria" pitchFamily="34" charset="-120"/>
+              </a:rPr>
+              <a:t>21.8 ms</a:t>
+            </a:r>
+            <a:endParaRPr lang="en-US" sz="1400" dirty="0"/>
+          </a:p>
+        </p:txBody>
+      </p:sp>
+      <p:sp>
+        <p:nvSpPr>
+          <p:cNvPr id="27" name="Text 25"/>
+          <p:cNvSpPr txBox="1"/>
+          <p:nvPr/>
+        </p:nvSpPr>
+        <p:spPr>
+          <a:xfrm>
+            <a:off x="7498080" y="4032504"/>
+            <a:ext cx="1828800" cy="329184"/>
+          </a:xfrm>
+          <a:prstGeom prst="rect">
+            <a:avLst/>
+          </a:prstGeom>
+          <a:noFill/>
+          <a:ln/>
+        </p:spPr>
+        <p:txBody>
+          <a:bodyPr wrap="square" lIns="0" tIns="0" rIns="0" bIns="0" rtlCol="0" anchor="ctr"/>
+          <a:lstStyle/>
+          <a:p>
+            <a:pPr indent="0" marL="0">
+              <a:buNone/>
+            </a:pPr>
+            <a:r>
+              <a:rPr lang="en-US" sz="1400" b="1" dirty="0">
+                <a:solidFill>
+                  <a:srgbClr val="3A4A5F"/>
+                </a:solidFill>
+                <a:latin typeface="Cambria" pitchFamily="34" charset="0"/>
+                <a:ea typeface="Cambria" pitchFamily="34" charset="-122"/>
+                <a:cs typeface="Cambria" pitchFamily="34" charset="-120"/>
+              </a:rPr>
+              <a:t>33.6 ms</a:t>
+            </a:r>
+            <a:endParaRPr lang="en-US" sz="1400" dirty="0"/>
+          </a:p>
+        </p:txBody>
+      </p:sp>
+      <p:sp>
+        <p:nvSpPr>
+          <p:cNvPr id="28" name="Text 26"/>
+          <p:cNvSpPr txBox="1"/>
+          <p:nvPr/>
+        </p:nvSpPr>
+        <p:spPr>
+          <a:xfrm>
+            <a:off x="9601200" y="4050792"/>
+            <a:ext cx="1463040" cy="292608"/>
+          </a:xfrm>
+          <a:prstGeom prst="rect">
+            <a:avLst/>
+          </a:prstGeom>
+          <a:noFill/>
+          <a:ln/>
+        </p:spPr>
+        <p:txBody>
+          <a:bodyPr wrap="square" lIns="0" tIns="0" rIns="0" bIns="0" rtlCol="0" anchor="ctr"/>
+          <a:lstStyle/>
+          <a:p>
+            <a:pPr indent="0" marL="0">
+              <a:buNone/>
+            </a:pPr>
+            <a:r>
+              <a:rPr lang="en-US" sz="1300" b="1" dirty="0">
+                <a:solidFill>
+                  <a:srgbClr val="3A4A5F"/>
+                </a:solidFill>
+                <a:latin typeface="Calibri" pitchFamily="34" charset="0"/>
+                <a:ea typeface="Calibri" pitchFamily="34" charset="-122"/>
+                <a:cs typeface="Calibri" pitchFamily="34" charset="-120"/>
+              </a:rPr>
+              <a:t>1.5x</a:t>
+            </a:r>
+            <a:endParaRPr lang="en-US" sz="1300" dirty="0"/>
+          </a:p>
+        </p:txBody>
+      </p:sp>
+      <p:sp>
+        <p:nvSpPr>
+          <p:cNvPr id="29" name="Shape 27"/>
+          <p:cNvSpPr/>
+          <p:nvPr/>
+        </p:nvSpPr>
+        <p:spPr>
+          <a:xfrm>
+            <a:off x="640080" y="4498848"/>
+            <a:ext cx="10881360" cy="475488"/>
+          </a:xfrm>
+          <a:prstGeom prst="roundRect">
+            <a:avLst>
+              <a:gd name="adj" fmla="val 9615"/>
             </a:avLst>
           </a:prstGeom>
           <a:solidFill>
             <a:srgbClr val="EEF4F8"/>
           </a:solidFill>
-          <a:ln w="9525">
+          <a:ln w="6350">
             <a:solidFill>
-              <a:srgbClr val="D8E4EC"/>
+              <a:srgbClr val="E2ECF2"/>
             </a:solidFill>
             <a:prstDash val="solid"/>
           </a:ln>
-          <a:effectLst>
-            <a:outerShdw sx="100000" sy="100000" kx="0" ky="0" algn="bl" rotWithShape="0" blurRad="50800" dist="12700" dir="5400000">
-              <a:srgbClr val="BFCEDA">
-                <a:alpha val="35000"/>
-              </a:srgbClr>
-            </a:outerShdw>
-          </a:effectLst>
-        </p:spPr>
-      </p:sp>
-      <p:sp>
-        <p:nvSpPr>
-          <p:cNvPr id="10" name="Text 8"/>
-          <p:cNvSpPr txBox="1"/>
-          <p:nvPr/>
-        </p:nvSpPr>
-        <p:spPr>
-          <a:xfrm>
-            <a:off x="960120" y="3584448"/>
-            <a:ext cx="3291840" cy="365760"/>
-          </a:xfrm>
-          <a:prstGeom prst="rect">
-            <a:avLst/>
-          </a:prstGeom>
-          <a:noFill/>
-          <a:ln/>
-        </p:spPr>
-        <p:txBody>
-          <a:bodyPr wrap="square" lIns="0" tIns="0" rIns="0" bIns="0" rtlCol="0" anchor="ctr"/>
-          <a:lstStyle/>
-          <a:p>
-            <a:pPr indent="0" marL="0">
-              <a:buNone/>
-            </a:pPr>
-            <a:r>
-              <a:rPr lang="en-US" sz="1500" b="1" dirty="0">
+        </p:spPr>
+      </p:sp>
+      <p:sp>
+        <p:nvSpPr>
+          <p:cNvPr id="30" name="Text 28"/>
+          <p:cNvSpPr txBox="1"/>
+          <p:nvPr/>
+        </p:nvSpPr>
+        <p:spPr>
+          <a:xfrm>
+            <a:off x="914400" y="4599432"/>
+            <a:ext cx="4480560" cy="292608"/>
+          </a:xfrm>
+          <a:prstGeom prst="rect">
+            <a:avLst/>
+          </a:prstGeom>
+          <a:noFill/>
+          <a:ln/>
+        </p:spPr>
+        <p:txBody>
+          <a:bodyPr wrap="square" lIns="0" tIns="0" rIns="0" bIns="0" rtlCol="0" anchor="ctr"/>
+          <a:lstStyle/>
+          <a:p>
+            <a:pPr indent="0" marL="0">
+              <a:buNone/>
+            </a:pPr>
+            <a:r>
+              <a:rPr lang="en-US" sz="1300" dirty="0">
                 <a:solidFill>
                   <a:srgbClr val="13233B"/>
                 </a:solidFill>
@@ -9609,85 +10339,124 @@
                 <a:ea typeface="Calibri" pitchFamily="34" charset="-122"/>
                 <a:cs typeface="Calibri" pitchFamily="34" charset="-120"/>
               </a:rPr>
-              <a:t>Bulk TCP flows</a:t>
-            </a:r>
-            <a:endParaRPr lang="en-US" sz="1500" dirty="0"/>
-          </a:p>
-        </p:txBody>
-      </p:sp>
-      <p:sp>
-        <p:nvSpPr>
-          <p:cNvPr id="11" name="Text 9"/>
-          <p:cNvSpPr txBox="1"/>
-          <p:nvPr/>
-        </p:nvSpPr>
-        <p:spPr>
-          <a:xfrm>
-            <a:off x="4389120" y="3566160"/>
-            <a:ext cx="1828800" cy="548640"/>
-          </a:xfrm>
-          <a:prstGeom prst="rect">
-            <a:avLst/>
-          </a:prstGeom>
-          <a:noFill/>
-          <a:ln/>
-        </p:spPr>
-        <p:txBody>
-          <a:bodyPr wrap="square" lIns="0" tIns="0" rIns="0" bIns="0" rtlCol="0" anchor="ctr"/>
-          <a:lstStyle/>
-          <a:p>
-            <a:pPr indent="0" marL="0">
-              <a:buNone/>
-            </a:pPr>
-            <a:r>
-              <a:rPr lang="en-US" sz="2800" b="1" dirty="0">
-                <a:solidFill>
-                  <a:srgbClr val="065A82"/>
+              <a:t>CoDel  (single queue)</a:t>
+            </a:r>
+            <a:endParaRPr lang="en-US" sz="1300" dirty="0"/>
+          </a:p>
+        </p:txBody>
+      </p:sp>
+      <p:sp>
+        <p:nvSpPr>
+          <p:cNvPr id="31" name="Text 29"/>
+          <p:cNvSpPr txBox="1"/>
+          <p:nvPr/>
+        </p:nvSpPr>
+        <p:spPr>
+          <a:xfrm>
+            <a:off x="5486400" y="4581144"/>
+            <a:ext cx="1828800" cy="329184"/>
+          </a:xfrm>
+          <a:prstGeom prst="rect">
+            <a:avLst/>
+          </a:prstGeom>
+          <a:noFill/>
+          <a:ln/>
+        </p:spPr>
+        <p:txBody>
+          <a:bodyPr wrap="square" lIns="0" tIns="0" rIns="0" bIns="0" rtlCol="0" anchor="ctr"/>
+          <a:lstStyle/>
+          <a:p>
+            <a:pPr indent="0" marL="0">
+              <a:buNone/>
+            </a:pPr>
+            <a:r>
+              <a:rPr lang="en-US" sz="1400" dirty="0">
+                <a:solidFill>
+                  <a:srgbClr val="1C7293"/>
                 </a:solidFill>
                 <a:latin typeface="Cambria" pitchFamily="34" charset="0"/>
                 <a:ea typeface="Cambria" pitchFamily="34" charset="-122"/>
                 <a:cs typeface="Cambria" pitchFamily="34" charset="-120"/>
               </a:rPr>
-              <a:t>36.3 ms</a:t>
-            </a:r>
-            <a:endParaRPr lang="en-US" sz="2800" dirty="0"/>
-          </a:p>
-        </p:txBody>
-      </p:sp>
-      <p:sp>
-        <p:nvSpPr>
-          <p:cNvPr id="12" name="Text 10"/>
-          <p:cNvSpPr txBox="1"/>
-          <p:nvPr/>
-        </p:nvSpPr>
-        <p:spPr>
-          <a:xfrm>
-            <a:off x="6400800" y="3703320"/>
-            <a:ext cx="4754880" cy="365760"/>
-          </a:xfrm>
-          <a:prstGeom prst="rect">
-            <a:avLst/>
-          </a:prstGeom>
-          <a:noFill/>
-          <a:ln/>
-        </p:spPr>
-        <p:txBody>
-          <a:bodyPr wrap="square" lIns="0" tIns="0" rIns="0" bIns="0" rtlCol="0" anchor="ctr"/>
-          <a:lstStyle/>
-          <a:p>
-            <a:pPr indent="0" marL="0">
-              <a:buNone/>
-            </a:pPr>
-            <a:r>
-              <a:rPr lang="en-US" sz="1300" dirty="0">
-                <a:solidFill>
-                  <a:srgbClr val="7B8A9C"/>
-                </a:solidFill>
-                <a:latin typeface="Calibri" pitchFamily="34" charset="0"/>
-                <a:ea typeface="Calibri" pitchFamily="34" charset="-122"/>
-                <a:cs typeface="Calibri" pitchFamily="34" charset="-120"/>
-              </a:rPr>
-              <a:t>what the data flows actually see</a:t>
+              <a:t>39.2 ms</a:t>
+            </a:r>
+            <a:endParaRPr lang="en-US" sz="1400" dirty="0"/>
+          </a:p>
+        </p:txBody>
+      </p:sp>
+      <p:sp>
+        <p:nvSpPr>
+          <p:cNvPr id="32" name="Text 30"/>
+          <p:cNvSpPr txBox="1"/>
+          <p:nvPr/>
+        </p:nvSpPr>
+        <p:spPr>
+          <a:xfrm>
+            <a:off x="7498080" y="4581144"/>
+            <a:ext cx="1828800" cy="329184"/>
+          </a:xfrm>
+          <a:prstGeom prst="rect">
+            <a:avLst/>
+          </a:prstGeom>
+          <a:noFill/>
+          <a:ln/>
+        </p:spPr>
+        <p:txBody>
+          <a:bodyPr wrap="square" lIns="0" tIns="0" rIns="0" bIns="0" rtlCol="0" anchor="ctr"/>
+          <a:lstStyle/>
+          <a:p>
+            <a:pPr indent="0" marL="0">
+              <a:buNone/>
+            </a:pPr>
+            <a:r>
+              <a:rPr lang="en-US" sz="1400" b="1" dirty="0">
+                <a:solidFill>
+                  <a:srgbClr val="2C7A5A"/>
+                </a:solidFill>
+                <a:latin typeface="Cambria" pitchFamily="34" charset="0"/>
+                <a:ea typeface="Cambria" pitchFamily="34" charset="-122"/>
+                <a:cs typeface="Cambria" pitchFamily="34" charset="-120"/>
+              </a:rPr>
+              <a:t>44.4 ms</a:t>
+            </a:r>
+            <a:endParaRPr lang="en-US" sz="1400" dirty="0"/>
+          </a:p>
+        </p:txBody>
+      </p:sp>
+      <p:sp>
+        <p:nvSpPr>
+          <p:cNvPr id="33" name="Text 31"/>
+          <p:cNvSpPr txBox="1"/>
+          <p:nvPr/>
+        </p:nvSpPr>
+        <p:spPr>
+          <a:xfrm>
+            <a:off x="9601200" y="4599432"/>
+            <a:ext cx="1463040" cy="292608"/>
+          </a:xfrm>
+          <a:prstGeom prst="rect">
+            <a:avLst/>
+          </a:prstGeom>
+          <a:noFill/>
+          <a:ln/>
+        </p:spPr>
+        <p:txBody>
+          <a:bodyPr wrap="square" lIns="0" tIns="0" rIns="0" bIns="0" rtlCol="0" anchor="ctr"/>
+          <a:lstStyle/>
+          <a:p>
+            <a:pPr indent="0" marL="0">
+              <a:buNone/>
+            </a:pPr>
+            <a:r>
+              <a:rPr lang="en-US" sz="1300" b="1" dirty="0">
+                <a:solidFill>
+                  <a:srgbClr val="2C7A5A"/>
+                </a:solidFill>
+                <a:latin typeface="Calibri" pitchFamily="34" charset="0"/>
+                <a:ea typeface="Calibri" pitchFamily="34" charset="-122"/>
+                <a:cs typeface="Calibri" pitchFamily="34" charset="-120"/>
+              </a:rPr>
+              <a:t>1.1x</a:t>
             </a:r>
             <a:endParaRPr lang="en-US" sz="1300" dirty="0"/>
           </a:p>
@@ -9695,18 +10464,18 @@
       </p:sp>
       <p:sp>
         <p:nvSpPr>
-          <p:cNvPr id="13" name="Shape 11"/>
+          <p:cNvPr id="34" name="Shape 32"/>
           <p:cNvSpPr/>
           <p:nvPr/>
         </p:nvSpPr>
         <p:spPr>
           <a:xfrm>
-            <a:off x="640080" y="4709160"/>
-            <a:ext cx="10881360" cy="914400"/>
+            <a:off x="640080" y="5166360"/>
+            <a:ext cx="10881360" cy="1143000"/>
           </a:xfrm>
           <a:prstGeom prst="roundRect">
             <a:avLst>
-              <a:gd name="adj" fmla="val 8000"/>
+              <a:gd name="adj" fmla="val 6400"/>
             </a:avLst>
           </a:prstGeom>
           <a:solidFill>
@@ -9729,40 +10498,79 @@
       </p:sp>
       <p:sp>
         <p:nvSpPr>
-          <p:cNvPr id="14" name="Text 12"/>
-          <p:cNvSpPr txBox="1"/>
-          <p:nvPr/>
-        </p:nvSpPr>
-        <p:spPr>
-          <a:xfrm>
-            <a:off x="960120" y="4892040"/>
-            <a:ext cx="10241280" cy="548640"/>
-          </a:xfrm>
-          <a:prstGeom prst="rect">
-            <a:avLst/>
-          </a:prstGeom>
-          <a:noFill/>
-          <a:ln/>
-        </p:spPr>
-        <p:txBody>
-          <a:bodyPr wrap="square" lIns="0" tIns="0" rIns="0" bIns="0" rtlCol="0" anchor="ctr"/>
-          <a:lstStyle/>
-          <a:p>
-            <a:pPr indent="0" marL="0">
-              <a:buNone/>
-            </a:pPr>
-            <a:r>
-              <a:rPr lang="en-US" sz="1500" dirty="0">
+          <p:cNvPr id="35" name="Text 33"/>
+          <p:cNvSpPr txBox="1"/>
+          <p:nvPr/>
+        </p:nvSpPr>
+        <p:spPr>
+          <a:xfrm>
+            <a:off x="960120" y="5321808"/>
+            <a:ext cx="10241280" cy="347472"/>
+          </a:xfrm>
+          <a:prstGeom prst="rect">
+            <a:avLst/>
+          </a:prstGeom>
+          <a:noFill/>
+          <a:ln/>
+        </p:spPr>
+        <p:txBody>
+          <a:bodyPr wrap="square" lIns="0" tIns="0" rIns="0" bIns="0" rtlCol="0" anchor="ctr"/>
+          <a:lstStyle/>
+          <a:p>
+            <a:pPr indent="0" marL="0">
+              <a:buNone/>
+            </a:pPr>
+            <a:r>
+              <a:rPr lang="en-US" sz="1700" b="1" dirty="0">
                 <a:solidFill>
                   <a:srgbClr val="065A82"/>
                 </a:solidFill>
-                <a:latin typeface="Calibri" pitchFamily="34" charset="0"/>
-                <a:ea typeface="Calibri" pitchFamily="34" charset="-122"/>
-                <a:cs typeface="Calibri" pitchFamily="34" charset="-120"/>
-              </a:rPr>
-              <a:t>A 62% difference. Quoting only the probe — as the original work did — overstates the benefit to bulk traffic. Both belong in a latency claim.</a:t>
-            </a:r>
-            <a:endParaRPr lang="en-US" sz="1500" dirty="0"/>
+                <a:latin typeface="Cambria" pitchFamily="34" charset="0"/>
+                <a:ea typeface="Cambria" pitchFamily="34" charset="-122"/>
+                <a:cs typeface="Cambria" pitchFamily="34" charset="-120"/>
+              </a:rPr>
+              <a:t>Quoting only the probe inverts the ranking.</a:t>
+            </a:r>
+            <a:endParaRPr lang="en-US" sz="1700" dirty="0"/>
+          </a:p>
+        </p:txBody>
+      </p:sp>
+      <p:sp>
+        <p:nvSpPr>
+          <p:cNvPr id="36" name="Text 34"/>
+          <p:cNvSpPr txBox="1"/>
+          <p:nvPr/>
+        </p:nvSpPr>
+        <p:spPr>
+          <a:xfrm>
+            <a:off x="960120" y="5669280"/>
+            <a:ext cx="10241280" cy="594360"/>
+          </a:xfrm>
+          <a:prstGeom prst="rect">
+            <a:avLst/>
+          </a:prstGeom>
+          <a:noFill/>
+          <a:ln/>
+        </p:spPr>
+        <p:txBody>
+          <a:bodyPr wrap="square" lIns="0" tIns="0" rIns="0" bIns="0" rtlCol="0" anchor="ctr"/>
+          <a:lstStyle/>
+          <a:p>
+            <a:pPr indent="0" marL="0">
+              <a:buNone/>
+            </a:pPr>
+            <a:r>
+              <a:rPr lang="en-US" sz="1250" dirty="0">
+                <a:solidFill>
+                  <a:srgbClr val="3A4A5F"/>
+                </a:solidFill>
+                <a:latin typeface="Calibri" pitchFamily="34" charset="0"/>
+                <a:ea typeface="Calibri" pitchFamily="34" charset="-122"/>
+                <a:cs typeface="Calibri" pitchFamily="34" charset="-120"/>
+              </a:rPr>
+              <a:t>By probe RTT, SFQ (30.7 ms) beats CoDel (39.2 ms). By what the data flows actually experience, SFQ is 294 ms against CoDel's 44 ms — nearly 7x worse. SFQ gives the probe its own short queue but has no AQM, so the bulk queues sit at its 127-packet limit throughout.</a:t>
+            </a:r>
+            <a:endParaRPr lang="en-US" sz="1250" dirty="0"/>
           </a:p>
         </p:txBody>
       </p:sp>

--- a/deck/ACAPE_2026.pptx
+++ b/deck/ACAPE_2026.pptx
@@ -22,9 +22,10 @@
     <p:sldId id="270" r:id="rId16"/>
     <p:sldId id="271" r:id="rId17"/>
     <p:sldId id="272" r:id="rId18"/>
+    <p:sldId id="273" r:id="rId19"/>
   </p:sldIdLst>
   <p:notesMasterIdLst>
-    <p:notesMasterId r:id="rId19"/>
+    <p:notesMasterId r:id="rId20"/>
   </p:notesMasterIdLst>
   <p:sldSz cx="12192000" cy="6858000"/>
   <p:notesSz cx="6858000" cy="12192000"/>
@@ -782,7 +783,7 @@
           <a:p>
             <a:r>
               <a:rPr lang="en-US" dirty="0"/>
-              <a:t>Figures from the pilot; the full three-repetition suite refines them. The direction is not expected to change.</a:t>
+              <a:t>Steady load has a stable operating point to converge on; staged load does not, and the adjustments lag the transitions.</a:t>
             </a:r>
             <a:endParaRPr lang="en-US" dirty="0"/>
           </a:p>
@@ -1134,7 +1135,7 @@
           <a:p>
             <a:r>
               <a:rPr lang="en-US" dirty="0"/>
-              <a:t>The null result is only credible because of the control condition. That is what makes it a contribution rather than a failure.</a:t>
+              <a:t/>
             </a:r>
             <a:endParaRPr lang="en-US" dirty="0"/>
           </a:p>
@@ -1222,7 +1223,7 @@
           <a:p>
             <a:r>
               <a:rPr lang="en-US" dirty="0"/>
-              <a:t/>
+              <a:t>The null result is only credible because of the control condition. That is what makes it a contribution rather than a failure.</a:t>
             </a:r>
             <a:endParaRPr lang="en-US" dirty="0"/>
           </a:p>
@@ -1246,6 +1247,94 @@
             <a:fld id="{F7021451-1387-4CA6-816F-3879F97B5CBC}" type="slidenum">
               <a:rPr lang="en-US"/>
               <a:t>17</a:t>
+            </a:fld>
+            <a:endParaRPr lang="en-US"/>
+          </a:p>
+        </p:txBody>
+      </p:sp>
+    </p:spTree>
+    <p:extLst>
+      <p:ext uri="{BB962C8B-B14F-4D97-AF65-F5344CB8AC3E}">
+        <p14:creationId xmlns:p14="http://schemas.microsoft.com/office/powerpoint/2010/main" val="1024086991"/>
+      </p:ext>
+    </p:extLst>
+  </p:cSld>
+  <p:clrMapOvr>
+    <a:masterClrMapping/>
+  </p:clrMapOvr>
+</p:notes>
+</file>
+
+<file path=ppt/notesSlides/notesSlide18.xml><?xml version="1.0" encoding="utf-8"?>
+<p:notes xmlns:a="http://schemas.openxmlformats.org/drawingml/2006/main" xmlns:r="http://schemas.openxmlformats.org/officeDocument/2006/relationships" xmlns:p="http://schemas.openxmlformats.org/presentationml/2006/main">
+  <p:cSld>
+    <p:spTree>
+      <p:nvGrpSpPr>
+        <p:cNvPr id="1" name=""/>
+        <p:cNvGrpSpPr/>
+        <p:nvPr/>
+      </p:nvGrpSpPr>
+      <p:grpSpPr>
+        <a:xfrm>
+          <a:off x="0" y="0"/>
+          <a:ext cx="0" cy="0"/>
+          <a:chOff x="0" y="0"/>
+          <a:chExt cx="0" cy="0"/>
+        </a:xfrm>
+      </p:grpSpPr>
+      <p:sp>
+        <p:nvSpPr>
+          <p:cNvPr id="2" name="Slide Image Placeholder 1"/>
+          <p:cNvSpPr>
+            <a:spLocks noGrp="1" noRot="1" noChangeAspect="1"/>
+          </p:cNvSpPr>
+          <p:nvPr>
+            <p:ph type="sldImg"/>
+          </p:nvPr>
+        </p:nvSpPr>
+        <p:spPr/>
+      </p:sp>
+      <p:sp>
+        <p:nvSpPr>
+          <p:cNvPr id="3" name="Notes Placeholder 2"/>
+          <p:cNvSpPr>
+            <a:spLocks noGrp="1"/>
+          </p:cNvSpPr>
+          <p:nvPr>
+            <p:ph type="body" idx="1"/>
+          </p:nvPr>
+        </p:nvSpPr>
+        <p:spPr/>
+        <p:txBody>
+          <a:bodyPr/>
+          <a:lstStyle/>
+          <a:p>
+            <a:r>
+              <a:rPr lang="en-US" dirty="0"/>
+              <a:t/>
+            </a:r>
+            <a:endParaRPr lang="en-US" dirty="0"/>
+          </a:p>
+        </p:txBody>
+      </p:sp>
+      <p:sp>
+        <p:nvSpPr>
+          <p:cNvPr id="4" name="Slide Number Placeholder 3"/>
+          <p:cNvSpPr>
+            <a:spLocks noGrp="1"/>
+          </p:cNvSpPr>
+          <p:nvPr>
+            <p:ph type="sldNum" sz="quarter" idx="10"/>
+          </p:nvPr>
+        </p:nvSpPr>
+        <p:spPr/>
+        <p:txBody>
+          <a:bodyPr/>
+          <a:lstStyle/>
+          <a:p>
+            <a:fld id="{F7021451-1387-4CA6-816F-3879F97B5CBC}" type="slidenum">
+              <a:rPr lang="en-US"/>
+              <a:t>18</a:t>
             </a:fld>
             <a:endParaRPr lang="en-US"/>
           </a:p>
@@ -3404,12 +3493,12 @@
         </p:nvSpPr>
         <p:spPr>
           <a:xfrm>
-            <a:off x="640080" y="1143000"/>
-            <a:ext cx="10881360" cy="960120"/>
+            <a:off x="640080" y="1097280"/>
+            <a:ext cx="10881360" cy="868680"/>
           </a:xfrm>
           <a:prstGeom prst="roundRect">
             <a:avLst>
-              <a:gd name="adj" fmla="val 7619"/>
+              <a:gd name="adj" fmla="val 8421"/>
             </a:avLst>
           </a:prstGeom>
           <a:solidFill>
@@ -3438,8 +3527,8 @@
         </p:nvSpPr>
         <p:spPr>
           <a:xfrm>
-            <a:off x="960120" y="1325880"/>
-            <a:ext cx="10241280" cy="594360"/>
+            <a:off x="960120" y="1280160"/>
+            <a:ext cx="10241280" cy="502920"/>
           </a:xfrm>
           <a:prstGeom prst="rect">
             <a:avLst/>
@@ -3463,7 +3552,7 @@
                 <a:ea typeface="Cambria" pitchFamily="34" charset="-122"/>
                 <a:cs typeface="Cambria" pitchFamily="34" charset="-120"/>
               </a:rPr>
-              <a:t>On the evidence so far: it shrinks the queue slightly, and does not reduce the latency users see.</a:t>
+              <a:t>A small gain under steady load. Nothing under a load that changes.</a:t>
             </a:r>
             <a:endParaRPr lang="en-US" sz="1800" dirty="0"/>
           </a:p>
@@ -3471,18 +3560,135 @@
       </p:sp>
       <p:sp>
         <p:nvSpPr>
-          <p:cNvPr id="5" name="Shape 3"/>
+          <p:cNvPr id="5" name="Text 3"/>
+          <p:cNvSpPr txBox="1"/>
+          <p:nvPr/>
+        </p:nvSpPr>
+        <p:spPr>
+          <a:xfrm>
+            <a:off x="914400" y="2103120"/>
+            <a:ext cx="3291840" cy="274320"/>
+          </a:xfrm>
+          <a:prstGeom prst="rect">
+            <a:avLst/>
+          </a:prstGeom>
+          <a:noFill/>
+          <a:ln/>
+        </p:spPr>
+        <p:txBody>
+          <a:bodyPr wrap="square" lIns="0" tIns="0" rIns="0" bIns="0" rtlCol="0" anchor="ctr"/>
+          <a:lstStyle/>
+          <a:p>
+            <a:pPr indent="0" marL="0">
+              <a:buNone/>
+            </a:pPr>
+            <a:r>
+              <a:rPr lang="en-US" sz="1150" b="1" spc="100" kern="0" dirty="0">
+                <a:solidFill>
+                  <a:srgbClr val="7B8A9C"/>
+                </a:solidFill>
+                <a:latin typeface="Calibri" pitchFamily="34" charset="0"/>
+                <a:ea typeface="Calibri" pitchFamily="34" charset="-122"/>
+                <a:cs typeface="Calibri" pitchFamily="34" charset="-120"/>
+              </a:rPr>
+              <a:t>Metric</a:t>
+            </a:r>
+            <a:endParaRPr lang="en-US" sz="1150" dirty="0"/>
+          </a:p>
+        </p:txBody>
+      </p:sp>
+      <p:sp>
+        <p:nvSpPr>
+          <p:cNvPr id="6" name="Text 4"/>
+          <p:cNvSpPr txBox="1"/>
+          <p:nvPr/>
+        </p:nvSpPr>
+        <p:spPr>
+          <a:xfrm>
+            <a:off x="5212080" y="2103120"/>
+            <a:ext cx="3291840" cy="274320"/>
+          </a:xfrm>
+          <a:prstGeom prst="rect">
+            <a:avLst/>
+          </a:prstGeom>
+          <a:noFill/>
+          <a:ln/>
+        </p:spPr>
+        <p:txBody>
+          <a:bodyPr wrap="square" lIns="0" tIns="0" rIns="0" bIns="0" rtlCol="0" anchor="ctr"/>
+          <a:lstStyle/>
+          <a:p>
+            <a:pPr indent="0" marL="0">
+              <a:buNone/>
+            </a:pPr>
+            <a:r>
+              <a:rPr lang="en-US" sz="1150" b="1" spc="100" kern="0" dirty="0">
+                <a:solidFill>
+                  <a:srgbClr val="7B8A9C"/>
+                </a:solidFill>
+                <a:latin typeface="Calibri" pitchFamily="34" charset="0"/>
+                <a:ea typeface="Calibri" pitchFamily="34" charset="-122"/>
+                <a:cs typeface="Calibri" pitchFamily="34" charset="-120"/>
+              </a:rPr>
+              <a:t>Steady workload</a:t>
+            </a:r>
+            <a:endParaRPr lang="en-US" sz="1150" dirty="0"/>
+          </a:p>
+        </p:txBody>
+      </p:sp>
+      <p:sp>
+        <p:nvSpPr>
+          <p:cNvPr id="7" name="Text 5"/>
+          <p:cNvSpPr txBox="1"/>
+          <p:nvPr/>
+        </p:nvSpPr>
+        <p:spPr>
+          <a:xfrm>
+            <a:off x="8778240" y="2103120"/>
+            <a:ext cx="3291840" cy="274320"/>
+          </a:xfrm>
+          <a:prstGeom prst="rect">
+            <a:avLst/>
+          </a:prstGeom>
+          <a:noFill/>
+          <a:ln/>
+        </p:spPr>
+        <p:txBody>
+          <a:bodyPr wrap="square" lIns="0" tIns="0" rIns="0" bIns="0" rtlCol="0" anchor="ctr"/>
+          <a:lstStyle/>
+          <a:p>
+            <a:pPr indent="0" marL="0">
+              <a:buNone/>
+            </a:pPr>
+            <a:r>
+              <a:rPr lang="en-US" sz="1150" b="1" spc="100" kern="0" dirty="0">
+                <a:solidFill>
+                  <a:srgbClr val="7B8A9C"/>
+                </a:solidFill>
+                <a:latin typeface="Calibri" pitchFamily="34" charset="0"/>
+                <a:ea typeface="Calibri" pitchFamily="34" charset="-122"/>
+                <a:cs typeface="Calibri" pitchFamily="34" charset="-120"/>
+              </a:rPr>
+              <a:t>Staged workload</a:t>
+            </a:r>
+            <a:endParaRPr lang="en-US" sz="1150" dirty="0"/>
+          </a:p>
+        </p:txBody>
+      </p:sp>
+      <p:sp>
+        <p:nvSpPr>
+          <p:cNvPr id="8" name="Shape 6"/>
           <p:cNvSpPr/>
           <p:nvPr/>
         </p:nvSpPr>
         <p:spPr>
           <a:xfrm>
-            <a:off x="640080" y="2286000"/>
-            <a:ext cx="10881360" cy="566928"/>
+            <a:off x="640080" y="2423160"/>
+            <a:ext cx="10881360" cy="493776"/>
           </a:xfrm>
           <a:prstGeom prst="roundRect">
             <a:avLst>
-              <a:gd name="adj" fmla="val 9677"/>
+              <a:gd name="adj" fmla="val 9259"/>
             </a:avLst>
           </a:prstGeom>
           <a:solidFill>
@@ -3498,30 +3704,30 @@
       </p:sp>
       <p:sp>
         <p:nvSpPr>
-          <p:cNvPr id="6" name="Text 4"/>
-          <p:cNvSpPr txBox="1"/>
-          <p:nvPr/>
-        </p:nvSpPr>
-        <p:spPr>
-          <a:xfrm>
-            <a:off x="914400" y="2404872"/>
-            <a:ext cx="3017520" cy="329184"/>
-          </a:xfrm>
-          <a:prstGeom prst="rect">
-            <a:avLst/>
-          </a:prstGeom>
-          <a:noFill/>
-          <a:ln/>
-        </p:spPr>
-        <p:txBody>
-          <a:bodyPr wrap="square" lIns="0" tIns="0" rIns="0" bIns="0" rtlCol="0" anchor="ctr"/>
-          <a:lstStyle/>
-          <a:p>
-            <a:pPr indent="0" marL="0">
-              <a:buNone/>
-            </a:pPr>
-            <a:r>
-              <a:rPr lang="en-US" sz="1400" b="1" dirty="0">
+          <p:cNvPr id="9" name="Text 7"/>
+          <p:cNvSpPr txBox="1"/>
+          <p:nvPr/>
+        </p:nvSpPr>
+        <p:spPr>
+          <a:xfrm>
+            <a:off x="914400" y="2542032"/>
+            <a:ext cx="4023360" cy="292608"/>
+          </a:xfrm>
+          <a:prstGeom prst="rect">
+            <a:avLst/>
+          </a:prstGeom>
+          <a:noFill/>
+          <a:ln/>
+        </p:spPr>
+        <p:txBody>
+          <a:bodyPr wrap="square" lIns="0" tIns="0" rIns="0" bIns="0" rtlCol="0" anchor="ctr"/>
+          <a:lstStyle/>
+          <a:p>
+            <a:pPr indent="0" marL="0">
+              <a:buNone/>
+            </a:pPr>
+            <a:r>
+              <a:rPr lang="en-US" sz="1350" b="1" dirty="0">
                 <a:solidFill>
                   <a:srgbClr val="13233B"/>
                 </a:solidFill>
@@ -3531,83 +3737,83 @@
               </a:rPr>
               <a:t>Mean backlog</a:t>
             </a:r>
-            <a:endParaRPr lang="en-US" sz="1400" dirty="0"/>
-          </a:p>
-        </p:txBody>
-      </p:sp>
-      <p:sp>
-        <p:nvSpPr>
-          <p:cNvPr id="7" name="Text 5"/>
-          <p:cNvSpPr txBox="1"/>
-          <p:nvPr/>
-        </p:nvSpPr>
-        <p:spPr>
-          <a:xfrm>
-            <a:off x="4023360" y="2377440"/>
-            <a:ext cx="1371600" cy="384048"/>
-          </a:xfrm>
-          <a:prstGeom prst="rect">
-            <a:avLst/>
-          </a:prstGeom>
-          <a:noFill/>
-          <a:ln/>
-        </p:spPr>
-        <p:txBody>
-          <a:bodyPr wrap="square" lIns="0" tIns="0" rIns="0" bIns="0" rtlCol="0" anchor="ctr"/>
-          <a:lstStyle/>
-          <a:p>
-            <a:pPr indent="0" marL="0">
-              <a:buNone/>
-            </a:pPr>
-            <a:r>
-              <a:rPr lang="en-US" sz="1700" b="1" dirty="0">
+            <a:endParaRPr lang="en-US" sz="1350" dirty="0"/>
+          </a:p>
+        </p:txBody>
+      </p:sp>
+      <p:sp>
+        <p:nvSpPr>
+          <p:cNvPr id="10" name="Text 8"/>
+          <p:cNvSpPr txBox="1"/>
+          <p:nvPr/>
+        </p:nvSpPr>
+        <p:spPr>
+          <a:xfrm>
+            <a:off x="5212080" y="2542032"/>
+            <a:ext cx="3291840" cy="292608"/>
+          </a:xfrm>
+          <a:prstGeom prst="rect">
+            <a:avLst/>
+          </a:prstGeom>
+          <a:noFill/>
+          <a:ln/>
+        </p:spPr>
+        <p:txBody>
+          <a:bodyPr wrap="square" lIns="0" tIns="0" rIns="0" bIns="0" rtlCol="0" anchor="ctr"/>
+          <a:lstStyle/>
+          <a:p>
+            <a:pPr indent="0" marL="0">
+              <a:buNone/>
+            </a:pPr>
+            <a:r>
+              <a:rPr lang="en-US" sz="1300" b="1" dirty="0">
+                <a:solidFill>
+                  <a:srgbClr val="2C7A5A"/>
+                </a:solidFill>
+                <a:latin typeface="Calibri" pitchFamily="34" charset="0"/>
+                <a:ea typeface="Calibri" pitchFamily="34" charset="-122"/>
+                <a:cs typeface="Calibri" pitchFamily="34" charset="-120"/>
+              </a:rPr>
+              <a:t>-9.6%   p=0.050</a:t>
+            </a:r>
+            <a:endParaRPr lang="en-US" sz="1300" dirty="0"/>
+          </a:p>
+        </p:txBody>
+      </p:sp>
+      <p:sp>
+        <p:nvSpPr>
+          <p:cNvPr id="11" name="Text 9"/>
+          <p:cNvSpPr txBox="1"/>
+          <p:nvPr/>
+        </p:nvSpPr>
+        <p:spPr>
+          <a:xfrm>
+            <a:off x="8778240" y="2542032"/>
+            <a:ext cx="3291840" cy="292608"/>
+          </a:xfrm>
+          <a:prstGeom prst="rect">
+            <a:avLst/>
+          </a:prstGeom>
+          <a:noFill/>
+          <a:ln/>
+        </p:spPr>
+        <p:txBody>
+          <a:bodyPr wrap="square" lIns="0" tIns="0" rIns="0" bIns="0" rtlCol="0" anchor="ctr"/>
+          <a:lstStyle/>
+          <a:p>
+            <a:pPr indent="0" marL="0">
+              <a:buNone/>
+            </a:pPr>
+            <a:r>
+              <a:rPr lang="en-US" sz="1300" b="1" dirty="0">
                 <a:solidFill>
                   <a:srgbClr val="7B8A9C"/>
                 </a:solidFill>
-                <a:latin typeface="Cambria" pitchFamily="34" charset="0"/>
-                <a:ea typeface="Cambria" pitchFamily="34" charset="-122"/>
-                <a:cs typeface="Cambria" pitchFamily="34" charset="-120"/>
-              </a:rPr>
-              <a:t>−15%</a:t>
-            </a:r>
-            <a:endParaRPr lang="en-US" sz="1700" dirty="0"/>
-          </a:p>
-        </p:txBody>
-      </p:sp>
-      <p:sp>
-        <p:nvSpPr>
-          <p:cNvPr id="8" name="Text 6"/>
-          <p:cNvSpPr txBox="1"/>
-          <p:nvPr/>
-        </p:nvSpPr>
-        <p:spPr>
-          <a:xfrm>
-            <a:off x="5577840" y="2423160"/>
-            <a:ext cx="5669280" cy="329184"/>
-          </a:xfrm>
-          <a:prstGeom prst="rect">
-            <a:avLst/>
-          </a:prstGeom>
-          <a:noFill/>
-          <a:ln/>
-        </p:spPr>
-        <p:txBody>
-          <a:bodyPr wrap="square" lIns="0" tIns="0" rIns="0" bIns="0" rtlCol="0" anchor="ctr"/>
-          <a:lstStyle/>
-          <a:p>
-            <a:pPr indent="0" marL="0">
-              <a:buNone/>
-            </a:pPr>
-            <a:r>
-              <a:rPr lang="en-US" sz="1300" dirty="0">
-                <a:solidFill>
-                  <a:srgbClr val="3A4A5F"/>
-                </a:solidFill>
-                <a:latin typeface="Calibri" pitchFamily="34" charset="0"/>
-                <a:ea typeface="Calibri" pitchFamily="34" charset="-122"/>
-                <a:cs typeface="Calibri" pitchFamily="34" charset="-120"/>
-              </a:rPr>
-              <a:t>not distinguishable  (p = 0.066)</a:t>
+                <a:latin typeface="Calibri" pitchFamily="34" charset="0"/>
+                <a:ea typeface="Calibri" pitchFamily="34" charset="-122"/>
+                <a:cs typeface="Calibri" pitchFamily="34" charset="-120"/>
+              </a:rPr>
+              <a:t>+2.2%   p=0.66</a:t>
             </a:r>
             <a:endParaRPr lang="en-US" sz="1300" dirty="0"/>
           </a:p>
@@ -3615,18 +3821,18 @@
       </p:sp>
       <p:sp>
         <p:nvSpPr>
-          <p:cNvPr id="9" name="Shape 7"/>
+          <p:cNvPr id="12" name="Shape 10"/>
           <p:cNvSpPr/>
           <p:nvPr/>
         </p:nvSpPr>
         <p:spPr>
           <a:xfrm>
-            <a:off x="640080" y="2944368"/>
-            <a:ext cx="10881360" cy="566928"/>
+            <a:off x="640080" y="2990088"/>
+            <a:ext cx="10881360" cy="493776"/>
           </a:xfrm>
           <a:prstGeom prst="roundRect">
             <a:avLst>
-              <a:gd name="adj" fmla="val 9677"/>
+              <a:gd name="adj" fmla="val 9259"/>
             </a:avLst>
           </a:prstGeom>
           <a:solidFill>
@@ -3642,30 +3848,30 @@
       </p:sp>
       <p:sp>
         <p:nvSpPr>
-          <p:cNvPr id="10" name="Text 8"/>
-          <p:cNvSpPr txBox="1"/>
-          <p:nvPr/>
-        </p:nvSpPr>
-        <p:spPr>
-          <a:xfrm>
-            <a:off x="914400" y="3063240"/>
-            <a:ext cx="3017520" cy="329184"/>
-          </a:xfrm>
-          <a:prstGeom prst="rect">
-            <a:avLst/>
-          </a:prstGeom>
-          <a:noFill/>
-          <a:ln/>
-        </p:spPr>
-        <p:txBody>
-          <a:bodyPr wrap="square" lIns="0" tIns="0" rIns="0" bIns="0" rtlCol="0" anchor="ctr"/>
-          <a:lstStyle/>
-          <a:p>
-            <a:pPr indent="0" marL="0">
-              <a:buNone/>
-            </a:pPr>
-            <a:r>
-              <a:rPr lang="en-US" sz="1400" b="1" dirty="0">
+          <p:cNvPr id="13" name="Text 11"/>
+          <p:cNvSpPr txBox="1"/>
+          <p:nvPr/>
+        </p:nvSpPr>
+        <p:spPr>
+          <a:xfrm>
+            <a:off x="914400" y="3108960"/>
+            <a:ext cx="4023360" cy="292608"/>
+          </a:xfrm>
+          <a:prstGeom prst="rect">
+            <a:avLst/>
+          </a:prstGeom>
+          <a:noFill/>
+          <a:ln/>
+        </p:spPr>
+        <p:txBody>
+          <a:bodyPr wrap="square" lIns="0" tIns="0" rIns="0" bIns="0" rtlCol="0" anchor="ctr"/>
+          <a:lstStyle/>
+          <a:p>
+            <a:pPr indent="0" marL="0">
+              <a:buNone/>
+            </a:pPr>
+            <a:r>
+              <a:rPr lang="en-US" sz="1350" b="1" dirty="0">
                 <a:solidFill>
                   <a:srgbClr val="13233B"/>
                 </a:solidFill>
@@ -3673,85 +3879,46 @@
                 <a:ea typeface="Calibri" pitchFamily="34" charset="-122"/>
                 <a:cs typeface="Calibri" pitchFamily="34" charset="-120"/>
               </a:rPr>
-              <a:t>p95 queue delay</a:t>
-            </a:r>
-            <a:endParaRPr lang="en-US" sz="1400" dirty="0"/>
-          </a:p>
-        </p:txBody>
-      </p:sp>
-      <p:sp>
-        <p:nvSpPr>
-          <p:cNvPr id="11" name="Text 9"/>
-          <p:cNvSpPr txBox="1"/>
-          <p:nvPr/>
-        </p:nvSpPr>
-        <p:spPr>
-          <a:xfrm>
-            <a:off x="4023360" y="3035808"/>
-            <a:ext cx="1371600" cy="384048"/>
-          </a:xfrm>
-          <a:prstGeom prst="rect">
-            <a:avLst/>
-          </a:prstGeom>
-          <a:noFill/>
-          <a:ln/>
-        </p:spPr>
-        <p:txBody>
-          <a:bodyPr wrap="square" lIns="0" tIns="0" rIns="0" bIns="0" rtlCol="0" anchor="ctr"/>
-          <a:lstStyle/>
-          <a:p>
-            <a:pPr indent="0" marL="0">
-              <a:buNone/>
-            </a:pPr>
-            <a:r>
-              <a:rPr lang="en-US" sz="1700" b="1" dirty="0">
-                <a:solidFill>
-                  <a:srgbClr val="1C7293"/>
-                </a:solidFill>
-                <a:latin typeface="Cambria" pitchFamily="34" charset="0"/>
-                <a:ea typeface="Cambria" pitchFamily="34" charset="-122"/>
-                <a:cs typeface="Cambria" pitchFamily="34" charset="-120"/>
-              </a:rPr>
-              <a:t>−16%</a:t>
-            </a:r>
-            <a:endParaRPr lang="en-US" sz="1700" dirty="0"/>
-          </a:p>
-        </p:txBody>
-      </p:sp>
-      <p:sp>
-        <p:nvSpPr>
-          <p:cNvPr id="12" name="Text 10"/>
-          <p:cNvSpPr txBox="1"/>
-          <p:nvPr/>
-        </p:nvSpPr>
-        <p:spPr>
-          <a:xfrm>
-            <a:off x="5577840" y="3081528"/>
-            <a:ext cx="5669280" cy="329184"/>
-          </a:xfrm>
-          <a:prstGeom prst="rect">
-            <a:avLst/>
-          </a:prstGeom>
-          <a:noFill/>
-          <a:ln/>
-        </p:spPr>
-        <p:txBody>
-          <a:bodyPr wrap="square" lIns="0" tIns="0" rIns="0" bIns="0" rtlCol="0" anchor="ctr"/>
-          <a:lstStyle/>
-          <a:p>
-            <a:pPr indent="0" marL="0">
-              <a:buNone/>
-            </a:pPr>
-            <a:r>
-              <a:rPr lang="en-US" sz="1300" dirty="0">
-                <a:solidFill>
-                  <a:srgbClr val="3A4A5F"/>
-                </a:solidFill>
-                <a:latin typeface="Calibri" pitchFamily="34" charset="0"/>
-                <a:ea typeface="Calibri" pitchFamily="34" charset="-122"/>
-                <a:cs typeface="Calibri" pitchFamily="34" charset="-120"/>
-              </a:rPr>
-              <a:t>marginal  (p = 0.047)</a:t>
+              <a:t>p95 RTT (probe)</a:t>
+            </a:r>
+            <a:endParaRPr lang="en-US" sz="1350" dirty="0"/>
+          </a:p>
+        </p:txBody>
+      </p:sp>
+      <p:sp>
+        <p:nvSpPr>
+          <p:cNvPr id="14" name="Text 12"/>
+          <p:cNvSpPr txBox="1"/>
+          <p:nvPr/>
+        </p:nvSpPr>
+        <p:spPr>
+          <a:xfrm>
+            <a:off x="5212080" y="3108960"/>
+            <a:ext cx="3291840" cy="292608"/>
+          </a:xfrm>
+          <a:prstGeom prst="rect">
+            <a:avLst/>
+          </a:prstGeom>
+          <a:noFill/>
+          <a:ln/>
+        </p:spPr>
+        <p:txBody>
+          <a:bodyPr wrap="square" lIns="0" tIns="0" rIns="0" bIns="0" rtlCol="0" anchor="ctr"/>
+          <a:lstStyle/>
+          <a:p>
+            <a:pPr indent="0" marL="0">
+              <a:buNone/>
+            </a:pPr>
+            <a:r>
+              <a:rPr lang="en-US" sz="1300" b="1" dirty="0">
+                <a:solidFill>
+                  <a:srgbClr val="2C7A5A"/>
+                </a:solidFill>
+                <a:latin typeface="Calibri" pitchFamily="34" charset="0"/>
+                <a:ea typeface="Calibri" pitchFamily="34" charset="-122"/>
+                <a:cs typeface="Calibri" pitchFamily="34" charset="-120"/>
+              </a:rPr>
+              <a:t>-0.5%   p=0.047</a:t>
             </a:r>
             <a:endParaRPr lang="en-US" sz="1300" dirty="0"/>
           </a:p>
@@ -3759,18 +3926,57 @@
       </p:sp>
       <p:sp>
         <p:nvSpPr>
-          <p:cNvPr id="13" name="Shape 11"/>
+          <p:cNvPr id="15" name="Text 13"/>
+          <p:cNvSpPr txBox="1"/>
+          <p:nvPr/>
+        </p:nvSpPr>
+        <p:spPr>
+          <a:xfrm>
+            <a:off x="8778240" y="3108960"/>
+            <a:ext cx="3291840" cy="292608"/>
+          </a:xfrm>
+          <a:prstGeom prst="rect">
+            <a:avLst/>
+          </a:prstGeom>
+          <a:noFill/>
+          <a:ln/>
+        </p:spPr>
+        <p:txBody>
+          <a:bodyPr wrap="square" lIns="0" tIns="0" rIns="0" bIns="0" rtlCol="0" anchor="ctr"/>
+          <a:lstStyle/>
+          <a:p>
+            <a:pPr indent="0" marL="0">
+              <a:buNone/>
+            </a:pPr>
+            <a:r>
+              <a:rPr lang="en-US" sz="1300" b="1" dirty="0">
+                <a:solidFill>
+                  <a:srgbClr val="7B8A9C"/>
+                </a:solidFill>
+                <a:latin typeface="Calibri" pitchFamily="34" charset="0"/>
+                <a:ea typeface="Calibri" pitchFamily="34" charset="-122"/>
+                <a:cs typeface="Calibri" pitchFamily="34" charset="-120"/>
+              </a:rPr>
+              <a:t>+3.2%   p=0.07</a:t>
+            </a:r>
+            <a:endParaRPr lang="en-US" sz="1300" dirty="0"/>
+          </a:p>
+        </p:txBody>
+      </p:sp>
+      <p:sp>
+        <p:nvSpPr>
+          <p:cNvPr id="16" name="Shape 14"/>
           <p:cNvSpPr/>
           <p:nvPr/>
         </p:nvSpPr>
         <p:spPr>
           <a:xfrm>
-            <a:off x="640080" y="3602736"/>
-            <a:ext cx="10881360" cy="566928"/>
+            <a:off x="640080" y="3557016"/>
+            <a:ext cx="10881360" cy="493776"/>
           </a:xfrm>
           <a:prstGeom prst="roundRect">
             <a:avLst>
-              <a:gd name="adj" fmla="val 9677"/>
+              <a:gd name="adj" fmla="val 9259"/>
             </a:avLst>
           </a:prstGeom>
           <a:solidFill>
@@ -3786,30 +3992,30 @@
       </p:sp>
       <p:sp>
         <p:nvSpPr>
-          <p:cNvPr id="14" name="Text 12"/>
-          <p:cNvSpPr txBox="1"/>
-          <p:nvPr/>
-        </p:nvSpPr>
-        <p:spPr>
-          <a:xfrm>
-            <a:off x="914400" y="3721608"/>
-            <a:ext cx="3017520" cy="329184"/>
-          </a:xfrm>
-          <a:prstGeom prst="rect">
-            <a:avLst/>
-          </a:prstGeom>
-          <a:noFill/>
-          <a:ln/>
-        </p:spPr>
-        <p:txBody>
-          <a:bodyPr wrap="square" lIns="0" tIns="0" rIns="0" bIns="0" rtlCol="0" anchor="ctr"/>
-          <a:lstStyle/>
-          <a:p>
-            <a:pPr indent="0" marL="0">
-              <a:buNone/>
-            </a:pPr>
-            <a:r>
-              <a:rPr lang="en-US" sz="1400" b="1" dirty="0">
+          <p:cNvPr id="17" name="Text 15"/>
+          <p:cNvSpPr txBox="1"/>
+          <p:nvPr/>
+        </p:nvSpPr>
+        <p:spPr>
+          <a:xfrm>
+            <a:off x="914400" y="3675888"/>
+            <a:ext cx="4023360" cy="292608"/>
+          </a:xfrm>
+          <a:prstGeom prst="rect">
+            <a:avLst/>
+          </a:prstGeom>
+          <a:noFill/>
+          <a:ln/>
+        </p:spPr>
+        <p:txBody>
+          <a:bodyPr wrap="square" lIns="0" tIns="0" rIns="0" bIns="0" rtlCol="0" anchor="ctr"/>
+          <a:lstStyle/>
+          <a:p>
+            <a:pPr indent="0" marL="0">
+              <a:buNone/>
+            </a:pPr>
+            <a:r>
+              <a:rPr lang="en-US" sz="1350" b="1" dirty="0">
                 <a:solidFill>
                   <a:srgbClr val="13233B"/>
                 </a:solidFill>
@@ -3817,85 +4023,46 @@
                 <a:ea typeface="Calibri" pitchFamily="34" charset="-122"/>
                 <a:cs typeface="Calibri" pitchFamily="34" charset="-120"/>
               </a:rPr>
-              <a:t>p95 RTT</a:t>
-            </a:r>
-            <a:endParaRPr lang="en-US" sz="1400" dirty="0"/>
-          </a:p>
-        </p:txBody>
-      </p:sp>
-      <p:sp>
-        <p:nvSpPr>
-          <p:cNvPr id="15" name="Text 13"/>
-          <p:cNvSpPr txBox="1"/>
-          <p:nvPr/>
-        </p:nvSpPr>
-        <p:spPr>
-          <a:xfrm>
-            <a:off x="4023360" y="3694176"/>
-            <a:ext cx="1371600" cy="384048"/>
-          </a:xfrm>
-          <a:prstGeom prst="rect">
-            <a:avLst/>
-          </a:prstGeom>
-          <a:noFill/>
-          <a:ln/>
-        </p:spPr>
-        <p:txBody>
-          <a:bodyPr wrap="square" lIns="0" tIns="0" rIns="0" bIns="0" rtlCol="0" anchor="ctr"/>
-          <a:lstStyle/>
-          <a:p>
-            <a:pPr indent="0" marL="0">
-              <a:buNone/>
-            </a:pPr>
-            <a:r>
-              <a:rPr lang="en-US" sz="1700" b="1" dirty="0">
+              <a:t>Mean RTT (probe)</a:t>
+            </a:r>
+            <a:endParaRPr lang="en-US" sz="1350" dirty="0"/>
+          </a:p>
+        </p:txBody>
+      </p:sp>
+      <p:sp>
+        <p:nvSpPr>
+          <p:cNvPr id="18" name="Text 16"/>
+          <p:cNvSpPr txBox="1"/>
+          <p:nvPr/>
+        </p:nvSpPr>
+        <p:spPr>
+          <a:xfrm>
+            <a:off x="5212080" y="3675888"/>
+            <a:ext cx="3291840" cy="292608"/>
+          </a:xfrm>
+          <a:prstGeom prst="rect">
+            <a:avLst/>
+          </a:prstGeom>
+          <a:noFill/>
+          <a:ln/>
+        </p:spPr>
+        <p:txBody>
+          <a:bodyPr wrap="square" lIns="0" tIns="0" rIns="0" bIns="0" rtlCol="0" anchor="ctr"/>
+          <a:lstStyle/>
+          <a:p>
+            <a:pPr indent="0" marL="0">
+              <a:buNone/>
+            </a:pPr>
+            <a:r>
+              <a:rPr lang="en-US" sz="1300" b="1" dirty="0">
                 <a:solidFill>
                   <a:srgbClr val="7B8A9C"/>
                 </a:solidFill>
-                <a:latin typeface="Cambria" pitchFamily="34" charset="0"/>
-                <a:ea typeface="Cambria" pitchFamily="34" charset="-122"/>
-                <a:cs typeface="Cambria" pitchFamily="34" charset="-120"/>
-              </a:rPr>
-              <a:t>+1%</a:t>
-            </a:r>
-            <a:endParaRPr lang="en-US" sz="1700" dirty="0"/>
-          </a:p>
-        </p:txBody>
-      </p:sp>
-      <p:sp>
-        <p:nvSpPr>
-          <p:cNvPr id="16" name="Text 14"/>
-          <p:cNvSpPr txBox="1"/>
-          <p:nvPr/>
-        </p:nvSpPr>
-        <p:spPr>
-          <a:xfrm>
-            <a:off x="5577840" y="3739896"/>
-            <a:ext cx="5669280" cy="329184"/>
-          </a:xfrm>
-          <a:prstGeom prst="rect">
-            <a:avLst/>
-          </a:prstGeom>
-          <a:noFill/>
-          <a:ln/>
-        </p:spPr>
-        <p:txBody>
-          <a:bodyPr wrap="square" lIns="0" tIns="0" rIns="0" bIns="0" rtlCol="0" anchor="ctr"/>
-          <a:lstStyle/>
-          <a:p>
-            <a:pPr indent="0" marL="0">
-              <a:buNone/>
-            </a:pPr>
-            <a:r>
-              <a:rPr lang="en-US" sz="1300" dirty="0">
-                <a:solidFill>
-                  <a:srgbClr val="3A4A5F"/>
-                </a:solidFill>
-                <a:latin typeface="Calibri" pitchFamily="34" charset="0"/>
-                <a:ea typeface="Calibri" pitchFamily="34" charset="-122"/>
-                <a:cs typeface="Calibri" pitchFamily="34" charset="-120"/>
-              </a:rPr>
-              <a:t>not distinguishable  (p = 0.449)</a:t>
+                <a:latin typeface="Calibri" pitchFamily="34" charset="0"/>
+                <a:ea typeface="Calibri" pitchFamily="34" charset="-122"/>
+                <a:cs typeface="Calibri" pitchFamily="34" charset="-120"/>
+              </a:rPr>
+              <a:t>+0.4%   p=0.48</a:t>
             </a:r>
             <a:endParaRPr lang="en-US" sz="1300" dirty="0"/>
           </a:p>
@@ -3903,18 +4070,57 @@
       </p:sp>
       <p:sp>
         <p:nvSpPr>
-          <p:cNvPr id="17" name="Shape 15"/>
+          <p:cNvPr id="19" name="Text 17"/>
+          <p:cNvSpPr txBox="1"/>
+          <p:nvPr/>
+        </p:nvSpPr>
+        <p:spPr>
+          <a:xfrm>
+            <a:off x="8778240" y="3675888"/>
+            <a:ext cx="3291840" cy="292608"/>
+          </a:xfrm>
+          <a:prstGeom prst="rect">
+            <a:avLst/>
+          </a:prstGeom>
+          <a:noFill/>
+          <a:ln/>
+        </p:spPr>
+        <p:txBody>
+          <a:bodyPr wrap="square" lIns="0" tIns="0" rIns="0" bIns="0" rtlCol="0" anchor="ctr"/>
+          <a:lstStyle/>
+          <a:p>
+            <a:pPr indent="0" marL="0">
+              <a:buNone/>
+            </a:pPr>
+            <a:r>
+              <a:rPr lang="en-US" sz="1300" b="1" dirty="0">
+                <a:solidFill>
+                  <a:srgbClr val="B23A48"/>
+                </a:solidFill>
+                <a:latin typeface="Calibri" pitchFamily="34" charset="0"/>
+                <a:ea typeface="Calibri" pitchFamily="34" charset="-122"/>
+                <a:cs typeface="Calibri" pitchFamily="34" charset="-120"/>
+              </a:rPr>
+              <a:t>+1.6%   p=0.050</a:t>
+            </a:r>
+            <a:endParaRPr lang="en-US" sz="1300" dirty="0"/>
+          </a:p>
+        </p:txBody>
+      </p:sp>
+      <p:sp>
+        <p:nvSpPr>
+          <p:cNvPr id="20" name="Shape 18"/>
           <p:cNvSpPr/>
           <p:nvPr/>
         </p:nvSpPr>
         <p:spPr>
           <a:xfrm>
-            <a:off x="640080" y="4261104"/>
-            <a:ext cx="10881360" cy="566928"/>
+            <a:off x="640080" y="4123944"/>
+            <a:ext cx="10881360" cy="493776"/>
           </a:xfrm>
           <a:prstGeom prst="roundRect">
             <a:avLst>
-              <a:gd name="adj" fmla="val 9677"/>
+              <a:gd name="adj" fmla="val 9259"/>
             </a:avLst>
           </a:prstGeom>
           <a:solidFill>
@@ -3930,30 +4136,30 @@
       </p:sp>
       <p:sp>
         <p:nvSpPr>
-          <p:cNvPr id="18" name="Text 16"/>
-          <p:cNvSpPr txBox="1"/>
-          <p:nvPr/>
-        </p:nvSpPr>
-        <p:spPr>
-          <a:xfrm>
-            <a:off x="914400" y="4379976"/>
-            <a:ext cx="3017520" cy="329184"/>
-          </a:xfrm>
-          <a:prstGeom prst="rect">
-            <a:avLst/>
-          </a:prstGeom>
-          <a:noFill/>
-          <a:ln/>
-        </p:spPr>
-        <p:txBody>
-          <a:bodyPr wrap="square" lIns="0" tIns="0" rIns="0" bIns="0" rtlCol="0" anchor="ctr"/>
-          <a:lstStyle/>
-          <a:p>
-            <a:pPr indent="0" marL="0">
-              <a:buNone/>
-            </a:pPr>
-            <a:r>
-              <a:rPr lang="en-US" sz="1400" b="1" dirty="0">
+          <p:cNvPr id="21" name="Text 19"/>
+          <p:cNvSpPr txBox="1"/>
+          <p:nvPr/>
+        </p:nvSpPr>
+        <p:spPr>
+          <a:xfrm>
+            <a:off x="914400" y="4242816"/>
+            <a:ext cx="4023360" cy="292608"/>
+          </a:xfrm>
+          <a:prstGeom prst="rect">
+            <a:avLst/>
+          </a:prstGeom>
+          <a:noFill/>
+          <a:ln/>
+        </p:spPr>
+        <p:txBody>
+          <a:bodyPr wrap="square" lIns="0" tIns="0" rIns="0" bIns="0" rtlCol="0" anchor="ctr"/>
+          <a:lstStyle/>
+          <a:p>
+            <a:pPr indent="0" marL="0">
+              <a:buNone/>
+            </a:pPr>
+            <a:r>
+              <a:rPr lang="en-US" sz="1350" b="1" dirty="0">
                 <a:solidFill>
                   <a:srgbClr val="13233B"/>
                 </a:solidFill>
@@ -3961,85 +4167,46 @@
                 <a:ea typeface="Calibri" pitchFamily="34" charset="-122"/>
                 <a:cs typeface="Calibri" pitchFamily="34" charset="-120"/>
               </a:rPr>
-              <a:t>Mean RTT</a:t>
-            </a:r>
-            <a:endParaRPr lang="en-US" sz="1400" dirty="0"/>
-          </a:p>
-        </p:txBody>
-      </p:sp>
-      <p:sp>
-        <p:nvSpPr>
-          <p:cNvPr id="19" name="Text 17"/>
-          <p:cNvSpPr txBox="1"/>
-          <p:nvPr/>
-        </p:nvSpPr>
-        <p:spPr>
-          <a:xfrm>
-            <a:off x="4023360" y="4352544"/>
-            <a:ext cx="1371600" cy="384048"/>
-          </a:xfrm>
-          <a:prstGeom prst="rect">
-            <a:avLst/>
-          </a:prstGeom>
-          <a:noFill/>
-          <a:ln/>
-        </p:spPr>
-        <p:txBody>
-          <a:bodyPr wrap="square" lIns="0" tIns="0" rIns="0" bIns="0" rtlCol="0" anchor="ctr"/>
-          <a:lstStyle/>
-          <a:p>
-            <a:pPr indent="0" marL="0">
-              <a:buNone/>
-            </a:pPr>
-            <a:r>
-              <a:rPr lang="en-US" sz="1700" b="1" dirty="0">
-                <a:solidFill>
-                  <a:srgbClr val="B23A48"/>
-                </a:solidFill>
-                <a:latin typeface="Cambria" pitchFamily="34" charset="0"/>
-                <a:ea typeface="Cambria" pitchFamily="34" charset="-122"/>
-                <a:cs typeface="Cambria" pitchFamily="34" charset="-120"/>
-              </a:rPr>
-              <a:t>+2.7%</a:t>
-            </a:r>
-            <a:endParaRPr lang="en-US" sz="1700" dirty="0"/>
-          </a:p>
-        </p:txBody>
-      </p:sp>
-      <p:sp>
-        <p:nvSpPr>
-          <p:cNvPr id="20" name="Text 18"/>
-          <p:cNvSpPr txBox="1"/>
-          <p:nvPr/>
-        </p:nvSpPr>
-        <p:spPr>
-          <a:xfrm>
-            <a:off x="5577840" y="4398264"/>
-            <a:ext cx="5669280" cy="329184"/>
-          </a:xfrm>
-          <a:prstGeom prst="rect">
-            <a:avLst/>
-          </a:prstGeom>
-          <a:noFill/>
-          <a:ln/>
-        </p:spPr>
-        <p:txBody>
-          <a:bodyPr wrap="square" lIns="0" tIns="0" rIns="0" bIns="0" rtlCol="0" anchor="ctr"/>
-          <a:lstStyle/>
-          <a:p>
-            <a:pPr indent="0" marL="0">
-              <a:buNone/>
-            </a:pPr>
-            <a:r>
-              <a:rPr lang="en-US" sz="1300" dirty="0">
-                <a:solidFill>
-                  <a:srgbClr val="3A4A5F"/>
-                </a:solidFill>
-                <a:latin typeface="Calibri" pitchFamily="34" charset="0"/>
-                <a:ea typeface="Calibri" pitchFamily="34" charset="-122"/>
-                <a:cs typeface="Calibri" pitchFamily="34" charset="-120"/>
-              </a:rPr>
-              <a:t>significant — and in the wrong direction</a:t>
+              <a:t>Mean RTT (bulk)</a:t>
+            </a:r>
+            <a:endParaRPr lang="en-US" sz="1350" dirty="0"/>
+          </a:p>
+        </p:txBody>
+      </p:sp>
+      <p:sp>
+        <p:nvSpPr>
+          <p:cNvPr id="22" name="Text 20"/>
+          <p:cNvSpPr txBox="1"/>
+          <p:nvPr/>
+        </p:nvSpPr>
+        <p:spPr>
+          <a:xfrm>
+            <a:off x="5212080" y="4242816"/>
+            <a:ext cx="3291840" cy="292608"/>
+          </a:xfrm>
+          <a:prstGeom prst="rect">
+            <a:avLst/>
+          </a:prstGeom>
+          <a:noFill/>
+          <a:ln/>
+        </p:spPr>
+        <p:txBody>
+          <a:bodyPr wrap="square" lIns="0" tIns="0" rIns="0" bIns="0" rtlCol="0" anchor="ctr"/>
+          <a:lstStyle/>
+          <a:p>
+            <a:pPr indent="0" marL="0">
+              <a:buNone/>
+            </a:pPr>
+            <a:r>
+              <a:rPr lang="en-US" sz="1300" b="1" dirty="0">
+                <a:solidFill>
+                  <a:srgbClr val="7B8A9C"/>
+                </a:solidFill>
+                <a:latin typeface="Calibri" pitchFamily="34" charset="0"/>
+                <a:ea typeface="Calibri" pitchFamily="34" charset="-122"/>
+                <a:cs typeface="Calibri" pitchFamily="34" charset="-120"/>
+              </a:rPr>
+              <a:t>-1.4%   p=0.38</a:t>
             </a:r>
             <a:endParaRPr lang="en-US" sz="1300" dirty="0"/>
           </a:p>
@@ -4047,18 +4214,57 @@
       </p:sp>
       <p:sp>
         <p:nvSpPr>
-          <p:cNvPr id="21" name="Shape 19"/>
+          <p:cNvPr id="23" name="Text 21"/>
+          <p:cNvSpPr txBox="1"/>
+          <p:nvPr/>
+        </p:nvSpPr>
+        <p:spPr>
+          <a:xfrm>
+            <a:off x="8778240" y="4242816"/>
+            <a:ext cx="3291840" cy="292608"/>
+          </a:xfrm>
+          <a:prstGeom prst="rect">
+            <a:avLst/>
+          </a:prstGeom>
+          <a:noFill/>
+          <a:ln/>
+        </p:spPr>
+        <p:txBody>
+          <a:bodyPr wrap="square" lIns="0" tIns="0" rIns="0" bIns="0" rtlCol="0" anchor="ctr"/>
+          <a:lstStyle/>
+          <a:p>
+            <a:pPr indent="0" marL="0">
+              <a:buNone/>
+            </a:pPr>
+            <a:r>
+              <a:rPr lang="en-US" sz="1300" b="1" dirty="0">
+                <a:solidFill>
+                  <a:srgbClr val="7B8A9C"/>
+                </a:solidFill>
+                <a:latin typeface="Calibri" pitchFamily="34" charset="0"/>
+                <a:ea typeface="Calibri" pitchFamily="34" charset="-122"/>
+                <a:cs typeface="Calibri" pitchFamily="34" charset="-120"/>
+              </a:rPr>
+              <a:t>-0.5%   p=0.52</a:t>
+            </a:r>
+            <a:endParaRPr lang="en-US" sz="1300" dirty="0"/>
+          </a:p>
+        </p:txBody>
+      </p:sp>
+      <p:sp>
+        <p:nvSpPr>
+          <p:cNvPr id="24" name="Shape 22"/>
           <p:cNvSpPr/>
           <p:nvPr/>
         </p:nvSpPr>
         <p:spPr>
           <a:xfrm>
-            <a:off x="640080" y="4919472"/>
-            <a:ext cx="10881360" cy="566928"/>
+            <a:off x="640080" y="4690872"/>
+            <a:ext cx="10881360" cy="493776"/>
           </a:xfrm>
           <a:prstGeom prst="roundRect">
             <a:avLst>
-              <a:gd name="adj" fmla="val 9677"/>
+              <a:gd name="adj" fmla="val 9259"/>
             </a:avLst>
           </a:prstGeom>
           <a:solidFill>
@@ -4074,30 +4280,30 @@
       </p:sp>
       <p:sp>
         <p:nvSpPr>
-          <p:cNvPr id="22" name="Text 20"/>
-          <p:cNvSpPr txBox="1"/>
-          <p:nvPr/>
-        </p:nvSpPr>
-        <p:spPr>
-          <a:xfrm>
-            <a:off x="914400" y="5038344"/>
-            <a:ext cx="3017520" cy="329184"/>
-          </a:xfrm>
-          <a:prstGeom prst="rect">
-            <a:avLst/>
-          </a:prstGeom>
-          <a:noFill/>
-          <a:ln/>
-        </p:spPr>
-        <p:txBody>
-          <a:bodyPr wrap="square" lIns="0" tIns="0" rIns="0" bIns="0" rtlCol="0" anchor="ctr"/>
-          <a:lstStyle/>
-          <a:p>
-            <a:pPr indent="0" marL="0">
-              <a:buNone/>
-            </a:pPr>
-            <a:r>
-              <a:rPr lang="en-US" sz="1400" b="1" dirty="0">
+          <p:cNvPr id="25" name="Text 23"/>
+          <p:cNvSpPr txBox="1"/>
+          <p:nvPr/>
+        </p:nvSpPr>
+        <p:spPr>
+          <a:xfrm>
+            <a:off x="914400" y="4809744"/>
+            <a:ext cx="4023360" cy="292608"/>
+          </a:xfrm>
+          <a:prstGeom prst="rect">
+            <a:avLst/>
+          </a:prstGeom>
+          <a:noFill/>
+          <a:ln/>
+        </p:spPr>
+        <p:txBody>
+          <a:bodyPr wrap="square" lIns="0" tIns="0" rIns="0" bIns="0" rtlCol="0" anchor="ctr"/>
+          <a:lstStyle/>
+          <a:p>
+            <a:pPr indent="0" marL="0">
+              <a:buNone/>
+            </a:pPr>
+            <a:r>
+              <a:rPr lang="en-US" sz="1350" b="1" dirty="0">
                 <a:solidFill>
                   <a:srgbClr val="13233B"/>
                 </a:solidFill>
@@ -4107,83 +4313,44 @@
               </a:rPr>
               <a:t>Goodput / fairness</a:t>
             </a:r>
-            <a:endParaRPr lang="en-US" sz="1400" dirty="0"/>
-          </a:p>
-        </p:txBody>
-      </p:sp>
-      <p:sp>
-        <p:nvSpPr>
-          <p:cNvPr id="23" name="Text 21"/>
-          <p:cNvSpPr txBox="1"/>
-          <p:nvPr/>
-        </p:nvSpPr>
-        <p:spPr>
-          <a:xfrm>
-            <a:off x="4023360" y="5010912"/>
-            <a:ext cx="1371600" cy="384048"/>
-          </a:xfrm>
-          <a:prstGeom prst="rect">
-            <a:avLst/>
-          </a:prstGeom>
-          <a:noFill/>
-          <a:ln/>
-        </p:spPr>
-        <p:txBody>
-          <a:bodyPr wrap="square" lIns="0" tIns="0" rIns="0" bIns="0" rtlCol="0" anchor="ctr"/>
-          <a:lstStyle/>
-          <a:p>
-            <a:pPr indent="0" marL="0">
-              <a:buNone/>
-            </a:pPr>
-            <a:r>
-              <a:rPr lang="en-US" sz="1700" b="1" dirty="0">
-                <a:solidFill>
-                  <a:srgbClr val="2C7A5A"/>
-                </a:solidFill>
-                <a:latin typeface="Cambria" pitchFamily="34" charset="0"/>
-                <a:ea typeface="Cambria" pitchFamily="34" charset="-122"/>
-                <a:cs typeface="Cambria" pitchFamily="34" charset="-120"/>
-              </a:rPr>
-              <a:t>0%</a:t>
-            </a:r>
-            <a:endParaRPr lang="en-US" sz="1700" dirty="0"/>
-          </a:p>
-        </p:txBody>
-      </p:sp>
-      <p:sp>
-        <p:nvSpPr>
-          <p:cNvPr id="24" name="Text 22"/>
-          <p:cNvSpPr txBox="1"/>
-          <p:nvPr/>
-        </p:nvSpPr>
-        <p:spPr>
-          <a:xfrm>
-            <a:off x="5577840" y="5056632"/>
-            <a:ext cx="5669280" cy="329184"/>
-          </a:xfrm>
-          <a:prstGeom prst="rect">
-            <a:avLst/>
-          </a:prstGeom>
-          <a:noFill/>
-          <a:ln/>
-        </p:spPr>
-        <p:txBody>
-          <a:bodyPr wrap="square" lIns="0" tIns="0" rIns="0" bIns="0" rtlCol="0" anchor="ctr"/>
-          <a:lstStyle/>
-          <a:p>
-            <a:pPr indent="0" marL="0">
-              <a:buNone/>
-            </a:pPr>
-            <a:r>
-              <a:rPr lang="en-US" sz="1300" dirty="0">
-                <a:solidFill>
-                  <a:srgbClr val="3A4A5F"/>
-                </a:solidFill>
-                <a:latin typeface="Calibri" pitchFamily="34" charset="0"/>
-                <a:ea typeface="Calibri" pitchFamily="34" charset="-122"/>
-                <a:cs typeface="Calibri" pitchFamily="34" charset="-120"/>
-              </a:rPr>
-              <a:t>no cost</a:t>
+            <a:endParaRPr lang="en-US" sz="1350" dirty="0"/>
+          </a:p>
+        </p:txBody>
+      </p:sp>
+      <p:sp>
+        <p:nvSpPr>
+          <p:cNvPr id="26" name="Text 24"/>
+          <p:cNvSpPr txBox="1"/>
+          <p:nvPr/>
+        </p:nvSpPr>
+        <p:spPr>
+          <a:xfrm>
+            <a:off x="5212080" y="4809744"/>
+            <a:ext cx="3291840" cy="292608"/>
+          </a:xfrm>
+          <a:prstGeom prst="rect">
+            <a:avLst/>
+          </a:prstGeom>
+          <a:noFill/>
+          <a:ln/>
+        </p:spPr>
+        <p:txBody>
+          <a:bodyPr wrap="square" lIns="0" tIns="0" rIns="0" bIns="0" rtlCol="0" anchor="ctr"/>
+          <a:lstStyle/>
+          <a:p>
+            <a:pPr indent="0" marL="0">
+              <a:buNone/>
+            </a:pPr>
+            <a:r>
+              <a:rPr lang="en-US" sz="1300" b="1" dirty="0">
+                <a:solidFill>
+                  <a:srgbClr val="7B8A9C"/>
+                </a:solidFill>
+                <a:latin typeface="Calibri" pitchFamily="34" charset="0"/>
+                <a:ea typeface="Calibri" pitchFamily="34" charset="-122"/>
+                <a:cs typeface="Calibri" pitchFamily="34" charset="-120"/>
+              </a:rPr>
+              <a:t>unchanged</a:t>
             </a:r>
             <a:endParaRPr lang="en-US" sz="1300" dirty="0"/>
           </a:p>
@@ -4191,13 +4358,52 @@
       </p:sp>
       <p:sp>
         <p:nvSpPr>
-          <p:cNvPr id="25" name="Text 23"/>
-          <p:cNvSpPr txBox="1"/>
-          <p:nvPr/>
-        </p:nvSpPr>
-        <p:spPr>
-          <a:xfrm>
-            <a:off x="640080" y="5669280"/>
+          <p:cNvPr id="27" name="Text 25"/>
+          <p:cNvSpPr txBox="1"/>
+          <p:nvPr/>
+        </p:nvSpPr>
+        <p:spPr>
+          <a:xfrm>
+            <a:off x="8778240" y="4809744"/>
+            <a:ext cx="3291840" cy="292608"/>
+          </a:xfrm>
+          <a:prstGeom prst="rect">
+            <a:avLst/>
+          </a:prstGeom>
+          <a:noFill/>
+          <a:ln/>
+        </p:spPr>
+        <p:txBody>
+          <a:bodyPr wrap="square" lIns="0" tIns="0" rIns="0" bIns="0" rtlCol="0" anchor="ctr"/>
+          <a:lstStyle/>
+          <a:p>
+            <a:pPr indent="0" marL="0">
+              <a:buNone/>
+            </a:pPr>
+            <a:r>
+              <a:rPr lang="en-US" sz="1300" b="1" dirty="0">
+                <a:solidFill>
+                  <a:srgbClr val="7B8A9C"/>
+                </a:solidFill>
+                <a:latin typeface="Calibri" pitchFamily="34" charset="0"/>
+                <a:ea typeface="Calibri" pitchFamily="34" charset="-122"/>
+                <a:cs typeface="Calibri" pitchFamily="34" charset="-120"/>
+              </a:rPr>
+              <a:t>unchanged</a:t>
+            </a:r>
+            <a:endParaRPr lang="en-US" sz="1300" dirty="0"/>
+          </a:p>
+        </p:txBody>
+      </p:sp>
+      <p:sp>
+        <p:nvSpPr>
+          <p:cNvPr id="28" name="Text 26"/>
+          <p:cNvSpPr txBox="1"/>
+          <p:nvPr/>
+        </p:nvSpPr>
+        <p:spPr>
+          <a:xfrm>
+            <a:off x="640080" y="5349240"/>
             <a:ext cx="10881360" cy="548640"/>
           </a:xfrm>
           <a:prstGeom prst="rect">
@@ -4216,13 +4422,13 @@
             <a:r>
               <a:rPr lang="en-US" sz="1300" i="1" dirty="0">
                 <a:solidFill>
-                  <a:srgbClr val="7B8A9C"/>
-                </a:solidFill>
-                <a:latin typeface="Calibri" pitchFamily="34" charset="0"/>
-                <a:ea typeface="Calibri" pitchFamily="34" charset="-122"/>
-                <a:cs typeface="Calibri" pitchFamily="34" charset="-120"/>
-              </a:rPr>
-              <a:t>The queue under static fq_codel was already only ~7 packets. There was very little delay left to remove, and tightening target costs more drop-and-retransmit than it saves.</a:t>
+                  <a:srgbClr val="13233B"/>
+                </a:solidFill>
+                <a:latin typeface="Calibri" pitchFamily="34" charset="0"/>
+                <a:ea typeface="Calibri" pitchFamily="34" charset="-122"/>
+                <a:cs typeface="Calibri" pitchFamily="34" charset="-120"/>
+              </a:rPr>
+              <a:t>The workload designed to give the controller something to respond to is the one where it helps least. The sham condition rules out overhead, so these are its decisions.</a:t>
             </a:r>
             <a:endParaRPr lang="en-US" sz="1300" dirty="0"/>
           </a:p>
@@ -4239,6 +4445,759 @@
 <file path=ppt/slides/slide13.xml><?xml version="1.0" encoding="utf-8"?>
 <p:sld xmlns:a="http://schemas.openxmlformats.org/drawingml/2006/main" xmlns:r="http://schemas.openxmlformats.org/officeDocument/2006/relationships" xmlns:p="http://schemas.openxmlformats.org/presentationml/2006/main">
   <p:cSld name="Slide 13">
+    <p:bg>
+      <p:bgPr>
+        <a:solidFill>
+          <a:srgbClr val="FFFFFF"/>
+        </a:solidFill>
+      </p:bgPr>
+    </p:bg>
+    <p:spTree>
+      <p:nvGrpSpPr>
+        <p:cNvPr id="1" name=""/>
+        <p:cNvGrpSpPr/>
+        <p:nvPr/>
+      </p:nvGrpSpPr>
+      <p:grpSpPr>
+        <a:xfrm>
+          <a:off x="0" y="0"/>
+          <a:ext cx="0" cy="0"/>
+          <a:chOff x="0" y="0"/>
+          <a:chExt cx="0" cy="0"/>
+        </a:xfrm>
+      </p:grpSpPr>
+      <p:sp>
+        <p:nvSpPr>
+          <p:cNvPr id="2" name="Text 0"/>
+          <p:cNvSpPr txBox="1"/>
+          <p:nvPr/>
+        </p:nvSpPr>
+        <p:spPr>
+          <a:xfrm>
+            <a:off x="640080" y="411480"/>
+            <a:ext cx="10881360" cy="731520"/>
+          </a:xfrm>
+          <a:prstGeom prst="rect">
+            <a:avLst/>
+          </a:prstGeom>
+          <a:noFill/>
+          <a:ln/>
+        </p:spPr>
+        <p:txBody>
+          <a:bodyPr wrap="square" rtlCol="0" anchor="ctr"/>
+          <a:lstStyle/>
+          <a:p>
+            <a:pPr indent="0" marL="0">
+              <a:buNone/>
+            </a:pPr>
+            <a:r>
+              <a:rPr lang="en-US" sz="3200" b="1" dirty="0">
+                <a:solidFill>
+                  <a:srgbClr val="13233B"/>
+                </a:solidFill>
+                <a:latin typeface="Cambria" pitchFamily="34" charset="0"/>
+                <a:ea typeface="Cambria" pitchFamily="34" charset="-122"/>
+                <a:cs typeface="Cambria" pitchFamily="34" charset="-120"/>
+              </a:rPr>
+              <a:t>CAKE beats the adapted system</a:t>
+            </a:r>
+            <a:endParaRPr lang="en-US" sz="3200" dirty="0"/>
+          </a:p>
+        </p:txBody>
+      </p:sp>
+      <p:sp>
+        <p:nvSpPr>
+          <p:cNvPr id="3" name="Text 1"/>
+          <p:cNvSpPr txBox="1"/>
+          <p:nvPr/>
+        </p:nvSpPr>
+        <p:spPr>
+          <a:xfrm>
+            <a:off x="640080" y="1097280"/>
+            <a:ext cx="10881360" cy="365760"/>
+          </a:xfrm>
+          <a:prstGeom prst="rect">
+            <a:avLst/>
+          </a:prstGeom>
+          <a:noFill/>
+          <a:ln/>
+        </p:spPr>
+        <p:txBody>
+          <a:bodyPr wrap="square" rtlCol="0" anchor="ctr"/>
+          <a:lstStyle/>
+          <a:p>
+            <a:pPr indent="0" marL="0">
+              <a:buNone/>
+            </a:pPr>
+            <a:r>
+              <a:rPr lang="en-US" sz="1500" dirty="0">
+                <a:solidFill>
+                  <a:srgbClr val="3A4A5F"/>
+                </a:solidFill>
+                <a:latin typeface="Calibri" pitchFamily="34" charset="0"/>
+                <a:ea typeface="Calibri" pitchFamily="34" charset="-122"/>
+                <a:cs typeface="Calibri" pitchFamily="34" charset="-120"/>
+              </a:rPr>
+              <a:t>No controller. One configuration argument. Lower latency than tuned fq_codel.</a:t>
+            </a:r>
+            <a:endParaRPr lang="en-US" sz="1500" dirty="0"/>
+          </a:p>
+        </p:txBody>
+      </p:sp>
+      <p:sp>
+        <p:nvSpPr>
+          <p:cNvPr id="4" name="Text 2"/>
+          <p:cNvSpPr txBox="1"/>
+          <p:nvPr/>
+        </p:nvSpPr>
+        <p:spPr>
+          <a:xfrm>
+            <a:off x="5486400" y="1600200"/>
+            <a:ext cx="2743200" cy="274320"/>
+          </a:xfrm>
+          <a:prstGeom prst="rect">
+            <a:avLst/>
+          </a:prstGeom>
+          <a:noFill/>
+          <a:ln/>
+        </p:spPr>
+        <p:txBody>
+          <a:bodyPr wrap="square" lIns="0" tIns="0" rIns="0" bIns="0" rtlCol="0" anchor="ctr"/>
+          <a:lstStyle/>
+          <a:p>
+            <a:pPr indent="0" marL="0">
+              <a:buNone/>
+            </a:pPr>
+            <a:r>
+              <a:rPr lang="en-US" sz="1150" b="1" spc="100" kern="0" dirty="0">
+                <a:solidFill>
+                  <a:srgbClr val="7B8A9C"/>
+                </a:solidFill>
+                <a:latin typeface="Calibri" pitchFamily="34" charset="0"/>
+                <a:ea typeface="Calibri" pitchFamily="34" charset="-122"/>
+                <a:cs typeface="Calibri" pitchFamily="34" charset="-120"/>
+              </a:rPr>
+              <a:t>p95 probe RTT</a:t>
+            </a:r>
+            <a:endParaRPr lang="en-US" sz="1150" dirty="0"/>
+          </a:p>
+        </p:txBody>
+      </p:sp>
+      <p:sp>
+        <p:nvSpPr>
+          <p:cNvPr id="5" name="Text 3"/>
+          <p:cNvSpPr txBox="1"/>
+          <p:nvPr/>
+        </p:nvSpPr>
+        <p:spPr>
+          <a:xfrm>
+            <a:off x="8412480" y="1600200"/>
+            <a:ext cx="2743200" cy="274320"/>
+          </a:xfrm>
+          <a:prstGeom prst="rect">
+            <a:avLst/>
+          </a:prstGeom>
+          <a:noFill/>
+          <a:ln/>
+        </p:spPr>
+        <p:txBody>
+          <a:bodyPr wrap="square" lIns="0" tIns="0" rIns="0" bIns="0" rtlCol="0" anchor="ctr"/>
+          <a:lstStyle/>
+          <a:p>
+            <a:pPr indent="0" marL="0">
+              <a:buNone/>
+            </a:pPr>
+            <a:r>
+              <a:rPr lang="en-US" sz="1150" b="1" spc="100" kern="0" dirty="0">
+                <a:solidFill>
+                  <a:srgbClr val="7B8A9C"/>
+                </a:solidFill>
+                <a:latin typeface="Calibri" pitchFamily="34" charset="0"/>
+                <a:ea typeface="Calibri" pitchFamily="34" charset="-122"/>
+                <a:cs typeface="Calibri" pitchFamily="34" charset="-120"/>
+              </a:rPr>
+              <a:t>mean bulk RTT</a:t>
+            </a:r>
+            <a:endParaRPr lang="en-US" sz="1150" dirty="0"/>
+          </a:p>
+        </p:txBody>
+      </p:sp>
+      <p:sp>
+        <p:nvSpPr>
+          <p:cNvPr id="6" name="Shape 4"/>
+          <p:cNvSpPr/>
+          <p:nvPr/>
+        </p:nvSpPr>
+        <p:spPr>
+          <a:xfrm>
+            <a:off x="640080" y="1920240"/>
+            <a:ext cx="10881360" cy="658368"/>
+          </a:xfrm>
+          <a:prstGeom prst="roundRect">
+            <a:avLst>
+              <a:gd name="adj" fmla="val 11111"/>
+            </a:avLst>
+          </a:prstGeom>
+          <a:solidFill>
+            <a:srgbClr val="EEF4F8"/>
+          </a:solidFill>
+          <a:ln w="9525">
+            <a:solidFill>
+              <a:srgbClr val="D8E4EC"/>
+            </a:solidFill>
+            <a:prstDash val="solid"/>
+          </a:ln>
+          <a:effectLst>
+            <a:outerShdw sx="100000" sy="100000" kx="0" ky="0" algn="bl" rotWithShape="0" blurRad="50800" dist="12700" dir="5400000">
+              <a:srgbClr val="BFCEDA">
+                <a:alpha val="35000"/>
+              </a:srgbClr>
+            </a:outerShdw>
+          </a:effectLst>
+        </p:spPr>
+      </p:sp>
+      <p:sp>
+        <p:nvSpPr>
+          <p:cNvPr id="7" name="Text 5"/>
+          <p:cNvSpPr txBox="1"/>
+          <p:nvPr/>
+        </p:nvSpPr>
+        <p:spPr>
+          <a:xfrm>
+            <a:off x="960120" y="2103120"/>
+            <a:ext cx="4297680" cy="320040"/>
+          </a:xfrm>
+          <a:prstGeom prst="rect">
+            <a:avLst/>
+          </a:prstGeom>
+          <a:noFill/>
+          <a:ln/>
+        </p:spPr>
+        <p:txBody>
+          <a:bodyPr wrap="square" lIns="0" tIns="0" rIns="0" bIns="0" rtlCol="0" anchor="ctr"/>
+          <a:lstStyle/>
+          <a:p>
+            <a:pPr indent="0" marL="0">
+              <a:buNone/>
+            </a:pPr>
+            <a:r>
+              <a:rPr lang="en-US" sz="1500" dirty="0">
+                <a:solidFill>
+                  <a:srgbClr val="13233B"/>
+                </a:solidFill>
+                <a:latin typeface="Calibri" pitchFamily="34" charset="0"/>
+                <a:ea typeface="Calibri" pitchFamily="34" charset="-122"/>
+                <a:cs typeface="Calibri" pitchFamily="34" charset="-120"/>
+              </a:rPr>
+              <a:t>fq_codel (static)</a:t>
+            </a:r>
+            <a:endParaRPr lang="en-US" sz="1500" dirty="0"/>
+          </a:p>
+        </p:txBody>
+      </p:sp>
+      <p:sp>
+        <p:nvSpPr>
+          <p:cNvPr id="8" name="Text 6"/>
+          <p:cNvSpPr txBox="1"/>
+          <p:nvPr/>
+        </p:nvSpPr>
+        <p:spPr>
+          <a:xfrm>
+            <a:off x="5486400" y="2057400"/>
+            <a:ext cx="2743200" cy="384048"/>
+          </a:xfrm>
+          <a:prstGeom prst="rect">
+            <a:avLst/>
+          </a:prstGeom>
+          <a:noFill/>
+          <a:ln/>
+        </p:spPr>
+        <p:txBody>
+          <a:bodyPr wrap="square" lIns="0" tIns="0" rIns="0" bIns="0" rtlCol="0" anchor="ctr"/>
+          <a:lstStyle/>
+          <a:p>
+            <a:pPr indent="0" marL="0">
+              <a:buNone/>
+            </a:pPr>
+            <a:r>
+              <a:rPr lang="en-US" sz="1900" b="1" dirty="0">
+                <a:solidFill>
+                  <a:srgbClr val="7B8A9C"/>
+                </a:solidFill>
+                <a:latin typeface="Cambria" pitchFamily="34" charset="0"/>
+                <a:ea typeface="Cambria" pitchFamily="34" charset="-122"/>
+                <a:cs typeface="Cambria" pitchFamily="34" charset="-120"/>
+              </a:rPr>
+              <a:t>24.6 ms</a:t>
+            </a:r>
+            <a:endParaRPr lang="en-US" sz="1900" dirty="0"/>
+          </a:p>
+        </p:txBody>
+      </p:sp>
+      <p:sp>
+        <p:nvSpPr>
+          <p:cNvPr id="9" name="Text 7"/>
+          <p:cNvSpPr txBox="1"/>
+          <p:nvPr/>
+        </p:nvSpPr>
+        <p:spPr>
+          <a:xfrm>
+            <a:off x="8412480" y="2057400"/>
+            <a:ext cx="2743200" cy="384048"/>
+          </a:xfrm>
+          <a:prstGeom prst="rect">
+            <a:avLst/>
+          </a:prstGeom>
+          <a:noFill/>
+          <a:ln/>
+        </p:spPr>
+        <p:txBody>
+          <a:bodyPr wrap="square" lIns="0" tIns="0" rIns="0" bIns="0" rtlCol="0" anchor="ctr"/>
+          <a:lstStyle/>
+          <a:p>
+            <a:pPr indent="0" marL="0">
+              <a:buNone/>
+            </a:pPr>
+            <a:r>
+              <a:rPr lang="en-US" sz="1900" b="1" dirty="0">
+                <a:solidFill>
+                  <a:srgbClr val="7B8A9C"/>
+                </a:solidFill>
+                <a:latin typeface="Cambria" pitchFamily="34" charset="0"/>
+                <a:ea typeface="Cambria" pitchFamily="34" charset="-122"/>
+                <a:cs typeface="Cambria" pitchFamily="34" charset="-120"/>
+              </a:rPr>
+              <a:t>36.4 ms</a:t>
+            </a:r>
+            <a:endParaRPr lang="en-US" sz="1900" dirty="0"/>
+          </a:p>
+        </p:txBody>
+      </p:sp>
+      <p:sp>
+        <p:nvSpPr>
+          <p:cNvPr id="10" name="Shape 8"/>
+          <p:cNvSpPr/>
+          <p:nvPr/>
+        </p:nvSpPr>
+        <p:spPr>
+          <a:xfrm>
+            <a:off x="640080" y="2697480"/>
+            <a:ext cx="10881360" cy="658368"/>
+          </a:xfrm>
+          <a:prstGeom prst="roundRect">
+            <a:avLst>
+              <a:gd name="adj" fmla="val 11111"/>
+            </a:avLst>
+          </a:prstGeom>
+          <a:solidFill>
+            <a:srgbClr val="EEF4F8"/>
+          </a:solidFill>
+          <a:ln w="9525">
+            <a:solidFill>
+              <a:srgbClr val="D8E4EC"/>
+            </a:solidFill>
+            <a:prstDash val="solid"/>
+          </a:ln>
+          <a:effectLst>
+            <a:outerShdw sx="100000" sy="100000" kx="0" ky="0" algn="bl" rotWithShape="0" blurRad="50800" dist="12700" dir="5400000">
+              <a:srgbClr val="BFCEDA">
+                <a:alpha val="35000"/>
+              </a:srgbClr>
+            </a:outerShdw>
+          </a:effectLst>
+        </p:spPr>
+      </p:sp>
+      <p:sp>
+        <p:nvSpPr>
+          <p:cNvPr id="11" name="Text 9"/>
+          <p:cNvSpPr txBox="1"/>
+          <p:nvPr/>
+        </p:nvSpPr>
+        <p:spPr>
+          <a:xfrm>
+            <a:off x="960120" y="2880360"/>
+            <a:ext cx="4297680" cy="320040"/>
+          </a:xfrm>
+          <a:prstGeom prst="rect">
+            <a:avLst/>
+          </a:prstGeom>
+          <a:noFill/>
+          <a:ln/>
+        </p:spPr>
+        <p:txBody>
+          <a:bodyPr wrap="square" lIns="0" tIns="0" rIns="0" bIns="0" rtlCol="0" anchor="ctr"/>
+          <a:lstStyle/>
+          <a:p>
+            <a:pPr indent="0" marL="0">
+              <a:buNone/>
+            </a:pPr>
+            <a:r>
+              <a:rPr lang="en-US" sz="1500" dirty="0">
+                <a:solidFill>
+                  <a:srgbClr val="13233B"/>
+                </a:solidFill>
+                <a:latin typeface="Calibri" pitchFamily="34" charset="0"/>
+                <a:ea typeface="Calibri" pitchFamily="34" charset="-122"/>
+                <a:cs typeface="Calibri" pitchFamily="34" charset="-120"/>
+              </a:rPr>
+              <a:t>fq_codel + ACAPE</a:t>
+            </a:r>
+            <a:endParaRPr lang="en-US" sz="1500" dirty="0"/>
+          </a:p>
+        </p:txBody>
+      </p:sp>
+      <p:sp>
+        <p:nvSpPr>
+          <p:cNvPr id="12" name="Text 10"/>
+          <p:cNvSpPr txBox="1"/>
+          <p:nvPr/>
+        </p:nvSpPr>
+        <p:spPr>
+          <a:xfrm>
+            <a:off x="5486400" y="2834640"/>
+            <a:ext cx="2743200" cy="384048"/>
+          </a:xfrm>
+          <a:prstGeom prst="rect">
+            <a:avLst/>
+          </a:prstGeom>
+          <a:noFill/>
+          <a:ln/>
+        </p:spPr>
+        <p:txBody>
+          <a:bodyPr wrap="square" lIns="0" tIns="0" rIns="0" bIns="0" rtlCol="0" anchor="ctr"/>
+          <a:lstStyle/>
+          <a:p>
+            <a:pPr indent="0" marL="0">
+              <a:buNone/>
+            </a:pPr>
+            <a:r>
+              <a:rPr lang="en-US" sz="1900" b="1" dirty="0">
+                <a:solidFill>
+                  <a:srgbClr val="1C7293"/>
+                </a:solidFill>
+                <a:latin typeface="Cambria" pitchFamily="34" charset="0"/>
+                <a:ea typeface="Cambria" pitchFamily="34" charset="-122"/>
+                <a:cs typeface="Cambria" pitchFamily="34" charset="-120"/>
+              </a:rPr>
+              <a:t>24.4 ms</a:t>
+            </a:r>
+            <a:endParaRPr lang="en-US" sz="1900" dirty="0"/>
+          </a:p>
+        </p:txBody>
+      </p:sp>
+      <p:sp>
+        <p:nvSpPr>
+          <p:cNvPr id="13" name="Text 11"/>
+          <p:cNvSpPr txBox="1"/>
+          <p:nvPr/>
+        </p:nvSpPr>
+        <p:spPr>
+          <a:xfrm>
+            <a:off x="8412480" y="2834640"/>
+            <a:ext cx="2743200" cy="384048"/>
+          </a:xfrm>
+          <a:prstGeom prst="rect">
+            <a:avLst/>
+          </a:prstGeom>
+          <a:noFill/>
+          <a:ln/>
+        </p:spPr>
+        <p:txBody>
+          <a:bodyPr wrap="square" lIns="0" tIns="0" rIns="0" bIns="0" rtlCol="0" anchor="ctr"/>
+          <a:lstStyle/>
+          <a:p>
+            <a:pPr indent="0" marL="0">
+              <a:buNone/>
+            </a:pPr>
+            <a:r>
+              <a:rPr lang="en-US" sz="1900" b="1" dirty="0">
+                <a:solidFill>
+                  <a:srgbClr val="1C7293"/>
+                </a:solidFill>
+                <a:latin typeface="Cambria" pitchFamily="34" charset="0"/>
+                <a:ea typeface="Cambria" pitchFamily="34" charset="-122"/>
+                <a:cs typeface="Cambria" pitchFamily="34" charset="-120"/>
+              </a:rPr>
+              <a:t>35.9 ms</a:t>
+            </a:r>
+            <a:endParaRPr lang="en-US" sz="1900" dirty="0"/>
+          </a:p>
+        </p:txBody>
+      </p:sp>
+      <p:sp>
+        <p:nvSpPr>
+          <p:cNvPr id="14" name="Shape 12"/>
+          <p:cNvSpPr/>
+          <p:nvPr/>
+        </p:nvSpPr>
+        <p:spPr>
+          <a:xfrm>
+            <a:off x="640080" y="3474720"/>
+            <a:ext cx="10881360" cy="658368"/>
+          </a:xfrm>
+          <a:prstGeom prst="roundRect">
+            <a:avLst>
+              <a:gd name="adj" fmla="val 11111"/>
+            </a:avLst>
+          </a:prstGeom>
+          <a:solidFill>
+            <a:srgbClr val="EAF4EE"/>
+          </a:solidFill>
+          <a:ln w="9525">
+            <a:solidFill>
+              <a:srgbClr val="D8E4EC"/>
+            </a:solidFill>
+            <a:prstDash val="solid"/>
+          </a:ln>
+          <a:effectLst>
+            <a:outerShdw sx="100000" sy="100000" kx="0" ky="0" algn="bl" rotWithShape="0" blurRad="50800" dist="12700" dir="5400000">
+              <a:srgbClr val="BFCEDA">
+                <a:alpha val="35000"/>
+              </a:srgbClr>
+            </a:outerShdw>
+          </a:effectLst>
+        </p:spPr>
+      </p:sp>
+      <p:sp>
+        <p:nvSpPr>
+          <p:cNvPr id="15" name="Text 13"/>
+          <p:cNvSpPr txBox="1"/>
+          <p:nvPr/>
+        </p:nvSpPr>
+        <p:spPr>
+          <a:xfrm>
+            <a:off x="960120" y="3657600"/>
+            <a:ext cx="4297680" cy="320040"/>
+          </a:xfrm>
+          <a:prstGeom prst="rect">
+            <a:avLst/>
+          </a:prstGeom>
+          <a:noFill/>
+          <a:ln/>
+        </p:spPr>
+        <p:txBody>
+          <a:bodyPr wrap="square" lIns="0" tIns="0" rIns="0" bIns="0" rtlCol="0" anchor="ctr"/>
+          <a:lstStyle/>
+          <a:p>
+            <a:pPr indent="0" marL="0">
+              <a:buNone/>
+            </a:pPr>
+            <a:r>
+              <a:rPr lang="en-US" sz="1500" b="1" dirty="0">
+                <a:solidFill>
+                  <a:srgbClr val="13233B"/>
+                </a:solidFill>
+                <a:latin typeface="Calibri" pitchFamily="34" charset="0"/>
+                <a:ea typeface="Calibri" pitchFamily="34" charset="-122"/>
+                <a:cs typeface="Calibri" pitchFamily="34" charset="-120"/>
+              </a:rPr>
+              <a:t>CAKE</a:t>
+            </a:r>
+            <a:endParaRPr lang="en-US" sz="1500" dirty="0"/>
+          </a:p>
+        </p:txBody>
+      </p:sp>
+      <p:sp>
+        <p:nvSpPr>
+          <p:cNvPr id="16" name="Text 14"/>
+          <p:cNvSpPr txBox="1"/>
+          <p:nvPr/>
+        </p:nvSpPr>
+        <p:spPr>
+          <a:xfrm>
+            <a:off x="5486400" y="3611880"/>
+            <a:ext cx="2743200" cy="384048"/>
+          </a:xfrm>
+          <a:prstGeom prst="rect">
+            <a:avLst/>
+          </a:prstGeom>
+          <a:noFill/>
+          <a:ln/>
+        </p:spPr>
+        <p:txBody>
+          <a:bodyPr wrap="square" lIns="0" tIns="0" rIns="0" bIns="0" rtlCol="0" anchor="ctr"/>
+          <a:lstStyle/>
+          <a:p>
+            <a:pPr indent="0" marL="0">
+              <a:buNone/>
+            </a:pPr>
+            <a:r>
+              <a:rPr lang="en-US" sz="1900" b="1" dirty="0">
+                <a:solidFill>
+                  <a:srgbClr val="2C7A5A"/>
+                </a:solidFill>
+                <a:latin typeface="Cambria" pitchFamily="34" charset="0"/>
+                <a:ea typeface="Cambria" pitchFamily="34" charset="-122"/>
+                <a:cs typeface="Cambria" pitchFamily="34" charset="-120"/>
+              </a:rPr>
+              <a:t>22.9 ms</a:t>
+            </a:r>
+            <a:endParaRPr lang="en-US" sz="1900" dirty="0"/>
+          </a:p>
+        </p:txBody>
+      </p:sp>
+      <p:sp>
+        <p:nvSpPr>
+          <p:cNvPr id="17" name="Text 15"/>
+          <p:cNvSpPr txBox="1"/>
+          <p:nvPr/>
+        </p:nvSpPr>
+        <p:spPr>
+          <a:xfrm>
+            <a:off x="8412480" y="3611880"/>
+            <a:ext cx="2743200" cy="384048"/>
+          </a:xfrm>
+          <a:prstGeom prst="rect">
+            <a:avLst/>
+          </a:prstGeom>
+          <a:noFill/>
+          <a:ln/>
+        </p:spPr>
+        <p:txBody>
+          <a:bodyPr wrap="square" lIns="0" tIns="0" rIns="0" bIns="0" rtlCol="0" anchor="ctr"/>
+          <a:lstStyle/>
+          <a:p>
+            <a:pPr indent="0" marL="0">
+              <a:buNone/>
+            </a:pPr>
+            <a:r>
+              <a:rPr lang="en-US" sz="1900" b="1" dirty="0">
+                <a:solidFill>
+                  <a:srgbClr val="2C7A5A"/>
+                </a:solidFill>
+                <a:latin typeface="Cambria" pitchFamily="34" charset="0"/>
+                <a:ea typeface="Cambria" pitchFamily="34" charset="-122"/>
+                <a:cs typeface="Cambria" pitchFamily="34" charset="-120"/>
+              </a:rPr>
+              <a:t>33.6 ms</a:t>
+            </a:r>
+            <a:endParaRPr lang="en-US" sz="1900" dirty="0"/>
+          </a:p>
+        </p:txBody>
+      </p:sp>
+      <p:sp>
+        <p:nvSpPr>
+          <p:cNvPr id="18" name="Shape 16"/>
+          <p:cNvSpPr/>
+          <p:nvPr/>
+        </p:nvSpPr>
+        <p:spPr>
+          <a:xfrm>
+            <a:off x="640080" y="4343400"/>
+            <a:ext cx="10881360" cy="1234440"/>
+          </a:xfrm>
+          <a:prstGeom prst="roundRect">
+            <a:avLst>
+              <a:gd name="adj" fmla="val 5926"/>
+            </a:avLst>
+          </a:prstGeom>
+          <a:solidFill>
+            <a:srgbClr val="E8F1F6"/>
+          </a:solidFill>
+          <a:ln w="9525">
+            <a:solidFill>
+              <a:srgbClr val="D8E4EC"/>
+            </a:solidFill>
+            <a:prstDash val="solid"/>
+          </a:ln>
+          <a:effectLst>
+            <a:outerShdw sx="100000" sy="100000" kx="0" ky="0" algn="bl" rotWithShape="0" blurRad="50800" dist="12700" dir="5400000">
+              <a:srgbClr val="BFCEDA">
+                <a:alpha val="35000"/>
+              </a:srgbClr>
+            </a:outerShdw>
+          </a:effectLst>
+        </p:spPr>
+      </p:sp>
+      <p:sp>
+        <p:nvSpPr>
+          <p:cNvPr id="19" name="Text 17"/>
+          <p:cNvSpPr txBox="1"/>
+          <p:nvPr/>
+        </p:nvSpPr>
+        <p:spPr>
+          <a:xfrm>
+            <a:off x="960120" y="4526280"/>
+            <a:ext cx="10241280" cy="365760"/>
+          </a:xfrm>
+          <a:prstGeom prst="rect">
+            <a:avLst/>
+          </a:prstGeom>
+          <a:noFill/>
+          <a:ln/>
+        </p:spPr>
+        <p:txBody>
+          <a:bodyPr wrap="square" lIns="0" tIns="0" rIns="0" bIns="0" rtlCol="0" anchor="ctr"/>
+          <a:lstStyle/>
+          <a:p>
+            <a:pPr indent="0" marL="0">
+              <a:buNone/>
+            </a:pPr>
+            <a:r>
+              <a:rPr lang="en-US" sz="1600" b="1" dirty="0">
+                <a:solidFill>
+                  <a:srgbClr val="065A82"/>
+                </a:solidFill>
+                <a:latin typeface="Calibri" pitchFamily="34" charset="0"/>
+                <a:ea typeface="Calibri" pitchFamily="34" charset="-122"/>
+                <a:cs typeface="Calibri" pitchFamily="34" charset="-120"/>
+              </a:rPr>
+              <a:t>CAKE beats the adapted system by more than the adaptation beats the defaults  (p &lt; 0.001).</a:t>
+            </a:r>
+            <a:endParaRPr lang="en-US" sz="1600" dirty="0"/>
+          </a:p>
+        </p:txBody>
+      </p:sp>
+      <p:sp>
+        <p:nvSpPr>
+          <p:cNvPr id="20" name="Text 18"/>
+          <p:cNvSpPr txBox="1"/>
+          <p:nvPr/>
+        </p:nvSpPr>
+        <p:spPr>
+          <a:xfrm>
+            <a:off x="960120" y="4892040"/>
+            <a:ext cx="10241280" cy="594360"/>
+          </a:xfrm>
+          <a:prstGeom prst="rect">
+            <a:avLst/>
+          </a:prstGeom>
+          <a:noFill/>
+          <a:ln/>
+        </p:spPr>
+        <p:txBody>
+          <a:bodyPr wrap="square" lIns="0" tIns="0" rIns="0" bIns="0" rtlCol="0" anchor="ctr"/>
+          <a:lstStyle/>
+          <a:p>
+            <a:pPr indent="0" marL="0">
+              <a:buNone/>
+            </a:pPr>
+            <a:r>
+              <a:rPr lang="en-US" sz="1300" dirty="0">
+                <a:solidFill>
+                  <a:srgbClr val="3A4A5F"/>
+                </a:solidFill>
+                <a:latin typeface="Calibri" pitchFamily="34" charset="0"/>
+                <a:ea typeface="Calibri" pitchFamily="34" charset="-122"/>
+                <a:cs typeface="Calibri" pitchFamily="34" charset="-120"/>
+              </a:rPr>
+              <a:t>For a practitioner wanting lower latency on this class of link, changing queue discipline is a larger and far simpler win than tuning fq_codel's parameters. We report this because it is the most useful thing a reader can take away.</a:t>
+            </a:r>
+            <a:endParaRPr lang="en-US" sz="1300" dirty="0"/>
+          </a:p>
+        </p:txBody>
+      </p:sp>
+    </p:spTree>
+  </p:cSld>
+  <p:clrMapOvr>
+    <a:masterClrMapping/>
+  </p:clrMapOvr>
+</p:sld>
+</file>
+
+<file path=ppt/slides/slide14.xml><?xml version="1.0" encoding="utf-8"?>
+<p:sld xmlns:a="http://schemas.openxmlformats.org/drawingml/2006/main" xmlns:r="http://schemas.openxmlformats.org/officeDocument/2006/relationships" xmlns:p="http://schemas.openxmlformats.org/presentationml/2006/main">
+  <p:cSld name="Slide 14">
     <p:bg>
       <p:bgPr>
         <a:solidFill>
@@ -4374,1348 +5333,6 @@
               <a:t>Seven classes of silent failure. Each produced results that were confident, internally consistent, and wrong.</a:t>
             </a:r>
             <a:endParaRPr lang="en-US" sz="1600" dirty="0"/>
-          </a:p>
-        </p:txBody>
-      </p:sp>
-    </p:spTree>
-  </p:cSld>
-  <p:clrMapOvr>
-    <a:masterClrMapping/>
-  </p:clrMapOvr>
-</p:sld>
-</file>
-
-<file path=ppt/slides/slide14.xml><?xml version="1.0" encoding="utf-8"?>
-<p:sld xmlns:a="http://schemas.openxmlformats.org/drawingml/2006/main" xmlns:r="http://schemas.openxmlformats.org/officeDocument/2006/relationships" xmlns:p="http://schemas.openxmlformats.org/presentationml/2006/main">
-  <p:cSld name="Slide 14">
-    <p:bg>
-      <p:bgPr>
-        <a:solidFill>
-          <a:srgbClr val="FFFFFF"/>
-        </a:solidFill>
-      </p:bgPr>
-    </p:bg>
-    <p:spTree>
-      <p:nvGrpSpPr>
-        <p:cNvPr id="1" name=""/>
-        <p:cNvGrpSpPr/>
-        <p:nvPr/>
-      </p:nvGrpSpPr>
-      <p:grpSpPr>
-        <a:xfrm>
-          <a:off x="0" y="0"/>
-          <a:ext cx="0" cy="0"/>
-          <a:chOff x="0" y="0"/>
-          <a:chExt cx="0" cy="0"/>
-        </a:xfrm>
-      </p:grpSpPr>
-      <p:sp>
-        <p:nvSpPr>
-          <p:cNvPr id="2" name="Text 0"/>
-          <p:cNvSpPr txBox="1"/>
-          <p:nvPr/>
-        </p:nvSpPr>
-        <p:spPr>
-          <a:xfrm>
-            <a:off x="640080" y="411480"/>
-            <a:ext cx="10881360" cy="731520"/>
-          </a:xfrm>
-          <a:prstGeom prst="rect">
-            <a:avLst/>
-          </a:prstGeom>
-          <a:noFill/>
-          <a:ln/>
-        </p:spPr>
-        <p:txBody>
-          <a:bodyPr wrap="square" rtlCol="0" anchor="ctr"/>
-          <a:lstStyle/>
-          <a:p>
-            <a:pPr indent="0" marL="0">
-              <a:buNone/>
-            </a:pPr>
-            <a:r>
-              <a:rPr lang="en-US" sz="3200" b="1" dirty="0">
-                <a:solidFill>
-                  <a:srgbClr val="13233B"/>
-                </a:solidFill>
-                <a:latin typeface="Cambria" pitchFamily="34" charset="0"/>
-                <a:ea typeface="Cambria" pitchFamily="34" charset="-122"/>
-                <a:cs typeface="Cambria" pitchFamily="34" charset="-120"/>
-              </a:rPr>
-              <a:t>The seven defects</a:t>
-            </a:r>
-            <a:endParaRPr lang="en-US" sz="3200" dirty="0"/>
-          </a:p>
-        </p:txBody>
-      </p:sp>
-      <p:sp>
-        <p:nvSpPr>
-          <p:cNvPr id="3" name="Shape 1"/>
-          <p:cNvSpPr/>
-          <p:nvPr/>
-        </p:nvSpPr>
-        <p:spPr>
-          <a:xfrm>
-            <a:off x="640080" y="1143000"/>
-            <a:ext cx="5349240" cy="932688"/>
-          </a:xfrm>
-          <a:prstGeom prst="roundRect">
-            <a:avLst>
-              <a:gd name="adj" fmla="val 7843"/>
-            </a:avLst>
-          </a:prstGeom>
-          <a:solidFill>
-            <a:srgbClr val="EEF4F8"/>
-          </a:solidFill>
-          <a:ln w="9525">
-            <a:solidFill>
-              <a:srgbClr val="D8E4EC"/>
-            </a:solidFill>
-            <a:prstDash val="solid"/>
-          </a:ln>
-          <a:effectLst>
-            <a:outerShdw sx="100000" sy="100000" kx="0" ky="0" algn="bl" rotWithShape="0" blurRad="50800" dist="12700" dir="5400000">
-              <a:srgbClr val="BFCEDA">
-                <a:alpha val="35000"/>
-              </a:srgbClr>
-            </a:outerShdw>
-          </a:effectLst>
-        </p:spPr>
-      </p:sp>
-      <p:sp>
-        <p:nvSpPr>
-          <p:cNvPr id="4" name="Shape 2"/>
-          <p:cNvSpPr/>
-          <p:nvPr/>
-        </p:nvSpPr>
-        <p:spPr>
-          <a:xfrm>
-            <a:off x="868680" y="1389888"/>
-            <a:ext cx="420624" cy="420624"/>
-          </a:xfrm>
-          <a:prstGeom prst="ellipse">
-            <a:avLst/>
-          </a:prstGeom>
-          <a:solidFill>
-            <a:srgbClr val="065A82"/>
-          </a:solidFill>
-          <a:ln w="12700">
-            <a:solidFill>
-              <a:srgbClr val="333333"/>
-            </a:solidFill>
-            <a:prstDash val="solid"/>
-          </a:ln>
-        </p:spPr>
-      </p:sp>
-      <p:sp>
-        <p:nvSpPr>
-          <p:cNvPr id="5" name="Text 3"/>
-          <p:cNvSpPr txBox="1"/>
-          <p:nvPr/>
-        </p:nvSpPr>
-        <p:spPr>
-          <a:xfrm>
-            <a:off x="868680" y="1389888"/>
-            <a:ext cx="420624" cy="420624"/>
-          </a:xfrm>
-          <a:prstGeom prst="rect">
-            <a:avLst/>
-          </a:prstGeom>
-          <a:noFill/>
-          <a:ln/>
-        </p:spPr>
-        <p:txBody>
-          <a:bodyPr wrap="square" lIns="0" tIns="0" rIns="0" bIns="0" rtlCol="0" anchor="ctr"/>
-          <a:lstStyle/>
-          <a:p>
-            <a:pPr algn="ctr" indent="0" marL="0">
-              <a:buNone/>
-            </a:pPr>
-            <a:r>
-              <a:rPr lang="en-US" sz="1300" b="1" dirty="0">
-                <a:solidFill>
-                  <a:srgbClr val="FFFFFF"/>
-                </a:solidFill>
-                <a:latin typeface="Calibri" pitchFamily="34" charset="0"/>
-                <a:ea typeface="Calibri" pitchFamily="34" charset="-122"/>
-                <a:cs typeface="Calibri" pitchFamily="34" charset="-120"/>
-              </a:rPr>
-              <a:t>1</a:t>
-            </a:r>
-            <a:endParaRPr lang="en-US" sz="1300" dirty="0"/>
-          </a:p>
-        </p:txBody>
-      </p:sp>
-      <p:sp>
-        <p:nvSpPr>
-          <p:cNvPr id="6" name="Text 4"/>
-          <p:cNvSpPr txBox="1"/>
-          <p:nvPr/>
-        </p:nvSpPr>
-        <p:spPr>
-          <a:xfrm>
-            <a:off x="1417320" y="1234440"/>
-            <a:ext cx="4434840" cy="301752"/>
-          </a:xfrm>
-          <a:prstGeom prst="rect">
-            <a:avLst/>
-          </a:prstGeom>
-          <a:noFill/>
-          <a:ln/>
-        </p:spPr>
-        <p:txBody>
-          <a:bodyPr wrap="square" lIns="0" tIns="0" rIns="0" bIns="0" rtlCol="0" anchor="ctr"/>
-          <a:lstStyle/>
-          <a:p>
-            <a:pPr indent="0" marL="0">
-              <a:buNone/>
-            </a:pPr>
-            <a:r>
-              <a:rPr lang="en-US" sz="1400" b="1" dirty="0">
-                <a:solidFill>
-                  <a:srgbClr val="13233B"/>
-                </a:solidFill>
-                <a:latin typeface="Calibri" pitchFamily="34" charset="0"/>
-                <a:ea typeface="Calibri" pitchFamily="34" charset="-122"/>
-                <a:cs typeface="Calibri" pitchFamily="34" charset="-120"/>
-              </a:rPr>
-              <a:t>Loopback traffic</a:t>
-            </a:r>
-            <a:endParaRPr lang="en-US" sz="1400" dirty="0"/>
-          </a:p>
-        </p:txBody>
-      </p:sp>
-      <p:sp>
-        <p:nvSpPr>
-          <p:cNvPr id="7" name="Text 5"/>
-          <p:cNvSpPr txBox="1"/>
-          <p:nvPr/>
-        </p:nvSpPr>
-        <p:spPr>
-          <a:xfrm>
-            <a:off x="1417320" y="1545336"/>
-            <a:ext cx="4434840" cy="475488"/>
-          </a:xfrm>
-          <a:prstGeom prst="rect">
-            <a:avLst/>
-          </a:prstGeom>
-          <a:noFill/>
-          <a:ln/>
-        </p:spPr>
-        <p:txBody>
-          <a:bodyPr wrap="square" lIns="0" tIns="0" rIns="0" bIns="0" rtlCol="0" anchor="ctr"/>
-          <a:lstStyle/>
-          <a:p>
-            <a:pPr indent="0" marL="0">
-              <a:buNone/>
-            </a:pPr>
-            <a:r>
-              <a:rPr lang="en-US" sz="1150" dirty="0">
-                <a:solidFill>
-                  <a:srgbClr val="3A4A5F"/>
-                </a:solidFill>
-                <a:latin typeface="Calibri" pitchFamily="34" charset="0"/>
-                <a:ea typeface="Calibri" pitchFamily="34" charset="-122"/>
-                <a:cs typeface="Calibri" pitchFamily="34" charset="-120"/>
-              </a:rPr>
-              <a:t>Parts 1–3 ran iperf3 to 127.0.0.1 at 93–219 Gbit/s. No qdisc was ever in the path.</a:t>
-            </a:r>
-            <a:endParaRPr lang="en-US" sz="1150" dirty="0"/>
-          </a:p>
-        </p:txBody>
-      </p:sp>
-      <p:sp>
-        <p:nvSpPr>
-          <p:cNvPr id="8" name="Shape 6"/>
-          <p:cNvSpPr/>
-          <p:nvPr/>
-        </p:nvSpPr>
-        <p:spPr>
-          <a:xfrm>
-            <a:off x="6217920" y="1143000"/>
-            <a:ext cx="5349240" cy="932688"/>
-          </a:xfrm>
-          <a:prstGeom prst="roundRect">
-            <a:avLst>
-              <a:gd name="adj" fmla="val 7843"/>
-            </a:avLst>
-          </a:prstGeom>
-          <a:solidFill>
-            <a:srgbClr val="EEF4F8"/>
-          </a:solidFill>
-          <a:ln w="9525">
-            <a:solidFill>
-              <a:srgbClr val="D8E4EC"/>
-            </a:solidFill>
-            <a:prstDash val="solid"/>
-          </a:ln>
-          <a:effectLst>
-            <a:outerShdw sx="100000" sy="100000" kx="0" ky="0" algn="bl" rotWithShape="0" blurRad="50800" dist="12700" dir="5400000">
-              <a:srgbClr val="BFCEDA">
-                <a:alpha val="35000"/>
-              </a:srgbClr>
-            </a:outerShdw>
-          </a:effectLst>
-        </p:spPr>
-      </p:sp>
-      <p:sp>
-        <p:nvSpPr>
-          <p:cNvPr id="9" name="Shape 7"/>
-          <p:cNvSpPr/>
-          <p:nvPr/>
-        </p:nvSpPr>
-        <p:spPr>
-          <a:xfrm>
-            <a:off x="6446520" y="1389888"/>
-            <a:ext cx="420624" cy="420624"/>
-          </a:xfrm>
-          <a:prstGeom prst="ellipse">
-            <a:avLst/>
-          </a:prstGeom>
-          <a:solidFill>
-            <a:srgbClr val="065A82"/>
-          </a:solidFill>
-          <a:ln w="12700">
-            <a:solidFill>
-              <a:srgbClr val="333333"/>
-            </a:solidFill>
-            <a:prstDash val="solid"/>
-          </a:ln>
-        </p:spPr>
-      </p:sp>
-      <p:sp>
-        <p:nvSpPr>
-          <p:cNvPr id="10" name="Text 8"/>
-          <p:cNvSpPr txBox="1"/>
-          <p:nvPr/>
-        </p:nvSpPr>
-        <p:spPr>
-          <a:xfrm>
-            <a:off x="6446520" y="1389888"/>
-            <a:ext cx="420624" cy="420624"/>
-          </a:xfrm>
-          <a:prstGeom prst="rect">
-            <a:avLst/>
-          </a:prstGeom>
-          <a:noFill/>
-          <a:ln/>
-        </p:spPr>
-        <p:txBody>
-          <a:bodyPr wrap="square" lIns="0" tIns="0" rIns="0" bIns="0" rtlCol="0" anchor="ctr"/>
-          <a:lstStyle/>
-          <a:p>
-            <a:pPr algn="ctr" indent="0" marL="0">
-              <a:buNone/>
-            </a:pPr>
-            <a:r>
-              <a:rPr lang="en-US" sz="1300" b="1" dirty="0">
-                <a:solidFill>
-                  <a:srgbClr val="FFFFFF"/>
-                </a:solidFill>
-                <a:latin typeface="Calibri" pitchFamily="34" charset="0"/>
-                <a:ea typeface="Calibri" pitchFamily="34" charset="-122"/>
-                <a:cs typeface="Calibri" pitchFamily="34" charset="-120"/>
-              </a:rPr>
-              <a:t>2</a:t>
-            </a:r>
-            <a:endParaRPr lang="en-US" sz="1300" dirty="0"/>
-          </a:p>
-        </p:txBody>
-      </p:sp>
-      <p:sp>
-        <p:nvSpPr>
-          <p:cNvPr id="11" name="Text 9"/>
-          <p:cNvSpPr txBox="1"/>
-          <p:nvPr/>
-        </p:nvSpPr>
-        <p:spPr>
-          <a:xfrm>
-            <a:off x="6995160" y="1234440"/>
-            <a:ext cx="4434840" cy="301752"/>
-          </a:xfrm>
-          <a:prstGeom prst="rect">
-            <a:avLst/>
-          </a:prstGeom>
-          <a:noFill/>
-          <a:ln/>
-        </p:spPr>
-        <p:txBody>
-          <a:bodyPr wrap="square" lIns="0" tIns="0" rIns="0" bIns="0" rtlCol="0" anchor="ctr"/>
-          <a:lstStyle/>
-          <a:p>
-            <a:pPr indent="0" marL="0">
-              <a:buNone/>
-            </a:pPr>
-            <a:r>
-              <a:rPr lang="en-US" sz="1400" b="1" dirty="0">
-                <a:solidFill>
-                  <a:srgbClr val="13233B"/>
-                </a:solidFill>
-                <a:latin typeface="Calibri" pitchFamily="34" charset="0"/>
-                <a:ea typeface="Calibri" pitchFamily="34" charset="-122"/>
-                <a:cs typeface="Calibri" pitchFamily="34" charset="-120"/>
-              </a:rPr>
-              <a:t>ACK-path bottleneck</a:t>
-            </a:r>
-            <a:endParaRPr lang="en-US" sz="1400" dirty="0"/>
-          </a:p>
-        </p:txBody>
-      </p:sp>
-      <p:sp>
-        <p:nvSpPr>
-          <p:cNvPr id="12" name="Text 10"/>
-          <p:cNvSpPr txBox="1"/>
-          <p:nvPr/>
-        </p:nvSpPr>
-        <p:spPr>
-          <a:xfrm>
-            <a:off x="6995160" y="1545336"/>
-            <a:ext cx="4434840" cy="475488"/>
-          </a:xfrm>
-          <a:prstGeom prst="rect">
-            <a:avLst/>
-          </a:prstGeom>
-          <a:noFill/>
-          <a:ln/>
-        </p:spPr>
-        <p:txBody>
-          <a:bodyPr wrap="square" lIns="0" tIns="0" rIns="0" bIns="0" rtlCol="0" anchor="ctr"/>
-          <a:lstStyle/>
-          <a:p>
-            <a:pPr indent="0" marL="0">
-              <a:buNone/>
-            </a:pPr>
-            <a:r>
-              <a:rPr lang="en-US" sz="1150" dirty="0">
-                <a:solidFill>
-                  <a:srgbClr val="3A4A5F"/>
-                </a:solidFill>
-                <a:latin typeface="Calibri" pitchFamily="34" charset="0"/>
-                <a:ea typeface="Calibri" pitchFamily="34" charset="-122"/>
-                <a:cs typeface="Calibri" pitchFamily="34" charset="-120"/>
-              </a:rPr>
-              <a:t>Parts 2–4 shaped the acknowledgement direction. 66 bytes/packet.</a:t>
-            </a:r>
-            <a:endParaRPr lang="en-US" sz="1150" dirty="0"/>
-          </a:p>
-        </p:txBody>
-      </p:sp>
-      <p:sp>
-        <p:nvSpPr>
-          <p:cNvPr id="13" name="Shape 11"/>
-          <p:cNvSpPr/>
-          <p:nvPr/>
-        </p:nvSpPr>
-        <p:spPr>
-          <a:xfrm>
-            <a:off x="640080" y="2203704"/>
-            <a:ext cx="5349240" cy="932688"/>
-          </a:xfrm>
-          <a:prstGeom prst="roundRect">
-            <a:avLst>
-              <a:gd name="adj" fmla="val 7843"/>
-            </a:avLst>
-          </a:prstGeom>
-          <a:solidFill>
-            <a:srgbClr val="EEF4F8"/>
-          </a:solidFill>
-          <a:ln w="9525">
-            <a:solidFill>
-              <a:srgbClr val="D8E4EC"/>
-            </a:solidFill>
-            <a:prstDash val="solid"/>
-          </a:ln>
-          <a:effectLst>
-            <a:outerShdw sx="100000" sy="100000" kx="0" ky="0" algn="bl" rotWithShape="0" blurRad="50800" dist="12700" dir="5400000">
-              <a:srgbClr val="BFCEDA">
-                <a:alpha val="35000"/>
-              </a:srgbClr>
-            </a:outerShdw>
-          </a:effectLst>
-        </p:spPr>
-      </p:sp>
-      <p:sp>
-        <p:nvSpPr>
-          <p:cNvPr id="14" name="Shape 12"/>
-          <p:cNvSpPr/>
-          <p:nvPr/>
-        </p:nvSpPr>
-        <p:spPr>
-          <a:xfrm>
-            <a:off x="868680" y="2450592"/>
-            <a:ext cx="420624" cy="420624"/>
-          </a:xfrm>
-          <a:prstGeom prst="ellipse">
-            <a:avLst/>
-          </a:prstGeom>
-          <a:solidFill>
-            <a:srgbClr val="065A82"/>
-          </a:solidFill>
-          <a:ln w="12700">
-            <a:solidFill>
-              <a:srgbClr val="333333"/>
-            </a:solidFill>
-            <a:prstDash val="solid"/>
-          </a:ln>
-        </p:spPr>
-      </p:sp>
-      <p:sp>
-        <p:nvSpPr>
-          <p:cNvPr id="15" name="Text 13"/>
-          <p:cNvSpPr txBox="1"/>
-          <p:nvPr/>
-        </p:nvSpPr>
-        <p:spPr>
-          <a:xfrm>
-            <a:off x="868680" y="2450592"/>
-            <a:ext cx="420624" cy="420624"/>
-          </a:xfrm>
-          <a:prstGeom prst="rect">
-            <a:avLst/>
-          </a:prstGeom>
-          <a:noFill/>
-          <a:ln/>
-        </p:spPr>
-        <p:txBody>
-          <a:bodyPr wrap="square" lIns="0" tIns="0" rIns="0" bIns="0" rtlCol="0" anchor="ctr"/>
-          <a:lstStyle/>
-          <a:p>
-            <a:pPr algn="ctr" indent="0" marL="0">
-              <a:buNone/>
-            </a:pPr>
-            <a:r>
-              <a:rPr lang="en-US" sz="1300" b="1" dirty="0">
-                <a:solidFill>
-                  <a:srgbClr val="FFFFFF"/>
-                </a:solidFill>
-                <a:latin typeface="Calibri" pitchFamily="34" charset="0"/>
-                <a:ea typeface="Calibri" pitchFamily="34" charset="-122"/>
-                <a:cs typeface="Calibri" pitchFamily="34" charset="-120"/>
-              </a:rPr>
-              <a:t>3</a:t>
-            </a:r>
-            <a:endParaRPr lang="en-US" sz="1300" dirty="0"/>
-          </a:p>
-        </p:txBody>
-      </p:sp>
-      <p:sp>
-        <p:nvSpPr>
-          <p:cNvPr id="16" name="Text 14"/>
-          <p:cNvSpPr txBox="1"/>
-          <p:nvPr/>
-        </p:nvSpPr>
-        <p:spPr>
-          <a:xfrm>
-            <a:off x="1417320" y="2295144"/>
-            <a:ext cx="4434840" cy="301752"/>
-          </a:xfrm>
-          <a:prstGeom prst="rect">
-            <a:avLst/>
-          </a:prstGeom>
-          <a:noFill/>
-          <a:ln/>
-        </p:spPr>
-        <p:txBody>
-          <a:bodyPr wrap="square" lIns="0" tIns="0" rIns="0" bIns="0" rtlCol="0" anchor="ctr"/>
-          <a:lstStyle/>
-          <a:p>
-            <a:pPr indent="0" marL="0">
-              <a:buNone/>
-            </a:pPr>
-            <a:r>
-              <a:rPr lang="en-US" sz="1400" b="1" dirty="0">
-                <a:solidFill>
-                  <a:srgbClr val="13233B"/>
-                </a:solidFill>
-                <a:latin typeface="Calibri" pitchFamily="34" charset="0"/>
-                <a:ea typeface="Calibri" pitchFamily="34" charset="-122"/>
-                <a:cs typeface="Calibri" pitchFamily="34" charset="-120"/>
-              </a:rPr>
-              <a:t>No RTT ever measured</a:t>
-            </a:r>
-            <a:endParaRPr lang="en-US" sz="1400" dirty="0"/>
-          </a:p>
-        </p:txBody>
-      </p:sp>
-      <p:sp>
-        <p:nvSpPr>
-          <p:cNvPr id="17" name="Text 15"/>
-          <p:cNvSpPr txBox="1"/>
-          <p:nvPr/>
-        </p:nvSpPr>
-        <p:spPr>
-          <a:xfrm>
-            <a:off x="1417320" y="2606040"/>
-            <a:ext cx="4434840" cy="475488"/>
-          </a:xfrm>
-          <a:prstGeom prst="rect">
-            <a:avLst/>
-          </a:prstGeom>
-          <a:noFill/>
-          <a:ln/>
-        </p:spPr>
-        <p:txBody>
-          <a:bodyPr wrap="square" lIns="0" tIns="0" rIns="0" bIns="0" rtlCol="0" anchor="ctr"/>
-          <a:lstStyle/>
-          <a:p>
-            <a:pPr indent="0" marL="0">
-              <a:buNone/>
-            </a:pPr>
-            <a:r>
-              <a:rPr lang="en-US" sz="1150" dirty="0">
-                <a:solidFill>
-                  <a:srgbClr val="3A4A5F"/>
-                </a:solidFill>
-                <a:latin typeface="Calibri" pitchFamily="34" charset="0"/>
-                <a:ea typeface="Calibri" pitchFamily="34" charset="-122"/>
-                <a:cs typeface="Calibri" pitchFamily="34" charset="-120"/>
-              </a:rPr>
-              <a:t>The reported 0.541 / 2.200 / 2.445 ms have no source anywhere in the repository.</a:t>
-            </a:r>
-            <a:endParaRPr lang="en-US" sz="1150" dirty="0"/>
-          </a:p>
-        </p:txBody>
-      </p:sp>
-      <p:sp>
-        <p:nvSpPr>
-          <p:cNvPr id="18" name="Shape 16"/>
-          <p:cNvSpPr/>
-          <p:nvPr/>
-        </p:nvSpPr>
-        <p:spPr>
-          <a:xfrm>
-            <a:off x="6217920" y="2203704"/>
-            <a:ext cx="5349240" cy="932688"/>
-          </a:xfrm>
-          <a:prstGeom prst="roundRect">
-            <a:avLst>
-              <a:gd name="adj" fmla="val 7843"/>
-            </a:avLst>
-          </a:prstGeom>
-          <a:solidFill>
-            <a:srgbClr val="EEF4F8"/>
-          </a:solidFill>
-          <a:ln w="9525">
-            <a:solidFill>
-              <a:srgbClr val="D8E4EC"/>
-            </a:solidFill>
-            <a:prstDash val="solid"/>
-          </a:ln>
-          <a:effectLst>
-            <a:outerShdw sx="100000" sy="100000" kx="0" ky="0" algn="bl" rotWithShape="0" blurRad="50800" dist="12700" dir="5400000">
-              <a:srgbClr val="BFCEDA">
-                <a:alpha val="35000"/>
-              </a:srgbClr>
-            </a:outerShdw>
-          </a:effectLst>
-        </p:spPr>
-      </p:sp>
-      <p:sp>
-        <p:nvSpPr>
-          <p:cNvPr id="19" name="Shape 17"/>
-          <p:cNvSpPr/>
-          <p:nvPr/>
-        </p:nvSpPr>
-        <p:spPr>
-          <a:xfrm>
-            <a:off x="6446520" y="2450592"/>
-            <a:ext cx="420624" cy="420624"/>
-          </a:xfrm>
-          <a:prstGeom prst="ellipse">
-            <a:avLst/>
-          </a:prstGeom>
-          <a:solidFill>
-            <a:srgbClr val="065A82"/>
-          </a:solidFill>
-          <a:ln w="12700">
-            <a:solidFill>
-              <a:srgbClr val="333333"/>
-            </a:solidFill>
-            <a:prstDash val="solid"/>
-          </a:ln>
-        </p:spPr>
-      </p:sp>
-      <p:sp>
-        <p:nvSpPr>
-          <p:cNvPr id="20" name="Text 18"/>
-          <p:cNvSpPr txBox="1"/>
-          <p:nvPr/>
-        </p:nvSpPr>
-        <p:spPr>
-          <a:xfrm>
-            <a:off x="6446520" y="2450592"/>
-            <a:ext cx="420624" cy="420624"/>
-          </a:xfrm>
-          <a:prstGeom prst="rect">
-            <a:avLst/>
-          </a:prstGeom>
-          <a:noFill/>
-          <a:ln/>
-        </p:spPr>
-        <p:txBody>
-          <a:bodyPr wrap="square" lIns="0" tIns="0" rIns="0" bIns="0" rtlCol="0" anchor="ctr"/>
-          <a:lstStyle/>
-          <a:p>
-            <a:pPr algn="ctr" indent="0" marL="0">
-              <a:buNone/>
-            </a:pPr>
-            <a:r>
-              <a:rPr lang="en-US" sz="1300" b="1" dirty="0">
-                <a:solidFill>
-                  <a:srgbClr val="FFFFFF"/>
-                </a:solidFill>
-                <a:latin typeface="Calibri" pitchFamily="34" charset="0"/>
-                <a:ea typeface="Calibri" pitchFamily="34" charset="-122"/>
-                <a:cs typeface="Calibri" pitchFamily="34" charset="-120"/>
-              </a:rPr>
-              <a:t>4</a:t>
-            </a:r>
-            <a:endParaRPr lang="en-US" sz="1300" dirty="0"/>
-          </a:p>
-        </p:txBody>
-      </p:sp>
-      <p:sp>
-        <p:nvSpPr>
-          <p:cNvPr id="21" name="Text 19"/>
-          <p:cNvSpPr txBox="1"/>
-          <p:nvPr/>
-        </p:nvSpPr>
-        <p:spPr>
-          <a:xfrm>
-            <a:off x="6995160" y="2295144"/>
-            <a:ext cx="4434840" cy="301752"/>
-          </a:xfrm>
-          <a:prstGeom prst="rect">
-            <a:avLst/>
-          </a:prstGeom>
-          <a:noFill/>
-          <a:ln/>
-        </p:spPr>
-        <p:txBody>
-          <a:bodyPr wrap="square" lIns="0" tIns="0" rIns="0" bIns="0" rtlCol="0" anchor="ctr"/>
-          <a:lstStyle/>
-          <a:p>
-            <a:pPr indent="0" marL="0">
-              <a:buNone/>
-            </a:pPr>
-            <a:r>
-              <a:rPr lang="en-US" sz="1400" b="1" dirty="0">
-                <a:solidFill>
-                  <a:srgbClr val="13233B"/>
-                </a:solidFill>
-                <a:latin typeface="Calibri" pitchFamily="34" charset="0"/>
-                <a:ea typeface="Calibri" pitchFamily="34" charset="-122"/>
-                <a:cs typeface="Calibri" pitchFamily="34" charset="-120"/>
-              </a:rPr>
-              <a:t>eBPF telemetry read zero</a:t>
-            </a:r>
-            <a:endParaRPr lang="en-US" sz="1400" dirty="0"/>
-          </a:p>
-        </p:txBody>
-      </p:sp>
-      <p:sp>
-        <p:nvSpPr>
-          <p:cNvPr id="22" name="Text 20"/>
-          <p:cNvSpPr txBox="1"/>
-          <p:nvPr/>
-        </p:nvSpPr>
-        <p:spPr>
-          <a:xfrm>
-            <a:off x="6995160" y="2606040"/>
-            <a:ext cx="4434840" cy="475488"/>
-          </a:xfrm>
-          <a:prstGeom prst="rect">
-            <a:avLst/>
-          </a:prstGeom>
-          <a:noFill/>
-          <a:ln/>
-        </p:spPr>
-        <p:txBody>
-          <a:bodyPr wrap="square" lIns="0" tIns="0" rIns="0" bIns="0" rtlCol="0" anchor="ctr"/>
-          <a:lstStyle/>
-          <a:p>
-            <a:pPr indent="0" marL="0">
-              <a:buNone/>
-            </a:pPr>
-            <a:r>
-              <a:rPr lang="en-US" sz="1150" dirty="0">
-                <a:solidFill>
-                  <a:srgbClr val="3A4A5F"/>
-                </a:solidFill>
-                <a:latin typeface="Calibri" pitchFamily="34" charset="0"/>
-                <a:ea typeface="Calibri" pitchFamily="34" charset="-122"/>
-                <a:cs typeface="Calibri" pitchFamily="34" charset="-120"/>
-              </a:rPr>
-              <a:t>Three decode bugs: hex strings into a bare except, wrong struct offsets, CLOCK_REALTIME vs CLOCK_MONOTONIC (age = 56.8 years).</a:t>
-            </a:r>
-            <a:endParaRPr lang="en-US" sz="1150" dirty="0"/>
-          </a:p>
-        </p:txBody>
-      </p:sp>
-      <p:sp>
-        <p:nvSpPr>
-          <p:cNvPr id="23" name="Shape 21"/>
-          <p:cNvSpPr/>
-          <p:nvPr/>
-        </p:nvSpPr>
-        <p:spPr>
-          <a:xfrm>
-            <a:off x="640080" y="3264408"/>
-            <a:ext cx="5349240" cy="932688"/>
-          </a:xfrm>
-          <a:prstGeom prst="roundRect">
-            <a:avLst>
-              <a:gd name="adj" fmla="val 7843"/>
-            </a:avLst>
-          </a:prstGeom>
-          <a:solidFill>
-            <a:srgbClr val="EEF4F8"/>
-          </a:solidFill>
-          <a:ln w="9525">
-            <a:solidFill>
-              <a:srgbClr val="D8E4EC"/>
-            </a:solidFill>
-            <a:prstDash val="solid"/>
-          </a:ln>
-          <a:effectLst>
-            <a:outerShdw sx="100000" sy="100000" kx="0" ky="0" algn="bl" rotWithShape="0" blurRad="50800" dist="12700" dir="5400000">
-              <a:srgbClr val="BFCEDA">
-                <a:alpha val="35000"/>
-              </a:srgbClr>
-            </a:outerShdw>
-          </a:effectLst>
-        </p:spPr>
-      </p:sp>
-      <p:sp>
-        <p:nvSpPr>
-          <p:cNvPr id="24" name="Shape 22"/>
-          <p:cNvSpPr/>
-          <p:nvPr/>
-        </p:nvSpPr>
-        <p:spPr>
-          <a:xfrm>
-            <a:off x="868680" y="3511296"/>
-            <a:ext cx="420624" cy="420624"/>
-          </a:xfrm>
-          <a:prstGeom prst="ellipse">
-            <a:avLst/>
-          </a:prstGeom>
-          <a:solidFill>
-            <a:srgbClr val="065A82"/>
-          </a:solidFill>
-          <a:ln w="12700">
-            <a:solidFill>
-              <a:srgbClr val="333333"/>
-            </a:solidFill>
-            <a:prstDash val="solid"/>
-          </a:ln>
-        </p:spPr>
-      </p:sp>
-      <p:sp>
-        <p:nvSpPr>
-          <p:cNvPr id="25" name="Text 23"/>
-          <p:cNvSpPr txBox="1"/>
-          <p:nvPr/>
-        </p:nvSpPr>
-        <p:spPr>
-          <a:xfrm>
-            <a:off x="868680" y="3511296"/>
-            <a:ext cx="420624" cy="420624"/>
-          </a:xfrm>
-          <a:prstGeom prst="rect">
-            <a:avLst/>
-          </a:prstGeom>
-          <a:noFill/>
-          <a:ln/>
-        </p:spPr>
-        <p:txBody>
-          <a:bodyPr wrap="square" lIns="0" tIns="0" rIns="0" bIns="0" rtlCol="0" anchor="ctr"/>
-          <a:lstStyle/>
-          <a:p>
-            <a:pPr algn="ctr" indent="0" marL="0">
-              <a:buNone/>
-            </a:pPr>
-            <a:r>
-              <a:rPr lang="en-US" sz="1300" b="1" dirty="0">
-                <a:solidFill>
-                  <a:srgbClr val="FFFFFF"/>
-                </a:solidFill>
-                <a:latin typeface="Calibri" pitchFamily="34" charset="0"/>
-                <a:ea typeface="Calibri" pitchFamily="34" charset="-122"/>
-                <a:cs typeface="Calibri" pitchFamily="34" charset="-120"/>
-              </a:rPr>
-              <a:t>5</a:t>
-            </a:r>
-            <a:endParaRPr lang="en-US" sz="1300" dirty="0"/>
-          </a:p>
-        </p:txBody>
-      </p:sp>
-      <p:sp>
-        <p:nvSpPr>
-          <p:cNvPr id="26" name="Text 24"/>
-          <p:cNvSpPr txBox="1"/>
-          <p:nvPr/>
-        </p:nvSpPr>
-        <p:spPr>
-          <a:xfrm>
-            <a:off x="1417320" y="3355848"/>
-            <a:ext cx="4434840" cy="301752"/>
-          </a:xfrm>
-          <a:prstGeom prst="rect">
-            <a:avLst/>
-          </a:prstGeom>
-          <a:noFill/>
-          <a:ln/>
-        </p:spPr>
-        <p:txBody>
-          <a:bodyPr wrap="square" lIns="0" tIns="0" rIns="0" bIns="0" rtlCol="0" anchor="ctr"/>
-          <a:lstStyle/>
-          <a:p>
-            <a:pPr indent="0" marL="0">
-              <a:buNone/>
-            </a:pPr>
-            <a:r>
-              <a:rPr lang="en-US" sz="1400" b="1" dirty="0">
-                <a:solidFill>
-                  <a:srgbClr val="13233B"/>
-                </a:solidFill>
-                <a:latin typeface="Calibri" pitchFamily="34" charset="0"/>
-                <a:ea typeface="Calibri" pitchFamily="34" charset="-122"/>
-                <a:cs typeface="Calibri" pitchFamily="34" charset="-120"/>
-              </a:rPr>
-              <a:t>Elephant threshold unreachable</a:t>
-            </a:r>
-            <a:endParaRPr lang="en-US" sz="1400" dirty="0"/>
-          </a:p>
-        </p:txBody>
-      </p:sp>
-      <p:sp>
-        <p:nvSpPr>
-          <p:cNvPr id="27" name="Text 25"/>
-          <p:cNvSpPr txBox="1"/>
-          <p:nvPr/>
-        </p:nvSpPr>
-        <p:spPr>
-          <a:xfrm>
-            <a:off x="1417320" y="3666744"/>
-            <a:ext cx="4434840" cy="475488"/>
-          </a:xfrm>
-          <a:prstGeom prst="rect">
-            <a:avLst/>
-          </a:prstGeom>
-          <a:noFill/>
-          <a:ln/>
-        </p:spPr>
-        <p:txBody>
-          <a:bodyPr wrap="square" lIns="0" tIns="0" rIns="0" bIns="0" rtlCol="0" anchor="ctr"/>
-          <a:lstStyle/>
-          <a:p>
-            <a:pPr indent="0" marL="0">
-              <a:buNone/>
-            </a:pPr>
-            <a:r>
-              <a:rPr lang="en-US" sz="1150" dirty="0">
-                <a:solidFill>
-                  <a:srgbClr val="3A4A5F"/>
-                </a:solidFill>
-                <a:latin typeface="Calibri" pitchFamily="34" charset="0"/>
-                <a:ea typeface="Calibri" pitchFamily="34" charset="-122"/>
-                <a:cs typeface="Calibri" pitchFamily="34" charset="-120"/>
-              </a:rPr>
-              <a:t>10 MB threshold, 9.38 MB maximum possible flow share. The classifier could never fire.</a:t>
-            </a:r>
-            <a:endParaRPr lang="en-US" sz="1150" dirty="0"/>
-          </a:p>
-        </p:txBody>
-      </p:sp>
-      <p:sp>
-        <p:nvSpPr>
-          <p:cNvPr id="28" name="Shape 26"/>
-          <p:cNvSpPr/>
-          <p:nvPr/>
-        </p:nvSpPr>
-        <p:spPr>
-          <a:xfrm>
-            <a:off x="6217920" y="3264408"/>
-            <a:ext cx="5349240" cy="932688"/>
-          </a:xfrm>
-          <a:prstGeom prst="roundRect">
-            <a:avLst>
-              <a:gd name="adj" fmla="val 7843"/>
-            </a:avLst>
-          </a:prstGeom>
-          <a:solidFill>
-            <a:srgbClr val="EEF4F8"/>
-          </a:solidFill>
-          <a:ln w="9525">
-            <a:solidFill>
-              <a:srgbClr val="D8E4EC"/>
-            </a:solidFill>
-            <a:prstDash val="solid"/>
-          </a:ln>
-          <a:effectLst>
-            <a:outerShdw sx="100000" sy="100000" kx="0" ky="0" algn="bl" rotWithShape="0" blurRad="50800" dist="12700" dir="5400000">
-              <a:srgbClr val="BFCEDA">
-                <a:alpha val="35000"/>
-              </a:srgbClr>
-            </a:outerShdw>
-          </a:effectLst>
-        </p:spPr>
-      </p:sp>
-      <p:sp>
-        <p:nvSpPr>
-          <p:cNvPr id="29" name="Shape 27"/>
-          <p:cNvSpPr/>
-          <p:nvPr/>
-        </p:nvSpPr>
-        <p:spPr>
-          <a:xfrm>
-            <a:off x="6446520" y="3511296"/>
-            <a:ext cx="420624" cy="420624"/>
-          </a:xfrm>
-          <a:prstGeom prst="ellipse">
-            <a:avLst/>
-          </a:prstGeom>
-          <a:solidFill>
-            <a:srgbClr val="065A82"/>
-          </a:solidFill>
-          <a:ln w="12700">
-            <a:solidFill>
-              <a:srgbClr val="333333"/>
-            </a:solidFill>
-            <a:prstDash val="solid"/>
-          </a:ln>
-        </p:spPr>
-      </p:sp>
-      <p:sp>
-        <p:nvSpPr>
-          <p:cNvPr id="30" name="Text 28"/>
-          <p:cNvSpPr txBox="1"/>
-          <p:nvPr/>
-        </p:nvSpPr>
-        <p:spPr>
-          <a:xfrm>
-            <a:off x="6446520" y="3511296"/>
-            <a:ext cx="420624" cy="420624"/>
-          </a:xfrm>
-          <a:prstGeom prst="rect">
-            <a:avLst/>
-          </a:prstGeom>
-          <a:noFill/>
-          <a:ln/>
-        </p:spPr>
-        <p:txBody>
-          <a:bodyPr wrap="square" lIns="0" tIns="0" rIns="0" bIns="0" rtlCol="0" anchor="ctr"/>
-          <a:lstStyle/>
-          <a:p>
-            <a:pPr algn="ctr" indent="0" marL="0">
-              <a:buNone/>
-            </a:pPr>
-            <a:r>
-              <a:rPr lang="en-US" sz="1300" b="1" dirty="0">
-                <a:solidFill>
-                  <a:srgbClr val="FFFFFF"/>
-                </a:solidFill>
-                <a:latin typeface="Calibri" pitchFamily="34" charset="0"/>
-                <a:ea typeface="Calibri" pitchFamily="34" charset="-122"/>
-                <a:cs typeface="Calibri" pitchFamily="34" charset="-120"/>
-              </a:rPr>
-              <a:t>6</a:t>
-            </a:r>
-            <a:endParaRPr lang="en-US" sz="1300" dirty="0"/>
-          </a:p>
-        </p:txBody>
-      </p:sp>
-      <p:sp>
-        <p:nvSpPr>
-          <p:cNvPr id="31" name="Text 29"/>
-          <p:cNvSpPr txBox="1"/>
-          <p:nvPr/>
-        </p:nvSpPr>
-        <p:spPr>
-          <a:xfrm>
-            <a:off x="6995160" y="3355848"/>
-            <a:ext cx="4434840" cy="301752"/>
-          </a:xfrm>
-          <a:prstGeom prst="rect">
-            <a:avLst/>
-          </a:prstGeom>
-          <a:noFill/>
-          <a:ln/>
-        </p:spPr>
-        <p:txBody>
-          <a:bodyPr wrap="square" lIns="0" tIns="0" rIns="0" bIns="0" rtlCol="0" anchor="ctr"/>
-          <a:lstStyle/>
-          <a:p>
-            <a:pPr indent="0" marL="0">
-              <a:buNone/>
-            </a:pPr>
-            <a:r>
-              <a:rPr lang="en-US" sz="1400" b="1" dirty="0">
-                <a:solidFill>
-                  <a:srgbClr val="13233B"/>
-                </a:solidFill>
-                <a:latin typeface="Calibri" pitchFamily="34" charset="0"/>
-                <a:ea typeface="Calibri" pitchFamily="34" charset="-122"/>
-                <a:cs typeface="Calibri" pitchFamily="34" charset="-120"/>
-              </a:rPr>
-              <a:t>Prediction had no effect</a:t>
-            </a:r>
-            <a:endParaRPr lang="en-US" sz="1400" dirty="0"/>
-          </a:p>
-        </p:txBody>
-      </p:sp>
-      <p:sp>
-        <p:nvSpPr>
-          <p:cNvPr id="32" name="Text 30"/>
-          <p:cNvSpPr txBox="1"/>
-          <p:nvPr/>
-        </p:nvSpPr>
-        <p:spPr>
-          <a:xfrm>
-            <a:off x="6995160" y="3666744"/>
-            <a:ext cx="4434840" cy="475488"/>
-          </a:xfrm>
-          <a:prstGeom prst="rect">
-            <a:avLst/>
-          </a:prstGeom>
-          <a:noFill/>
-          <a:ln/>
-        </p:spPr>
-        <p:txBody>
-          <a:bodyPr wrap="square" lIns="0" tIns="0" rIns="0" bIns="0" rtlCol="0" anchor="ctr"/>
-          <a:lstStyle/>
-          <a:p>
-            <a:pPr indent="0" marL="0">
-              <a:buNone/>
-            </a:pPr>
-            <a:r>
-              <a:rPr lang="en-US" sz="1150" dirty="0">
-                <a:solidFill>
-                  <a:srgbClr val="3A4A5F"/>
-                </a:solidFill>
-                <a:latin typeface="Calibri" pitchFamily="34" charset="0"/>
-                <a:ea typeface="Calibri" pitchFamily="34" charset="-122"/>
-                <a:cs typeface="Calibri" pitchFamily="34" charset="-120"/>
-              </a:rPr>
-              <a:t>All 375 logged adjustments applied the identical action.</a:t>
-            </a:r>
-            <a:endParaRPr lang="en-US" sz="1150" dirty="0"/>
-          </a:p>
-        </p:txBody>
-      </p:sp>
-      <p:sp>
-        <p:nvSpPr>
-          <p:cNvPr id="33" name="Shape 31"/>
-          <p:cNvSpPr/>
-          <p:nvPr/>
-        </p:nvSpPr>
-        <p:spPr>
-          <a:xfrm>
-            <a:off x="640080" y="4325112"/>
-            <a:ext cx="10881360" cy="932688"/>
-          </a:xfrm>
-          <a:prstGeom prst="roundRect">
-            <a:avLst>
-              <a:gd name="adj" fmla="val 7843"/>
-            </a:avLst>
-          </a:prstGeom>
-          <a:solidFill>
-            <a:srgbClr val="FBEEF0"/>
-          </a:solidFill>
-          <a:ln w="9525">
-            <a:solidFill>
-              <a:srgbClr val="D8E4EC"/>
-            </a:solidFill>
-            <a:prstDash val="solid"/>
-          </a:ln>
-          <a:effectLst>
-            <a:outerShdw sx="100000" sy="100000" kx="0" ky="0" algn="bl" rotWithShape="0" blurRad="50800" dist="12700" dir="5400000">
-              <a:srgbClr val="BFCEDA">
-                <a:alpha val="35000"/>
-              </a:srgbClr>
-            </a:outerShdw>
-          </a:effectLst>
-        </p:spPr>
-      </p:sp>
-      <p:sp>
-        <p:nvSpPr>
-          <p:cNvPr id="34" name="Shape 32"/>
-          <p:cNvSpPr/>
-          <p:nvPr/>
-        </p:nvSpPr>
-        <p:spPr>
-          <a:xfrm>
-            <a:off x="896112" y="4572000"/>
-            <a:ext cx="420624" cy="420624"/>
-          </a:xfrm>
-          <a:prstGeom prst="ellipse">
-            <a:avLst/>
-          </a:prstGeom>
-          <a:solidFill>
-            <a:srgbClr val="B23A48"/>
-          </a:solidFill>
-          <a:ln w="12700">
-            <a:solidFill>
-              <a:srgbClr val="333333"/>
-            </a:solidFill>
-            <a:prstDash val="solid"/>
-          </a:ln>
-        </p:spPr>
-      </p:sp>
-      <p:sp>
-        <p:nvSpPr>
-          <p:cNvPr id="35" name="Text 33"/>
-          <p:cNvSpPr txBox="1"/>
-          <p:nvPr/>
-        </p:nvSpPr>
-        <p:spPr>
-          <a:xfrm>
-            <a:off x="896112" y="4572000"/>
-            <a:ext cx="420624" cy="420624"/>
-          </a:xfrm>
-          <a:prstGeom prst="rect">
-            <a:avLst/>
-          </a:prstGeom>
-          <a:noFill/>
-          <a:ln/>
-        </p:spPr>
-        <p:txBody>
-          <a:bodyPr wrap="square" lIns="0" tIns="0" rIns="0" bIns="0" rtlCol="0" anchor="ctr"/>
-          <a:lstStyle/>
-          <a:p>
-            <a:pPr algn="ctr" indent="0" marL="0">
-              <a:buNone/>
-            </a:pPr>
-            <a:r>
-              <a:rPr lang="en-US" sz="1300" b="1" dirty="0">
-                <a:solidFill>
-                  <a:srgbClr val="FFFFFF"/>
-                </a:solidFill>
-                <a:latin typeface="Calibri" pitchFamily="34" charset="0"/>
-                <a:ea typeface="Calibri" pitchFamily="34" charset="-122"/>
-                <a:cs typeface="Calibri" pitchFamily="34" charset="-120"/>
-              </a:rPr>
-              <a:t>7</a:t>
-            </a:r>
-            <a:endParaRPr lang="en-US" sz="1300" dirty="0"/>
-          </a:p>
-        </p:txBody>
-      </p:sp>
-      <p:sp>
-        <p:nvSpPr>
-          <p:cNvPr id="36" name="Text 34"/>
-          <p:cNvSpPr txBox="1"/>
-          <p:nvPr/>
-        </p:nvSpPr>
-        <p:spPr>
-          <a:xfrm>
-            <a:off x="1481328" y="4416552"/>
-            <a:ext cx="9966960" cy="301752"/>
-          </a:xfrm>
-          <a:prstGeom prst="rect">
-            <a:avLst/>
-          </a:prstGeom>
-          <a:noFill/>
-          <a:ln/>
-        </p:spPr>
-        <p:txBody>
-          <a:bodyPr wrap="square" lIns="0" tIns="0" rIns="0" bIns="0" rtlCol="0" anchor="ctr"/>
-          <a:lstStyle/>
-          <a:p>
-            <a:pPr indent="0" marL="0">
-              <a:buNone/>
-            </a:pPr>
-            <a:r>
-              <a:rPr lang="en-US" sz="1400" b="1" dirty="0">
-                <a:solidFill>
-                  <a:srgbClr val="B23A48"/>
-                </a:solidFill>
-                <a:latin typeface="Calibri" pitchFamily="34" charset="0"/>
-                <a:ea typeface="Calibri" pitchFamily="34" charset="-122"/>
-                <a:cs typeface="Calibri" pitchFamily="34" charset="-120"/>
-              </a:rPr>
-              <a:t>Headline figures hardcoded</a:t>
-            </a:r>
-            <a:endParaRPr lang="en-US" sz="1400" dirty="0"/>
-          </a:p>
-        </p:txBody>
-      </p:sp>
-      <p:sp>
-        <p:nvSpPr>
-          <p:cNvPr id="37" name="Text 35"/>
-          <p:cNvSpPr txBox="1"/>
-          <p:nvPr/>
-        </p:nvSpPr>
-        <p:spPr>
-          <a:xfrm>
-            <a:off x="1481328" y="4727448"/>
-            <a:ext cx="9966960" cy="457200"/>
-          </a:xfrm>
-          <a:prstGeom prst="rect">
-            <a:avLst/>
-          </a:prstGeom>
-          <a:noFill/>
-          <a:ln/>
-        </p:spPr>
-        <p:txBody>
-          <a:bodyPr wrap="square" lIns="0" tIns="0" rIns="0" bIns="0" rtlCol="0" anchor="ctr"/>
-          <a:lstStyle/>
-          <a:p>
-            <a:pPr indent="0" marL="0">
-              <a:buNone/>
-            </a:pPr>
-            <a:r>
-              <a:rPr lang="en-US" sz="1200" dirty="0">
-                <a:solidFill>
-                  <a:srgbClr val="3A4A5F"/>
-                </a:solidFill>
-                <a:latin typeface="Calibri" pitchFamily="34" charset="0"/>
-                <a:ea typeface="Calibri" pitchFamily="34" charset="-122"/>
-                <a:cs typeface="Calibri" pitchFamily="34" charset="-120"/>
-              </a:rPr>
-              <a:t>"12× faster" is the literal array [120, 70, 60, 5]. No stabilisation time was ever measured.</a:t>
-            </a:r>
-            <a:endParaRPr lang="en-US" sz="1200" dirty="0"/>
-          </a:p>
-        </p:txBody>
-      </p:sp>
-      <p:sp>
-        <p:nvSpPr>
-          <p:cNvPr id="38" name="Text 36"/>
-          <p:cNvSpPr txBox="1"/>
-          <p:nvPr/>
-        </p:nvSpPr>
-        <p:spPr>
-          <a:xfrm>
-            <a:off x="640080" y="5852160"/>
-            <a:ext cx="10881360" cy="365760"/>
-          </a:xfrm>
-          <a:prstGeom prst="rect">
-            <a:avLst/>
-          </a:prstGeom>
-          <a:noFill/>
-          <a:ln/>
-        </p:spPr>
-        <p:txBody>
-          <a:bodyPr wrap="square" rtlCol="0" anchor="ctr"/>
-          <a:lstStyle/>
-          <a:p>
-            <a:pPr indent="0" marL="0">
-              <a:buNone/>
-            </a:pPr>
-            <a:r>
-              <a:rPr lang="en-US" sz="1300" i="1" dirty="0">
-                <a:solidFill>
-                  <a:srgbClr val="7B8A9C"/>
-                </a:solidFill>
-                <a:latin typeface="Calibri" pitchFamily="34" charset="0"/>
-                <a:ea typeface="Calibri" pitchFamily="34" charset="-122"/>
-                <a:cs typeface="Calibri" pitchFamily="34" charset="-120"/>
-              </a:rPr>
-              <a:t>All seven are pinned by regression tests that fail against the original behaviour.</a:t>
-            </a:r>
-            <a:endParaRPr lang="en-US" sz="1300" dirty="0"/>
           </a:p>
         </p:txBody>
       </p:sp>
@@ -5784,7 +5401,7 @@
                 <a:ea typeface="Cambria" pitchFamily="34" charset="-122"/>
                 <a:cs typeface="Cambria" pitchFamily="34" charset="-120"/>
               </a:rPr>
-              <a:t>How each was caught</a:t>
+              <a:t>The seven defects</a:t>
             </a:r>
             <a:endParaRPr lang="en-US" sz="3200" dirty="0"/>
           </a:p>
@@ -5792,57 +5409,18 @@
       </p:sp>
       <p:sp>
         <p:nvSpPr>
-          <p:cNvPr id="3" name="Text 1"/>
-          <p:cNvSpPr txBox="1"/>
-          <p:nvPr/>
-        </p:nvSpPr>
-        <p:spPr>
-          <a:xfrm>
-            <a:off x="640080" y="1097280"/>
-            <a:ext cx="10881360" cy="411480"/>
-          </a:xfrm>
-          <a:prstGeom prst="rect">
-            <a:avLst/>
-          </a:prstGeom>
-          <a:noFill/>
-          <a:ln/>
-        </p:spPr>
-        <p:txBody>
-          <a:bodyPr wrap="square" rtlCol="0" anchor="ctr"/>
-          <a:lstStyle/>
-          <a:p>
-            <a:pPr indent="0" marL="0">
-              <a:buNone/>
-            </a:pPr>
-            <a:r>
-              <a:rPr lang="en-US" sz="1500" dirty="0">
-                <a:solidFill>
-                  <a:srgbClr val="3A4A5F"/>
-                </a:solidFill>
-                <a:latin typeface="Calibri" pitchFamily="34" charset="0"/>
-                <a:ea typeface="Calibri" pitchFamily="34" charset="-122"/>
-                <a:cs typeface="Calibri" pitchFamily="34" charset="-120"/>
-              </a:rPr>
-              <a:t>Not one was visible from a summary statistic. Every one was found by checking a physical invariant.</a:t>
-            </a:r>
-            <a:endParaRPr lang="en-US" sz="1500" dirty="0"/>
-          </a:p>
-        </p:txBody>
-      </p:sp>
-      <p:sp>
-        <p:nvSpPr>
-          <p:cNvPr id="4" name="Shape 2"/>
+          <p:cNvPr id="3" name="Shape 1"/>
           <p:cNvSpPr/>
           <p:nvPr/>
         </p:nvSpPr>
         <p:spPr>
           <a:xfrm>
-            <a:off x="640080" y="1691640"/>
-            <a:ext cx="10881360" cy="749808"/>
+            <a:off x="640080" y="1143000"/>
+            <a:ext cx="5349240" cy="932688"/>
           </a:xfrm>
           <a:prstGeom prst="roundRect">
             <a:avLst>
-              <a:gd name="adj" fmla="val 9756"/>
+              <a:gd name="adj" fmla="val 7843"/>
             </a:avLst>
           </a:prstGeom>
           <a:solidFill>
@@ -5865,14 +5443,78 @@
       </p:sp>
       <p:sp>
         <p:nvSpPr>
+          <p:cNvPr id="4" name="Shape 2"/>
+          <p:cNvSpPr/>
+          <p:nvPr/>
+        </p:nvSpPr>
+        <p:spPr>
+          <a:xfrm>
+            <a:off x="868680" y="1389888"/>
+            <a:ext cx="420624" cy="420624"/>
+          </a:xfrm>
+          <a:prstGeom prst="ellipse">
+            <a:avLst/>
+          </a:prstGeom>
+          <a:solidFill>
+            <a:srgbClr val="065A82"/>
+          </a:solidFill>
+          <a:ln w="12700">
+            <a:solidFill>
+              <a:srgbClr val="333333"/>
+            </a:solidFill>
+            <a:prstDash val="solid"/>
+          </a:ln>
+        </p:spPr>
+      </p:sp>
+      <p:sp>
+        <p:nvSpPr>
           <p:cNvPr id="5" name="Text 3"/>
           <p:cNvSpPr txBox="1"/>
           <p:nvPr/>
         </p:nvSpPr>
         <p:spPr>
           <a:xfrm>
-            <a:off x="960120" y="1764792"/>
-            <a:ext cx="5394960" cy="347472"/>
+            <a:off x="868680" y="1389888"/>
+            <a:ext cx="420624" cy="420624"/>
+          </a:xfrm>
+          <a:prstGeom prst="rect">
+            <a:avLst/>
+          </a:prstGeom>
+          <a:noFill/>
+          <a:ln/>
+        </p:spPr>
+        <p:txBody>
+          <a:bodyPr wrap="square" lIns="0" tIns="0" rIns="0" bIns="0" rtlCol="0" anchor="ctr"/>
+          <a:lstStyle/>
+          <a:p>
+            <a:pPr algn="ctr" indent="0" marL="0">
+              <a:buNone/>
+            </a:pPr>
+            <a:r>
+              <a:rPr lang="en-US" sz="1300" b="1" dirty="0">
+                <a:solidFill>
+                  <a:srgbClr val="FFFFFF"/>
+                </a:solidFill>
+                <a:latin typeface="Calibri" pitchFamily="34" charset="0"/>
+                <a:ea typeface="Calibri" pitchFamily="34" charset="-122"/>
+                <a:cs typeface="Calibri" pitchFamily="34" charset="-120"/>
+              </a:rPr>
+              <a:t>1</a:t>
+            </a:r>
+            <a:endParaRPr lang="en-US" sz="1300" dirty="0"/>
+          </a:p>
+        </p:txBody>
+      </p:sp>
+      <p:sp>
+        <p:nvSpPr>
+          <p:cNvPr id="6" name="Text 4"/>
+          <p:cNvSpPr txBox="1"/>
+          <p:nvPr/>
+        </p:nvSpPr>
+        <p:spPr>
+          <a:xfrm>
+            <a:off x="1417320" y="1234440"/>
+            <a:ext cx="4434840" cy="301752"/>
           </a:xfrm>
           <a:prstGeom prst="rect">
             <a:avLst/>
@@ -5890,13 +5532,13 @@
             <a:r>
               <a:rPr lang="en-US" sz="1400" b="1" dirty="0">
                 <a:solidFill>
-                  <a:srgbClr val="065A82"/>
-                </a:solidFill>
-                <a:latin typeface="Calibri" pitchFamily="34" charset="0"/>
-                <a:ea typeface="Calibri" pitchFamily="34" charset="-122"/>
-                <a:cs typeface="Calibri" pitchFamily="34" charset="-120"/>
-              </a:rPr>
-              <a:t>Bytes ÷ packets on the monitored queue</a:t>
+                  <a:srgbClr val="13233B"/>
+                </a:solidFill>
+                <a:latin typeface="Calibri" pitchFamily="34" charset="0"/>
+                <a:ea typeface="Calibri" pitchFamily="34" charset="-122"/>
+                <a:cs typeface="Calibri" pitchFamily="34" charset="-120"/>
+              </a:rPr>
+              <a:t>Loopback traffic</a:t>
             </a:r>
             <a:endParaRPr lang="en-US" sz="1400" dirty="0"/>
           </a:p>
@@ -5904,30 +5546,30 @@
       </p:sp>
       <p:sp>
         <p:nvSpPr>
-          <p:cNvPr id="6" name="Text 4"/>
-          <p:cNvSpPr txBox="1"/>
-          <p:nvPr/>
-        </p:nvSpPr>
-        <p:spPr>
-          <a:xfrm>
-            <a:off x="960120" y="2093976"/>
-            <a:ext cx="10241280" cy="310896"/>
-          </a:xfrm>
-          <a:prstGeom prst="rect">
-            <a:avLst/>
-          </a:prstGeom>
-          <a:noFill/>
-          <a:ln/>
-        </p:spPr>
-        <p:txBody>
-          <a:bodyPr wrap="square" lIns="0" tIns="0" rIns="0" bIns="0" rtlCol="0" anchor="ctr"/>
-          <a:lstStyle/>
-          <a:p>
-            <a:pPr indent="0" marL="0">
-              <a:buNone/>
-            </a:pPr>
-            <a:r>
-              <a:rPr lang="en-US" sz="1250" dirty="0">
+          <p:cNvPr id="7" name="Text 5"/>
+          <p:cNvSpPr txBox="1"/>
+          <p:nvPr/>
+        </p:nvSpPr>
+        <p:spPr>
+          <a:xfrm>
+            <a:off x="1417320" y="1545336"/>
+            <a:ext cx="4434840" cy="475488"/>
+          </a:xfrm>
+          <a:prstGeom prst="rect">
+            <a:avLst/>
+          </a:prstGeom>
+          <a:noFill/>
+          <a:ln/>
+        </p:spPr>
+        <p:txBody>
+          <a:bodyPr wrap="square" lIns="0" tIns="0" rIns="0" bIns="0" rtlCol="0" anchor="ctr"/>
+          <a:lstStyle/>
+          <a:p>
+            <a:pPr indent="0" marL="0">
+              <a:buNone/>
+            </a:pPr>
+            <a:r>
+              <a:rPr lang="en-US" sz="1150" dirty="0">
                 <a:solidFill>
                   <a:srgbClr val="3A4A5F"/>
                 </a:solidFill>
@@ -5935,26 +5577,26 @@
                 <a:ea typeface="Calibri" pitchFamily="34" charset="-122"/>
                 <a:cs typeface="Calibri" pitchFamily="34" charset="-120"/>
               </a:rPr>
-              <a:t>66 B means you are queueing ACKs, not data</a:t>
-            </a:r>
-            <a:endParaRPr lang="en-US" sz="1250" dirty="0"/>
-          </a:p>
-        </p:txBody>
-      </p:sp>
-      <p:sp>
-        <p:nvSpPr>
-          <p:cNvPr id="7" name="Shape 5"/>
+              <a:t>Parts 1–3 ran iperf3 to 127.0.0.1 at 93–219 Gbit/s. No qdisc was ever in the path.</a:t>
+            </a:r>
+            <a:endParaRPr lang="en-US" sz="1150" dirty="0"/>
+          </a:p>
+        </p:txBody>
+      </p:sp>
+      <p:sp>
+        <p:nvSpPr>
+          <p:cNvPr id="8" name="Shape 6"/>
           <p:cNvSpPr/>
           <p:nvPr/>
         </p:nvSpPr>
         <p:spPr>
           <a:xfrm>
-            <a:off x="640080" y="2560320"/>
-            <a:ext cx="10881360" cy="749808"/>
+            <a:off x="6217920" y="1143000"/>
+            <a:ext cx="5349240" cy="932688"/>
           </a:xfrm>
           <a:prstGeom prst="roundRect">
             <a:avLst>
-              <a:gd name="adj" fmla="val 9756"/>
+              <a:gd name="adj" fmla="val 7843"/>
             </a:avLst>
           </a:prstGeom>
           <a:solidFill>
@@ -5977,14 +5619,78 @@
       </p:sp>
       <p:sp>
         <p:nvSpPr>
-          <p:cNvPr id="8" name="Text 6"/>
-          <p:cNvSpPr txBox="1"/>
-          <p:nvPr/>
-        </p:nvSpPr>
-        <p:spPr>
-          <a:xfrm>
-            <a:off x="960120" y="2633472"/>
-            <a:ext cx="5394960" cy="347472"/>
+          <p:cNvPr id="9" name="Shape 7"/>
+          <p:cNvSpPr/>
+          <p:nvPr/>
+        </p:nvSpPr>
+        <p:spPr>
+          <a:xfrm>
+            <a:off x="6446520" y="1389888"/>
+            <a:ext cx="420624" cy="420624"/>
+          </a:xfrm>
+          <a:prstGeom prst="ellipse">
+            <a:avLst/>
+          </a:prstGeom>
+          <a:solidFill>
+            <a:srgbClr val="065A82"/>
+          </a:solidFill>
+          <a:ln w="12700">
+            <a:solidFill>
+              <a:srgbClr val="333333"/>
+            </a:solidFill>
+            <a:prstDash val="solid"/>
+          </a:ln>
+        </p:spPr>
+      </p:sp>
+      <p:sp>
+        <p:nvSpPr>
+          <p:cNvPr id="10" name="Text 8"/>
+          <p:cNvSpPr txBox="1"/>
+          <p:nvPr/>
+        </p:nvSpPr>
+        <p:spPr>
+          <a:xfrm>
+            <a:off x="6446520" y="1389888"/>
+            <a:ext cx="420624" cy="420624"/>
+          </a:xfrm>
+          <a:prstGeom prst="rect">
+            <a:avLst/>
+          </a:prstGeom>
+          <a:noFill/>
+          <a:ln/>
+        </p:spPr>
+        <p:txBody>
+          <a:bodyPr wrap="square" lIns="0" tIns="0" rIns="0" bIns="0" rtlCol="0" anchor="ctr"/>
+          <a:lstStyle/>
+          <a:p>
+            <a:pPr algn="ctr" indent="0" marL="0">
+              <a:buNone/>
+            </a:pPr>
+            <a:r>
+              <a:rPr lang="en-US" sz="1300" b="1" dirty="0">
+                <a:solidFill>
+                  <a:srgbClr val="FFFFFF"/>
+                </a:solidFill>
+                <a:latin typeface="Calibri" pitchFamily="34" charset="0"/>
+                <a:ea typeface="Calibri" pitchFamily="34" charset="-122"/>
+                <a:cs typeface="Calibri" pitchFamily="34" charset="-120"/>
+              </a:rPr>
+              <a:t>2</a:t>
+            </a:r>
+            <a:endParaRPr lang="en-US" sz="1300" dirty="0"/>
+          </a:p>
+        </p:txBody>
+      </p:sp>
+      <p:sp>
+        <p:nvSpPr>
+          <p:cNvPr id="11" name="Text 9"/>
+          <p:cNvSpPr txBox="1"/>
+          <p:nvPr/>
+        </p:nvSpPr>
+        <p:spPr>
+          <a:xfrm>
+            <a:off x="6995160" y="1234440"/>
+            <a:ext cx="4434840" cy="301752"/>
           </a:xfrm>
           <a:prstGeom prst="rect">
             <a:avLst/>
@@ -6002,13 +5708,13 @@
             <a:r>
               <a:rPr lang="en-US" sz="1400" b="1" dirty="0">
                 <a:solidFill>
-                  <a:srgbClr val="065A82"/>
-                </a:solidFill>
-                <a:latin typeface="Calibri" pitchFamily="34" charset="0"/>
-                <a:ea typeface="Calibri" pitchFamily="34" charset="-122"/>
-                <a:cs typeface="Calibri" pitchFamily="34" charset="-120"/>
-              </a:rPr>
-              <a:t>Drop rate vs the link's packet rate</a:t>
+                  <a:srgbClr val="13233B"/>
+                </a:solidFill>
+                <a:latin typeface="Calibri" pitchFamily="34" charset="0"/>
+                <a:ea typeface="Calibri" pitchFamily="34" charset="-122"/>
+                <a:cs typeface="Calibri" pitchFamily="34" charset="-120"/>
+              </a:rPr>
+              <a:t>ACK-path bottleneck</a:t>
             </a:r>
             <a:endParaRPr lang="en-US" sz="1400" dirty="0"/>
           </a:p>
@@ -6016,30 +5722,30 @@
       </p:sp>
       <p:sp>
         <p:nvSpPr>
-          <p:cNvPr id="9" name="Text 7"/>
-          <p:cNvSpPr txBox="1"/>
-          <p:nvPr/>
-        </p:nvSpPr>
-        <p:spPr>
-          <a:xfrm>
-            <a:off x="960120" y="2962656"/>
-            <a:ext cx="10241280" cy="310896"/>
-          </a:xfrm>
-          <a:prstGeom prst="rect">
-            <a:avLst/>
-          </a:prstGeom>
-          <a:noFill/>
-          <a:ln/>
-        </p:spPr>
-        <p:txBody>
-          <a:bodyPr wrap="square" lIns="0" tIns="0" rIns="0" bIns="0" rtlCol="0" anchor="ctr"/>
-          <a:lstStyle/>
-          <a:p>
-            <a:pPr indent="0" marL="0">
-              <a:buNone/>
-            </a:pPr>
-            <a:r>
-              <a:rPr lang="en-US" sz="1250" dirty="0">
+          <p:cNvPr id="12" name="Text 10"/>
+          <p:cNvSpPr txBox="1"/>
+          <p:nvPr/>
+        </p:nvSpPr>
+        <p:spPr>
+          <a:xfrm>
+            <a:off x="6995160" y="1545336"/>
+            <a:ext cx="4434840" cy="475488"/>
+          </a:xfrm>
+          <a:prstGeom prst="rect">
+            <a:avLst/>
+          </a:prstGeom>
+          <a:noFill/>
+          <a:ln/>
+        </p:spPr>
+        <p:txBody>
+          <a:bodyPr wrap="square" lIns="0" tIns="0" rIns="0" bIns="0" rtlCol="0" anchor="ctr"/>
+          <a:lstStyle/>
+          <a:p>
+            <a:pPr indent="0" marL="0">
+              <a:buNone/>
+            </a:pPr>
+            <a:r>
+              <a:rPr lang="en-US" sz="1150" dirty="0">
                 <a:solidFill>
                   <a:srgbClr val="3A4A5F"/>
                 </a:solidFill>
@@ -6047,26 +5753,26 @@
                 <a:ea typeface="Calibri" pitchFamily="34" charset="-122"/>
                 <a:cs typeface="Calibri" pitchFamily="34" charset="-120"/>
               </a:rPr>
-              <a:t>A 10 Mbit link passes 826 pkt/s; 130,000 drops/s is impossible</a:t>
-            </a:r>
-            <a:endParaRPr lang="en-US" sz="1250" dirty="0"/>
-          </a:p>
-        </p:txBody>
-      </p:sp>
-      <p:sp>
-        <p:nvSpPr>
-          <p:cNvPr id="10" name="Shape 8"/>
+              <a:t>Parts 2–4 shaped the acknowledgement direction. 66 bytes/packet.</a:t>
+            </a:r>
+            <a:endParaRPr lang="en-US" sz="1150" dirty="0"/>
+          </a:p>
+        </p:txBody>
+      </p:sp>
+      <p:sp>
+        <p:nvSpPr>
+          <p:cNvPr id="13" name="Shape 11"/>
           <p:cNvSpPr/>
           <p:nvPr/>
         </p:nvSpPr>
         <p:spPr>
           <a:xfrm>
-            <a:off x="640080" y="3429000"/>
-            <a:ext cx="10881360" cy="749808"/>
+            <a:off x="640080" y="2203704"/>
+            <a:ext cx="5349240" cy="932688"/>
           </a:xfrm>
           <a:prstGeom prst="roundRect">
             <a:avLst>
-              <a:gd name="adj" fmla="val 9756"/>
+              <a:gd name="adj" fmla="val 7843"/>
             </a:avLst>
           </a:prstGeom>
           <a:solidFill>
@@ -6089,14 +5795,78 @@
       </p:sp>
       <p:sp>
         <p:nvSpPr>
-          <p:cNvPr id="11" name="Text 9"/>
-          <p:cNvSpPr txBox="1"/>
-          <p:nvPr/>
-        </p:nvSpPr>
-        <p:spPr>
-          <a:xfrm>
-            <a:off x="960120" y="3502152"/>
-            <a:ext cx="5394960" cy="347472"/>
+          <p:cNvPr id="14" name="Shape 12"/>
+          <p:cNvSpPr/>
+          <p:nvPr/>
+        </p:nvSpPr>
+        <p:spPr>
+          <a:xfrm>
+            <a:off x="868680" y="2450592"/>
+            <a:ext cx="420624" cy="420624"/>
+          </a:xfrm>
+          <a:prstGeom prst="ellipse">
+            <a:avLst/>
+          </a:prstGeom>
+          <a:solidFill>
+            <a:srgbClr val="065A82"/>
+          </a:solidFill>
+          <a:ln w="12700">
+            <a:solidFill>
+              <a:srgbClr val="333333"/>
+            </a:solidFill>
+            <a:prstDash val="solid"/>
+          </a:ln>
+        </p:spPr>
+      </p:sp>
+      <p:sp>
+        <p:nvSpPr>
+          <p:cNvPr id="15" name="Text 13"/>
+          <p:cNvSpPr txBox="1"/>
+          <p:nvPr/>
+        </p:nvSpPr>
+        <p:spPr>
+          <a:xfrm>
+            <a:off x="868680" y="2450592"/>
+            <a:ext cx="420624" cy="420624"/>
+          </a:xfrm>
+          <a:prstGeom prst="rect">
+            <a:avLst/>
+          </a:prstGeom>
+          <a:noFill/>
+          <a:ln/>
+        </p:spPr>
+        <p:txBody>
+          <a:bodyPr wrap="square" lIns="0" tIns="0" rIns="0" bIns="0" rtlCol="0" anchor="ctr"/>
+          <a:lstStyle/>
+          <a:p>
+            <a:pPr algn="ctr" indent="0" marL="0">
+              <a:buNone/>
+            </a:pPr>
+            <a:r>
+              <a:rPr lang="en-US" sz="1300" b="1" dirty="0">
+                <a:solidFill>
+                  <a:srgbClr val="FFFFFF"/>
+                </a:solidFill>
+                <a:latin typeface="Calibri" pitchFamily="34" charset="0"/>
+                <a:ea typeface="Calibri" pitchFamily="34" charset="-122"/>
+                <a:cs typeface="Calibri" pitchFamily="34" charset="-120"/>
+              </a:rPr>
+              <a:t>3</a:t>
+            </a:r>
+            <a:endParaRPr lang="en-US" sz="1300" dirty="0"/>
+          </a:p>
+        </p:txBody>
+      </p:sp>
+      <p:sp>
+        <p:nvSpPr>
+          <p:cNvPr id="16" name="Text 14"/>
+          <p:cNvSpPr txBox="1"/>
+          <p:nvPr/>
+        </p:nvSpPr>
+        <p:spPr>
+          <a:xfrm>
+            <a:off x="1417320" y="2295144"/>
+            <a:ext cx="4434840" cy="301752"/>
           </a:xfrm>
           <a:prstGeom prst="rect">
             <a:avLst/>
@@ -6114,13 +5884,13 @@
             <a:r>
               <a:rPr lang="en-US" sz="1400" b="1" dirty="0">
                 <a:solidFill>
-                  <a:srgbClr val="065A82"/>
-                </a:solidFill>
-                <a:latin typeface="Calibri" pitchFamily="34" charset="0"/>
-                <a:ea typeface="Calibri" pitchFamily="34" charset="-122"/>
-                <a:cs typeface="Calibri" pitchFamily="34" charset="-120"/>
-              </a:rPr>
-              <a:t>Does varying a control input change the output?</a:t>
+                  <a:srgbClr val="13233B"/>
+                </a:solidFill>
+                <a:latin typeface="Calibri" pitchFamily="34" charset="0"/>
+                <a:ea typeface="Calibri" pitchFamily="34" charset="-122"/>
+                <a:cs typeface="Calibri" pitchFamily="34" charset="-120"/>
+              </a:rPr>
+              <a:t>No RTT ever measured</a:t>
             </a:r>
             <a:endParaRPr lang="en-US" sz="1400" dirty="0"/>
           </a:p>
@@ -6128,30 +5898,30 @@
       </p:sp>
       <p:sp>
         <p:nvSpPr>
-          <p:cNvPr id="12" name="Text 10"/>
-          <p:cNvSpPr txBox="1"/>
-          <p:nvPr/>
-        </p:nvSpPr>
-        <p:spPr>
-          <a:xfrm>
-            <a:off x="960120" y="3831336"/>
-            <a:ext cx="10241280" cy="310896"/>
-          </a:xfrm>
-          <a:prstGeom prst="rect">
-            <a:avLst/>
-          </a:prstGeom>
-          <a:noFill/>
-          <a:ln/>
-        </p:spPr>
-        <p:txBody>
-          <a:bodyPr wrap="square" lIns="0" tIns="0" rIns="0" bIns="0" rtlCol="0" anchor="ctr"/>
-          <a:lstStyle/>
-          <a:p>
-            <a:pPr indent="0" marL="0">
-              <a:buNone/>
-            </a:pPr>
-            <a:r>
-              <a:rPr lang="en-US" sz="1250" dirty="0">
+          <p:cNvPr id="17" name="Text 15"/>
+          <p:cNvSpPr txBox="1"/>
+          <p:nvPr/>
+        </p:nvSpPr>
+        <p:spPr>
+          <a:xfrm>
+            <a:off x="1417320" y="2606040"/>
+            <a:ext cx="4434840" cy="475488"/>
+          </a:xfrm>
+          <a:prstGeom prst="rect">
+            <a:avLst/>
+          </a:prstGeom>
+          <a:noFill/>
+          <a:ln/>
+        </p:spPr>
+        <p:txBody>
+          <a:bodyPr wrap="square" lIns="0" tIns="0" rIns="0" bIns="0" rtlCol="0" anchor="ctr"/>
+          <a:lstStyle/>
+          <a:p>
+            <a:pPr indent="0" marL="0">
+              <a:buNone/>
+            </a:pPr>
+            <a:r>
+              <a:rPr lang="en-US" sz="1150" dirty="0">
                 <a:solidFill>
                   <a:srgbClr val="3A4A5F"/>
                 </a:solidFill>
@@ -6159,26 +5929,26 @@
                 <a:ea typeface="Calibri" pitchFamily="34" charset="-122"/>
                 <a:cs typeface="Calibri" pitchFamily="34" charset="-120"/>
               </a:rPr>
-              <a:t>If not, the control path is inert however it is labelled</a:t>
-            </a:r>
-            <a:endParaRPr lang="en-US" sz="1250" dirty="0"/>
-          </a:p>
-        </p:txBody>
-      </p:sp>
-      <p:sp>
-        <p:nvSpPr>
-          <p:cNvPr id="13" name="Shape 11"/>
+              <a:t>The reported 0.541 / 2.200 / 2.445 ms have no source anywhere in the repository.</a:t>
+            </a:r>
+            <a:endParaRPr lang="en-US" sz="1150" dirty="0"/>
+          </a:p>
+        </p:txBody>
+      </p:sp>
+      <p:sp>
+        <p:nvSpPr>
+          <p:cNvPr id="18" name="Shape 16"/>
           <p:cNvSpPr/>
           <p:nvPr/>
         </p:nvSpPr>
         <p:spPr>
           <a:xfrm>
-            <a:off x="640080" y="4297680"/>
-            <a:ext cx="10881360" cy="749808"/>
+            <a:off x="6217920" y="2203704"/>
+            <a:ext cx="5349240" cy="932688"/>
           </a:xfrm>
           <a:prstGeom prst="roundRect">
             <a:avLst>
-              <a:gd name="adj" fmla="val 9756"/>
+              <a:gd name="adj" fmla="val 7843"/>
             </a:avLst>
           </a:prstGeom>
           <a:solidFill>
@@ -6201,14 +5971,78 @@
       </p:sp>
       <p:sp>
         <p:nvSpPr>
-          <p:cNvPr id="14" name="Text 12"/>
-          <p:cNvSpPr txBox="1"/>
-          <p:nvPr/>
-        </p:nvSpPr>
-        <p:spPr>
-          <a:xfrm>
-            <a:off x="960120" y="4370832"/>
-            <a:ext cx="5394960" cy="347472"/>
+          <p:cNvPr id="19" name="Shape 17"/>
+          <p:cNvSpPr/>
+          <p:nvPr/>
+        </p:nvSpPr>
+        <p:spPr>
+          <a:xfrm>
+            <a:off x="6446520" y="2450592"/>
+            <a:ext cx="420624" cy="420624"/>
+          </a:xfrm>
+          <a:prstGeom prst="ellipse">
+            <a:avLst/>
+          </a:prstGeom>
+          <a:solidFill>
+            <a:srgbClr val="065A82"/>
+          </a:solidFill>
+          <a:ln w="12700">
+            <a:solidFill>
+              <a:srgbClr val="333333"/>
+            </a:solidFill>
+            <a:prstDash val="solid"/>
+          </a:ln>
+        </p:spPr>
+      </p:sp>
+      <p:sp>
+        <p:nvSpPr>
+          <p:cNvPr id="20" name="Text 18"/>
+          <p:cNvSpPr txBox="1"/>
+          <p:nvPr/>
+        </p:nvSpPr>
+        <p:spPr>
+          <a:xfrm>
+            <a:off x="6446520" y="2450592"/>
+            <a:ext cx="420624" cy="420624"/>
+          </a:xfrm>
+          <a:prstGeom prst="rect">
+            <a:avLst/>
+          </a:prstGeom>
+          <a:noFill/>
+          <a:ln/>
+        </p:spPr>
+        <p:txBody>
+          <a:bodyPr wrap="square" lIns="0" tIns="0" rIns="0" bIns="0" rtlCol="0" anchor="ctr"/>
+          <a:lstStyle/>
+          <a:p>
+            <a:pPr algn="ctr" indent="0" marL="0">
+              <a:buNone/>
+            </a:pPr>
+            <a:r>
+              <a:rPr lang="en-US" sz="1300" b="1" dirty="0">
+                <a:solidFill>
+                  <a:srgbClr val="FFFFFF"/>
+                </a:solidFill>
+                <a:latin typeface="Calibri" pitchFamily="34" charset="0"/>
+                <a:ea typeface="Calibri" pitchFamily="34" charset="-122"/>
+                <a:cs typeface="Calibri" pitchFamily="34" charset="-120"/>
+              </a:rPr>
+              <a:t>4</a:t>
+            </a:r>
+            <a:endParaRPr lang="en-US" sz="1300" dirty="0"/>
+          </a:p>
+        </p:txBody>
+      </p:sp>
+      <p:sp>
+        <p:nvSpPr>
+          <p:cNvPr id="21" name="Text 19"/>
+          <p:cNvSpPr txBox="1"/>
+          <p:nvPr/>
+        </p:nvSpPr>
+        <p:spPr>
+          <a:xfrm>
+            <a:off x="6995160" y="2295144"/>
+            <a:ext cx="4434840" cy="301752"/>
           </a:xfrm>
           <a:prstGeom prst="rect">
             <a:avLst/>
@@ -6226,13 +6060,13 @@
             <a:r>
               <a:rPr lang="en-US" sz="1400" b="1" dirty="0">
                 <a:solidFill>
-                  <a:srgbClr val="065A82"/>
-                </a:solidFill>
-                <a:latin typeface="Calibri" pitchFamily="34" charset="0"/>
-                <a:ea typeface="Calibri" pitchFamily="34" charset="-122"/>
-                <a:cs typeface="Calibri" pitchFamily="34" charset="-120"/>
-              </a:rPr>
-              <a:t>Is the threshold reachable at all?</a:t>
+                  <a:srgbClr val="13233B"/>
+                </a:solidFill>
+                <a:latin typeface="Calibri" pitchFamily="34" charset="0"/>
+                <a:ea typeface="Calibri" pitchFamily="34" charset="-122"/>
+                <a:cs typeface="Calibri" pitchFamily="34" charset="-120"/>
+              </a:rPr>
+              <a:t>eBPF telemetry read zero</a:t>
             </a:r>
             <a:endParaRPr lang="en-US" sz="1400" dirty="0"/>
           </a:p>
@@ -6240,30 +6074,30 @@
       </p:sp>
       <p:sp>
         <p:nvSpPr>
-          <p:cNvPr id="15" name="Text 13"/>
-          <p:cNvSpPr txBox="1"/>
-          <p:nvPr/>
-        </p:nvSpPr>
-        <p:spPr>
-          <a:xfrm>
-            <a:off x="960120" y="4700016"/>
-            <a:ext cx="10241280" cy="310896"/>
-          </a:xfrm>
-          <a:prstGeom prst="rect">
-            <a:avLst/>
-          </a:prstGeom>
-          <a:noFill/>
-          <a:ln/>
-        </p:spPr>
-        <p:txBody>
-          <a:bodyPr wrap="square" lIns="0" tIns="0" rIns="0" bIns="0" rtlCol="0" anchor="ctr"/>
-          <a:lstStyle/>
-          <a:p>
-            <a:pPr indent="0" marL="0">
-              <a:buNone/>
-            </a:pPr>
-            <a:r>
-              <a:rPr lang="en-US" sz="1250" dirty="0">
+          <p:cNvPr id="22" name="Text 20"/>
+          <p:cNvSpPr txBox="1"/>
+          <p:nvPr/>
+        </p:nvSpPr>
+        <p:spPr>
+          <a:xfrm>
+            <a:off x="6995160" y="2606040"/>
+            <a:ext cx="4434840" cy="475488"/>
+          </a:xfrm>
+          <a:prstGeom prst="rect">
+            <a:avLst/>
+          </a:prstGeom>
+          <a:noFill/>
+          <a:ln/>
+        </p:spPr>
+        <p:txBody>
+          <a:bodyPr wrap="square" lIns="0" tIns="0" rIns="0" bIns="0" rtlCol="0" anchor="ctr"/>
+          <a:lstStyle/>
+          <a:p>
+            <a:pPr indent="0" marL="0">
+              <a:buNone/>
+            </a:pPr>
+            <a:r>
+              <a:rPr lang="en-US" sz="1150" dirty="0">
                 <a:solidFill>
                   <a:srgbClr val="3A4A5F"/>
                 </a:solidFill>
@@ -6271,26 +6105,26 @@
                 <a:ea typeface="Calibri" pitchFamily="34" charset="-122"/>
                 <a:cs typeface="Calibri" pitchFamily="34" charset="-120"/>
               </a:rPr>
-              <a:t>10 MB elephant threshold, 9.38 MB maximum flow share</a:t>
-            </a:r>
-            <a:endParaRPr lang="en-US" sz="1250" dirty="0"/>
-          </a:p>
-        </p:txBody>
-      </p:sp>
-      <p:sp>
-        <p:nvSpPr>
-          <p:cNvPr id="16" name="Shape 14"/>
+              <a:t>Three decode bugs: hex strings into a bare except, wrong struct offsets, CLOCK_REALTIME vs CLOCK_MONOTONIC (age = 56.8 years).</a:t>
+            </a:r>
+            <a:endParaRPr lang="en-US" sz="1150" dirty="0"/>
+          </a:p>
+        </p:txBody>
+      </p:sp>
+      <p:sp>
+        <p:nvSpPr>
+          <p:cNvPr id="23" name="Shape 21"/>
           <p:cNvSpPr/>
           <p:nvPr/>
         </p:nvSpPr>
         <p:spPr>
           <a:xfrm>
-            <a:off x="640080" y="5166360"/>
-            <a:ext cx="10881360" cy="749808"/>
+            <a:off x="640080" y="3264408"/>
+            <a:ext cx="5349240" cy="932688"/>
           </a:xfrm>
           <a:prstGeom prst="roundRect">
             <a:avLst>
-              <a:gd name="adj" fmla="val 9756"/>
+              <a:gd name="adj" fmla="val 7843"/>
             </a:avLst>
           </a:prstGeom>
           <a:solidFill>
@@ -6313,14 +6147,78 @@
       </p:sp>
       <p:sp>
         <p:nvSpPr>
-          <p:cNvPr id="17" name="Text 15"/>
-          <p:cNvSpPr txBox="1"/>
-          <p:nvPr/>
-        </p:nvSpPr>
-        <p:spPr>
-          <a:xfrm>
-            <a:off x="960120" y="5239512"/>
-            <a:ext cx="5394960" cy="347472"/>
+          <p:cNvPr id="24" name="Shape 22"/>
+          <p:cNvSpPr/>
+          <p:nvPr/>
+        </p:nvSpPr>
+        <p:spPr>
+          <a:xfrm>
+            <a:off x="868680" y="3511296"/>
+            <a:ext cx="420624" cy="420624"/>
+          </a:xfrm>
+          <a:prstGeom prst="ellipse">
+            <a:avLst/>
+          </a:prstGeom>
+          <a:solidFill>
+            <a:srgbClr val="065A82"/>
+          </a:solidFill>
+          <a:ln w="12700">
+            <a:solidFill>
+              <a:srgbClr val="333333"/>
+            </a:solidFill>
+            <a:prstDash val="solid"/>
+          </a:ln>
+        </p:spPr>
+      </p:sp>
+      <p:sp>
+        <p:nvSpPr>
+          <p:cNvPr id="25" name="Text 23"/>
+          <p:cNvSpPr txBox="1"/>
+          <p:nvPr/>
+        </p:nvSpPr>
+        <p:spPr>
+          <a:xfrm>
+            <a:off x="868680" y="3511296"/>
+            <a:ext cx="420624" cy="420624"/>
+          </a:xfrm>
+          <a:prstGeom prst="rect">
+            <a:avLst/>
+          </a:prstGeom>
+          <a:noFill/>
+          <a:ln/>
+        </p:spPr>
+        <p:txBody>
+          <a:bodyPr wrap="square" lIns="0" tIns="0" rIns="0" bIns="0" rtlCol="0" anchor="ctr"/>
+          <a:lstStyle/>
+          <a:p>
+            <a:pPr algn="ctr" indent="0" marL="0">
+              <a:buNone/>
+            </a:pPr>
+            <a:r>
+              <a:rPr lang="en-US" sz="1300" b="1" dirty="0">
+                <a:solidFill>
+                  <a:srgbClr val="FFFFFF"/>
+                </a:solidFill>
+                <a:latin typeface="Calibri" pitchFamily="34" charset="0"/>
+                <a:ea typeface="Calibri" pitchFamily="34" charset="-122"/>
+                <a:cs typeface="Calibri" pitchFamily="34" charset="-120"/>
+              </a:rPr>
+              <a:t>5</a:t>
+            </a:r>
+            <a:endParaRPr lang="en-US" sz="1300" dirty="0"/>
+          </a:p>
+        </p:txBody>
+      </p:sp>
+      <p:sp>
+        <p:nvSpPr>
+          <p:cNvPr id="26" name="Text 24"/>
+          <p:cNvSpPr txBox="1"/>
+          <p:nvPr/>
+        </p:nvSpPr>
+        <p:spPr>
+          <a:xfrm>
+            <a:off x="1417320" y="3355848"/>
+            <a:ext cx="4434840" cy="301752"/>
           </a:xfrm>
           <a:prstGeom prst="rect">
             <a:avLst/>
@@ -6338,13 +6236,13 @@
             <a:r>
               <a:rPr lang="en-US" sz="1400" b="1" dirty="0">
                 <a:solidFill>
-                  <a:srgbClr val="065A82"/>
-                </a:solidFill>
-                <a:latin typeface="Calibri" pitchFamily="34" charset="0"/>
-                <a:ea typeface="Calibri" pitchFamily="34" charset="-122"/>
-                <a:cs typeface="Calibri" pitchFamily="34" charset="-120"/>
-              </a:rPr>
-              <a:t>Does the reported value reach the kernel?</a:t>
+                  <a:srgbClr val="13233B"/>
+                </a:solidFill>
+                <a:latin typeface="Calibri" pitchFamily="34" charset="0"/>
+                <a:ea typeface="Calibri" pitchFamily="34" charset="-122"/>
+                <a:cs typeface="Calibri" pitchFamily="34" charset="-120"/>
+              </a:rPr>
+              <a:t>Elephant threshold unreachable</a:t>
             </a:r>
             <a:endParaRPr lang="en-US" sz="1400" dirty="0"/>
           </a:p>
@@ -6352,30 +6250,30 @@
       </p:sp>
       <p:sp>
         <p:nvSpPr>
-          <p:cNvPr id="18" name="Text 16"/>
-          <p:cNvSpPr txBox="1"/>
-          <p:nvPr/>
-        </p:nvSpPr>
-        <p:spPr>
-          <a:xfrm>
-            <a:off x="960120" y="5568696"/>
-            <a:ext cx="10241280" cy="310896"/>
-          </a:xfrm>
-          <a:prstGeom prst="rect">
-            <a:avLst/>
-          </a:prstGeom>
-          <a:noFill/>
-          <a:ln/>
-        </p:spPr>
-        <p:txBody>
-          <a:bodyPr wrap="square" lIns="0" tIns="0" rIns="0" bIns="0" rtlCol="0" anchor="ctr"/>
-          <a:lstStyle/>
-          <a:p>
-            <a:pPr indent="0" marL="0">
-              <a:buNone/>
-            </a:pPr>
-            <a:r>
-              <a:rPr lang="en-US" sz="1250" dirty="0">
+          <p:cNvPr id="27" name="Text 25"/>
+          <p:cNvSpPr txBox="1"/>
+          <p:nvPr/>
+        </p:nvSpPr>
+        <p:spPr>
+          <a:xfrm>
+            <a:off x="1417320" y="3666744"/>
+            <a:ext cx="4434840" cy="475488"/>
+          </a:xfrm>
+          <a:prstGeom prst="rect">
+            <a:avLst/>
+          </a:prstGeom>
+          <a:noFill/>
+          <a:ln/>
+        </p:spPr>
+        <p:txBody>
+          <a:bodyPr wrap="square" lIns="0" tIns="0" rIns="0" bIns="0" rtlCol="0" anchor="ctr"/>
+          <a:lstStyle/>
+          <a:p>
+            <a:pPr indent="0" marL="0">
+              <a:buNone/>
+            </a:pPr>
+            <a:r>
+              <a:rPr lang="en-US" sz="1150" dirty="0">
                 <a:solidFill>
                   <a:srgbClr val="3A4A5F"/>
                 </a:solidFill>
@@ -6383,21 +6281,373 @@
                 <a:ea typeface="Calibri" pitchFamily="34" charset="-122"/>
                 <a:cs typeface="Calibri" pitchFamily="34" charset="-120"/>
               </a:rPr>
-              <a:t>A float in userspace is not the qdisc parameter</a:t>
-            </a:r>
-            <a:endParaRPr lang="en-US" sz="1250" dirty="0"/>
-          </a:p>
-        </p:txBody>
-      </p:sp>
-      <p:sp>
-        <p:nvSpPr>
-          <p:cNvPr id="19" name="Text 17"/>
-          <p:cNvSpPr txBox="1"/>
-          <p:nvPr/>
-        </p:nvSpPr>
-        <p:spPr>
-          <a:xfrm>
-            <a:off x="640080" y="6080760"/>
+              <a:t>10 MB threshold, 9.38 MB maximum possible flow share. The classifier could never fire.</a:t>
+            </a:r>
+            <a:endParaRPr lang="en-US" sz="1150" dirty="0"/>
+          </a:p>
+        </p:txBody>
+      </p:sp>
+      <p:sp>
+        <p:nvSpPr>
+          <p:cNvPr id="28" name="Shape 26"/>
+          <p:cNvSpPr/>
+          <p:nvPr/>
+        </p:nvSpPr>
+        <p:spPr>
+          <a:xfrm>
+            <a:off x="6217920" y="3264408"/>
+            <a:ext cx="5349240" cy="932688"/>
+          </a:xfrm>
+          <a:prstGeom prst="roundRect">
+            <a:avLst>
+              <a:gd name="adj" fmla="val 7843"/>
+            </a:avLst>
+          </a:prstGeom>
+          <a:solidFill>
+            <a:srgbClr val="EEF4F8"/>
+          </a:solidFill>
+          <a:ln w="9525">
+            <a:solidFill>
+              <a:srgbClr val="D8E4EC"/>
+            </a:solidFill>
+            <a:prstDash val="solid"/>
+          </a:ln>
+          <a:effectLst>
+            <a:outerShdw sx="100000" sy="100000" kx="0" ky="0" algn="bl" rotWithShape="0" blurRad="50800" dist="12700" dir="5400000">
+              <a:srgbClr val="BFCEDA">
+                <a:alpha val="35000"/>
+              </a:srgbClr>
+            </a:outerShdw>
+          </a:effectLst>
+        </p:spPr>
+      </p:sp>
+      <p:sp>
+        <p:nvSpPr>
+          <p:cNvPr id="29" name="Shape 27"/>
+          <p:cNvSpPr/>
+          <p:nvPr/>
+        </p:nvSpPr>
+        <p:spPr>
+          <a:xfrm>
+            <a:off x="6446520" y="3511296"/>
+            <a:ext cx="420624" cy="420624"/>
+          </a:xfrm>
+          <a:prstGeom prst="ellipse">
+            <a:avLst/>
+          </a:prstGeom>
+          <a:solidFill>
+            <a:srgbClr val="065A82"/>
+          </a:solidFill>
+          <a:ln w="12700">
+            <a:solidFill>
+              <a:srgbClr val="333333"/>
+            </a:solidFill>
+            <a:prstDash val="solid"/>
+          </a:ln>
+        </p:spPr>
+      </p:sp>
+      <p:sp>
+        <p:nvSpPr>
+          <p:cNvPr id="30" name="Text 28"/>
+          <p:cNvSpPr txBox="1"/>
+          <p:nvPr/>
+        </p:nvSpPr>
+        <p:spPr>
+          <a:xfrm>
+            <a:off x="6446520" y="3511296"/>
+            <a:ext cx="420624" cy="420624"/>
+          </a:xfrm>
+          <a:prstGeom prst="rect">
+            <a:avLst/>
+          </a:prstGeom>
+          <a:noFill/>
+          <a:ln/>
+        </p:spPr>
+        <p:txBody>
+          <a:bodyPr wrap="square" lIns="0" tIns="0" rIns="0" bIns="0" rtlCol="0" anchor="ctr"/>
+          <a:lstStyle/>
+          <a:p>
+            <a:pPr algn="ctr" indent="0" marL="0">
+              <a:buNone/>
+            </a:pPr>
+            <a:r>
+              <a:rPr lang="en-US" sz="1300" b="1" dirty="0">
+                <a:solidFill>
+                  <a:srgbClr val="FFFFFF"/>
+                </a:solidFill>
+                <a:latin typeface="Calibri" pitchFamily="34" charset="0"/>
+                <a:ea typeface="Calibri" pitchFamily="34" charset="-122"/>
+                <a:cs typeface="Calibri" pitchFamily="34" charset="-120"/>
+              </a:rPr>
+              <a:t>6</a:t>
+            </a:r>
+            <a:endParaRPr lang="en-US" sz="1300" dirty="0"/>
+          </a:p>
+        </p:txBody>
+      </p:sp>
+      <p:sp>
+        <p:nvSpPr>
+          <p:cNvPr id="31" name="Text 29"/>
+          <p:cNvSpPr txBox="1"/>
+          <p:nvPr/>
+        </p:nvSpPr>
+        <p:spPr>
+          <a:xfrm>
+            <a:off x="6995160" y="3355848"/>
+            <a:ext cx="4434840" cy="301752"/>
+          </a:xfrm>
+          <a:prstGeom prst="rect">
+            <a:avLst/>
+          </a:prstGeom>
+          <a:noFill/>
+          <a:ln/>
+        </p:spPr>
+        <p:txBody>
+          <a:bodyPr wrap="square" lIns="0" tIns="0" rIns="0" bIns="0" rtlCol="0" anchor="ctr"/>
+          <a:lstStyle/>
+          <a:p>
+            <a:pPr indent="0" marL="0">
+              <a:buNone/>
+            </a:pPr>
+            <a:r>
+              <a:rPr lang="en-US" sz="1400" b="1" dirty="0">
+                <a:solidFill>
+                  <a:srgbClr val="13233B"/>
+                </a:solidFill>
+                <a:latin typeface="Calibri" pitchFamily="34" charset="0"/>
+                <a:ea typeface="Calibri" pitchFamily="34" charset="-122"/>
+                <a:cs typeface="Calibri" pitchFamily="34" charset="-120"/>
+              </a:rPr>
+              <a:t>Prediction had no effect</a:t>
+            </a:r>
+            <a:endParaRPr lang="en-US" sz="1400" dirty="0"/>
+          </a:p>
+        </p:txBody>
+      </p:sp>
+      <p:sp>
+        <p:nvSpPr>
+          <p:cNvPr id="32" name="Text 30"/>
+          <p:cNvSpPr txBox="1"/>
+          <p:nvPr/>
+        </p:nvSpPr>
+        <p:spPr>
+          <a:xfrm>
+            <a:off x="6995160" y="3666744"/>
+            <a:ext cx="4434840" cy="475488"/>
+          </a:xfrm>
+          <a:prstGeom prst="rect">
+            <a:avLst/>
+          </a:prstGeom>
+          <a:noFill/>
+          <a:ln/>
+        </p:spPr>
+        <p:txBody>
+          <a:bodyPr wrap="square" lIns="0" tIns="0" rIns="0" bIns="0" rtlCol="0" anchor="ctr"/>
+          <a:lstStyle/>
+          <a:p>
+            <a:pPr indent="0" marL="0">
+              <a:buNone/>
+            </a:pPr>
+            <a:r>
+              <a:rPr lang="en-US" sz="1150" dirty="0">
+                <a:solidFill>
+                  <a:srgbClr val="3A4A5F"/>
+                </a:solidFill>
+                <a:latin typeface="Calibri" pitchFamily="34" charset="0"/>
+                <a:ea typeface="Calibri" pitchFamily="34" charset="-122"/>
+                <a:cs typeface="Calibri" pitchFamily="34" charset="-120"/>
+              </a:rPr>
+              <a:t>All 375 logged adjustments applied the identical action.</a:t>
+            </a:r>
+            <a:endParaRPr lang="en-US" sz="1150" dirty="0"/>
+          </a:p>
+        </p:txBody>
+      </p:sp>
+      <p:sp>
+        <p:nvSpPr>
+          <p:cNvPr id="33" name="Shape 31"/>
+          <p:cNvSpPr/>
+          <p:nvPr/>
+        </p:nvSpPr>
+        <p:spPr>
+          <a:xfrm>
+            <a:off x="640080" y="4325112"/>
+            <a:ext cx="10881360" cy="932688"/>
+          </a:xfrm>
+          <a:prstGeom prst="roundRect">
+            <a:avLst>
+              <a:gd name="adj" fmla="val 7843"/>
+            </a:avLst>
+          </a:prstGeom>
+          <a:solidFill>
+            <a:srgbClr val="FBEEF0"/>
+          </a:solidFill>
+          <a:ln w="9525">
+            <a:solidFill>
+              <a:srgbClr val="D8E4EC"/>
+            </a:solidFill>
+            <a:prstDash val="solid"/>
+          </a:ln>
+          <a:effectLst>
+            <a:outerShdw sx="100000" sy="100000" kx="0" ky="0" algn="bl" rotWithShape="0" blurRad="50800" dist="12700" dir="5400000">
+              <a:srgbClr val="BFCEDA">
+                <a:alpha val="35000"/>
+              </a:srgbClr>
+            </a:outerShdw>
+          </a:effectLst>
+        </p:spPr>
+      </p:sp>
+      <p:sp>
+        <p:nvSpPr>
+          <p:cNvPr id="34" name="Shape 32"/>
+          <p:cNvSpPr/>
+          <p:nvPr/>
+        </p:nvSpPr>
+        <p:spPr>
+          <a:xfrm>
+            <a:off x="896112" y="4572000"/>
+            <a:ext cx="420624" cy="420624"/>
+          </a:xfrm>
+          <a:prstGeom prst="ellipse">
+            <a:avLst/>
+          </a:prstGeom>
+          <a:solidFill>
+            <a:srgbClr val="B23A48"/>
+          </a:solidFill>
+          <a:ln w="12700">
+            <a:solidFill>
+              <a:srgbClr val="333333"/>
+            </a:solidFill>
+            <a:prstDash val="solid"/>
+          </a:ln>
+        </p:spPr>
+      </p:sp>
+      <p:sp>
+        <p:nvSpPr>
+          <p:cNvPr id="35" name="Text 33"/>
+          <p:cNvSpPr txBox="1"/>
+          <p:nvPr/>
+        </p:nvSpPr>
+        <p:spPr>
+          <a:xfrm>
+            <a:off x="896112" y="4572000"/>
+            <a:ext cx="420624" cy="420624"/>
+          </a:xfrm>
+          <a:prstGeom prst="rect">
+            <a:avLst/>
+          </a:prstGeom>
+          <a:noFill/>
+          <a:ln/>
+        </p:spPr>
+        <p:txBody>
+          <a:bodyPr wrap="square" lIns="0" tIns="0" rIns="0" bIns="0" rtlCol="0" anchor="ctr"/>
+          <a:lstStyle/>
+          <a:p>
+            <a:pPr algn="ctr" indent="0" marL="0">
+              <a:buNone/>
+            </a:pPr>
+            <a:r>
+              <a:rPr lang="en-US" sz="1300" b="1" dirty="0">
+                <a:solidFill>
+                  <a:srgbClr val="FFFFFF"/>
+                </a:solidFill>
+                <a:latin typeface="Calibri" pitchFamily="34" charset="0"/>
+                <a:ea typeface="Calibri" pitchFamily="34" charset="-122"/>
+                <a:cs typeface="Calibri" pitchFamily="34" charset="-120"/>
+              </a:rPr>
+              <a:t>7</a:t>
+            </a:r>
+            <a:endParaRPr lang="en-US" sz="1300" dirty="0"/>
+          </a:p>
+        </p:txBody>
+      </p:sp>
+      <p:sp>
+        <p:nvSpPr>
+          <p:cNvPr id="36" name="Text 34"/>
+          <p:cNvSpPr txBox="1"/>
+          <p:nvPr/>
+        </p:nvSpPr>
+        <p:spPr>
+          <a:xfrm>
+            <a:off x="1481328" y="4416552"/>
+            <a:ext cx="9966960" cy="301752"/>
+          </a:xfrm>
+          <a:prstGeom prst="rect">
+            <a:avLst/>
+          </a:prstGeom>
+          <a:noFill/>
+          <a:ln/>
+        </p:spPr>
+        <p:txBody>
+          <a:bodyPr wrap="square" lIns="0" tIns="0" rIns="0" bIns="0" rtlCol="0" anchor="ctr"/>
+          <a:lstStyle/>
+          <a:p>
+            <a:pPr indent="0" marL="0">
+              <a:buNone/>
+            </a:pPr>
+            <a:r>
+              <a:rPr lang="en-US" sz="1400" b="1" dirty="0">
+                <a:solidFill>
+                  <a:srgbClr val="B23A48"/>
+                </a:solidFill>
+                <a:latin typeface="Calibri" pitchFamily="34" charset="0"/>
+                <a:ea typeface="Calibri" pitchFamily="34" charset="-122"/>
+                <a:cs typeface="Calibri" pitchFamily="34" charset="-120"/>
+              </a:rPr>
+              <a:t>Headline figures hardcoded</a:t>
+            </a:r>
+            <a:endParaRPr lang="en-US" sz="1400" dirty="0"/>
+          </a:p>
+        </p:txBody>
+      </p:sp>
+      <p:sp>
+        <p:nvSpPr>
+          <p:cNvPr id="37" name="Text 35"/>
+          <p:cNvSpPr txBox="1"/>
+          <p:nvPr/>
+        </p:nvSpPr>
+        <p:spPr>
+          <a:xfrm>
+            <a:off x="1481328" y="4727448"/>
+            <a:ext cx="9966960" cy="457200"/>
+          </a:xfrm>
+          <a:prstGeom prst="rect">
+            <a:avLst/>
+          </a:prstGeom>
+          <a:noFill/>
+          <a:ln/>
+        </p:spPr>
+        <p:txBody>
+          <a:bodyPr wrap="square" lIns="0" tIns="0" rIns="0" bIns="0" rtlCol="0" anchor="ctr"/>
+          <a:lstStyle/>
+          <a:p>
+            <a:pPr indent="0" marL="0">
+              <a:buNone/>
+            </a:pPr>
+            <a:r>
+              <a:rPr lang="en-US" sz="1200" dirty="0">
+                <a:solidFill>
+                  <a:srgbClr val="3A4A5F"/>
+                </a:solidFill>
+                <a:latin typeface="Calibri" pitchFamily="34" charset="0"/>
+                <a:ea typeface="Calibri" pitchFamily="34" charset="-122"/>
+                <a:cs typeface="Calibri" pitchFamily="34" charset="-120"/>
+              </a:rPr>
+              <a:t>"12× faster" is the literal array [120, 70, 60, 5]. No stabilisation time was ever measured.</a:t>
+            </a:r>
+            <a:endParaRPr lang="en-US" sz="1200" dirty="0"/>
+          </a:p>
+        </p:txBody>
+      </p:sp>
+      <p:sp>
+        <p:nvSpPr>
+          <p:cNvPr id="38" name="Text 36"/>
+          <p:cNvSpPr txBox="1"/>
+          <p:nvPr/>
+        </p:nvSpPr>
+        <p:spPr>
+          <a:xfrm>
+            <a:off x="640080" y="5852160"/>
             <a:ext cx="10881360" cy="365760"/>
           </a:xfrm>
           <a:prstGeom prst="rect">
@@ -6414,17 +6664,17 @@
               <a:buNone/>
             </a:pPr>
             <a:r>
-              <a:rPr lang="en-US" sz="1400" i="1" dirty="0">
-                <a:solidFill>
-                  <a:srgbClr val="13233B"/>
-                </a:solidFill>
-                <a:latin typeface="Calibri" pitchFamily="34" charset="0"/>
-                <a:ea typeface="Calibri" pitchFamily="34" charset="-122"/>
-                <a:cs typeface="Calibri" pitchFamily="34" charset="-120"/>
-              </a:rPr>
-              <a:t>We think this is the most transferable part of the work.</a:t>
-            </a:r>
-            <a:endParaRPr lang="en-US" sz="1400" dirty="0"/>
+              <a:rPr lang="en-US" sz="1300" i="1" dirty="0">
+                <a:solidFill>
+                  <a:srgbClr val="7B8A9C"/>
+                </a:solidFill>
+                <a:latin typeface="Calibri" pitchFamily="34" charset="0"/>
+                <a:ea typeface="Calibri" pitchFamily="34" charset="-122"/>
+                <a:cs typeface="Calibri" pitchFamily="34" charset="-120"/>
+              </a:rPr>
+              <a:t>All seven are pinned by regression tests that fail against the original behaviour.</a:t>
+            </a:r>
+            <a:endParaRPr lang="en-US" sz="1300" dirty="0"/>
           </a:p>
         </p:txBody>
       </p:sp>
@@ -6493,6 +6743,715 @@
                 <a:ea typeface="Cambria" pitchFamily="34" charset="-122"/>
                 <a:cs typeface="Cambria" pitchFamily="34" charset="-120"/>
               </a:rPr>
+              <a:t>How each was caught</a:t>
+            </a:r>
+            <a:endParaRPr lang="en-US" sz="3200" dirty="0"/>
+          </a:p>
+        </p:txBody>
+      </p:sp>
+      <p:sp>
+        <p:nvSpPr>
+          <p:cNvPr id="3" name="Text 1"/>
+          <p:cNvSpPr txBox="1"/>
+          <p:nvPr/>
+        </p:nvSpPr>
+        <p:spPr>
+          <a:xfrm>
+            <a:off x="640080" y="1097280"/>
+            <a:ext cx="10881360" cy="411480"/>
+          </a:xfrm>
+          <a:prstGeom prst="rect">
+            <a:avLst/>
+          </a:prstGeom>
+          <a:noFill/>
+          <a:ln/>
+        </p:spPr>
+        <p:txBody>
+          <a:bodyPr wrap="square" rtlCol="0" anchor="ctr"/>
+          <a:lstStyle/>
+          <a:p>
+            <a:pPr indent="0" marL="0">
+              <a:buNone/>
+            </a:pPr>
+            <a:r>
+              <a:rPr lang="en-US" sz="1500" dirty="0">
+                <a:solidFill>
+                  <a:srgbClr val="3A4A5F"/>
+                </a:solidFill>
+                <a:latin typeface="Calibri" pitchFamily="34" charset="0"/>
+                <a:ea typeface="Calibri" pitchFamily="34" charset="-122"/>
+                <a:cs typeface="Calibri" pitchFamily="34" charset="-120"/>
+              </a:rPr>
+              <a:t>Not one was visible from a summary statistic. Every one was found by checking a physical invariant.</a:t>
+            </a:r>
+            <a:endParaRPr lang="en-US" sz="1500" dirty="0"/>
+          </a:p>
+        </p:txBody>
+      </p:sp>
+      <p:sp>
+        <p:nvSpPr>
+          <p:cNvPr id="4" name="Shape 2"/>
+          <p:cNvSpPr/>
+          <p:nvPr/>
+        </p:nvSpPr>
+        <p:spPr>
+          <a:xfrm>
+            <a:off x="640080" y="1691640"/>
+            <a:ext cx="10881360" cy="749808"/>
+          </a:xfrm>
+          <a:prstGeom prst="roundRect">
+            <a:avLst>
+              <a:gd name="adj" fmla="val 9756"/>
+            </a:avLst>
+          </a:prstGeom>
+          <a:solidFill>
+            <a:srgbClr val="EEF4F8"/>
+          </a:solidFill>
+          <a:ln w="9525">
+            <a:solidFill>
+              <a:srgbClr val="D8E4EC"/>
+            </a:solidFill>
+            <a:prstDash val="solid"/>
+          </a:ln>
+          <a:effectLst>
+            <a:outerShdw sx="100000" sy="100000" kx="0" ky="0" algn="bl" rotWithShape="0" blurRad="50800" dist="12700" dir="5400000">
+              <a:srgbClr val="BFCEDA">
+                <a:alpha val="35000"/>
+              </a:srgbClr>
+            </a:outerShdw>
+          </a:effectLst>
+        </p:spPr>
+      </p:sp>
+      <p:sp>
+        <p:nvSpPr>
+          <p:cNvPr id="5" name="Text 3"/>
+          <p:cNvSpPr txBox="1"/>
+          <p:nvPr/>
+        </p:nvSpPr>
+        <p:spPr>
+          <a:xfrm>
+            <a:off x="960120" y="1764792"/>
+            <a:ext cx="5394960" cy="347472"/>
+          </a:xfrm>
+          <a:prstGeom prst="rect">
+            <a:avLst/>
+          </a:prstGeom>
+          <a:noFill/>
+          <a:ln/>
+        </p:spPr>
+        <p:txBody>
+          <a:bodyPr wrap="square" lIns="0" tIns="0" rIns="0" bIns="0" rtlCol="0" anchor="ctr"/>
+          <a:lstStyle/>
+          <a:p>
+            <a:pPr indent="0" marL="0">
+              <a:buNone/>
+            </a:pPr>
+            <a:r>
+              <a:rPr lang="en-US" sz="1400" b="1" dirty="0">
+                <a:solidFill>
+                  <a:srgbClr val="065A82"/>
+                </a:solidFill>
+                <a:latin typeface="Calibri" pitchFamily="34" charset="0"/>
+                <a:ea typeface="Calibri" pitchFamily="34" charset="-122"/>
+                <a:cs typeface="Calibri" pitchFamily="34" charset="-120"/>
+              </a:rPr>
+              <a:t>Bytes ÷ packets on the monitored queue</a:t>
+            </a:r>
+            <a:endParaRPr lang="en-US" sz="1400" dirty="0"/>
+          </a:p>
+        </p:txBody>
+      </p:sp>
+      <p:sp>
+        <p:nvSpPr>
+          <p:cNvPr id="6" name="Text 4"/>
+          <p:cNvSpPr txBox="1"/>
+          <p:nvPr/>
+        </p:nvSpPr>
+        <p:spPr>
+          <a:xfrm>
+            <a:off x="960120" y="2093976"/>
+            <a:ext cx="10241280" cy="310896"/>
+          </a:xfrm>
+          <a:prstGeom prst="rect">
+            <a:avLst/>
+          </a:prstGeom>
+          <a:noFill/>
+          <a:ln/>
+        </p:spPr>
+        <p:txBody>
+          <a:bodyPr wrap="square" lIns="0" tIns="0" rIns="0" bIns="0" rtlCol="0" anchor="ctr"/>
+          <a:lstStyle/>
+          <a:p>
+            <a:pPr indent="0" marL="0">
+              <a:buNone/>
+            </a:pPr>
+            <a:r>
+              <a:rPr lang="en-US" sz="1250" dirty="0">
+                <a:solidFill>
+                  <a:srgbClr val="3A4A5F"/>
+                </a:solidFill>
+                <a:latin typeface="Calibri" pitchFamily="34" charset="0"/>
+                <a:ea typeface="Calibri" pitchFamily="34" charset="-122"/>
+                <a:cs typeface="Calibri" pitchFamily="34" charset="-120"/>
+              </a:rPr>
+              <a:t>66 B means you are queueing ACKs, not data</a:t>
+            </a:r>
+            <a:endParaRPr lang="en-US" sz="1250" dirty="0"/>
+          </a:p>
+        </p:txBody>
+      </p:sp>
+      <p:sp>
+        <p:nvSpPr>
+          <p:cNvPr id="7" name="Shape 5"/>
+          <p:cNvSpPr/>
+          <p:nvPr/>
+        </p:nvSpPr>
+        <p:spPr>
+          <a:xfrm>
+            <a:off x="640080" y="2560320"/>
+            <a:ext cx="10881360" cy="749808"/>
+          </a:xfrm>
+          <a:prstGeom prst="roundRect">
+            <a:avLst>
+              <a:gd name="adj" fmla="val 9756"/>
+            </a:avLst>
+          </a:prstGeom>
+          <a:solidFill>
+            <a:srgbClr val="EEF4F8"/>
+          </a:solidFill>
+          <a:ln w="9525">
+            <a:solidFill>
+              <a:srgbClr val="D8E4EC"/>
+            </a:solidFill>
+            <a:prstDash val="solid"/>
+          </a:ln>
+          <a:effectLst>
+            <a:outerShdw sx="100000" sy="100000" kx="0" ky="0" algn="bl" rotWithShape="0" blurRad="50800" dist="12700" dir="5400000">
+              <a:srgbClr val="BFCEDA">
+                <a:alpha val="35000"/>
+              </a:srgbClr>
+            </a:outerShdw>
+          </a:effectLst>
+        </p:spPr>
+      </p:sp>
+      <p:sp>
+        <p:nvSpPr>
+          <p:cNvPr id="8" name="Text 6"/>
+          <p:cNvSpPr txBox="1"/>
+          <p:nvPr/>
+        </p:nvSpPr>
+        <p:spPr>
+          <a:xfrm>
+            <a:off x="960120" y="2633472"/>
+            <a:ext cx="5394960" cy="347472"/>
+          </a:xfrm>
+          <a:prstGeom prst="rect">
+            <a:avLst/>
+          </a:prstGeom>
+          <a:noFill/>
+          <a:ln/>
+        </p:spPr>
+        <p:txBody>
+          <a:bodyPr wrap="square" lIns="0" tIns="0" rIns="0" bIns="0" rtlCol="0" anchor="ctr"/>
+          <a:lstStyle/>
+          <a:p>
+            <a:pPr indent="0" marL="0">
+              <a:buNone/>
+            </a:pPr>
+            <a:r>
+              <a:rPr lang="en-US" sz="1400" b="1" dirty="0">
+                <a:solidFill>
+                  <a:srgbClr val="065A82"/>
+                </a:solidFill>
+                <a:latin typeface="Calibri" pitchFamily="34" charset="0"/>
+                <a:ea typeface="Calibri" pitchFamily="34" charset="-122"/>
+                <a:cs typeface="Calibri" pitchFamily="34" charset="-120"/>
+              </a:rPr>
+              <a:t>Drop rate vs the link's packet rate</a:t>
+            </a:r>
+            <a:endParaRPr lang="en-US" sz="1400" dirty="0"/>
+          </a:p>
+        </p:txBody>
+      </p:sp>
+      <p:sp>
+        <p:nvSpPr>
+          <p:cNvPr id="9" name="Text 7"/>
+          <p:cNvSpPr txBox="1"/>
+          <p:nvPr/>
+        </p:nvSpPr>
+        <p:spPr>
+          <a:xfrm>
+            <a:off x="960120" y="2962656"/>
+            <a:ext cx="10241280" cy="310896"/>
+          </a:xfrm>
+          <a:prstGeom prst="rect">
+            <a:avLst/>
+          </a:prstGeom>
+          <a:noFill/>
+          <a:ln/>
+        </p:spPr>
+        <p:txBody>
+          <a:bodyPr wrap="square" lIns="0" tIns="0" rIns="0" bIns="0" rtlCol="0" anchor="ctr"/>
+          <a:lstStyle/>
+          <a:p>
+            <a:pPr indent="0" marL="0">
+              <a:buNone/>
+            </a:pPr>
+            <a:r>
+              <a:rPr lang="en-US" sz="1250" dirty="0">
+                <a:solidFill>
+                  <a:srgbClr val="3A4A5F"/>
+                </a:solidFill>
+                <a:latin typeface="Calibri" pitchFamily="34" charset="0"/>
+                <a:ea typeface="Calibri" pitchFamily="34" charset="-122"/>
+                <a:cs typeface="Calibri" pitchFamily="34" charset="-120"/>
+              </a:rPr>
+              <a:t>A 10 Mbit link passes 826 pkt/s; 130,000 drops/s is impossible</a:t>
+            </a:r>
+            <a:endParaRPr lang="en-US" sz="1250" dirty="0"/>
+          </a:p>
+        </p:txBody>
+      </p:sp>
+      <p:sp>
+        <p:nvSpPr>
+          <p:cNvPr id="10" name="Shape 8"/>
+          <p:cNvSpPr/>
+          <p:nvPr/>
+        </p:nvSpPr>
+        <p:spPr>
+          <a:xfrm>
+            <a:off x="640080" y="3429000"/>
+            <a:ext cx="10881360" cy="749808"/>
+          </a:xfrm>
+          <a:prstGeom prst="roundRect">
+            <a:avLst>
+              <a:gd name="adj" fmla="val 9756"/>
+            </a:avLst>
+          </a:prstGeom>
+          <a:solidFill>
+            <a:srgbClr val="EEF4F8"/>
+          </a:solidFill>
+          <a:ln w="9525">
+            <a:solidFill>
+              <a:srgbClr val="D8E4EC"/>
+            </a:solidFill>
+            <a:prstDash val="solid"/>
+          </a:ln>
+          <a:effectLst>
+            <a:outerShdw sx="100000" sy="100000" kx="0" ky="0" algn="bl" rotWithShape="0" blurRad="50800" dist="12700" dir="5400000">
+              <a:srgbClr val="BFCEDA">
+                <a:alpha val="35000"/>
+              </a:srgbClr>
+            </a:outerShdw>
+          </a:effectLst>
+        </p:spPr>
+      </p:sp>
+      <p:sp>
+        <p:nvSpPr>
+          <p:cNvPr id="11" name="Text 9"/>
+          <p:cNvSpPr txBox="1"/>
+          <p:nvPr/>
+        </p:nvSpPr>
+        <p:spPr>
+          <a:xfrm>
+            <a:off x="960120" y="3502152"/>
+            <a:ext cx="5394960" cy="347472"/>
+          </a:xfrm>
+          <a:prstGeom prst="rect">
+            <a:avLst/>
+          </a:prstGeom>
+          <a:noFill/>
+          <a:ln/>
+        </p:spPr>
+        <p:txBody>
+          <a:bodyPr wrap="square" lIns="0" tIns="0" rIns="0" bIns="0" rtlCol="0" anchor="ctr"/>
+          <a:lstStyle/>
+          <a:p>
+            <a:pPr indent="0" marL="0">
+              <a:buNone/>
+            </a:pPr>
+            <a:r>
+              <a:rPr lang="en-US" sz="1400" b="1" dirty="0">
+                <a:solidFill>
+                  <a:srgbClr val="065A82"/>
+                </a:solidFill>
+                <a:latin typeface="Calibri" pitchFamily="34" charset="0"/>
+                <a:ea typeface="Calibri" pitchFamily="34" charset="-122"/>
+                <a:cs typeface="Calibri" pitchFamily="34" charset="-120"/>
+              </a:rPr>
+              <a:t>Does varying a control input change the output?</a:t>
+            </a:r>
+            <a:endParaRPr lang="en-US" sz="1400" dirty="0"/>
+          </a:p>
+        </p:txBody>
+      </p:sp>
+      <p:sp>
+        <p:nvSpPr>
+          <p:cNvPr id="12" name="Text 10"/>
+          <p:cNvSpPr txBox="1"/>
+          <p:nvPr/>
+        </p:nvSpPr>
+        <p:spPr>
+          <a:xfrm>
+            <a:off x="960120" y="3831336"/>
+            <a:ext cx="10241280" cy="310896"/>
+          </a:xfrm>
+          <a:prstGeom prst="rect">
+            <a:avLst/>
+          </a:prstGeom>
+          <a:noFill/>
+          <a:ln/>
+        </p:spPr>
+        <p:txBody>
+          <a:bodyPr wrap="square" lIns="0" tIns="0" rIns="0" bIns="0" rtlCol="0" anchor="ctr"/>
+          <a:lstStyle/>
+          <a:p>
+            <a:pPr indent="0" marL="0">
+              <a:buNone/>
+            </a:pPr>
+            <a:r>
+              <a:rPr lang="en-US" sz="1250" dirty="0">
+                <a:solidFill>
+                  <a:srgbClr val="3A4A5F"/>
+                </a:solidFill>
+                <a:latin typeface="Calibri" pitchFamily="34" charset="0"/>
+                <a:ea typeface="Calibri" pitchFamily="34" charset="-122"/>
+                <a:cs typeface="Calibri" pitchFamily="34" charset="-120"/>
+              </a:rPr>
+              <a:t>If not, the control path is inert however it is labelled</a:t>
+            </a:r>
+            <a:endParaRPr lang="en-US" sz="1250" dirty="0"/>
+          </a:p>
+        </p:txBody>
+      </p:sp>
+      <p:sp>
+        <p:nvSpPr>
+          <p:cNvPr id="13" name="Shape 11"/>
+          <p:cNvSpPr/>
+          <p:nvPr/>
+        </p:nvSpPr>
+        <p:spPr>
+          <a:xfrm>
+            <a:off x="640080" y="4297680"/>
+            <a:ext cx="10881360" cy="749808"/>
+          </a:xfrm>
+          <a:prstGeom prst="roundRect">
+            <a:avLst>
+              <a:gd name="adj" fmla="val 9756"/>
+            </a:avLst>
+          </a:prstGeom>
+          <a:solidFill>
+            <a:srgbClr val="EEF4F8"/>
+          </a:solidFill>
+          <a:ln w="9525">
+            <a:solidFill>
+              <a:srgbClr val="D8E4EC"/>
+            </a:solidFill>
+            <a:prstDash val="solid"/>
+          </a:ln>
+          <a:effectLst>
+            <a:outerShdw sx="100000" sy="100000" kx="0" ky="0" algn="bl" rotWithShape="0" blurRad="50800" dist="12700" dir="5400000">
+              <a:srgbClr val="BFCEDA">
+                <a:alpha val="35000"/>
+              </a:srgbClr>
+            </a:outerShdw>
+          </a:effectLst>
+        </p:spPr>
+      </p:sp>
+      <p:sp>
+        <p:nvSpPr>
+          <p:cNvPr id="14" name="Text 12"/>
+          <p:cNvSpPr txBox="1"/>
+          <p:nvPr/>
+        </p:nvSpPr>
+        <p:spPr>
+          <a:xfrm>
+            <a:off x="960120" y="4370832"/>
+            <a:ext cx="5394960" cy="347472"/>
+          </a:xfrm>
+          <a:prstGeom prst="rect">
+            <a:avLst/>
+          </a:prstGeom>
+          <a:noFill/>
+          <a:ln/>
+        </p:spPr>
+        <p:txBody>
+          <a:bodyPr wrap="square" lIns="0" tIns="0" rIns="0" bIns="0" rtlCol="0" anchor="ctr"/>
+          <a:lstStyle/>
+          <a:p>
+            <a:pPr indent="0" marL="0">
+              <a:buNone/>
+            </a:pPr>
+            <a:r>
+              <a:rPr lang="en-US" sz="1400" b="1" dirty="0">
+                <a:solidFill>
+                  <a:srgbClr val="065A82"/>
+                </a:solidFill>
+                <a:latin typeface="Calibri" pitchFamily="34" charset="0"/>
+                <a:ea typeface="Calibri" pitchFamily="34" charset="-122"/>
+                <a:cs typeface="Calibri" pitchFamily="34" charset="-120"/>
+              </a:rPr>
+              <a:t>Is the threshold reachable at all?</a:t>
+            </a:r>
+            <a:endParaRPr lang="en-US" sz="1400" dirty="0"/>
+          </a:p>
+        </p:txBody>
+      </p:sp>
+      <p:sp>
+        <p:nvSpPr>
+          <p:cNvPr id="15" name="Text 13"/>
+          <p:cNvSpPr txBox="1"/>
+          <p:nvPr/>
+        </p:nvSpPr>
+        <p:spPr>
+          <a:xfrm>
+            <a:off x="960120" y="4700016"/>
+            <a:ext cx="10241280" cy="310896"/>
+          </a:xfrm>
+          <a:prstGeom prst="rect">
+            <a:avLst/>
+          </a:prstGeom>
+          <a:noFill/>
+          <a:ln/>
+        </p:spPr>
+        <p:txBody>
+          <a:bodyPr wrap="square" lIns="0" tIns="0" rIns="0" bIns="0" rtlCol="0" anchor="ctr"/>
+          <a:lstStyle/>
+          <a:p>
+            <a:pPr indent="0" marL="0">
+              <a:buNone/>
+            </a:pPr>
+            <a:r>
+              <a:rPr lang="en-US" sz="1250" dirty="0">
+                <a:solidFill>
+                  <a:srgbClr val="3A4A5F"/>
+                </a:solidFill>
+                <a:latin typeface="Calibri" pitchFamily="34" charset="0"/>
+                <a:ea typeface="Calibri" pitchFamily="34" charset="-122"/>
+                <a:cs typeface="Calibri" pitchFamily="34" charset="-120"/>
+              </a:rPr>
+              <a:t>10 MB elephant threshold, 9.38 MB maximum flow share</a:t>
+            </a:r>
+            <a:endParaRPr lang="en-US" sz="1250" dirty="0"/>
+          </a:p>
+        </p:txBody>
+      </p:sp>
+      <p:sp>
+        <p:nvSpPr>
+          <p:cNvPr id="16" name="Shape 14"/>
+          <p:cNvSpPr/>
+          <p:nvPr/>
+        </p:nvSpPr>
+        <p:spPr>
+          <a:xfrm>
+            <a:off x="640080" y="5166360"/>
+            <a:ext cx="10881360" cy="749808"/>
+          </a:xfrm>
+          <a:prstGeom prst="roundRect">
+            <a:avLst>
+              <a:gd name="adj" fmla="val 9756"/>
+            </a:avLst>
+          </a:prstGeom>
+          <a:solidFill>
+            <a:srgbClr val="EEF4F8"/>
+          </a:solidFill>
+          <a:ln w="9525">
+            <a:solidFill>
+              <a:srgbClr val="D8E4EC"/>
+            </a:solidFill>
+            <a:prstDash val="solid"/>
+          </a:ln>
+          <a:effectLst>
+            <a:outerShdw sx="100000" sy="100000" kx="0" ky="0" algn="bl" rotWithShape="0" blurRad="50800" dist="12700" dir="5400000">
+              <a:srgbClr val="BFCEDA">
+                <a:alpha val="35000"/>
+              </a:srgbClr>
+            </a:outerShdw>
+          </a:effectLst>
+        </p:spPr>
+      </p:sp>
+      <p:sp>
+        <p:nvSpPr>
+          <p:cNvPr id="17" name="Text 15"/>
+          <p:cNvSpPr txBox="1"/>
+          <p:nvPr/>
+        </p:nvSpPr>
+        <p:spPr>
+          <a:xfrm>
+            <a:off x="960120" y="5239512"/>
+            <a:ext cx="5394960" cy="347472"/>
+          </a:xfrm>
+          <a:prstGeom prst="rect">
+            <a:avLst/>
+          </a:prstGeom>
+          <a:noFill/>
+          <a:ln/>
+        </p:spPr>
+        <p:txBody>
+          <a:bodyPr wrap="square" lIns="0" tIns="0" rIns="0" bIns="0" rtlCol="0" anchor="ctr"/>
+          <a:lstStyle/>
+          <a:p>
+            <a:pPr indent="0" marL="0">
+              <a:buNone/>
+            </a:pPr>
+            <a:r>
+              <a:rPr lang="en-US" sz="1400" b="1" dirty="0">
+                <a:solidFill>
+                  <a:srgbClr val="065A82"/>
+                </a:solidFill>
+                <a:latin typeface="Calibri" pitchFamily="34" charset="0"/>
+                <a:ea typeface="Calibri" pitchFamily="34" charset="-122"/>
+                <a:cs typeface="Calibri" pitchFamily="34" charset="-120"/>
+              </a:rPr>
+              <a:t>Does the reported value reach the kernel?</a:t>
+            </a:r>
+            <a:endParaRPr lang="en-US" sz="1400" dirty="0"/>
+          </a:p>
+        </p:txBody>
+      </p:sp>
+      <p:sp>
+        <p:nvSpPr>
+          <p:cNvPr id="18" name="Text 16"/>
+          <p:cNvSpPr txBox="1"/>
+          <p:nvPr/>
+        </p:nvSpPr>
+        <p:spPr>
+          <a:xfrm>
+            <a:off x="960120" y="5568696"/>
+            <a:ext cx="10241280" cy="310896"/>
+          </a:xfrm>
+          <a:prstGeom prst="rect">
+            <a:avLst/>
+          </a:prstGeom>
+          <a:noFill/>
+          <a:ln/>
+        </p:spPr>
+        <p:txBody>
+          <a:bodyPr wrap="square" lIns="0" tIns="0" rIns="0" bIns="0" rtlCol="0" anchor="ctr"/>
+          <a:lstStyle/>
+          <a:p>
+            <a:pPr indent="0" marL="0">
+              <a:buNone/>
+            </a:pPr>
+            <a:r>
+              <a:rPr lang="en-US" sz="1250" dirty="0">
+                <a:solidFill>
+                  <a:srgbClr val="3A4A5F"/>
+                </a:solidFill>
+                <a:latin typeface="Calibri" pitchFamily="34" charset="0"/>
+                <a:ea typeface="Calibri" pitchFamily="34" charset="-122"/>
+                <a:cs typeface="Calibri" pitchFamily="34" charset="-120"/>
+              </a:rPr>
+              <a:t>A float in userspace is not the qdisc parameter</a:t>
+            </a:r>
+            <a:endParaRPr lang="en-US" sz="1250" dirty="0"/>
+          </a:p>
+        </p:txBody>
+      </p:sp>
+      <p:sp>
+        <p:nvSpPr>
+          <p:cNvPr id="19" name="Text 17"/>
+          <p:cNvSpPr txBox="1"/>
+          <p:nvPr/>
+        </p:nvSpPr>
+        <p:spPr>
+          <a:xfrm>
+            <a:off x="640080" y="6080760"/>
+            <a:ext cx="10881360" cy="365760"/>
+          </a:xfrm>
+          <a:prstGeom prst="rect">
+            <a:avLst/>
+          </a:prstGeom>
+          <a:noFill/>
+          <a:ln/>
+        </p:spPr>
+        <p:txBody>
+          <a:bodyPr wrap="square" rtlCol="0" anchor="ctr"/>
+          <a:lstStyle/>
+          <a:p>
+            <a:pPr indent="0" marL="0">
+              <a:buNone/>
+            </a:pPr>
+            <a:r>
+              <a:rPr lang="en-US" sz="1400" i="1" dirty="0">
+                <a:solidFill>
+                  <a:srgbClr val="13233B"/>
+                </a:solidFill>
+                <a:latin typeface="Calibri" pitchFamily="34" charset="0"/>
+                <a:ea typeface="Calibri" pitchFamily="34" charset="-122"/>
+                <a:cs typeface="Calibri" pitchFamily="34" charset="-120"/>
+              </a:rPr>
+              <a:t>We think this is the most transferable part of the work.</a:t>
+            </a:r>
+            <a:endParaRPr lang="en-US" sz="1400" dirty="0"/>
+          </a:p>
+        </p:txBody>
+      </p:sp>
+    </p:spTree>
+  </p:cSld>
+  <p:clrMapOvr>
+    <a:masterClrMapping/>
+  </p:clrMapOvr>
+</p:sld>
+</file>
+
+<file path=ppt/slides/slide17.xml><?xml version="1.0" encoding="utf-8"?>
+<p:sld xmlns:a="http://schemas.openxmlformats.org/drawingml/2006/main" xmlns:r="http://schemas.openxmlformats.org/officeDocument/2006/relationships" xmlns:p="http://schemas.openxmlformats.org/presentationml/2006/main">
+  <p:cSld name="Slide 17">
+    <p:bg>
+      <p:bgPr>
+        <a:solidFill>
+          <a:srgbClr val="FFFFFF"/>
+        </a:solidFill>
+      </p:bgPr>
+    </p:bg>
+    <p:spTree>
+      <p:nvGrpSpPr>
+        <p:cNvPr id="1" name=""/>
+        <p:cNvGrpSpPr/>
+        <p:nvPr/>
+      </p:nvGrpSpPr>
+      <p:grpSpPr>
+        <a:xfrm>
+          <a:off x="0" y="0"/>
+          <a:ext cx="0" cy="0"/>
+          <a:chOff x="0" y="0"/>
+          <a:chExt cx="0" cy="0"/>
+        </a:xfrm>
+      </p:grpSpPr>
+      <p:sp>
+        <p:nvSpPr>
+          <p:cNvPr id="2" name="Text 0"/>
+          <p:cNvSpPr txBox="1"/>
+          <p:nvPr/>
+        </p:nvSpPr>
+        <p:spPr>
+          <a:xfrm>
+            <a:off x="640080" y="411480"/>
+            <a:ext cx="10881360" cy="731520"/>
+          </a:xfrm>
+          <a:prstGeom prst="rect">
+            <a:avLst/>
+          </a:prstGeom>
+          <a:noFill/>
+          <a:ln/>
+        </p:spPr>
+        <p:txBody>
+          <a:bodyPr wrap="square" rtlCol="0" anchor="ctr"/>
+          <a:lstStyle/>
+          <a:p>
+            <a:pPr indent="0" marL="0">
+              <a:buNone/>
+            </a:pPr>
+            <a:r>
+              <a:rPr lang="en-US" sz="3200" b="1" dirty="0">
+                <a:solidFill>
+                  <a:srgbClr val="13233B"/>
+                </a:solidFill>
+                <a:latin typeface="Cambria" pitchFamily="34" charset="0"/>
+                <a:ea typeface="Cambria" pitchFamily="34" charset="-122"/>
+                <a:cs typeface="Cambria" pitchFamily="34" charset="-120"/>
+              </a:rPr>
               <a:t>Where this sits against recent work</a:t>
             </a:r>
             <a:endParaRPr lang="en-US" sz="3200" dirty="0"/>
@@ -7016,9 +7975,9 @@
 </p:sld>
 </file>
 
-<file path=ppt/slides/slide17.xml><?xml version="1.0" encoding="utf-8"?>
+<file path=ppt/slides/slide18.xml><?xml version="1.0" encoding="utf-8"?>
 <p:sld xmlns:a="http://schemas.openxmlformats.org/drawingml/2006/main" xmlns:r="http://schemas.openxmlformats.org/officeDocument/2006/relationships" xmlns:p="http://schemas.openxmlformats.org/presentationml/2006/main">
-  <p:cSld name="Slide 17">
+  <p:cSld name="Slide 18">
     <p:bg>
       <p:bgPr>
         <a:solidFill>
@@ -7450,7 +8409,7 @@
                 <a:ea typeface="Calibri" pitchFamily="34" charset="-122"/>
                 <a:cs typeface="Calibri" pitchFamily="34" charset="-120"/>
               </a:rPr>
-              <a:t>No distinguishable improvement over the defaults in the regimes tested</a:t>
+              <a:t>Backlog -9.6% under steady load, nothing under a changing one; CAKE beats it outright</a:t>
             </a:r>
             <a:endParaRPr lang="en-US" sz="1250" dirty="0"/>
           </a:p>

--- a/deck/ACAPE_2026.pptx
+++ b/deck/ACAPE_2026.pptx
@@ -23,9 +23,13 @@
     <p:sldId id="271" r:id="rId17"/>
     <p:sldId id="272" r:id="rId18"/>
     <p:sldId id="273" r:id="rId19"/>
+    <p:sldId id="274" r:id="rId20"/>
+    <p:sldId id="275" r:id="rId21"/>
+    <p:sldId id="276" r:id="rId22"/>
+    <p:sldId id="277" r:id="rId23"/>
   </p:sldIdLst>
   <p:notesMasterIdLst>
-    <p:notesMasterId r:id="rId20"/>
+    <p:notesMasterId r:id="rId24"/>
   </p:notesMasterIdLst>
   <p:sldSz cx="12192000" cy="6858000"/>
   <p:notesSz cx="6858000" cy="12192000"/>
@@ -1047,7 +1051,7 @@
           <a:p>
             <a:r>
               <a:rPr lang="en-US" dirty="0"/>
-              <a:t/>
+              <a:t>This is the contribution. The mechanism is old; the number at which it starts to matter is what was missing.</a:t>
             </a:r>
             <a:endParaRPr lang="en-US" dirty="0"/>
           </a:p>
@@ -1223,7 +1227,7 @@
           <a:p>
             <a:r>
               <a:rPr lang="en-US" dirty="0"/>
-              <a:t>The null result is only credible because of the control condition. That is what makes it a contribution rather than a failure.</a:t>
+              <a:t>We had this data and had not looked. A referee would have asked. r governs the RTT dimension; a second group governs the ceiling.</a:t>
             </a:r>
             <a:endParaRPr lang="en-US" dirty="0"/>
           </a:p>
@@ -1353,6 +1357,94 @@
 </p:notes>
 </file>
 
+<file path=ppt/notesSlides/notesSlide19.xml><?xml version="1.0" encoding="utf-8"?>
+<p:notes xmlns:a="http://schemas.openxmlformats.org/drawingml/2006/main" xmlns:r="http://schemas.openxmlformats.org/officeDocument/2006/relationships" xmlns:p="http://schemas.openxmlformats.org/presentationml/2006/main">
+  <p:cSld>
+    <p:spTree>
+      <p:nvGrpSpPr>
+        <p:cNvPr id="1" name=""/>
+        <p:cNvGrpSpPr/>
+        <p:nvPr/>
+      </p:nvGrpSpPr>
+      <p:grpSpPr>
+        <a:xfrm>
+          <a:off x="0" y="0"/>
+          <a:ext cx="0" cy="0"/>
+          <a:chOff x="0" y="0"/>
+          <a:chExt cx="0" cy="0"/>
+        </a:xfrm>
+      </p:grpSpPr>
+      <p:sp>
+        <p:nvSpPr>
+          <p:cNvPr id="2" name="Slide Image Placeholder 1"/>
+          <p:cNvSpPr>
+            <a:spLocks noGrp="1" noRot="1" noChangeAspect="1"/>
+          </p:cNvSpPr>
+          <p:nvPr>
+            <p:ph type="sldImg"/>
+          </p:nvPr>
+        </p:nvSpPr>
+        <p:spPr/>
+      </p:sp>
+      <p:sp>
+        <p:nvSpPr>
+          <p:cNvPr id="3" name="Notes Placeholder 2"/>
+          <p:cNvSpPr>
+            <a:spLocks noGrp="1"/>
+          </p:cNvSpPr>
+          <p:nvPr>
+            <p:ph type="body" idx="1"/>
+          </p:nvPr>
+        </p:nvSpPr>
+        <p:spPr/>
+        <p:txBody>
+          <a:bodyPr/>
+          <a:lstStyle/>
+          <a:p>
+            <a:r>
+              <a:rPr lang="en-US" dirty="0"/>
+              <a:t/>
+            </a:r>
+            <a:endParaRPr lang="en-US" dirty="0"/>
+          </a:p>
+        </p:txBody>
+      </p:sp>
+      <p:sp>
+        <p:nvSpPr>
+          <p:cNvPr id="4" name="Slide Number Placeholder 3"/>
+          <p:cNvSpPr>
+            <a:spLocks noGrp="1"/>
+          </p:cNvSpPr>
+          <p:nvPr>
+            <p:ph type="sldNum" sz="quarter" idx="10"/>
+          </p:nvPr>
+        </p:nvSpPr>
+        <p:spPr/>
+        <p:txBody>
+          <a:bodyPr/>
+          <a:lstStyle/>
+          <a:p>
+            <a:fld id="{F7021451-1387-4CA6-816F-3879F97B5CBC}" type="slidenum">
+              <a:rPr lang="en-US"/>
+              <a:t>19</a:t>
+            </a:fld>
+            <a:endParaRPr lang="en-US"/>
+          </a:p>
+        </p:txBody>
+      </p:sp>
+    </p:spTree>
+    <p:extLst>
+      <p:ext uri="{BB962C8B-B14F-4D97-AF65-F5344CB8AC3E}">
+        <p14:creationId xmlns:p14="http://schemas.microsoft.com/office/powerpoint/2010/main" val="1024086991"/>
+      </p:ext>
+    </p:extLst>
+  </p:cSld>
+  <p:clrMapOvr>
+    <a:masterClrMapping/>
+  </p:clrMapOvr>
+</p:notes>
+</file>
+
 <file path=ppt/notesSlides/notesSlide2.xml><?xml version="1.0" encoding="utf-8"?>
 <p:notes xmlns:a="http://schemas.openxmlformats.org/drawingml/2006/main" xmlns:r="http://schemas.openxmlformats.org/officeDocument/2006/relationships" xmlns:p="http://schemas.openxmlformats.org/presentationml/2006/main">
   <p:cSld>
@@ -1423,6 +1515,270 @@
             <a:fld id="{F7021451-1387-4CA6-816F-3879F97B5CBC}" type="slidenum">
               <a:rPr lang="en-US"/>
               <a:t>2</a:t>
+            </a:fld>
+            <a:endParaRPr lang="en-US"/>
+          </a:p>
+        </p:txBody>
+      </p:sp>
+    </p:spTree>
+    <p:extLst>
+      <p:ext uri="{BB962C8B-B14F-4D97-AF65-F5344CB8AC3E}">
+        <p14:creationId xmlns:p14="http://schemas.microsoft.com/office/powerpoint/2010/main" val="1024086991"/>
+      </p:ext>
+    </p:extLst>
+  </p:cSld>
+  <p:clrMapOvr>
+    <a:masterClrMapping/>
+  </p:clrMapOvr>
+</p:notes>
+</file>
+
+<file path=ppt/notesSlides/notesSlide20.xml><?xml version="1.0" encoding="utf-8"?>
+<p:notes xmlns:a="http://schemas.openxmlformats.org/drawingml/2006/main" xmlns:r="http://schemas.openxmlformats.org/officeDocument/2006/relationships" xmlns:p="http://schemas.openxmlformats.org/presentationml/2006/main">
+  <p:cSld>
+    <p:spTree>
+      <p:nvGrpSpPr>
+        <p:cNvPr id="1" name=""/>
+        <p:cNvGrpSpPr/>
+        <p:nvPr/>
+      </p:nvGrpSpPr>
+      <p:grpSpPr>
+        <a:xfrm>
+          <a:off x="0" y="0"/>
+          <a:ext cx="0" cy="0"/>
+          <a:chOff x="0" y="0"/>
+          <a:chExt cx="0" cy="0"/>
+        </a:xfrm>
+      </p:grpSpPr>
+      <p:sp>
+        <p:nvSpPr>
+          <p:cNvPr id="2" name="Slide Image Placeholder 1"/>
+          <p:cNvSpPr>
+            <a:spLocks noGrp="1" noRot="1" noChangeAspect="1"/>
+          </p:cNvSpPr>
+          <p:nvPr>
+            <p:ph type="sldImg"/>
+          </p:nvPr>
+        </p:nvSpPr>
+        <p:spPr/>
+      </p:sp>
+      <p:sp>
+        <p:nvSpPr>
+          <p:cNvPr id="3" name="Notes Placeholder 2"/>
+          <p:cNvSpPr>
+            <a:spLocks noGrp="1"/>
+          </p:cNvSpPr>
+          <p:nvPr>
+            <p:ph type="body" idx="1"/>
+          </p:nvPr>
+        </p:nvSpPr>
+        <p:spPr/>
+        <p:txBody>
+          <a:bodyPr/>
+          <a:lstStyle/>
+          <a:p>
+            <a:r>
+              <a:rPr lang="en-US" dirty="0"/>
+              <a:t/>
+            </a:r>
+            <a:endParaRPr lang="en-US" dirty="0"/>
+          </a:p>
+        </p:txBody>
+      </p:sp>
+      <p:sp>
+        <p:nvSpPr>
+          <p:cNvPr id="4" name="Slide Number Placeholder 3"/>
+          <p:cNvSpPr>
+            <a:spLocks noGrp="1"/>
+          </p:cNvSpPr>
+          <p:nvPr>
+            <p:ph type="sldNum" sz="quarter" idx="10"/>
+          </p:nvPr>
+        </p:nvSpPr>
+        <p:spPr/>
+        <p:txBody>
+          <a:bodyPr/>
+          <a:lstStyle/>
+          <a:p>
+            <a:fld id="{F7021451-1387-4CA6-816F-3879F97B5CBC}" type="slidenum">
+              <a:rPr lang="en-US"/>
+              <a:t>20</a:t>
+            </a:fld>
+            <a:endParaRPr lang="en-US"/>
+          </a:p>
+        </p:txBody>
+      </p:sp>
+    </p:spTree>
+    <p:extLst>
+      <p:ext uri="{BB962C8B-B14F-4D97-AF65-F5344CB8AC3E}">
+        <p14:creationId xmlns:p14="http://schemas.microsoft.com/office/powerpoint/2010/main" val="1024086991"/>
+      </p:ext>
+    </p:extLst>
+  </p:cSld>
+  <p:clrMapOvr>
+    <a:masterClrMapping/>
+  </p:clrMapOvr>
+</p:notes>
+</file>
+
+<file path=ppt/notesSlides/notesSlide21.xml><?xml version="1.0" encoding="utf-8"?>
+<p:notes xmlns:a="http://schemas.openxmlformats.org/drawingml/2006/main" xmlns:r="http://schemas.openxmlformats.org/officeDocument/2006/relationships" xmlns:p="http://schemas.openxmlformats.org/presentationml/2006/main">
+  <p:cSld>
+    <p:spTree>
+      <p:nvGrpSpPr>
+        <p:cNvPr id="1" name=""/>
+        <p:cNvGrpSpPr/>
+        <p:nvPr/>
+      </p:nvGrpSpPr>
+      <p:grpSpPr>
+        <a:xfrm>
+          <a:off x="0" y="0"/>
+          <a:ext cx="0" cy="0"/>
+          <a:chOff x="0" y="0"/>
+          <a:chExt cx="0" cy="0"/>
+        </a:xfrm>
+      </p:grpSpPr>
+      <p:sp>
+        <p:nvSpPr>
+          <p:cNvPr id="2" name="Slide Image Placeholder 1"/>
+          <p:cNvSpPr>
+            <a:spLocks noGrp="1" noRot="1" noChangeAspect="1"/>
+          </p:cNvSpPr>
+          <p:nvPr>
+            <p:ph type="sldImg"/>
+          </p:nvPr>
+        </p:nvSpPr>
+        <p:spPr/>
+      </p:sp>
+      <p:sp>
+        <p:nvSpPr>
+          <p:cNvPr id="3" name="Notes Placeholder 2"/>
+          <p:cNvSpPr>
+            <a:spLocks noGrp="1"/>
+          </p:cNvSpPr>
+          <p:nvPr>
+            <p:ph type="body" idx="1"/>
+          </p:nvPr>
+        </p:nvSpPr>
+        <p:spPr/>
+        <p:txBody>
+          <a:bodyPr/>
+          <a:lstStyle/>
+          <a:p>
+            <a:r>
+              <a:rPr lang="en-US" dirty="0"/>
+              <a:t>The null result is only credible because of the control condition. That is what makes it a contribution rather than a failure.</a:t>
+            </a:r>
+            <a:endParaRPr lang="en-US" dirty="0"/>
+          </a:p>
+        </p:txBody>
+      </p:sp>
+      <p:sp>
+        <p:nvSpPr>
+          <p:cNvPr id="4" name="Slide Number Placeholder 3"/>
+          <p:cNvSpPr>
+            <a:spLocks noGrp="1"/>
+          </p:cNvSpPr>
+          <p:nvPr>
+            <p:ph type="sldNum" sz="quarter" idx="10"/>
+          </p:nvPr>
+        </p:nvSpPr>
+        <p:spPr/>
+        <p:txBody>
+          <a:bodyPr/>
+          <a:lstStyle/>
+          <a:p>
+            <a:fld id="{F7021451-1387-4CA6-816F-3879F97B5CBC}" type="slidenum">
+              <a:rPr lang="en-US"/>
+              <a:t>21</a:t>
+            </a:fld>
+            <a:endParaRPr lang="en-US"/>
+          </a:p>
+        </p:txBody>
+      </p:sp>
+    </p:spTree>
+    <p:extLst>
+      <p:ext uri="{BB962C8B-B14F-4D97-AF65-F5344CB8AC3E}">
+        <p14:creationId xmlns:p14="http://schemas.microsoft.com/office/powerpoint/2010/main" val="1024086991"/>
+      </p:ext>
+    </p:extLst>
+  </p:cSld>
+  <p:clrMapOvr>
+    <a:masterClrMapping/>
+  </p:clrMapOvr>
+</p:notes>
+</file>
+
+<file path=ppt/notesSlides/notesSlide22.xml><?xml version="1.0" encoding="utf-8"?>
+<p:notes xmlns:a="http://schemas.openxmlformats.org/drawingml/2006/main" xmlns:r="http://schemas.openxmlformats.org/officeDocument/2006/relationships" xmlns:p="http://schemas.openxmlformats.org/presentationml/2006/main">
+  <p:cSld>
+    <p:spTree>
+      <p:nvGrpSpPr>
+        <p:cNvPr id="1" name=""/>
+        <p:cNvGrpSpPr/>
+        <p:nvPr/>
+      </p:nvGrpSpPr>
+      <p:grpSpPr>
+        <a:xfrm>
+          <a:off x="0" y="0"/>
+          <a:ext cx="0" cy="0"/>
+          <a:chOff x="0" y="0"/>
+          <a:chExt cx="0" cy="0"/>
+        </a:xfrm>
+      </p:grpSpPr>
+      <p:sp>
+        <p:nvSpPr>
+          <p:cNvPr id="2" name="Slide Image Placeholder 1"/>
+          <p:cNvSpPr>
+            <a:spLocks noGrp="1" noRot="1" noChangeAspect="1"/>
+          </p:cNvSpPr>
+          <p:nvPr>
+            <p:ph type="sldImg"/>
+          </p:nvPr>
+        </p:nvSpPr>
+        <p:spPr/>
+      </p:sp>
+      <p:sp>
+        <p:nvSpPr>
+          <p:cNvPr id="3" name="Notes Placeholder 2"/>
+          <p:cNvSpPr>
+            <a:spLocks noGrp="1"/>
+          </p:cNvSpPr>
+          <p:nvPr>
+            <p:ph type="body" idx="1"/>
+          </p:nvPr>
+        </p:nvSpPr>
+        <p:spPr/>
+        <p:txBody>
+          <a:bodyPr/>
+          <a:lstStyle/>
+          <a:p>
+            <a:r>
+              <a:rPr lang="en-US" dirty="0"/>
+              <a:t/>
+            </a:r>
+            <a:endParaRPr lang="en-US" dirty="0"/>
+          </a:p>
+        </p:txBody>
+      </p:sp>
+      <p:sp>
+        <p:nvSpPr>
+          <p:cNvPr id="4" name="Slide Number Placeholder 3"/>
+          <p:cNvSpPr>
+            <a:spLocks noGrp="1"/>
+          </p:cNvSpPr>
+          <p:nvPr>
+            <p:ph type="sldNum" sz="quarter" idx="10"/>
+          </p:nvPr>
+        </p:nvSpPr>
+        <p:spPr/>
+        <p:txBody>
+          <a:bodyPr/>
+          <a:lstStyle/>
+          <a:p>
+            <a:fld id="{F7021451-1387-4CA6-816F-3879F97B5CBC}" type="slidenum">
+              <a:rPr lang="en-US"/>
+              <a:t>22</a:t>
             </a:fld>
             <a:endParaRPr lang="en-US"/>
           </a:p>
@@ -3552,7 +3908,7 @@
                 <a:ea typeface="Cambria" pitchFamily="34" charset="-122"/>
                 <a:cs typeface="Cambria" pitchFamily="34" charset="-120"/>
               </a:rPr>
-              <a:t>A small gain under steady load. Nothing under a load that changes.</a:t>
+              <a:t>Nothing separates from zero, under either load.</a:t>
             </a:r>
             <a:endParaRPr lang="en-US" sz="1800" dirty="0"/>
           </a:p>
@@ -3768,13 +4124,13 @@
             <a:r>
               <a:rPr lang="en-US" sz="1300" b="1" dirty="0">
                 <a:solidFill>
-                  <a:srgbClr val="2C7A5A"/>
-                </a:solidFill>
-                <a:latin typeface="Calibri" pitchFamily="34" charset="0"/>
-                <a:ea typeface="Calibri" pitchFamily="34" charset="-122"/>
-                <a:cs typeface="Calibri" pitchFamily="34" charset="-120"/>
-              </a:rPr>
-              <a:t>-9.6%   p=0.050</a:t>
+                  <a:srgbClr val="7B8A9C"/>
+                </a:solidFill>
+                <a:latin typeface="Calibri" pitchFamily="34" charset="0"/>
+                <a:ea typeface="Calibri" pitchFamily="34" charset="-122"/>
+                <a:cs typeface="Calibri" pitchFamily="34" charset="-120"/>
+              </a:rPr>
+              <a:t>-9.6%  CI +-1.00 pkt</a:t>
             </a:r>
             <a:endParaRPr lang="en-US" sz="1300" dirty="0"/>
           </a:p>
@@ -3813,7 +4169,7 @@
                 <a:ea typeface="Calibri" pitchFamily="34" charset="-122"/>
                 <a:cs typeface="Calibri" pitchFamily="34" charset="-120"/>
               </a:rPr>
-              <a:t>+2.2%   p=0.66</a:t>
+              <a:t>+2.2%   n.s.</a:t>
             </a:r>
             <a:endParaRPr lang="en-US" sz="1300" dirty="0"/>
           </a:p>
@@ -3912,13 +4268,13 @@
             <a:r>
               <a:rPr lang="en-US" sz="1300" b="1" dirty="0">
                 <a:solidFill>
-                  <a:srgbClr val="2C7A5A"/>
-                </a:solidFill>
-                <a:latin typeface="Calibri" pitchFamily="34" charset="0"/>
-                <a:ea typeface="Calibri" pitchFamily="34" charset="-122"/>
-                <a:cs typeface="Calibri" pitchFamily="34" charset="-120"/>
-              </a:rPr>
-              <a:t>-0.5%   p=0.047</a:t>
+                  <a:srgbClr val="7B8A9C"/>
+                </a:solidFill>
+                <a:latin typeface="Calibri" pitchFamily="34" charset="0"/>
+                <a:ea typeface="Calibri" pitchFamily="34" charset="-122"/>
+                <a:cs typeface="Calibri" pitchFamily="34" charset="-120"/>
+              </a:rPr>
+              <a:t>-0.5%  n.s.</a:t>
             </a:r>
             <a:endParaRPr lang="en-US" sz="1300" dirty="0"/>
           </a:p>
@@ -3957,7 +4313,7 @@
                 <a:ea typeface="Calibri" pitchFamily="34" charset="-122"/>
                 <a:cs typeface="Calibri" pitchFamily="34" charset="-120"/>
               </a:rPr>
-              <a:t>+3.2%   p=0.07</a:t>
+              <a:t>+3.2%   n.s.</a:t>
             </a:r>
             <a:endParaRPr lang="en-US" sz="1300" dirty="0"/>
           </a:p>
@@ -4062,7 +4418,7 @@
                 <a:ea typeface="Calibri" pitchFamily="34" charset="-122"/>
                 <a:cs typeface="Calibri" pitchFamily="34" charset="-120"/>
               </a:rPr>
-              <a:t>+0.4%   p=0.48</a:t>
+              <a:t>+0.4%  n.s.</a:t>
             </a:r>
             <a:endParaRPr lang="en-US" sz="1300" dirty="0"/>
           </a:p>
@@ -4095,13 +4451,13 @@
             <a:r>
               <a:rPr lang="en-US" sz="1300" b="1" dirty="0">
                 <a:solidFill>
-                  <a:srgbClr val="B23A48"/>
-                </a:solidFill>
-                <a:latin typeface="Calibri" pitchFamily="34" charset="0"/>
-                <a:ea typeface="Calibri" pitchFamily="34" charset="-122"/>
-                <a:cs typeface="Calibri" pitchFamily="34" charset="-120"/>
-              </a:rPr>
-              <a:t>+1.6%   p=0.050</a:t>
+                  <a:srgbClr val="7B8A9C"/>
+                </a:solidFill>
+                <a:latin typeface="Calibri" pitchFamily="34" charset="0"/>
+                <a:ea typeface="Calibri" pitchFamily="34" charset="-122"/>
+                <a:cs typeface="Calibri" pitchFamily="34" charset="-120"/>
+              </a:rPr>
+              <a:t>+1.6%   n.s.</a:t>
             </a:r>
             <a:endParaRPr lang="en-US" sz="1300" dirty="0"/>
           </a:p>
@@ -4206,7 +4562,7 @@
                 <a:ea typeface="Calibri" pitchFamily="34" charset="-122"/>
                 <a:cs typeface="Calibri" pitchFamily="34" charset="-120"/>
               </a:rPr>
-              <a:t>-1.4%   p=0.38</a:t>
+              <a:t>-1.4%  n.s.</a:t>
             </a:r>
             <a:endParaRPr lang="en-US" sz="1300" dirty="0"/>
           </a:p>
@@ -4245,7 +4601,7 @@
                 <a:ea typeface="Calibri" pitchFamily="34" charset="-122"/>
                 <a:cs typeface="Calibri" pitchFamily="34" charset="-120"/>
               </a:rPr>
-              <a:t>-0.5%   p=0.52</a:t>
+              <a:t>-0.5%   n.s.</a:t>
             </a:r>
             <a:endParaRPr lang="en-US" sz="1300" dirty="0"/>
           </a:p>
@@ -4428,7 +4784,7 @@
                 <a:ea typeface="Calibri" pitchFamily="34" charset="-122"/>
                 <a:cs typeface="Calibri" pitchFamily="34" charset="-120"/>
               </a:rPr>
-              <a:t>The workload designed to give the controller something to respond to is the one where it helps least. The sham condition rules out overhead, so these are its decisions.</a:t>
+              <a:t>The largest movement, backlog, has an interval of +-1.00 packets and covers zero. At three repetitions the design resolves about 3.5%, so these bound the effect rather than disprove it. The sham arm shows the controller's processor cost is not detectable either, so this is not a cost masking a benefit. The law explains it: these runs sit at r = 0.25.</a:t>
             </a:r>
             <a:endParaRPr lang="en-US" sz="1300" dirty="0"/>
           </a:p>
@@ -5252,7 +5608,7 @@
                 <a:ea typeface="Calibri" pitchFamily="34" charset="-122"/>
                 <a:cs typeface="Calibri" pitchFamily="34" charset="-120"/>
               </a:rPr>
-              <a:t>INTEGRITY</a:t>
+              <a:t>THE SCALING LAW</a:t>
             </a:r>
             <a:endParaRPr lang="en-US" sz="1500" dirty="0"/>
           </a:p>
@@ -5291,48 +5647,9 @@
                 <a:ea typeface="Cambria" pitchFamily="34" charset="-122"/>
                 <a:cs typeface="Cambria" pitchFamily="34" charset="-120"/>
               </a:rPr>
-              <a:t>What did not survive verification</a:t>
+              <a:t>When does adapting pay?</a:t>
             </a:r>
             <a:endParaRPr lang="en-US" sz="4200" dirty="0"/>
-          </a:p>
-        </p:txBody>
-      </p:sp>
-      <p:sp>
-        <p:nvSpPr>
-          <p:cNvPr id="4" name="Text 2"/>
-          <p:cNvSpPr txBox="1"/>
-          <p:nvPr/>
-        </p:nvSpPr>
-        <p:spPr>
-          <a:xfrm>
-            <a:off x="640080" y="3931920"/>
-            <a:ext cx="10881360" cy="640080"/>
-          </a:xfrm>
-          <a:prstGeom prst="rect">
-            <a:avLst/>
-          </a:prstGeom>
-          <a:noFill/>
-          <a:ln/>
-        </p:spPr>
-        <p:txBody>
-          <a:bodyPr wrap="square" rtlCol="0" anchor="ctr"/>
-          <a:lstStyle/>
-          <a:p>
-            <a:pPr indent="0" marL="0">
-              <a:buNone/>
-            </a:pPr>
-            <a:r>
-              <a:rPr lang="en-US" sz="1600" i="1" dirty="0">
-                <a:solidFill>
-                  <a:srgbClr val="A9C3DE"/>
-                </a:solidFill>
-                <a:latin typeface="Calibri" pitchFamily="34" charset="0"/>
-                <a:ea typeface="Calibri" pitchFamily="34" charset="-122"/>
-                <a:cs typeface="Calibri" pitchFamily="34" charset="-120"/>
-              </a:rPr>
-              <a:t>Seven classes of silent failure. Each produced results that were confident, internally consistent, and wrong.</a:t>
-            </a:r>
-            <a:endParaRPr lang="en-US" sz="1600" dirty="0"/>
           </a:p>
         </p:txBody>
       </p:sp>
@@ -5401,7 +5718,7 @@
                 <a:ea typeface="Cambria" pitchFamily="34" charset="-122"/>
                 <a:cs typeface="Cambria" pitchFamily="34" charset="-120"/>
               </a:rPr>
-              <a:t>The seven defects</a:t>
+              <a:t>The answer is a ratio, not a delay</a:t>
             </a:r>
             <a:endParaRPr lang="en-US" sz="3200" dirty="0"/>
           </a:p>
@@ -5409,22 +5726,61 @@
       </p:sp>
       <p:sp>
         <p:nvSpPr>
-          <p:cNvPr id="3" name="Shape 1"/>
+          <p:cNvPr id="3" name="Text 1"/>
+          <p:cNvSpPr txBox="1"/>
+          <p:nvPr/>
+        </p:nvSpPr>
+        <p:spPr>
+          <a:xfrm>
+            <a:off x="640080" y="1097280"/>
+            <a:ext cx="10881360" cy="365760"/>
+          </a:xfrm>
+          <a:prstGeom prst="rect">
+            <a:avLst/>
+          </a:prstGeom>
+          <a:noFill/>
+          <a:ln/>
+        </p:spPr>
+        <p:txBody>
+          <a:bodyPr wrap="square" rtlCol="0" anchor="ctr"/>
+          <a:lstStyle/>
+          <a:p>
+            <a:pPr indent="0" marL="0">
+              <a:buNone/>
+            </a:pPr>
+            <a:r>
+              <a:rPr lang="en-US" sz="1500" dirty="0">
+                <a:solidFill>
+                  <a:srgbClr val="3A4A5F"/>
+                </a:solidFill>
+                <a:latin typeface="Calibri" pitchFamily="34" charset="0"/>
+                <a:ea typeface="Calibri" pitchFamily="34" charset="-122"/>
+                <a:cs typeface="Calibri" pitchFamily="34" charset="-120"/>
+              </a:rPr>
+              <a:t>Sweeping path RTT from 2 to 200 ms showed the benefit is not a function of RTT at all.</a:t>
+            </a:r>
+            <a:endParaRPr lang="en-US" sz="1500" dirty="0"/>
+          </a:p>
+        </p:txBody>
+      </p:sp>
+      <p:sp>
+        <p:nvSpPr>
+          <p:cNvPr id="4" name="Shape 2"/>
           <p:cNvSpPr/>
           <p:nvPr/>
         </p:nvSpPr>
         <p:spPr>
           <a:xfrm>
-            <a:off x="640080" y="1143000"/>
-            <a:ext cx="5349240" cy="932688"/>
+            <a:off x="640080" y="1600200"/>
+            <a:ext cx="10881360" cy="1051560"/>
           </a:xfrm>
           <a:prstGeom prst="roundRect">
             <a:avLst>
-              <a:gd name="adj" fmla="val 7843"/>
+              <a:gd name="adj" fmla="val 6957"/>
             </a:avLst>
           </a:prstGeom>
           <a:solidFill>
-            <a:srgbClr val="EEF4F8"/>
+            <a:srgbClr val="E8F1F6"/>
           </a:solidFill>
           <a:ln w="9525">
             <a:solidFill>
@@ -5443,65 +5799,40 @@
       </p:sp>
       <p:sp>
         <p:nvSpPr>
-          <p:cNvPr id="4" name="Shape 2"/>
-          <p:cNvSpPr/>
-          <p:nvPr/>
-        </p:nvSpPr>
-        <p:spPr>
-          <a:xfrm>
-            <a:off x="868680" y="1389888"/>
-            <a:ext cx="420624" cy="420624"/>
-          </a:xfrm>
-          <a:prstGeom prst="ellipse">
-            <a:avLst/>
-          </a:prstGeom>
-          <a:solidFill>
-            <a:srgbClr val="065A82"/>
-          </a:solidFill>
-          <a:ln w="12700">
-            <a:solidFill>
-              <a:srgbClr val="333333"/>
-            </a:solidFill>
-            <a:prstDash val="solid"/>
-          </a:ln>
-        </p:spPr>
-      </p:sp>
-      <p:sp>
-        <p:nvSpPr>
           <p:cNvPr id="5" name="Text 3"/>
           <p:cNvSpPr txBox="1"/>
           <p:nvPr/>
         </p:nvSpPr>
         <p:spPr>
           <a:xfrm>
-            <a:off x="868680" y="1389888"/>
-            <a:ext cx="420624" cy="420624"/>
-          </a:xfrm>
-          <a:prstGeom prst="rect">
-            <a:avLst/>
-          </a:prstGeom>
-          <a:noFill/>
-          <a:ln/>
-        </p:spPr>
-        <p:txBody>
-          <a:bodyPr wrap="square" lIns="0" tIns="0" rIns="0" bIns="0" rtlCol="0" anchor="ctr"/>
-          <a:lstStyle/>
-          <a:p>
-            <a:pPr algn="ctr" indent="0" marL="0">
-              <a:buNone/>
-            </a:pPr>
-            <a:r>
-              <a:rPr lang="en-US" sz="1300" b="1" dirty="0">
-                <a:solidFill>
-                  <a:srgbClr val="FFFFFF"/>
-                </a:solidFill>
-                <a:latin typeface="Calibri" pitchFamily="34" charset="0"/>
-                <a:ea typeface="Calibri" pitchFamily="34" charset="-122"/>
-                <a:cs typeface="Calibri" pitchFamily="34" charset="-120"/>
-              </a:rPr>
-              <a:t>1</a:t>
-            </a:r>
-            <a:endParaRPr lang="en-US" sz="1300" dirty="0"/>
+            <a:off x="960120" y="1783080"/>
+            <a:ext cx="3840480" cy="685800"/>
+          </a:xfrm>
+          <a:prstGeom prst="rect">
+            <a:avLst/>
+          </a:prstGeom>
+          <a:noFill/>
+          <a:ln/>
+        </p:spPr>
+        <p:txBody>
+          <a:bodyPr wrap="square" lIns="0" tIns="0" rIns="0" bIns="0" rtlCol="0" anchor="ctr"/>
+          <a:lstStyle/>
+          <a:p>
+            <a:pPr indent="0" marL="0">
+              <a:buNone/>
+            </a:pPr>
+            <a:r>
+              <a:rPr lang="en-US" sz="3000" b="1" dirty="0">
+                <a:solidFill>
+                  <a:srgbClr val="065A82"/>
+                </a:solidFill>
+                <a:latin typeface="Cambria" pitchFamily="34" charset="0"/>
+                <a:ea typeface="Cambria" pitchFamily="34" charset="-122"/>
+                <a:cs typeface="Cambria" pitchFamily="34" charset="-120"/>
+              </a:rPr>
+              <a:t>r  =  target / RTT</a:t>
+            </a:r>
+            <a:endParaRPr lang="en-US" sz="3000" dirty="0"/>
           </a:p>
         </p:txBody>
       </p:sp>
@@ -5513,63 +5844,24 @@
         </p:nvSpPr>
         <p:spPr>
           <a:xfrm>
-            <a:off x="1417320" y="1234440"/>
-            <a:ext cx="4434840" cy="301752"/>
-          </a:xfrm>
-          <a:prstGeom prst="rect">
-            <a:avLst/>
-          </a:prstGeom>
-          <a:noFill/>
-          <a:ln/>
-        </p:spPr>
-        <p:txBody>
-          <a:bodyPr wrap="square" lIns="0" tIns="0" rIns="0" bIns="0" rtlCol="0" anchor="ctr"/>
-          <a:lstStyle/>
-          <a:p>
-            <a:pPr indent="0" marL="0">
-              <a:buNone/>
-            </a:pPr>
-            <a:r>
-              <a:rPr lang="en-US" sz="1400" b="1" dirty="0">
-                <a:solidFill>
-                  <a:srgbClr val="13233B"/>
-                </a:solidFill>
-                <a:latin typeface="Calibri" pitchFamily="34" charset="0"/>
-                <a:ea typeface="Calibri" pitchFamily="34" charset="-122"/>
-                <a:cs typeface="Calibri" pitchFamily="34" charset="-120"/>
-              </a:rPr>
-              <a:t>Loopback traffic</a:t>
-            </a:r>
-            <a:endParaRPr lang="en-US" sz="1400" dirty="0"/>
-          </a:p>
-        </p:txBody>
-      </p:sp>
-      <p:sp>
-        <p:nvSpPr>
-          <p:cNvPr id="7" name="Text 5"/>
-          <p:cNvSpPr txBox="1"/>
-          <p:nvPr/>
-        </p:nvSpPr>
-        <p:spPr>
-          <a:xfrm>
-            <a:off x="1417320" y="1545336"/>
-            <a:ext cx="4434840" cy="475488"/>
-          </a:xfrm>
-          <a:prstGeom prst="rect">
-            <a:avLst/>
-          </a:prstGeom>
-          <a:noFill/>
-          <a:ln/>
-        </p:spPr>
-        <p:txBody>
-          <a:bodyPr wrap="square" lIns="0" tIns="0" rIns="0" bIns="0" rtlCol="0" anchor="ctr"/>
-          <a:lstStyle/>
-          <a:p>
-            <a:pPr indent="0" marL="0">
-              <a:buNone/>
-            </a:pPr>
-            <a:r>
-              <a:rPr lang="en-US" sz="1150" dirty="0">
+            <a:off x="5212080" y="1874520"/>
+            <a:ext cx="6035040" cy="640080"/>
+          </a:xfrm>
+          <a:prstGeom prst="rect">
+            <a:avLst/>
+          </a:prstGeom>
+          <a:noFill/>
+          <a:ln/>
+        </p:spPr>
+        <p:txBody>
+          <a:bodyPr wrap="square" lIns="0" tIns="0" rIns="0" bIns="0" rtlCol="0" anchor="ctr"/>
+          <a:lstStyle/>
+          <a:p>
+            <a:pPr indent="0" marL="0">
+              <a:buNone/>
+            </a:pPr>
+            <a:r>
+              <a:rPr lang="en-US" sz="1350" dirty="0">
                 <a:solidFill>
                   <a:srgbClr val="3A4A5F"/>
                 </a:solidFill>
@@ -5577,1048 +5869,54 @@
                 <a:ea typeface="Calibri" pitchFamily="34" charset="-122"/>
                 <a:cs typeface="Calibri" pitchFamily="34" charset="-120"/>
               </a:rPr>
-              <a:t>Parts 1–3 ran iperf3 to 127.0.0.1 at 93–219 Gbit/s. No qdisc was ever in the path.</a:t>
-            </a:r>
-            <a:endParaRPr lang="en-US" sz="1150" dirty="0"/>
-          </a:p>
-        </p:txBody>
-      </p:sp>
-      <p:sp>
-        <p:nvSpPr>
-          <p:cNvPr id="8" name="Shape 6"/>
-          <p:cNvSpPr/>
-          <p:nvPr/>
-        </p:nvSpPr>
-        <p:spPr>
-          <a:xfrm>
-            <a:off x="6217920" y="1143000"/>
-            <a:ext cx="5349240" cy="932688"/>
-          </a:xfrm>
-          <a:prstGeom prst="roundRect">
-            <a:avLst>
-              <a:gd name="adj" fmla="val 7843"/>
-            </a:avLst>
-          </a:prstGeom>
-          <a:solidFill>
-            <a:srgbClr val="EEF4F8"/>
-          </a:solidFill>
-          <a:ln w="9525">
-            <a:solidFill>
-              <a:srgbClr val="D8E4EC"/>
-            </a:solidFill>
-            <a:prstDash val="solid"/>
-          </a:ln>
-          <a:effectLst>
-            <a:outerShdw sx="100000" sy="100000" kx="0" ky="0" algn="bl" rotWithShape="0" blurRad="50800" dist="12700" dir="5400000">
-              <a:srgbClr val="BFCEDA">
-                <a:alpha val="35000"/>
-              </a:srgbClr>
-            </a:outerShdw>
-          </a:effectLst>
-        </p:spPr>
-      </p:sp>
-      <p:sp>
-        <p:nvSpPr>
-          <p:cNvPr id="9" name="Shape 7"/>
-          <p:cNvSpPr/>
-          <p:nvPr/>
-        </p:nvSpPr>
-        <p:spPr>
-          <a:xfrm>
-            <a:off x="6446520" y="1389888"/>
-            <a:ext cx="420624" cy="420624"/>
-          </a:xfrm>
-          <a:prstGeom prst="ellipse">
-            <a:avLst/>
-          </a:prstGeom>
-          <a:solidFill>
-            <a:srgbClr val="065A82"/>
-          </a:solidFill>
-          <a:ln w="12700">
-            <a:solidFill>
-              <a:srgbClr val="333333"/>
-            </a:solidFill>
-            <a:prstDash val="solid"/>
-          </a:ln>
-        </p:spPr>
-      </p:sp>
-      <p:sp>
-        <p:nvSpPr>
-          <p:cNvPr id="10" name="Text 8"/>
-          <p:cNvSpPr txBox="1"/>
-          <p:nvPr/>
-        </p:nvSpPr>
-        <p:spPr>
-          <a:xfrm>
-            <a:off x="6446520" y="1389888"/>
-            <a:ext cx="420624" cy="420624"/>
-          </a:xfrm>
-          <a:prstGeom prst="rect">
-            <a:avLst/>
-          </a:prstGeom>
-          <a:noFill/>
-          <a:ln/>
-        </p:spPr>
-        <p:txBody>
-          <a:bodyPr wrap="square" lIns="0" tIns="0" rIns="0" bIns="0" rtlCol="0" anchor="ctr"/>
-          <a:lstStyle/>
-          <a:p>
-            <a:pPr algn="ctr" indent="0" marL="0">
-              <a:buNone/>
-            </a:pPr>
-            <a:r>
-              <a:rPr lang="en-US" sz="1300" b="1" dirty="0">
-                <a:solidFill>
-                  <a:srgbClr val="FFFFFF"/>
-                </a:solidFill>
-                <a:latin typeface="Calibri" pitchFamily="34" charset="0"/>
-                <a:ea typeface="Calibri" pitchFamily="34" charset="-122"/>
-                <a:cs typeface="Calibri" pitchFamily="34" charset="-120"/>
-              </a:rPr>
-              <a:t>2</a:t>
-            </a:r>
-            <a:endParaRPr lang="en-US" sz="1300" dirty="0"/>
-          </a:p>
-        </p:txBody>
-      </p:sp>
-      <p:sp>
-        <p:nvSpPr>
-          <p:cNvPr id="11" name="Text 9"/>
-          <p:cNvSpPr txBox="1"/>
-          <p:nvPr/>
-        </p:nvSpPr>
-        <p:spPr>
-          <a:xfrm>
-            <a:off x="6995160" y="1234440"/>
-            <a:ext cx="4434840" cy="301752"/>
-          </a:xfrm>
-          <a:prstGeom prst="rect">
-            <a:avLst/>
-          </a:prstGeom>
-          <a:noFill/>
-          <a:ln/>
-        </p:spPr>
-        <p:txBody>
-          <a:bodyPr wrap="square" lIns="0" tIns="0" rIns="0" bIns="0" rtlCol="0" anchor="ctr"/>
-          <a:lstStyle/>
-          <a:p>
-            <a:pPr indent="0" marL="0">
-              <a:buNone/>
-            </a:pPr>
-            <a:r>
-              <a:rPr lang="en-US" sz="1400" b="1" dirty="0">
-                <a:solidFill>
-                  <a:srgbClr val="13233B"/>
-                </a:solidFill>
-                <a:latin typeface="Calibri" pitchFamily="34" charset="0"/>
-                <a:ea typeface="Calibri" pitchFamily="34" charset="-122"/>
-                <a:cs typeface="Calibri" pitchFamily="34" charset="-120"/>
-              </a:rPr>
-              <a:t>ACK-path bottleneck</a:t>
-            </a:r>
-            <a:endParaRPr lang="en-US" sz="1400" dirty="0"/>
-          </a:p>
-        </p:txBody>
-      </p:sp>
-      <p:sp>
-        <p:nvSpPr>
-          <p:cNvPr id="12" name="Text 10"/>
-          <p:cNvSpPr txBox="1"/>
-          <p:nvPr/>
-        </p:nvSpPr>
-        <p:spPr>
-          <a:xfrm>
-            <a:off x="6995160" y="1545336"/>
-            <a:ext cx="4434840" cy="475488"/>
-          </a:xfrm>
-          <a:prstGeom prst="rect">
-            <a:avLst/>
-          </a:prstGeom>
-          <a:noFill/>
-          <a:ln/>
-        </p:spPr>
-        <p:txBody>
-          <a:bodyPr wrap="square" lIns="0" tIns="0" rIns="0" bIns="0" rtlCol="0" anchor="ctr"/>
-          <a:lstStyle/>
-          <a:p>
-            <a:pPr indent="0" marL="0">
-              <a:buNone/>
-            </a:pPr>
-            <a:r>
-              <a:rPr lang="en-US" sz="1150" dirty="0">
-                <a:solidFill>
-                  <a:srgbClr val="3A4A5F"/>
-                </a:solidFill>
-                <a:latin typeface="Calibri" pitchFamily="34" charset="0"/>
-                <a:ea typeface="Calibri" pitchFamily="34" charset="-122"/>
-                <a:cs typeface="Calibri" pitchFamily="34" charset="-120"/>
-              </a:rPr>
-              <a:t>Parts 2–4 shaped the acknowledgement direction. 66 bytes/packet.</a:t>
-            </a:r>
-            <a:endParaRPr lang="en-US" sz="1150" dirty="0"/>
-          </a:p>
-        </p:txBody>
-      </p:sp>
-      <p:sp>
-        <p:nvSpPr>
-          <p:cNvPr id="13" name="Shape 11"/>
-          <p:cNvSpPr/>
-          <p:nvPr/>
-        </p:nvSpPr>
-        <p:spPr>
-          <a:xfrm>
-            <a:off x="640080" y="2203704"/>
-            <a:ext cx="5349240" cy="932688"/>
-          </a:xfrm>
-          <a:prstGeom prst="roundRect">
-            <a:avLst>
-              <a:gd name="adj" fmla="val 7843"/>
-            </a:avLst>
-          </a:prstGeom>
-          <a:solidFill>
-            <a:srgbClr val="EEF4F8"/>
-          </a:solidFill>
-          <a:ln w="9525">
-            <a:solidFill>
-              <a:srgbClr val="D8E4EC"/>
-            </a:solidFill>
-            <a:prstDash val="solid"/>
-          </a:ln>
-          <a:effectLst>
-            <a:outerShdw sx="100000" sy="100000" kx="0" ky="0" algn="bl" rotWithShape="0" blurRad="50800" dist="12700" dir="5400000">
-              <a:srgbClr val="BFCEDA">
-                <a:alpha val="35000"/>
-              </a:srgbClr>
-            </a:outerShdw>
-          </a:effectLst>
-        </p:spPr>
-      </p:sp>
-      <p:sp>
-        <p:nvSpPr>
-          <p:cNvPr id="14" name="Shape 12"/>
-          <p:cNvSpPr/>
-          <p:nvPr/>
-        </p:nvSpPr>
-        <p:spPr>
-          <a:xfrm>
-            <a:off x="868680" y="2450592"/>
-            <a:ext cx="420624" cy="420624"/>
-          </a:xfrm>
-          <a:prstGeom prst="ellipse">
-            <a:avLst/>
-          </a:prstGeom>
-          <a:solidFill>
-            <a:srgbClr val="065A82"/>
-          </a:solidFill>
-          <a:ln w="12700">
-            <a:solidFill>
-              <a:srgbClr val="333333"/>
-            </a:solidFill>
-            <a:prstDash val="solid"/>
-          </a:ln>
-        </p:spPr>
-      </p:sp>
-      <p:sp>
-        <p:nvSpPr>
-          <p:cNvPr id="15" name="Text 13"/>
-          <p:cNvSpPr txBox="1"/>
-          <p:nvPr/>
-        </p:nvSpPr>
-        <p:spPr>
-          <a:xfrm>
-            <a:off x="868680" y="2450592"/>
-            <a:ext cx="420624" cy="420624"/>
-          </a:xfrm>
-          <a:prstGeom prst="rect">
-            <a:avLst/>
-          </a:prstGeom>
-          <a:noFill/>
-          <a:ln/>
-        </p:spPr>
-        <p:txBody>
-          <a:bodyPr wrap="square" lIns="0" tIns="0" rIns="0" bIns="0" rtlCol="0" anchor="ctr"/>
-          <a:lstStyle/>
-          <a:p>
-            <a:pPr algn="ctr" indent="0" marL="0">
-              <a:buNone/>
-            </a:pPr>
-            <a:r>
-              <a:rPr lang="en-US" sz="1300" b="1" dirty="0">
-                <a:solidFill>
-                  <a:srgbClr val="FFFFFF"/>
-                </a:solidFill>
-                <a:latin typeface="Calibri" pitchFamily="34" charset="0"/>
-                <a:ea typeface="Calibri" pitchFamily="34" charset="-122"/>
-                <a:cs typeface="Calibri" pitchFamily="34" charset="-120"/>
-              </a:rPr>
-              <a:t>3</a:t>
-            </a:r>
-            <a:endParaRPr lang="en-US" sz="1300" dirty="0"/>
-          </a:p>
-        </p:txBody>
-      </p:sp>
-      <p:sp>
-        <p:nvSpPr>
-          <p:cNvPr id="16" name="Text 14"/>
-          <p:cNvSpPr txBox="1"/>
-          <p:nvPr/>
-        </p:nvSpPr>
-        <p:spPr>
-          <a:xfrm>
-            <a:off x="1417320" y="2295144"/>
-            <a:ext cx="4434840" cy="301752"/>
-          </a:xfrm>
-          <a:prstGeom prst="rect">
-            <a:avLst/>
-          </a:prstGeom>
-          <a:noFill/>
-          <a:ln/>
-        </p:spPr>
-        <p:txBody>
-          <a:bodyPr wrap="square" lIns="0" tIns="0" rIns="0" bIns="0" rtlCol="0" anchor="ctr"/>
-          <a:lstStyle/>
-          <a:p>
-            <a:pPr indent="0" marL="0">
-              <a:buNone/>
-            </a:pPr>
-            <a:r>
-              <a:rPr lang="en-US" sz="1400" b="1" dirty="0">
-                <a:solidFill>
-                  <a:srgbClr val="13233B"/>
-                </a:solidFill>
-                <a:latin typeface="Calibri" pitchFamily="34" charset="0"/>
-                <a:ea typeface="Calibri" pitchFamily="34" charset="-122"/>
-                <a:cs typeface="Calibri" pitchFamily="34" charset="-120"/>
-              </a:rPr>
-              <a:t>No RTT ever measured</a:t>
-            </a:r>
-            <a:endParaRPr lang="en-US" sz="1400" dirty="0"/>
-          </a:p>
-        </p:txBody>
-      </p:sp>
-      <p:sp>
-        <p:nvSpPr>
-          <p:cNvPr id="17" name="Text 15"/>
-          <p:cNvSpPr txBox="1"/>
-          <p:nvPr/>
-        </p:nvSpPr>
-        <p:spPr>
-          <a:xfrm>
-            <a:off x="1417320" y="2606040"/>
-            <a:ext cx="4434840" cy="475488"/>
-          </a:xfrm>
-          <a:prstGeom prst="rect">
-            <a:avLst/>
-          </a:prstGeom>
-          <a:noFill/>
-          <a:ln/>
-        </p:spPr>
-        <p:txBody>
-          <a:bodyPr wrap="square" lIns="0" tIns="0" rIns="0" bIns="0" rtlCol="0" anchor="ctr"/>
-          <a:lstStyle/>
-          <a:p>
-            <a:pPr indent="0" marL="0">
-              <a:buNone/>
-            </a:pPr>
-            <a:r>
-              <a:rPr lang="en-US" sz="1150" dirty="0">
-                <a:solidFill>
-                  <a:srgbClr val="3A4A5F"/>
-                </a:solidFill>
-                <a:latin typeface="Calibri" pitchFamily="34" charset="0"/>
-                <a:ea typeface="Calibri" pitchFamily="34" charset="-122"/>
-                <a:cs typeface="Calibri" pitchFamily="34" charset="-120"/>
-              </a:rPr>
-              <a:t>The reported 0.541 / 2.200 / 2.445 ms have no source anywhere in the repository.</a:t>
-            </a:r>
-            <a:endParaRPr lang="en-US" sz="1150" dirty="0"/>
-          </a:p>
-        </p:txBody>
-      </p:sp>
-      <p:sp>
-        <p:nvSpPr>
-          <p:cNvPr id="18" name="Shape 16"/>
-          <p:cNvSpPr/>
-          <p:nvPr/>
-        </p:nvSpPr>
-        <p:spPr>
-          <a:xfrm>
-            <a:off x="6217920" y="2203704"/>
-            <a:ext cx="5349240" cy="932688"/>
-          </a:xfrm>
-          <a:prstGeom prst="roundRect">
-            <a:avLst>
-              <a:gd name="adj" fmla="val 7843"/>
-            </a:avLst>
-          </a:prstGeom>
-          <a:solidFill>
-            <a:srgbClr val="EEF4F8"/>
-          </a:solidFill>
-          <a:ln w="9525">
-            <a:solidFill>
-              <a:srgbClr val="D8E4EC"/>
-            </a:solidFill>
-            <a:prstDash val="solid"/>
-          </a:ln>
-          <a:effectLst>
-            <a:outerShdw sx="100000" sy="100000" kx="0" ky="0" algn="bl" rotWithShape="0" blurRad="50800" dist="12700" dir="5400000">
-              <a:srgbClr val="BFCEDA">
-                <a:alpha val="35000"/>
-              </a:srgbClr>
-            </a:outerShdw>
-          </a:effectLst>
-        </p:spPr>
-      </p:sp>
-      <p:sp>
-        <p:nvSpPr>
-          <p:cNvPr id="19" name="Shape 17"/>
-          <p:cNvSpPr/>
-          <p:nvPr/>
-        </p:nvSpPr>
-        <p:spPr>
-          <a:xfrm>
-            <a:off x="6446520" y="2450592"/>
-            <a:ext cx="420624" cy="420624"/>
-          </a:xfrm>
-          <a:prstGeom prst="ellipse">
-            <a:avLst/>
-          </a:prstGeom>
-          <a:solidFill>
-            <a:srgbClr val="065A82"/>
-          </a:solidFill>
-          <a:ln w="12700">
-            <a:solidFill>
-              <a:srgbClr val="333333"/>
-            </a:solidFill>
-            <a:prstDash val="solid"/>
-          </a:ln>
-        </p:spPr>
-      </p:sp>
-      <p:sp>
-        <p:nvSpPr>
-          <p:cNvPr id="20" name="Text 18"/>
-          <p:cNvSpPr txBox="1"/>
-          <p:nvPr/>
-        </p:nvSpPr>
-        <p:spPr>
-          <a:xfrm>
-            <a:off x="6446520" y="2450592"/>
-            <a:ext cx="420624" cy="420624"/>
-          </a:xfrm>
-          <a:prstGeom prst="rect">
-            <a:avLst/>
-          </a:prstGeom>
-          <a:noFill/>
-          <a:ln/>
-        </p:spPr>
-        <p:txBody>
-          <a:bodyPr wrap="square" lIns="0" tIns="0" rIns="0" bIns="0" rtlCol="0" anchor="ctr"/>
-          <a:lstStyle/>
-          <a:p>
-            <a:pPr algn="ctr" indent="0" marL="0">
-              <a:buNone/>
-            </a:pPr>
-            <a:r>
-              <a:rPr lang="en-US" sz="1300" b="1" dirty="0">
-                <a:solidFill>
-                  <a:srgbClr val="FFFFFF"/>
-                </a:solidFill>
-                <a:latin typeface="Calibri" pitchFamily="34" charset="0"/>
-                <a:ea typeface="Calibri" pitchFamily="34" charset="-122"/>
-                <a:cs typeface="Calibri" pitchFamily="34" charset="-120"/>
-              </a:rPr>
-              <a:t>4</a:t>
-            </a:r>
-            <a:endParaRPr lang="en-US" sz="1300" dirty="0"/>
-          </a:p>
-        </p:txBody>
-      </p:sp>
-      <p:sp>
-        <p:nvSpPr>
-          <p:cNvPr id="21" name="Text 19"/>
-          <p:cNvSpPr txBox="1"/>
-          <p:nvPr/>
-        </p:nvSpPr>
-        <p:spPr>
-          <a:xfrm>
-            <a:off x="6995160" y="2295144"/>
-            <a:ext cx="4434840" cy="301752"/>
-          </a:xfrm>
-          <a:prstGeom prst="rect">
-            <a:avLst/>
-          </a:prstGeom>
-          <a:noFill/>
-          <a:ln/>
-        </p:spPr>
-        <p:txBody>
-          <a:bodyPr wrap="square" lIns="0" tIns="0" rIns="0" bIns="0" rtlCol="0" anchor="ctr"/>
-          <a:lstStyle/>
-          <a:p>
-            <a:pPr indent="0" marL="0">
-              <a:buNone/>
-            </a:pPr>
-            <a:r>
-              <a:rPr lang="en-US" sz="1400" b="1" dirty="0">
-                <a:solidFill>
-                  <a:srgbClr val="13233B"/>
-                </a:solidFill>
-                <a:latin typeface="Calibri" pitchFamily="34" charset="0"/>
-                <a:ea typeface="Calibri" pitchFamily="34" charset="-122"/>
-                <a:cs typeface="Calibri" pitchFamily="34" charset="-120"/>
-              </a:rPr>
-              <a:t>eBPF telemetry read zero</a:t>
-            </a:r>
-            <a:endParaRPr lang="en-US" sz="1400" dirty="0"/>
-          </a:p>
-        </p:txBody>
-      </p:sp>
-      <p:sp>
-        <p:nvSpPr>
-          <p:cNvPr id="22" name="Text 20"/>
-          <p:cNvSpPr txBox="1"/>
-          <p:nvPr/>
-        </p:nvSpPr>
-        <p:spPr>
-          <a:xfrm>
-            <a:off x="6995160" y="2606040"/>
-            <a:ext cx="4434840" cy="475488"/>
-          </a:xfrm>
-          <a:prstGeom prst="rect">
-            <a:avLst/>
-          </a:prstGeom>
-          <a:noFill/>
-          <a:ln/>
-        </p:spPr>
-        <p:txBody>
-          <a:bodyPr wrap="square" lIns="0" tIns="0" rIns="0" bIns="0" rtlCol="0" anchor="ctr"/>
-          <a:lstStyle/>
-          <a:p>
-            <a:pPr indent="0" marL="0">
-              <a:buNone/>
-            </a:pPr>
-            <a:r>
-              <a:rPr lang="en-US" sz="1150" dirty="0">
-                <a:solidFill>
-                  <a:srgbClr val="3A4A5F"/>
-                </a:solidFill>
-                <a:latin typeface="Calibri" pitchFamily="34" charset="0"/>
-                <a:ea typeface="Calibri" pitchFamily="34" charset="-122"/>
-                <a:cs typeface="Calibri" pitchFamily="34" charset="-120"/>
-              </a:rPr>
-              <a:t>Three decode bugs: hex strings into a bare except, wrong struct offsets, CLOCK_REALTIME vs CLOCK_MONOTONIC (age = 56.8 years).</a:t>
-            </a:r>
-            <a:endParaRPr lang="en-US" sz="1150" dirty="0"/>
-          </a:p>
-        </p:txBody>
-      </p:sp>
-      <p:sp>
-        <p:nvSpPr>
-          <p:cNvPr id="23" name="Shape 21"/>
-          <p:cNvSpPr/>
-          <p:nvPr/>
-        </p:nvSpPr>
-        <p:spPr>
-          <a:xfrm>
-            <a:off x="640080" y="3264408"/>
-            <a:ext cx="5349240" cy="932688"/>
-          </a:xfrm>
-          <a:prstGeom prst="roundRect">
-            <a:avLst>
-              <a:gd name="adj" fmla="val 7843"/>
-            </a:avLst>
-          </a:prstGeom>
-          <a:solidFill>
-            <a:srgbClr val="EEF4F8"/>
-          </a:solidFill>
-          <a:ln w="9525">
-            <a:solidFill>
-              <a:srgbClr val="D8E4EC"/>
-            </a:solidFill>
-            <a:prstDash val="solid"/>
-          </a:ln>
-          <a:effectLst>
-            <a:outerShdw sx="100000" sy="100000" kx="0" ky="0" algn="bl" rotWithShape="0" blurRad="50800" dist="12700" dir="5400000">
-              <a:srgbClr val="BFCEDA">
-                <a:alpha val="35000"/>
-              </a:srgbClr>
-            </a:outerShdw>
-          </a:effectLst>
-        </p:spPr>
-      </p:sp>
-      <p:sp>
-        <p:nvSpPr>
-          <p:cNvPr id="24" name="Shape 22"/>
-          <p:cNvSpPr/>
-          <p:nvPr/>
-        </p:nvSpPr>
-        <p:spPr>
-          <a:xfrm>
-            <a:off x="868680" y="3511296"/>
-            <a:ext cx="420624" cy="420624"/>
-          </a:xfrm>
-          <a:prstGeom prst="ellipse">
-            <a:avLst/>
-          </a:prstGeom>
-          <a:solidFill>
-            <a:srgbClr val="065A82"/>
-          </a:solidFill>
-          <a:ln w="12700">
-            <a:solidFill>
-              <a:srgbClr val="333333"/>
-            </a:solidFill>
-            <a:prstDash val="solid"/>
-          </a:ln>
-        </p:spPr>
-      </p:sp>
-      <p:sp>
-        <p:nvSpPr>
-          <p:cNvPr id="25" name="Text 23"/>
-          <p:cNvSpPr txBox="1"/>
-          <p:nvPr/>
-        </p:nvSpPr>
-        <p:spPr>
-          <a:xfrm>
-            <a:off x="868680" y="3511296"/>
-            <a:ext cx="420624" cy="420624"/>
-          </a:xfrm>
-          <a:prstGeom prst="rect">
-            <a:avLst/>
-          </a:prstGeom>
-          <a:noFill/>
-          <a:ln/>
-        </p:spPr>
-        <p:txBody>
-          <a:bodyPr wrap="square" lIns="0" tIns="0" rIns="0" bIns="0" rtlCol="0" anchor="ctr"/>
-          <a:lstStyle/>
-          <a:p>
-            <a:pPr algn="ctr" indent="0" marL="0">
-              <a:buNone/>
-            </a:pPr>
-            <a:r>
-              <a:rPr lang="en-US" sz="1300" b="1" dirty="0">
-                <a:solidFill>
-                  <a:srgbClr val="FFFFFF"/>
-                </a:solidFill>
-                <a:latin typeface="Calibri" pitchFamily="34" charset="0"/>
-                <a:ea typeface="Calibri" pitchFamily="34" charset="-122"/>
-                <a:cs typeface="Calibri" pitchFamily="34" charset="-120"/>
-              </a:rPr>
-              <a:t>5</a:t>
-            </a:r>
-            <a:endParaRPr lang="en-US" sz="1300" dirty="0"/>
-          </a:p>
-        </p:txBody>
-      </p:sp>
-      <p:sp>
-        <p:nvSpPr>
-          <p:cNvPr id="26" name="Text 24"/>
-          <p:cNvSpPr txBox="1"/>
-          <p:nvPr/>
-        </p:nvSpPr>
-        <p:spPr>
-          <a:xfrm>
-            <a:off x="1417320" y="3355848"/>
-            <a:ext cx="4434840" cy="301752"/>
-          </a:xfrm>
-          <a:prstGeom prst="rect">
-            <a:avLst/>
-          </a:prstGeom>
-          <a:noFill/>
-          <a:ln/>
-        </p:spPr>
-        <p:txBody>
-          <a:bodyPr wrap="square" lIns="0" tIns="0" rIns="0" bIns="0" rtlCol="0" anchor="ctr"/>
-          <a:lstStyle/>
-          <a:p>
-            <a:pPr indent="0" marL="0">
-              <a:buNone/>
-            </a:pPr>
-            <a:r>
-              <a:rPr lang="en-US" sz="1400" b="1" dirty="0">
-                <a:solidFill>
-                  <a:srgbClr val="13233B"/>
-                </a:solidFill>
-                <a:latin typeface="Calibri" pitchFamily="34" charset="0"/>
-                <a:ea typeface="Calibri" pitchFamily="34" charset="-122"/>
-                <a:cs typeface="Calibri" pitchFamily="34" charset="-120"/>
-              </a:rPr>
-              <a:t>Elephant threshold unreachable</a:t>
-            </a:r>
-            <a:endParaRPr lang="en-US" sz="1400" dirty="0"/>
-          </a:p>
-        </p:txBody>
-      </p:sp>
-      <p:sp>
-        <p:nvSpPr>
-          <p:cNvPr id="27" name="Text 25"/>
-          <p:cNvSpPr txBox="1"/>
-          <p:nvPr/>
-        </p:nvSpPr>
-        <p:spPr>
-          <a:xfrm>
-            <a:off x="1417320" y="3666744"/>
-            <a:ext cx="4434840" cy="475488"/>
-          </a:xfrm>
-          <a:prstGeom prst="rect">
-            <a:avLst/>
-          </a:prstGeom>
-          <a:noFill/>
-          <a:ln/>
-        </p:spPr>
-        <p:txBody>
-          <a:bodyPr wrap="square" lIns="0" tIns="0" rIns="0" bIns="0" rtlCol="0" anchor="ctr"/>
-          <a:lstStyle/>
-          <a:p>
-            <a:pPr indent="0" marL="0">
-              <a:buNone/>
-            </a:pPr>
-            <a:r>
-              <a:rPr lang="en-US" sz="1150" dirty="0">
-                <a:solidFill>
-                  <a:srgbClr val="3A4A5F"/>
-                </a:solidFill>
-                <a:latin typeface="Calibri" pitchFamily="34" charset="0"/>
-                <a:ea typeface="Calibri" pitchFamily="34" charset="-122"/>
-                <a:cs typeface="Calibri" pitchFamily="34" charset="-120"/>
-              </a:rPr>
-              <a:t>10 MB threshold, 9.38 MB maximum possible flow share. The classifier could never fire.</a:t>
-            </a:r>
-            <a:endParaRPr lang="en-US" sz="1150" dirty="0"/>
-          </a:p>
-        </p:txBody>
-      </p:sp>
-      <p:sp>
-        <p:nvSpPr>
-          <p:cNvPr id="28" name="Shape 26"/>
-          <p:cNvSpPr/>
-          <p:nvPr/>
-        </p:nvSpPr>
-        <p:spPr>
-          <a:xfrm>
-            <a:off x="6217920" y="3264408"/>
-            <a:ext cx="5349240" cy="932688"/>
-          </a:xfrm>
-          <a:prstGeom prst="roundRect">
-            <a:avLst>
-              <a:gd name="adj" fmla="val 7843"/>
-            </a:avLst>
-          </a:prstGeom>
-          <a:solidFill>
-            <a:srgbClr val="EEF4F8"/>
-          </a:solidFill>
-          <a:ln w="9525">
-            <a:solidFill>
-              <a:srgbClr val="D8E4EC"/>
-            </a:solidFill>
-            <a:prstDash val="solid"/>
-          </a:ln>
-          <a:effectLst>
-            <a:outerShdw sx="100000" sy="100000" kx="0" ky="0" algn="bl" rotWithShape="0" blurRad="50800" dist="12700" dir="5400000">
-              <a:srgbClr val="BFCEDA">
-                <a:alpha val="35000"/>
-              </a:srgbClr>
-            </a:outerShdw>
-          </a:effectLst>
-        </p:spPr>
-      </p:sp>
-      <p:sp>
-        <p:nvSpPr>
-          <p:cNvPr id="29" name="Shape 27"/>
-          <p:cNvSpPr/>
-          <p:nvPr/>
-        </p:nvSpPr>
-        <p:spPr>
-          <a:xfrm>
-            <a:off x="6446520" y="3511296"/>
-            <a:ext cx="420624" cy="420624"/>
-          </a:xfrm>
-          <a:prstGeom prst="ellipse">
-            <a:avLst/>
-          </a:prstGeom>
-          <a:solidFill>
-            <a:srgbClr val="065A82"/>
-          </a:solidFill>
-          <a:ln w="12700">
-            <a:solidFill>
-              <a:srgbClr val="333333"/>
-            </a:solidFill>
-            <a:prstDash val="solid"/>
-          </a:ln>
-        </p:spPr>
-      </p:sp>
-      <p:sp>
-        <p:nvSpPr>
-          <p:cNvPr id="30" name="Text 28"/>
-          <p:cNvSpPr txBox="1"/>
-          <p:nvPr/>
-        </p:nvSpPr>
-        <p:spPr>
-          <a:xfrm>
-            <a:off x="6446520" y="3511296"/>
-            <a:ext cx="420624" cy="420624"/>
-          </a:xfrm>
-          <a:prstGeom prst="rect">
-            <a:avLst/>
-          </a:prstGeom>
-          <a:noFill/>
-          <a:ln/>
-        </p:spPr>
-        <p:txBody>
-          <a:bodyPr wrap="square" lIns="0" tIns="0" rIns="0" bIns="0" rtlCol="0" anchor="ctr"/>
-          <a:lstStyle/>
-          <a:p>
-            <a:pPr algn="ctr" indent="0" marL="0">
-              <a:buNone/>
-            </a:pPr>
-            <a:r>
-              <a:rPr lang="en-US" sz="1300" b="1" dirty="0">
-                <a:solidFill>
-                  <a:srgbClr val="FFFFFF"/>
-                </a:solidFill>
-                <a:latin typeface="Calibri" pitchFamily="34" charset="0"/>
-                <a:ea typeface="Calibri" pitchFamily="34" charset="-122"/>
-                <a:cs typeface="Calibri" pitchFamily="34" charset="-120"/>
-              </a:rPr>
-              <a:t>6</a:t>
-            </a:r>
-            <a:endParaRPr lang="en-US" sz="1300" dirty="0"/>
-          </a:p>
-        </p:txBody>
-      </p:sp>
-      <p:sp>
-        <p:nvSpPr>
-          <p:cNvPr id="31" name="Text 29"/>
-          <p:cNvSpPr txBox="1"/>
-          <p:nvPr/>
-        </p:nvSpPr>
-        <p:spPr>
-          <a:xfrm>
-            <a:off x="6995160" y="3355848"/>
-            <a:ext cx="4434840" cy="301752"/>
-          </a:xfrm>
-          <a:prstGeom prst="rect">
-            <a:avLst/>
-          </a:prstGeom>
-          <a:noFill/>
-          <a:ln/>
-        </p:spPr>
-        <p:txBody>
-          <a:bodyPr wrap="square" lIns="0" tIns="0" rIns="0" bIns="0" rtlCol="0" anchor="ctr"/>
-          <a:lstStyle/>
-          <a:p>
-            <a:pPr indent="0" marL="0">
-              <a:buNone/>
-            </a:pPr>
-            <a:r>
-              <a:rPr lang="en-US" sz="1400" b="1" dirty="0">
-                <a:solidFill>
-                  <a:srgbClr val="13233B"/>
-                </a:solidFill>
-                <a:latin typeface="Calibri" pitchFamily="34" charset="0"/>
-                <a:ea typeface="Calibri" pitchFamily="34" charset="-122"/>
-                <a:cs typeface="Calibri" pitchFamily="34" charset="-120"/>
-              </a:rPr>
-              <a:t>Prediction had no effect</a:t>
-            </a:r>
-            <a:endParaRPr lang="en-US" sz="1400" dirty="0"/>
-          </a:p>
-        </p:txBody>
-      </p:sp>
-      <p:sp>
-        <p:nvSpPr>
-          <p:cNvPr id="32" name="Text 30"/>
-          <p:cNvSpPr txBox="1"/>
-          <p:nvPr/>
-        </p:nvSpPr>
-        <p:spPr>
-          <a:xfrm>
-            <a:off x="6995160" y="3666744"/>
-            <a:ext cx="4434840" cy="475488"/>
-          </a:xfrm>
-          <a:prstGeom prst="rect">
-            <a:avLst/>
-          </a:prstGeom>
-          <a:noFill/>
-          <a:ln/>
-        </p:spPr>
-        <p:txBody>
-          <a:bodyPr wrap="square" lIns="0" tIns="0" rIns="0" bIns="0" rtlCol="0" anchor="ctr"/>
-          <a:lstStyle/>
-          <a:p>
-            <a:pPr indent="0" marL="0">
-              <a:buNone/>
-            </a:pPr>
-            <a:r>
-              <a:rPr lang="en-US" sz="1150" dirty="0">
-                <a:solidFill>
-                  <a:srgbClr val="3A4A5F"/>
-                </a:solidFill>
-                <a:latin typeface="Calibri" pitchFamily="34" charset="0"/>
-                <a:ea typeface="Calibri" pitchFamily="34" charset="-122"/>
-                <a:cs typeface="Calibri" pitchFamily="34" charset="-120"/>
-              </a:rPr>
-              <a:t>All 375 logged adjustments applied the identical action.</a:t>
-            </a:r>
-            <a:endParaRPr lang="en-US" sz="1150" dirty="0"/>
-          </a:p>
-        </p:txBody>
-      </p:sp>
-      <p:sp>
-        <p:nvSpPr>
-          <p:cNvPr id="33" name="Shape 31"/>
-          <p:cNvSpPr/>
-          <p:nvPr/>
-        </p:nvSpPr>
-        <p:spPr>
-          <a:xfrm>
-            <a:off x="640080" y="4325112"/>
-            <a:ext cx="10881360" cy="932688"/>
-          </a:xfrm>
-          <a:prstGeom prst="roundRect">
-            <a:avLst>
-              <a:gd name="adj" fmla="val 7843"/>
-            </a:avLst>
-          </a:prstGeom>
-          <a:solidFill>
-            <a:srgbClr val="FBEEF0"/>
-          </a:solidFill>
-          <a:ln w="9525">
-            <a:solidFill>
-              <a:srgbClr val="D8E4EC"/>
-            </a:solidFill>
-            <a:prstDash val="solid"/>
-          </a:ln>
-          <a:effectLst>
-            <a:outerShdw sx="100000" sy="100000" kx="0" ky="0" algn="bl" rotWithShape="0" blurRad="50800" dist="12700" dir="5400000">
-              <a:srgbClr val="BFCEDA">
-                <a:alpha val="35000"/>
-              </a:srgbClr>
-            </a:outerShdw>
-          </a:effectLst>
-        </p:spPr>
-      </p:sp>
-      <p:sp>
-        <p:nvSpPr>
-          <p:cNvPr id="34" name="Shape 32"/>
-          <p:cNvSpPr/>
-          <p:nvPr/>
-        </p:nvSpPr>
-        <p:spPr>
-          <a:xfrm>
-            <a:off x="896112" y="4572000"/>
-            <a:ext cx="420624" cy="420624"/>
-          </a:xfrm>
-          <a:prstGeom prst="ellipse">
-            <a:avLst/>
-          </a:prstGeom>
-          <a:solidFill>
-            <a:srgbClr val="B23A48"/>
-          </a:solidFill>
-          <a:ln w="12700">
-            <a:solidFill>
-              <a:srgbClr val="333333"/>
-            </a:solidFill>
-            <a:prstDash val="solid"/>
-          </a:ln>
-        </p:spPr>
-      </p:sp>
-      <p:sp>
-        <p:nvSpPr>
-          <p:cNvPr id="35" name="Text 33"/>
-          <p:cNvSpPr txBox="1"/>
-          <p:nvPr/>
-        </p:nvSpPr>
-        <p:spPr>
-          <a:xfrm>
-            <a:off x="896112" y="4572000"/>
-            <a:ext cx="420624" cy="420624"/>
-          </a:xfrm>
-          <a:prstGeom prst="rect">
-            <a:avLst/>
-          </a:prstGeom>
-          <a:noFill/>
-          <a:ln/>
-        </p:spPr>
-        <p:txBody>
-          <a:bodyPr wrap="square" lIns="0" tIns="0" rIns="0" bIns="0" rtlCol="0" anchor="ctr"/>
-          <a:lstStyle/>
-          <a:p>
-            <a:pPr algn="ctr" indent="0" marL="0">
-              <a:buNone/>
-            </a:pPr>
-            <a:r>
-              <a:rPr lang="en-US" sz="1300" b="1" dirty="0">
-                <a:solidFill>
-                  <a:srgbClr val="FFFFFF"/>
-                </a:solidFill>
-                <a:latin typeface="Calibri" pitchFamily="34" charset="0"/>
-                <a:ea typeface="Calibri" pitchFamily="34" charset="-122"/>
-                <a:cs typeface="Calibri" pitchFamily="34" charset="-120"/>
-              </a:rPr>
-              <a:t>7</a:t>
-            </a:r>
-            <a:endParaRPr lang="en-US" sz="1300" dirty="0"/>
-          </a:p>
-        </p:txBody>
-      </p:sp>
-      <p:sp>
-        <p:nvSpPr>
-          <p:cNvPr id="36" name="Text 34"/>
-          <p:cNvSpPr txBox="1"/>
-          <p:nvPr/>
-        </p:nvSpPr>
-        <p:spPr>
-          <a:xfrm>
-            <a:off x="1481328" y="4416552"/>
-            <a:ext cx="9966960" cy="301752"/>
-          </a:xfrm>
-          <a:prstGeom prst="rect">
-            <a:avLst/>
-          </a:prstGeom>
-          <a:noFill/>
-          <a:ln/>
-        </p:spPr>
-        <p:txBody>
-          <a:bodyPr wrap="square" lIns="0" tIns="0" rIns="0" bIns="0" rtlCol="0" anchor="ctr"/>
-          <a:lstStyle/>
-          <a:p>
-            <a:pPr indent="0" marL="0">
-              <a:buNone/>
-            </a:pPr>
-            <a:r>
-              <a:rPr lang="en-US" sz="1400" b="1" dirty="0">
-                <a:solidFill>
-                  <a:srgbClr val="B23A48"/>
-                </a:solidFill>
-                <a:latin typeface="Calibri" pitchFamily="34" charset="0"/>
-                <a:ea typeface="Calibri" pitchFamily="34" charset="-122"/>
-                <a:cs typeface="Calibri" pitchFamily="34" charset="-120"/>
-              </a:rPr>
-              <a:t>Headline figures hardcoded</a:t>
-            </a:r>
-            <a:endParaRPr lang="en-US" sz="1400" dirty="0"/>
-          </a:p>
-        </p:txBody>
-      </p:sp>
-      <p:sp>
-        <p:nvSpPr>
-          <p:cNvPr id="37" name="Text 35"/>
-          <p:cNvSpPr txBox="1"/>
-          <p:nvPr/>
-        </p:nvSpPr>
-        <p:spPr>
-          <a:xfrm>
-            <a:off x="1481328" y="4727448"/>
-            <a:ext cx="9966960" cy="457200"/>
-          </a:xfrm>
-          <a:prstGeom prst="rect">
-            <a:avLst/>
-          </a:prstGeom>
-          <a:noFill/>
-          <a:ln/>
-        </p:spPr>
-        <p:txBody>
-          <a:bodyPr wrap="square" lIns="0" tIns="0" rIns="0" bIns="0" rtlCol="0" anchor="ctr"/>
+              <a:t>A dimensionless number an operator already has: the configured target, and an estimate of the path.</a:t>
+            </a:r>
+            <a:endParaRPr lang="en-US" sz="1350" dirty="0"/>
+          </a:p>
+        </p:txBody>
+      </p:sp>
+      <p:pic>
+        <p:nvPicPr>
+          <p:cNvPr id="7" name="Image 0" descr="figures/comparison/fig16_scaling_law.png">    </p:cNvPr>
+          <p:cNvPicPr>
+            <a:picLocks noChangeAspect="1"/>
+          </p:cNvPicPr>
+          <p:nvPr/>
+        </p:nvPicPr>
+        <p:blipFill>
+          <a:blip r:embed="rId1"/>
+          <a:srcRect l="0" r="0" t="0" b="0"/>
+          <a:stretch/>
+        </p:blipFill>
+        <p:spPr>
+          <a:xfrm>
+            <a:off x="640080" y="2788920"/>
+            <a:ext cx="10881360" cy="3108960"/>
+          </a:xfrm>
+          <a:prstGeom prst="rect">
+            <a:avLst/>
+          </a:prstGeom>
+        </p:spPr>
+      </p:pic>
+      <p:sp>
+        <p:nvSpPr>
+          <p:cNvPr id="8" name="Text 5"/>
+          <p:cNvSpPr txBox="1"/>
+          <p:nvPr/>
+        </p:nvSpPr>
+        <p:spPr>
+          <a:xfrm>
+            <a:off x="640080" y="5989320"/>
+            <a:ext cx="10881360" cy="365760"/>
+          </a:xfrm>
+          <a:prstGeom prst="rect">
+            <a:avLst/>
+          </a:prstGeom>
+          <a:noFill/>
+          <a:ln/>
+        </p:spPr>
+        <p:txBody>
+          <a:bodyPr wrap="square" rtlCol="0" anchor="ctr"/>
           <a:lstStyle/>
           <a:p>
             <a:pPr indent="0" marL="0">
@@ -6627,54 +5925,15 @@
             <a:r>
               <a:rPr lang="en-US" sz="1200" dirty="0">
                 <a:solidFill>
-                  <a:srgbClr val="3A4A5F"/>
-                </a:solidFill>
-                <a:latin typeface="Calibri" pitchFamily="34" charset="0"/>
-                <a:ea typeface="Calibri" pitchFamily="34" charset="-122"/>
-                <a:cs typeface="Calibri" pitchFamily="34" charset="-120"/>
-              </a:rPr>
-              <a:t>"12× faster" is the literal array [120, 70, 60, 5]. No stabilisation time was ever measured.</a:t>
+                  <a:srgbClr val="7B8A9C"/>
+                </a:solidFill>
+                <a:latin typeface="Calibri" pitchFamily="34" charset="0"/>
+                <a:ea typeface="Calibri" pitchFamily="34" charset="-122"/>
+                <a:cs typeface="Calibri" pitchFamily="34" charset="-120"/>
+              </a:rPr>
+              <a:t>Left: benefit against the ratio, collapsing onto one curve. Right: the same runs against RTT alone, scattered.</a:t>
             </a:r>
             <a:endParaRPr lang="en-US" sz="1200" dirty="0"/>
-          </a:p>
-        </p:txBody>
-      </p:sp>
-      <p:sp>
-        <p:nvSpPr>
-          <p:cNvPr id="38" name="Text 36"/>
-          <p:cNvSpPr txBox="1"/>
-          <p:nvPr/>
-        </p:nvSpPr>
-        <p:spPr>
-          <a:xfrm>
-            <a:off x="640080" y="5852160"/>
-            <a:ext cx="10881360" cy="365760"/>
-          </a:xfrm>
-          <a:prstGeom prst="rect">
-            <a:avLst/>
-          </a:prstGeom>
-          <a:noFill/>
-          <a:ln/>
-        </p:spPr>
-        <p:txBody>
-          <a:bodyPr wrap="square" rtlCol="0" anchor="ctr"/>
-          <a:lstStyle/>
-          <a:p>
-            <a:pPr indent="0" marL="0">
-              <a:buNone/>
-            </a:pPr>
-            <a:r>
-              <a:rPr lang="en-US" sz="1300" i="1" dirty="0">
-                <a:solidFill>
-                  <a:srgbClr val="7B8A9C"/>
-                </a:solidFill>
-                <a:latin typeface="Calibri" pitchFamily="34" charset="0"/>
-                <a:ea typeface="Calibri" pitchFamily="34" charset="-122"/>
-                <a:cs typeface="Calibri" pitchFamily="34" charset="-120"/>
-              </a:rPr>
-              <a:t>All seven are pinned by regression tests that fail against the original behaviour.</a:t>
-            </a:r>
-            <a:endParaRPr lang="en-US" sz="1300" dirty="0"/>
           </a:p>
         </p:txBody>
       </p:sp>
@@ -6743,7 +6002,7 @@
                 <a:ea typeface="Cambria" pitchFamily="34" charset="-122"/>
                 <a:cs typeface="Cambria" pitchFamily="34" charset="-120"/>
               </a:rPr>
-              <a:t>How each was caught</a:t>
+              <a:t>b(r) = B / (1 + (r0/r)^k)</a:t>
             </a:r>
             <a:endParaRPr lang="en-US" sz="3200" dirty="0"/>
           </a:p>
@@ -6751,57 +6010,18 @@
       </p:sp>
       <p:sp>
         <p:nvSpPr>
-          <p:cNvPr id="3" name="Text 1"/>
-          <p:cNvSpPr txBox="1"/>
-          <p:nvPr/>
-        </p:nvSpPr>
-        <p:spPr>
-          <a:xfrm>
-            <a:off x="640080" y="1097280"/>
-            <a:ext cx="10881360" cy="411480"/>
-          </a:xfrm>
-          <a:prstGeom prst="rect">
-            <a:avLst/>
-          </a:prstGeom>
-          <a:noFill/>
-          <a:ln/>
-        </p:spPr>
-        <p:txBody>
-          <a:bodyPr wrap="square" rtlCol="0" anchor="ctr"/>
-          <a:lstStyle/>
-          <a:p>
-            <a:pPr indent="0" marL="0">
-              <a:buNone/>
-            </a:pPr>
-            <a:r>
-              <a:rPr lang="en-US" sz="1500" dirty="0">
-                <a:solidFill>
-                  <a:srgbClr val="3A4A5F"/>
-                </a:solidFill>
-                <a:latin typeface="Calibri" pitchFamily="34" charset="0"/>
-                <a:ea typeface="Calibri" pitchFamily="34" charset="-122"/>
-                <a:cs typeface="Calibri" pitchFamily="34" charset="-120"/>
-              </a:rPr>
-              <a:t>Not one was visible from a summary statistic. Every one was found by checking a physical invariant.</a:t>
-            </a:r>
-            <a:endParaRPr lang="en-US" sz="1500" dirty="0"/>
-          </a:p>
-        </p:txBody>
-      </p:sp>
-      <p:sp>
-        <p:nvSpPr>
-          <p:cNvPr id="4" name="Shape 2"/>
+          <p:cNvPr id="3" name="Shape 1"/>
           <p:cNvSpPr/>
           <p:nvPr/>
         </p:nvSpPr>
         <p:spPr>
           <a:xfrm>
-            <a:off x="640080" y="1691640"/>
-            <a:ext cx="10881360" cy="749808"/>
+            <a:off x="640080" y="1143000"/>
+            <a:ext cx="5303520" cy="822960"/>
           </a:xfrm>
           <a:prstGeom prst="roundRect">
             <a:avLst>
-              <a:gd name="adj" fmla="val 9756"/>
+              <a:gd name="adj" fmla="val 8889"/>
             </a:avLst>
           </a:prstGeom>
           <a:solidFill>
@@ -6824,69 +6044,69 @@
       </p:sp>
       <p:sp>
         <p:nvSpPr>
+          <p:cNvPr id="4" name="Text 2"/>
+          <p:cNvSpPr txBox="1"/>
+          <p:nvPr/>
+        </p:nvSpPr>
+        <p:spPr>
+          <a:xfrm>
+            <a:off x="914400" y="1234440"/>
+            <a:ext cx="2743200" cy="365760"/>
+          </a:xfrm>
+          <a:prstGeom prst="rect">
+            <a:avLst/>
+          </a:prstGeom>
+          <a:noFill/>
+          <a:ln/>
+        </p:spPr>
+        <p:txBody>
+          <a:bodyPr wrap="square" lIns="0" tIns="0" rIns="0" bIns="0" rtlCol="0" anchor="ctr"/>
+          <a:lstStyle/>
+          <a:p>
+            <a:pPr indent="0" marL="0">
+              <a:buNone/>
+            </a:pPr>
+            <a:r>
+              <a:rPr lang="en-US" sz="1900" b="1" dirty="0">
+                <a:solidFill>
+                  <a:srgbClr val="065A82"/>
+                </a:solidFill>
+                <a:latin typeface="Cambria" pitchFamily="34" charset="0"/>
+                <a:ea typeface="Cambria" pitchFamily="34" charset="-122"/>
+                <a:cs typeface="Cambria" pitchFamily="34" charset="-120"/>
+              </a:rPr>
+              <a:t>B  =  20.5 %</a:t>
+            </a:r>
+            <a:endParaRPr lang="en-US" sz="1900" dirty="0"/>
+          </a:p>
+        </p:txBody>
+      </p:sp>
+      <p:sp>
+        <p:nvSpPr>
           <p:cNvPr id="5" name="Text 3"/>
           <p:cNvSpPr txBox="1"/>
           <p:nvPr/>
         </p:nvSpPr>
         <p:spPr>
           <a:xfrm>
-            <a:off x="960120" y="1764792"/>
-            <a:ext cx="5394960" cy="347472"/>
-          </a:xfrm>
-          <a:prstGeom prst="rect">
-            <a:avLst/>
-          </a:prstGeom>
-          <a:noFill/>
-          <a:ln/>
-        </p:spPr>
-        <p:txBody>
-          <a:bodyPr wrap="square" lIns="0" tIns="0" rIns="0" bIns="0" rtlCol="0" anchor="ctr"/>
-          <a:lstStyle/>
-          <a:p>
-            <a:pPr indent="0" marL="0">
-              <a:buNone/>
-            </a:pPr>
-            <a:r>
-              <a:rPr lang="en-US" sz="1400" b="1" dirty="0">
-                <a:solidFill>
-                  <a:srgbClr val="065A82"/>
-                </a:solidFill>
-                <a:latin typeface="Calibri" pitchFamily="34" charset="0"/>
-                <a:ea typeface="Calibri" pitchFamily="34" charset="-122"/>
-                <a:cs typeface="Calibri" pitchFamily="34" charset="-120"/>
-              </a:rPr>
-              <a:t>Bytes ÷ packets on the monitored queue</a:t>
-            </a:r>
-            <a:endParaRPr lang="en-US" sz="1400" dirty="0"/>
-          </a:p>
-        </p:txBody>
-      </p:sp>
-      <p:sp>
-        <p:nvSpPr>
-          <p:cNvPr id="6" name="Text 4"/>
-          <p:cNvSpPr txBox="1"/>
-          <p:nvPr/>
-        </p:nvSpPr>
-        <p:spPr>
-          <a:xfrm>
-            <a:off x="960120" y="2093976"/>
-            <a:ext cx="10241280" cy="310896"/>
-          </a:xfrm>
-          <a:prstGeom prst="rect">
-            <a:avLst/>
-          </a:prstGeom>
-          <a:noFill/>
-          <a:ln/>
-        </p:spPr>
-        <p:txBody>
-          <a:bodyPr wrap="square" lIns="0" tIns="0" rIns="0" bIns="0" rtlCol="0" anchor="ctr"/>
-          <a:lstStyle/>
-          <a:p>
-            <a:pPr indent="0" marL="0">
-              <a:buNone/>
-            </a:pPr>
-            <a:r>
-              <a:rPr lang="en-US" sz="1250" dirty="0">
+            <a:off x="914400" y="1618488"/>
+            <a:ext cx="4754880" cy="274320"/>
+          </a:xfrm>
+          <a:prstGeom prst="rect">
+            <a:avLst/>
+          </a:prstGeom>
+          <a:noFill/>
+          <a:ln/>
+        </p:spPr>
+        <p:txBody>
+          <a:bodyPr wrap="square" lIns="0" tIns="0" rIns="0" bIns="0" rtlCol="0" anchor="ctr"/>
+          <a:lstStyle/>
+          <a:p>
+            <a:pPr indent="0" marL="0">
+              <a:buNone/>
+            </a:pPr>
+            <a:r>
+              <a:rPr lang="en-US" sz="1200" dirty="0">
                 <a:solidFill>
                   <a:srgbClr val="3A4A5F"/>
                 </a:solidFill>
@@ -6894,26 +6114,26 @@
                 <a:ea typeface="Calibri" pitchFamily="34" charset="-122"/>
                 <a:cs typeface="Calibri" pitchFamily="34" charset="-120"/>
               </a:rPr>
-              <a:t>66 B means you are queueing ACKs, not data</a:t>
-            </a:r>
-            <a:endParaRPr lang="en-US" sz="1250" dirty="0"/>
-          </a:p>
-        </p:txBody>
-      </p:sp>
-      <p:sp>
-        <p:nvSpPr>
-          <p:cNvPr id="7" name="Shape 5"/>
+              <a:t>the ceiling</a:t>
+            </a:r>
+            <a:endParaRPr lang="en-US" sz="1200" dirty="0"/>
+          </a:p>
+        </p:txBody>
+      </p:sp>
+      <p:sp>
+        <p:nvSpPr>
+          <p:cNvPr id="6" name="Shape 4"/>
           <p:cNvSpPr/>
           <p:nvPr/>
         </p:nvSpPr>
         <p:spPr>
           <a:xfrm>
-            <a:off x="640080" y="2560320"/>
-            <a:ext cx="10881360" cy="749808"/>
+            <a:off x="6217920" y="1143000"/>
+            <a:ext cx="5303520" cy="822960"/>
           </a:xfrm>
           <a:prstGeom prst="roundRect">
             <a:avLst>
-              <a:gd name="adj" fmla="val 9756"/>
+              <a:gd name="adj" fmla="val 8889"/>
             </a:avLst>
           </a:prstGeom>
           <a:solidFill>
@@ -6936,69 +6156,69 @@
       </p:sp>
       <p:sp>
         <p:nvSpPr>
+          <p:cNvPr id="7" name="Text 5"/>
+          <p:cNvSpPr txBox="1"/>
+          <p:nvPr/>
+        </p:nvSpPr>
+        <p:spPr>
+          <a:xfrm>
+            <a:off x="6492240" y="1234440"/>
+            <a:ext cx="2743200" cy="365760"/>
+          </a:xfrm>
+          <a:prstGeom prst="rect">
+            <a:avLst/>
+          </a:prstGeom>
+          <a:noFill/>
+          <a:ln/>
+        </p:spPr>
+        <p:txBody>
+          <a:bodyPr wrap="square" lIns="0" tIns="0" rIns="0" bIns="0" rtlCol="0" anchor="ctr"/>
+          <a:lstStyle/>
+          <a:p>
+            <a:pPr indent="0" marL="0">
+              <a:buNone/>
+            </a:pPr>
+            <a:r>
+              <a:rPr lang="en-US" sz="1900" b="1" dirty="0">
+                <a:solidFill>
+                  <a:srgbClr val="065A82"/>
+                </a:solidFill>
+                <a:latin typeface="Cambria" pitchFamily="34" charset="0"/>
+                <a:ea typeface="Cambria" pitchFamily="34" charset="-122"/>
+                <a:cs typeface="Cambria" pitchFamily="34" charset="-120"/>
+              </a:rPr>
+              <a:t>r0  =  0.50</a:t>
+            </a:r>
+            <a:endParaRPr lang="en-US" sz="1900" dirty="0"/>
+          </a:p>
+        </p:txBody>
+      </p:sp>
+      <p:sp>
+        <p:nvSpPr>
           <p:cNvPr id="8" name="Text 6"/>
           <p:cNvSpPr txBox="1"/>
           <p:nvPr/>
         </p:nvSpPr>
         <p:spPr>
           <a:xfrm>
-            <a:off x="960120" y="2633472"/>
-            <a:ext cx="5394960" cy="347472"/>
-          </a:xfrm>
-          <a:prstGeom prst="rect">
-            <a:avLst/>
-          </a:prstGeom>
-          <a:noFill/>
-          <a:ln/>
-        </p:spPr>
-        <p:txBody>
-          <a:bodyPr wrap="square" lIns="0" tIns="0" rIns="0" bIns="0" rtlCol="0" anchor="ctr"/>
-          <a:lstStyle/>
-          <a:p>
-            <a:pPr indent="0" marL="0">
-              <a:buNone/>
-            </a:pPr>
-            <a:r>
-              <a:rPr lang="en-US" sz="1400" b="1" dirty="0">
-                <a:solidFill>
-                  <a:srgbClr val="065A82"/>
-                </a:solidFill>
-                <a:latin typeface="Calibri" pitchFamily="34" charset="0"/>
-                <a:ea typeface="Calibri" pitchFamily="34" charset="-122"/>
-                <a:cs typeface="Calibri" pitchFamily="34" charset="-120"/>
-              </a:rPr>
-              <a:t>Drop rate vs the link's packet rate</a:t>
-            </a:r>
-            <a:endParaRPr lang="en-US" sz="1400" dirty="0"/>
-          </a:p>
-        </p:txBody>
-      </p:sp>
-      <p:sp>
-        <p:nvSpPr>
-          <p:cNvPr id="9" name="Text 7"/>
-          <p:cNvSpPr txBox="1"/>
-          <p:nvPr/>
-        </p:nvSpPr>
-        <p:spPr>
-          <a:xfrm>
-            <a:off x="960120" y="2962656"/>
-            <a:ext cx="10241280" cy="310896"/>
-          </a:xfrm>
-          <a:prstGeom prst="rect">
-            <a:avLst/>
-          </a:prstGeom>
-          <a:noFill/>
-          <a:ln/>
-        </p:spPr>
-        <p:txBody>
-          <a:bodyPr wrap="square" lIns="0" tIns="0" rIns="0" bIns="0" rtlCol="0" anchor="ctr"/>
-          <a:lstStyle/>
-          <a:p>
-            <a:pPr indent="0" marL="0">
-              <a:buNone/>
-            </a:pPr>
-            <a:r>
-              <a:rPr lang="en-US" sz="1250" dirty="0">
+            <a:off x="6492240" y="1618488"/>
+            <a:ext cx="4754880" cy="274320"/>
+          </a:xfrm>
+          <a:prstGeom prst="rect">
+            <a:avLst/>
+          </a:prstGeom>
+          <a:noFill/>
+          <a:ln/>
+        </p:spPr>
+        <p:txBody>
+          <a:bodyPr wrap="square" lIns="0" tIns="0" rIns="0" bIns="0" rtlCol="0" anchor="ctr"/>
+          <a:lstStyle/>
+          <a:p>
+            <a:pPr indent="0" marL="0">
+              <a:buNone/>
+            </a:pPr>
+            <a:r>
+              <a:rPr lang="en-US" sz="1200" dirty="0">
                 <a:solidFill>
                   <a:srgbClr val="3A4A5F"/>
                 </a:solidFill>
@@ -7006,26 +6226,26 @@
                 <a:ea typeface="Calibri" pitchFamily="34" charset="-122"/>
                 <a:cs typeface="Calibri" pitchFamily="34" charset="-120"/>
               </a:rPr>
-              <a:t>A 10 Mbit link passes 826 pkt/s; 130,000 drops/s is impossible</a:t>
-            </a:r>
-            <a:endParaRPr lang="en-US" sz="1250" dirty="0"/>
-          </a:p>
-        </p:txBody>
-      </p:sp>
-      <p:sp>
-        <p:nvSpPr>
-          <p:cNvPr id="10" name="Shape 8"/>
+              <a:t>half the benefit is reached here</a:t>
+            </a:r>
+            <a:endParaRPr lang="en-US" sz="1200" dirty="0"/>
+          </a:p>
+        </p:txBody>
+      </p:sp>
+      <p:sp>
+        <p:nvSpPr>
+          <p:cNvPr id="9" name="Shape 7"/>
           <p:cNvSpPr/>
           <p:nvPr/>
         </p:nvSpPr>
         <p:spPr>
           <a:xfrm>
-            <a:off x="640080" y="3429000"/>
-            <a:ext cx="10881360" cy="749808"/>
+            <a:off x="640080" y="2103120"/>
+            <a:ext cx="5303520" cy="822960"/>
           </a:xfrm>
           <a:prstGeom prst="roundRect">
             <a:avLst>
-              <a:gd name="adj" fmla="val 9756"/>
+              <a:gd name="adj" fmla="val 8889"/>
             </a:avLst>
           </a:prstGeom>
           <a:solidFill>
@@ -7048,69 +6268,69 @@
       </p:sp>
       <p:sp>
         <p:nvSpPr>
+          <p:cNvPr id="10" name="Text 8"/>
+          <p:cNvSpPr txBox="1"/>
+          <p:nvPr/>
+        </p:nvSpPr>
+        <p:spPr>
+          <a:xfrm>
+            <a:off x="914400" y="2194560"/>
+            <a:ext cx="2743200" cy="365760"/>
+          </a:xfrm>
+          <a:prstGeom prst="rect">
+            <a:avLst/>
+          </a:prstGeom>
+          <a:noFill/>
+          <a:ln/>
+        </p:spPr>
+        <p:txBody>
+          <a:bodyPr wrap="square" lIns="0" tIns="0" rIns="0" bIns="0" rtlCol="0" anchor="ctr"/>
+          <a:lstStyle/>
+          <a:p>
+            <a:pPr indent="0" marL="0">
+              <a:buNone/>
+            </a:pPr>
+            <a:r>
+              <a:rPr lang="en-US" sz="1900" b="1" dirty="0">
+                <a:solidFill>
+                  <a:srgbClr val="065A82"/>
+                </a:solidFill>
+                <a:latin typeface="Cambria" pitchFamily="34" charset="0"/>
+                <a:ea typeface="Cambria" pitchFamily="34" charset="-122"/>
+                <a:cs typeface="Cambria" pitchFamily="34" charset="-120"/>
+              </a:rPr>
+              <a:t>k  =  2.6</a:t>
+            </a:r>
+            <a:endParaRPr lang="en-US" sz="1900" dirty="0"/>
+          </a:p>
+        </p:txBody>
+      </p:sp>
+      <p:sp>
+        <p:nvSpPr>
           <p:cNvPr id="11" name="Text 9"/>
           <p:cNvSpPr txBox="1"/>
           <p:nvPr/>
         </p:nvSpPr>
         <p:spPr>
           <a:xfrm>
-            <a:off x="960120" y="3502152"/>
-            <a:ext cx="5394960" cy="347472"/>
-          </a:xfrm>
-          <a:prstGeom prst="rect">
-            <a:avLst/>
-          </a:prstGeom>
-          <a:noFill/>
-          <a:ln/>
-        </p:spPr>
-        <p:txBody>
-          <a:bodyPr wrap="square" lIns="0" tIns="0" rIns="0" bIns="0" rtlCol="0" anchor="ctr"/>
-          <a:lstStyle/>
-          <a:p>
-            <a:pPr indent="0" marL="0">
-              <a:buNone/>
-            </a:pPr>
-            <a:r>
-              <a:rPr lang="en-US" sz="1400" b="1" dirty="0">
-                <a:solidFill>
-                  <a:srgbClr val="065A82"/>
-                </a:solidFill>
-                <a:latin typeface="Calibri" pitchFamily="34" charset="0"/>
-                <a:ea typeface="Calibri" pitchFamily="34" charset="-122"/>
-                <a:cs typeface="Calibri" pitchFamily="34" charset="-120"/>
-              </a:rPr>
-              <a:t>Does varying a control input change the output?</a:t>
-            </a:r>
-            <a:endParaRPr lang="en-US" sz="1400" dirty="0"/>
-          </a:p>
-        </p:txBody>
-      </p:sp>
-      <p:sp>
-        <p:nvSpPr>
-          <p:cNvPr id="12" name="Text 10"/>
-          <p:cNvSpPr txBox="1"/>
-          <p:nvPr/>
-        </p:nvSpPr>
-        <p:spPr>
-          <a:xfrm>
-            <a:off x="960120" y="3831336"/>
-            <a:ext cx="10241280" cy="310896"/>
-          </a:xfrm>
-          <a:prstGeom prst="rect">
-            <a:avLst/>
-          </a:prstGeom>
-          <a:noFill/>
-          <a:ln/>
-        </p:spPr>
-        <p:txBody>
-          <a:bodyPr wrap="square" lIns="0" tIns="0" rIns="0" bIns="0" rtlCol="0" anchor="ctr"/>
-          <a:lstStyle/>
-          <a:p>
-            <a:pPr indent="0" marL="0">
-              <a:buNone/>
-            </a:pPr>
-            <a:r>
-              <a:rPr lang="en-US" sz="1250" dirty="0">
+            <a:off x="914400" y="2578608"/>
+            <a:ext cx="4754880" cy="274320"/>
+          </a:xfrm>
+          <a:prstGeom prst="rect">
+            <a:avLst/>
+          </a:prstGeom>
+          <a:noFill/>
+          <a:ln/>
+        </p:spPr>
+        <p:txBody>
+          <a:bodyPr wrap="square" lIns="0" tIns="0" rIns="0" bIns="0" rtlCol="0" anchor="ctr"/>
+          <a:lstStyle/>
+          <a:p>
+            <a:pPr indent="0" marL="0">
+              <a:buNone/>
+            </a:pPr>
+            <a:r>
+              <a:rPr lang="en-US" sz="1200" dirty="0">
                 <a:solidFill>
                   <a:srgbClr val="3A4A5F"/>
                 </a:solidFill>
@@ -7118,26 +6338,26 @@
                 <a:ea typeface="Calibri" pitchFamily="34" charset="-122"/>
                 <a:cs typeface="Calibri" pitchFamily="34" charset="-120"/>
               </a:rPr>
-              <a:t>If not, the control path is inert however it is labelled</a:t>
-            </a:r>
-            <a:endParaRPr lang="en-US" sz="1250" dirty="0"/>
-          </a:p>
-        </p:txBody>
-      </p:sp>
-      <p:sp>
-        <p:nvSpPr>
-          <p:cNvPr id="13" name="Shape 11"/>
+              <a:t>how sharp the transition is</a:t>
+            </a:r>
+            <a:endParaRPr lang="en-US" sz="1200" dirty="0"/>
+          </a:p>
+        </p:txBody>
+      </p:sp>
+      <p:sp>
+        <p:nvSpPr>
+          <p:cNvPr id="12" name="Shape 10"/>
           <p:cNvSpPr/>
           <p:nvPr/>
         </p:nvSpPr>
         <p:spPr>
           <a:xfrm>
-            <a:off x="640080" y="4297680"/>
-            <a:ext cx="10881360" cy="749808"/>
+            <a:off x="6217920" y="2103120"/>
+            <a:ext cx="5303520" cy="822960"/>
           </a:xfrm>
           <a:prstGeom prst="roundRect">
             <a:avLst>
-              <a:gd name="adj" fmla="val 9756"/>
+              <a:gd name="adj" fmla="val 8889"/>
             </a:avLst>
           </a:prstGeom>
           <a:solidFill>
@@ -7160,69 +6380,69 @@
       </p:sp>
       <p:sp>
         <p:nvSpPr>
+          <p:cNvPr id="13" name="Text 11"/>
+          <p:cNvSpPr txBox="1"/>
+          <p:nvPr/>
+        </p:nvSpPr>
+        <p:spPr>
+          <a:xfrm>
+            <a:off x="6492240" y="2194560"/>
+            <a:ext cx="2743200" cy="365760"/>
+          </a:xfrm>
+          <a:prstGeom prst="rect">
+            <a:avLst/>
+          </a:prstGeom>
+          <a:noFill/>
+          <a:ln/>
+        </p:spPr>
+        <p:txBody>
+          <a:bodyPr wrap="square" lIns="0" tIns="0" rIns="0" bIns="0" rtlCol="0" anchor="ctr"/>
+          <a:lstStyle/>
+          <a:p>
+            <a:pPr indent="0" marL="0">
+              <a:buNone/>
+            </a:pPr>
+            <a:r>
+              <a:rPr lang="en-US" sz="1900" b="1" dirty="0">
+                <a:solidFill>
+                  <a:srgbClr val="065A82"/>
+                </a:solidFill>
+                <a:latin typeface="Cambria" pitchFamily="34" charset="0"/>
+                <a:ea typeface="Cambria" pitchFamily="34" charset="-122"/>
+                <a:cs typeface="Cambria" pitchFamily="34" charset="-120"/>
+              </a:rPr>
+              <a:t>R2  =  0.986</a:t>
+            </a:r>
+            <a:endParaRPr lang="en-US" sz="1900" dirty="0"/>
+          </a:p>
+        </p:txBody>
+      </p:sp>
+      <p:sp>
+        <p:nvSpPr>
           <p:cNvPr id="14" name="Text 12"/>
           <p:cNvSpPr txBox="1"/>
           <p:nvPr/>
         </p:nvSpPr>
         <p:spPr>
           <a:xfrm>
-            <a:off x="960120" y="4370832"/>
-            <a:ext cx="5394960" cy="347472"/>
-          </a:xfrm>
-          <a:prstGeom prst="rect">
-            <a:avLst/>
-          </a:prstGeom>
-          <a:noFill/>
-          <a:ln/>
-        </p:spPr>
-        <p:txBody>
-          <a:bodyPr wrap="square" lIns="0" tIns="0" rIns="0" bIns="0" rtlCol="0" anchor="ctr"/>
-          <a:lstStyle/>
-          <a:p>
-            <a:pPr indent="0" marL="0">
-              <a:buNone/>
-            </a:pPr>
-            <a:r>
-              <a:rPr lang="en-US" sz="1400" b="1" dirty="0">
-                <a:solidFill>
-                  <a:srgbClr val="065A82"/>
-                </a:solidFill>
-                <a:latin typeface="Calibri" pitchFamily="34" charset="0"/>
-                <a:ea typeface="Calibri" pitchFamily="34" charset="-122"/>
-                <a:cs typeface="Calibri" pitchFamily="34" charset="-120"/>
-              </a:rPr>
-              <a:t>Is the threshold reachable at all?</a:t>
-            </a:r>
-            <a:endParaRPr lang="en-US" sz="1400" dirty="0"/>
-          </a:p>
-        </p:txBody>
-      </p:sp>
-      <p:sp>
-        <p:nvSpPr>
-          <p:cNvPr id="15" name="Text 13"/>
-          <p:cNvSpPr txBox="1"/>
-          <p:nvPr/>
-        </p:nvSpPr>
-        <p:spPr>
-          <a:xfrm>
-            <a:off x="960120" y="4700016"/>
-            <a:ext cx="10241280" cy="310896"/>
-          </a:xfrm>
-          <a:prstGeom prst="rect">
-            <a:avLst/>
-          </a:prstGeom>
-          <a:noFill/>
-          <a:ln/>
-        </p:spPr>
-        <p:txBody>
-          <a:bodyPr wrap="square" lIns="0" tIns="0" rIns="0" bIns="0" rtlCol="0" anchor="ctr"/>
-          <a:lstStyle/>
-          <a:p>
-            <a:pPr indent="0" marL="0">
-              <a:buNone/>
-            </a:pPr>
-            <a:r>
-              <a:rPr lang="en-US" sz="1250" dirty="0">
+            <a:off x="6492240" y="2578608"/>
+            <a:ext cx="4754880" cy="274320"/>
+          </a:xfrm>
+          <a:prstGeom prst="rect">
+            <a:avLst/>
+          </a:prstGeom>
+          <a:noFill/>
+          <a:ln/>
+        </p:spPr>
+        <p:txBody>
+          <a:bodyPr wrap="square" lIns="0" tIns="0" rIns="0" bIns="0" rtlCol="0" anchor="ctr"/>
+          <a:lstStyle/>
+          <a:p>
+            <a:pPr indent="0" marL="0">
+              <a:buNone/>
+            </a:pPr>
+            <a:r>
+              <a:rPr lang="en-US" sz="1200" dirty="0">
                 <a:solidFill>
                   <a:srgbClr val="3A4A5F"/>
                 </a:solidFill>
@@ -7230,30 +6450,30 @@
                 <a:ea typeface="Calibri" pitchFamily="34" charset="-122"/>
                 <a:cs typeface="Calibri" pitchFamily="34" charset="-120"/>
               </a:rPr>
-              <a:t>10 MB elephant threshold, 9.38 MB maximum flow share</a:t>
-            </a:r>
-            <a:endParaRPr lang="en-US" sz="1250" dirty="0"/>
-          </a:p>
-        </p:txBody>
-      </p:sp>
-      <p:sp>
-        <p:nvSpPr>
-          <p:cNvPr id="16" name="Shape 14"/>
+              <a:t>over 10 cells</a:t>
+            </a:r>
+            <a:endParaRPr lang="en-US" sz="1200" dirty="0"/>
+          </a:p>
+        </p:txBody>
+      </p:sp>
+      <p:sp>
+        <p:nvSpPr>
+          <p:cNvPr id="15" name="Shape 13"/>
           <p:cNvSpPr/>
           <p:nvPr/>
         </p:nvSpPr>
         <p:spPr>
           <a:xfrm>
-            <a:off x="640080" y="5166360"/>
-            <a:ext cx="10881360" cy="749808"/>
+            <a:off x="640080" y="3200400"/>
+            <a:ext cx="10881360" cy="1371600"/>
           </a:xfrm>
           <a:prstGeom prst="roundRect">
             <a:avLst>
-              <a:gd name="adj" fmla="val 9756"/>
+              <a:gd name="adj" fmla="val 5333"/>
             </a:avLst>
           </a:prstGeom>
           <a:solidFill>
-            <a:srgbClr val="EEF4F8"/>
+            <a:srgbClr val="E8F1F6"/>
           </a:solidFill>
           <a:ln w="9525">
             <a:solidFill>
@@ -7272,69 +6492,69 @@
       </p:sp>
       <p:sp>
         <p:nvSpPr>
+          <p:cNvPr id="16" name="Text 14"/>
+          <p:cNvSpPr txBox="1"/>
+          <p:nvPr/>
+        </p:nvSpPr>
+        <p:spPr>
+          <a:xfrm>
+            <a:off x="960120" y="3364992"/>
+            <a:ext cx="10515600" cy="320040"/>
+          </a:xfrm>
+          <a:prstGeom prst="rect">
+            <a:avLst/>
+          </a:prstGeom>
+          <a:noFill/>
+          <a:ln/>
+        </p:spPr>
+        <p:txBody>
+          <a:bodyPr wrap="square" lIns="0" tIns="0" rIns="0" bIns="0" rtlCol="0" anchor="ctr"/>
+          <a:lstStyle/>
+          <a:p>
+            <a:pPr indent="0" marL="0">
+              <a:buNone/>
+            </a:pPr>
+            <a:r>
+              <a:rPr lang="en-US" sz="1400" b="1" spc="100" kern="0" dirty="0">
+                <a:solidFill>
+                  <a:srgbClr val="065A82"/>
+                </a:solidFill>
+                <a:latin typeface="Calibri" pitchFamily="34" charset="0"/>
+                <a:ea typeface="Calibri" pitchFamily="34" charset="-122"/>
+                <a:cs typeface="Calibri" pitchFamily="34" charset="-120"/>
+              </a:rPr>
+              <a:t>Registered before the data existed. Three of four held.</a:t>
+            </a:r>
+            <a:endParaRPr lang="en-US" sz="1400" dirty="0"/>
+          </a:p>
+        </p:txBody>
+      </p:sp>
+      <p:sp>
+        <p:nvSpPr>
           <p:cNvPr id="17" name="Text 15"/>
           <p:cNvSpPr txBox="1"/>
           <p:nvPr/>
         </p:nvSpPr>
         <p:spPr>
           <a:xfrm>
-            <a:off x="960120" y="5239512"/>
-            <a:ext cx="5394960" cy="347472"/>
-          </a:xfrm>
-          <a:prstGeom prst="rect">
-            <a:avLst/>
-          </a:prstGeom>
-          <a:noFill/>
-          <a:ln/>
-        </p:spPr>
-        <p:txBody>
-          <a:bodyPr wrap="square" lIns="0" tIns="0" rIns="0" bIns="0" rtlCol="0" anchor="ctr"/>
-          <a:lstStyle/>
-          <a:p>
-            <a:pPr indent="0" marL="0">
-              <a:buNone/>
-            </a:pPr>
-            <a:r>
-              <a:rPr lang="en-US" sz="1400" b="1" dirty="0">
-                <a:solidFill>
-                  <a:srgbClr val="065A82"/>
-                </a:solidFill>
-                <a:latin typeface="Calibri" pitchFamily="34" charset="0"/>
-                <a:ea typeface="Calibri" pitchFamily="34" charset="-122"/>
-                <a:cs typeface="Calibri" pitchFamily="34" charset="-120"/>
-              </a:rPr>
-              <a:t>Does the reported value reach the kernel?</a:t>
-            </a:r>
-            <a:endParaRPr lang="en-US" sz="1400" dirty="0"/>
-          </a:p>
-        </p:txBody>
-      </p:sp>
-      <p:sp>
-        <p:nvSpPr>
-          <p:cNvPr id="18" name="Text 16"/>
-          <p:cNvSpPr txBox="1"/>
-          <p:nvPr/>
-        </p:nvSpPr>
-        <p:spPr>
-          <a:xfrm>
-            <a:off x="960120" y="5568696"/>
-            <a:ext cx="10241280" cy="310896"/>
-          </a:xfrm>
-          <a:prstGeom prst="rect">
-            <a:avLst/>
-          </a:prstGeom>
-          <a:noFill/>
-          <a:ln/>
-        </p:spPr>
-        <p:txBody>
-          <a:bodyPr wrap="square" lIns="0" tIns="0" rIns="0" bIns="0" rtlCol="0" anchor="ctr"/>
-          <a:lstStyle/>
-          <a:p>
-            <a:pPr indent="0" marL="0">
-              <a:buNone/>
-            </a:pPr>
-            <a:r>
-              <a:rPr lang="en-US" sz="1250" dirty="0">
+            <a:off x="960120" y="3703320"/>
+            <a:ext cx="10515600" cy="777240"/>
+          </a:xfrm>
+          <a:prstGeom prst="rect">
+            <a:avLst/>
+          </a:prstGeom>
+          <a:noFill/>
+          <a:ln/>
+        </p:spPr>
+        <p:txBody>
+          <a:bodyPr wrap="square" lIns="0" tIns="0" rIns="0" bIns="0" rtlCol="0" anchor="ctr"/>
+          <a:lstStyle/>
+          <a:p>
+            <a:pPr indent="0" marL="0">
+              <a:buNone/>
+            </a:pPr>
+            <a:r>
+              <a:rPr lang="en-US" sz="1300" dirty="0">
                 <a:solidFill>
                   <a:srgbClr val="3A4A5F"/>
                 </a:solidFill>
@@ -7342,11 +6562,45 @@
                 <a:ea typeface="Calibri" pitchFamily="34" charset="-122"/>
                 <a:cs typeface="Calibri" pitchFamily="34" charset="-120"/>
               </a:rPr>
-              <a:t>A float in userspace is not the qdisc parameter</a:t>
-            </a:r>
-            <a:endParaRPr lang="en-US" sz="1250" dirty="0"/>
-          </a:p>
-        </p:txBody>
+              <a:t>A crossover exists. The curve is invariant across a 16-fold change in RTT, 2.0 points against a 5-point threshold. Leave-one-out predicts held-out cells to 1.4 points. The form transfers to codel and PIE; the constant does not, and that fourth test failed.</a:t>
+            </a:r>
+            <a:endParaRPr lang="en-US" sz="1300" dirty="0"/>
+          </a:p>
+        </p:txBody>
+      </p:sp>
+      <p:sp>
+        <p:nvSpPr>
+          <p:cNvPr id="18" name="Shape 16"/>
+          <p:cNvSpPr/>
+          <p:nvPr/>
+        </p:nvSpPr>
+        <p:spPr>
+          <a:xfrm>
+            <a:off x="640080" y="4800600"/>
+            <a:ext cx="10881360" cy="1234440"/>
+          </a:xfrm>
+          <a:prstGeom prst="roundRect">
+            <a:avLst>
+              <a:gd name="adj" fmla="val 5926"/>
+            </a:avLst>
+          </a:prstGeom>
+          <a:solidFill>
+            <a:srgbClr val="FBEEF0"/>
+          </a:solidFill>
+          <a:ln w="9525">
+            <a:solidFill>
+              <a:srgbClr val="D8E4EC"/>
+            </a:solidFill>
+            <a:prstDash val="solid"/>
+          </a:ln>
+          <a:effectLst>
+            <a:outerShdw sx="100000" sy="100000" kx="0" ky="0" algn="bl" rotWithShape="0" blurRad="50800" dist="12700" dir="5400000">
+              <a:srgbClr val="BFCEDA">
+                <a:alpha val="35000"/>
+              </a:srgbClr>
+            </a:outerShdw>
+          </a:effectLst>
+        </p:spPr>
       </p:sp>
       <p:sp>
         <p:nvSpPr>
@@ -7356,24 +6610,63 @@
         </p:nvSpPr>
         <p:spPr>
           <a:xfrm>
-            <a:off x="640080" y="6080760"/>
-            <a:ext cx="10881360" cy="365760"/>
-          </a:xfrm>
-          <a:prstGeom prst="rect">
-            <a:avLst/>
-          </a:prstGeom>
-          <a:noFill/>
-          <a:ln/>
-        </p:spPr>
-        <p:txBody>
-          <a:bodyPr wrap="square" rtlCol="0" anchor="ctr"/>
-          <a:lstStyle/>
-          <a:p>
-            <a:pPr indent="0" marL="0">
-              <a:buNone/>
-            </a:pPr>
-            <a:r>
-              <a:rPr lang="en-US" sz="1400" i="1" dirty="0">
+            <a:off x="960120" y="4956048"/>
+            <a:ext cx="10515600" cy="292608"/>
+          </a:xfrm>
+          <a:prstGeom prst="rect">
+            <a:avLst/>
+          </a:prstGeom>
+          <a:noFill/>
+          <a:ln/>
+        </p:spPr>
+        <p:txBody>
+          <a:bodyPr wrap="square" lIns="0" tIns="0" rIns="0" bIns="0" rtlCol="0" anchor="ctr"/>
+          <a:lstStyle/>
+          <a:p>
+            <a:pPr indent="0" marL="0">
+              <a:buNone/>
+            </a:pPr>
+            <a:r>
+              <a:rPr lang="en-US" sz="1300" b="1" spc="100" kern="0" dirty="0">
+                <a:solidFill>
+                  <a:srgbClr val="B23A48"/>
+                </a:solidFill>
+                <a:latin typeface="Calibri" pitchFamily="34" charset="0"/>
+                <a:ea typeface="Calibri" pitchFamily="34" charset="-122"/>
+                <a:cs typeface="Calibri" pitchFamily="34" charset="-120"/>
+              </a:rPr>
+              <a:t>What it means</a:t>
+            </a:r>
+            <a:endParaRPr lang="en-US" sz="1300" dirty="0"/>
+          </a:p>
+        </p:txBody>
+      </p:sp>
+      <p:sp>
+        <p:nvSpPr>
+          <p:cNvPr id="20" name="Text 18"/>
+          <p:cNvSpPr txBox="1"/>
+          <p:nvPr/>
+        </p:nvSpPr>
+        <p:spPr>
+          <a:xfrm>
+            <a:off x="960120" y="5285232"/>
+            <a:ext cx="10515600" cy="685800"/>
+          </a:xfrm>
+          <a:prstGeom prst="rect">
+            <a:avLst/>
+          </a:prstGeom>
+          <a:noFill/>
+          <a:ln/>
+        </p:spPr>
+        <p:txBody>
+          <a:bodyPr wrap="square" lIns="0" tIns="0" rIns="0" bIns="0" rtlCol="0" anchor="ctr"/>
+          <a:lstStyle/>
+          <a:p>
+            <a:pPr indent="0" marL="0">
+              <a:buNone/>
+            </a:pPr>
+            <a:r>
+              <a:rPr lang="en-US" sz="1350" dirty="0">
                 <a:solidFill>
                   <a:srgbClr val="13233B"/>
                 </a:solidFill>
@@ -7381,9 +6674,9 @@
                 <a:ea typeface="Calibri" pitchFamily="34" charset="-122"/>
                 <a:cs typeface="Calibri" pitchFamily="34" charset="-120"/>
               </a:rPr>
-              <a:t>We think this is the most transferable part of the work.</a:t>
-            </a:r>
-            <a:endParaRPr lang="en-US" sz="1400" dirty="0"/>
+              <a:t>Correct configuration sits at r between 0.05 and 0.10. Half the available benefit arrives only at r = 0.50, five to ten times outside that. Adaptation repairs misconfiguration; it does not improve a correctly configured link.</a:t>
+            </a:r>
+            <a:endParaRPr lang="en-US" sz="1350" dirty="0"/>
           </a:p>
         </p:txBody>
       </p:sp>
@@ -7452,7 +6745,7 @@
                 <a:ea typeface="Cambria" pitchFamily="34" charset="-122"/>
                 <a:cs typeface="Cambria" pitchFamily="34" charset="-120"/>
               </a:rPr>
-              <a:t>Where this sits against recent work</a:t>
+              <a:t>The ratio fixes the shape, not the ceiling</a:t>
             </a:r>
             <a:endParaRPr lang="en-US" sz="3200" dirty="0"/>
           </a:p>
@@ -7491,7 +6784,7 @@
                 <a:ea typeface="Calibri" pitchFamily="34" charset="-122"/>
                 <a:cs typeface="Calibri" pitchFamily="34" charset="-120"/>
               </a:rPr>
-              <a:t>2023–2026 · what is taken, and what is not</a:t>
+              <a:t>Holding r = 1 and sweeping the link rate 25-fold. Only the rate changes.</a:t>
             </a:r>
             <a:endParaRPr lang="en-US" sz="1500" dirty="0"/>
           </a:p>
@@ -7499,107 +6792,252 @@
       </p:sp>
       <p:sp>
         <p:nvSpPr>
-          <p:cNvPr id="4" name="Shape 2"/>
+          <p:cNvPr id="4" name="Text 2"/>
+          <p:cNvSpPr txBox="1"/>
+          <p:nvPr/>
+        </p:nvSpPr>
+        <p:spPr>
+          <a:xfrm>
+            <a:off x="914400" y="1645920"/>
+            <a:ext cx="3291840" cy="274320"/>
+          </a:xfrm>
+          <a:prstGeom prst="rect">
+            <a:avLst/>
+          </a:prstGeom>
+          <a:noFill/>
+          <a:ln/>
+        </p:spPr>
+        <p:txBody>
+          <a:bodyPr wrap="square" lIns="0" tIns="0" rIns="0" bIns="0" rtlCol="0" anchor="ctr"/>
+          <a:lstStyle/>
+          <a:p>
+            <a:pPr indent="0" marL="0">
+              <a:buNone/>
+            </a:pPr>
+            <a:r>
+              <a:rPr lang="en-US" sz="1150" b="1" spc="100" kern="0" dirty="0">
+                <a:solidFill>
+                  <a:srgbClr val="7B8A9C"/>
+                </a:solidFill>
+                <a:latin typeface="Calibri" pitchFamily="34" charset="0"/>
+                <a:ea typeface="Calibri" pitchFamily="34" charset="-122"/>
+                <a:cs typeface="Calibri" pitchFamily="34" charset="-120"/>
+              </a:rPr>
+              <a:t>Link rate</a:t>
+            </a:r>
+            <a:endParaRPr lang="en-US" sz="1150" dirty="0"/>
+          </a:p>
+        </p:txBody>
+      </p:sp>
+      <p:sp>
+        <p:nvSpPr>
+          <p:cNvPr id="5" name="Text 3"/>
+          <p:cNvSpPr txBox="1"/>
+          <p:nvPr/>
+        </p:nvSpPr>
+        <p:spPr>
+          <a:xfrm>
+            <a:off x="4846320" y="1645920"/>
+            <a:ext cx="3291840" cy="274320"/>
+          </a:xfrm>
+          <a:prstGeom prst="rect">
+            <a:avLst/>
+          </a:prstGeom>
+          <a:noFill/>
+          <a:ln/>
+        </p:spPr>
+        <p:txBody>
+          <a:bodyPr wrap="square" lIns="0" tIns="0" rIns="0" bIns="0" rtlCol="0" anchor="ctr"/>
+          <a:lstStyle/>
+          <a:p>
+            <a:pPr indent="0" marL="0">
+              <a:buNone/>
+            </a:pPr>
+            <a:r>
+              <a:rPr lang="en-US" sz="1150" b="1" spc="100" kern="0" dirty="0">
+                <a:solidFill>
+                  <a:srgbClr val="7B8A9C"/>
+                </a:solidFill>
+                <a:latin typeface="Calibri" pitchFamily="34" charset="0"/>
+                <a:ea typeface="Calibri" pitchFamily="34" charset="-122"/>
+                <a:cs typeface="Calibri" pitchFamily="34" charset="-120"/>
+              </a:rPr>
+              <a:t>Benefit at r = 1</a:t>
+            </a:r>
+            <a:endParaRPr lang="en-US" sz="1150" dirty="0"/>
+          </a:p>
+        </p:txBody>
+      </p:sp>
+      <p:sp>
+        <p:nvSpPr>
+          <p:cNvPr id="6" name="Text 4"/>
+          <p:cNvSpPr txBox="1"/>
+          <p:nvPr/>
+        </p:nvSpPr>
+        <p:spPr>
+          <a:xfrm>
+            <a:off x="8686800" y="1645920"/>
+            <a:ext cx="3291840" cy="274320"/>
+          </a:xfrm>
+          <a:prstGeom prst="rect">
+            <a:avLst/>
+          </a:prstGeom>
+          <a:noFill/>
+          <a:ln/>
+        </p:spPr>
+        <p:txBody>
+          <a:bodyPr wrap="square" lIns="0" tIns="0" rIns="0" bIns="0" rtlCol="0" anchor="ctr"/>
+          <a:lstStyle/>
+          <a:p>
+            <a:pPr indent="0" marL="0">
+              <a:buNone/>
+            </a:pPr>
+            <a:r>
+              <a:rPr lang="en-US" sz="1150" b="1" spc="100" kern="0" dirty="0">
+                <a:solidFill>
+                  <a:srgbClr val="7B8A9C"/>
+                </a:solidFill>
+                <a:latin typeface="Calibri" pitchFamily="34" charset="0"/>
+                <a:ea typeface="Calibri" pitchFamily="34" charset="-122"/>
+                <a:cs typeface="Calibri" pitchFamily="34" charset="-120"/>
+              </a:rPr>
+              <a:t>p</a:t>
+            </a:r>
+            <a:endParaRPr lang="en-US" sz="1150" dirty="0"/>
+          </a:p>
+        </p:txBody>
+      </p:sp>
+      <p:sp>
+        <p:nvSpPr>
+          <p:cNvPr id="7" name="Shape 5"/>
           <p:cNvSpPr/>
           <p:nvPr/>
         </p:nvSpPr>
         <p:spPr>
           <a:xfrm>
-            <a:off x="640080" y="1600200"/>
-            <a:ext cx="5349240" cy="2240280"/>
+            <a:off x="640080" y="1965960"/>
+            <a:ext cx="10881360" cy="475488"/>
           </a:xfrm>
           <a:prstGeom prst="roundRect">
             <a:avLst>
-              <a:gd name="adj" fmla="val 3265"/>
+              <a:gd name="adj" fmla="val 9615"/>
             </a:avLst>
           </a:prstGeom>
           <a:solidFill>
-            <a:srgbClr val="FBEEF0"/>
+            <a:srgbClr val="EEF4F8"/>
           </a:solidFill>
-          <a:ln w="9525">
+          <a:ln w="6350">
             <a:solidFill>
-              <a:srgbClr val="D8E4EC"/>
+              <a:srgbClr val="E2ECF2"/>
             </a:solidFill>
             <a:prstDash val="solid"/>
           </a:ln>
-          <a:effectLst>
-            <a:outerShdw sx="100000" sy="100000" kx="0" ky="0" algn="bl" rotWithShape="0" blurRad="50800" dist="12700" dir="5400000">
-              <a:srgbClr val="BFCEDA">
-                <a:alpha val="35000"/>
-              </a:srgbClr>
-            </a:outerShdw>
-          </a:effectLst>
-        </p:spPr>
-      </p:sp>
-      <p:sp>
-        <p:nvSpPr>
-          <p:cNvPr id="5" name="Text 3"/>
-          <p:cNvSpPr txBox="1"/>
-          <p:nvPr/>
-        </p:nvSpPr>
-        <p:spPr>
-          <a:xfrm>
-            <a:off x="914400" y="1783080"/>
-            <a:ext cx="4800600" cy="347472"/>
-          </a:xfrm>
-          <a:prstGeom prst="rect">
-            <a:avLst/>
-          </a:prstGeom>
-          <a:noFill/>
-          <a:ln/>
-        </p:spPr>
-        <p:txBody>
-          <a:bodyPr wrap="square" lIns="0" tIns="0" rIns="0" bIns="0" rtlCol="0" anchor="ctr"/>
-          <a:lstStyle/>
-          <a:p>
-            <a:pPr indent="0" marL="0">
-              <a:buNone/>
-            </a:pPr>
-            <a:r>
-              <a:rPr lang="en-US" sz="1500" b="1" dirty="0">
-                <a:solidFill>
-                  <a:srgbClr val="B23A48"/>
-                </a:solidFill>
-                <a:latin typeface="Cambria" pitchFamily="34" charset="0"/>
-                <a:ea typeface="Cambria" pitchFamily="34" charset="-122"/>
-                <a:cs typeface="Cambria" pitchFamily="34" charset="-120"/>
-              </a:rPr>
-              <a:t>Already done — cannot claim</a:t>
-            </a:r>
-            <a:endParaRPr lang="en-US" sz="1500" dirty="0"/>
-          </a:p>
-        </p:txBody>
-      </p:sp>
-      <p:sp>
-        <p:nvSpPr>
-          <p:cNvPr id="6" name="Text 4"/>
-          <p:cNvSpPr txBox="1"/>
-          <p:nvPr/>
-        </p:nvSpPr>
-        <p:spPr>
-          <a:xfrm>
-            <a:off x="914400" y="2194560"/>
-            <a:ext cx="4800600" cy="1554480"/>
-          </a:xfrm>
-          <a:prstGeom prst="rect">
-            <a:avLst/>
-          </a:prstGeom>
-          <a:noFill/>
-          <a:ln/>
-        </p:spPr>
-        <p:txBody>
-          <a:bodyPr wrap="square" lIns="0" tIns="0" rIns="0" bIns="0" rtlCol="0" anchor="ctr"/>
-          <a:lstStyle/>
-          <a:p>
-            <a:pPr marL="342900" indent="-342900">
-              <a:spcAft>
-                <a:spcPts val="600"/>
-              </a:spcAft>
-              <a:buSzPct val="100000"/>
-              <a:buChar char="•"/>
-            </a:pPr>
-            <a:r>
-              <a:rPr lang="en-US" sz="1200" dirty="0">
+        </p:spPr>
+      </p:sp>
+      <p:sp>
+        <p:nvSpPr>
+          <p:cNvPr id="8" name="Text 6"/>
+          <p:cNvSpPr txBox="1"/>
+          <p:nvPr/>
+        </p:nvSpPr>
+        <p:spPr>
+          <a:xfrm>
+            <a:off x="914400" y="2075688"/>
+            <a:ext cx="3657600" cy="292608"/>
+          </a:xfrm>
+          <a:prstGeom prst="rect">
+            <a:avLst/>
+          </a:prstGeom>
+          <a:noFill/>
+          <a:ln/>
+        </p:spPr>
+        <p:txBody>
+          <a:bodyPr wrap="square" lIns="0" tIns="0" rIns="0" bIns="0" rtlCol="0" anchor="ctr"/>
+          <a:lstStyle/>
+          <a:p>
+            <a:pPr indent="0" marL="0">
+              <a:buNone/>
+            </a:pPr>
+            <a:r>
+              <a:rPr lang="en-US" sz="1350" b="1" dirty="0">
+                <a:solidFill>
+                  <a:srgbClr val="13233B"/>
+                </a:solidFill>
+                <a:latin typeface="Calibri" pitchFamily="34" charset="0"/>
+                <a:ea typeface="Calibri" pitchFamily="34" charset="-122"/>
+                <a:cs typeface="Calibri" pitchFamily="34" charset="-120"/>
+              </a:rPr>
+              <a:t>2 Mbit/s</a:t>
+            </a:r>
+            <a:endParaRPr lang="en-US" sz="1350" dirty="0"/>
+          </a:p>
+        </p:txBody>
+      </p:sp>
+      <p:sp>
+        <p:nvSpPr>
+          <p:cNvPr id="9" name="Text 7"/>
+          <p:cNvSpPr txBox="1"/>
+          <p:nvPr/>
+        </p:nvSpPr>
+        <p:spPr>
+          <a:xfrm>
+            <a:off x="4846320" y="2075688"/>
+            <a:ext cx="3657600" cy="292608"/>
+          </a:xfrm>
+          <a:prstGeom prst="rect">
+            <a:avLst/>
+          </a:prstGeom>
+          <a:noFill/>
+          <a:ln/>
+        </p:spPr>
+        <p:txBody>
+          <a:bodyPr wrap="square" lIns="0" tIns="0" rIns="0" bIns="0" rtlCol="0" anchor="ctr"/>
+          <a:lstStyle/>
+          <a:p>
+            <a:pPr indent="0" marL="0">
+              <a:buNone/>
+            </a:pPr>
+            <a:r>
+              <a:rPr lang="en-US" sz="1350" b="1" dirty="0">
+                <a:solidFill>
+                  <a:srgbClr val="2C7A5A"/>
+                </a:solidFill>
+                <a:latin typeface="Calibri" pitchFamily="34" charset="0"/>
+                <a:ea typeface="Calibri" pitchFamily="34" charset="-122"/>
+                <a:cs typeface="Calibri" pitchFamily="34" charset="-120"/>
+              </a:rPr>
+              <a:t>+13.2 %</a:t>
+            </a:r>
+            <a:endParaRPr lang="en-US" sz="1350" dirty="0"/>
+          </a:p>
+        </p:txBody>
+      </p:sp>
+      <p:sp>
+        <p:nvSpPr>
+          <p:cNvPr id="10" name="Text 8"/>
+          <p:cNvSpPr txBox="1"/>
+          <p:nvPr/>
+        </p:nvSpPr>
+        <p:spPr>
+          <a:xfrm>
+            <a:off x="8686800" y="2075688"/>
+            <a:ext cx="3657600" cy="292608"/>
+          </a:xfrm>
+          <a:prstGeom prst="rect">
+            <a:avLst/>
+          </a:prstGeom>
+          <a:noFill/>
+          <a:ln/>
+        </p:spPr>
+        <p:txBody>
+          <a:bodyPr wrap="square" lIns="0" tIns="0" rIns="0" bIns="0" rtlCol="0" anchor="ctr"/>
+          <a:lstStyle/>
+          <a:p>
+            <a:pPr indent="0" marL="0">
+              <a:buNone/>
+            </a:pPr>
+            <a:r>
+              <a:rPr lang="en-US" sz="1350" dirty="0">
                 <a:solidFill>
                   <a:srgbClr val="3A4A5F"/>
                 </a:solidFill>
@@ -7607,178 +7045,143 @@
                 <a:ea typeface="Calibri" pitchFamily="34" charset="-122"/>
                 <a:cs typeface="Calibri" pitchFamily="34" charset="-120"/>
               </a:rPr>
-              <a:t>DESiRED (2024) adapts an AQM target at runtime with DRL + INT on P4</a:t>
-            </a:r>
-            <a:endParaRPr lang="en-US" sz="1200" dirty="0"/>
-          </a:p>
-          <a:p>
-            <a:pPr marL="342900" indent="-342900">
-              <a:spcAft>
-                <a:spcPts val="600"/>
-              </a:spcAft>
-              <a:buSzPct val="100000"/>
-              <a:buChar char="•"/>
-            </a:pPr>
-            <a:r>
-              <a:rPr lang="en-US" sz="1200" dirty="0">
-                <a:solidFill>
-                  <a:srgbClr val="3A4A5F"/>
-                </a:solidFill>
-                <a:latin typeface="Calibri" pitchFamily="34" charset="0"/>
-                <a:ea typeface="Calibri" pitchFamily="34" charset="-122"/>
-                <a:cs typeface="Calibri" pitchFamily="34" charset="-120"/>
-              </a:rPr>
-              <a:t>Adaptive RED (2001) is the AIMD rule we borrow</a:t>
-            </a:r>
-            <a:endParaRPr lang="en-US" sz="1200" dirty="0"/>
-          </a:p>
-          <a:p>
-            <a:pPr marL="342900" indent="-342900">
-              <a:spcAft>
-                <a:spcPts val="600"/>
-              </a:spcAft>
-              <a:buSzPct val="100000"/>
-              <a:buChar char="•"/>
-            </a:pPr>
-            <a:r>
-              <a:rPr lang="en-US" sz="1200" dirty="0">
-                <a:solidFill>
-                  <a:srgbClr val="3A4A5F"/>
-                </a:solidFill>
-                <a:latin typeface="Calibri" pitchFamily="34" charset="0"/>
-                <a:ea typeface="Calibri" pitchFamily="34" charset="-122"/>
-                <a:cs typeface="Calibri" pitchFamily="34" charset="-120"/>
-              </a:rPr>
-              <a:t>ACoDel (2020) adapts CoDel's interval — with a stability proof we lack</a:t>
-            </a:r>
-            <a:endParaRPr lang="en-US" sz="1200" dirty="0"/>
-          </a:p>
-          <a:p>
-            <a:pPr marL="342900" indent="-342900">
-              <a:spcAft>
-                <a:spcPts val="600"/>
-              </a:spcAft>
-              <a:buSzPct val="100000"/>
-              <a:buChar char="•"/>
-            </a:pPr>
-            <a:r>
-              <a:rPr lang="en-US" sz="1200" dirty="0">
-                <a:solidFill>
-                  <a:srgbClr val="3A4A5F"/>
-                </a:solidFill>
-                <a:latin typeface="Calibri" pitchFamily="34" charset="0"/>
-                <a:ea typeface="Calibri" pitchFamily="34" charset="-122"/>
-                <a:cs typeface="Calibri" pitchFamily="34" charset="-120"/>
-              </a:rPr>
-              <a:t>QueuePilot (2023), AQM-LLM (2026) learn AQM policies</a:t>
-            </a:r>
-            <a:endParaRPr lang="en-US" sz="1200" dirty="0"/>
-          </a:p>
-        </p:txBody>
-      </p:sp>
-      <p:sp>
-        <p:nvSpPr>
-          <p:cNvPr id="7" name="Shape 5"/>
+              <a:t>0.0005</a:t>
+            </a:r>
+            <a:endParaRPr lang="en-US" sz="1350" dirty="0"/>
+          </a:p>
+        </p:txBody>
+      </p:sp>
+      <p:sp>
+        <p:nvSpPr>
+          <p:cNvPr id="11" name="Shape 9"/>
           <p:cNvSpPr/>
           <p:nvPr/>
         </p:nvSpPr>
         <p:spPr>
           <a:xfrm>
-            <a:off x="6263640" y="1600200"/>
-            <a:ext cx="5257800" cy="2240280"/>
+            <a:off x="640080" y="2514600"/>
+            <a:ext cx="10881360" cy="475488"/>
           </a:xfrm>
           <a:prstGeom prst="roundRect">
             <a:avLst>
-              <a:gd name="adj" fmla="val 3265"/>
+              <a:gd name="adj" fmla="val 9615"/>
             </a:avLst>
           </a:prstGeom>
           <a:solidFill>
-            <a:srgbClr val="EAF4EE"/>
+            <a:srgbClr val="F6FAFC"/>
           </a:solidFill>
-          <a:ln w="9525">
+          <a:ln w="6350">
             <a:solidFill>
-              <a:srgbClr val="D8E4EC"/>
+              <a:srgbClr val="E2ECF2"/>
             </a:solidFill>
             <a:prstDash val="solid"/>
           </a:ln>
-          <a:effectLst>
-            <a:outerShdw sx="100000" sy="100000" kx="0" ky="0" algn="bl" rotWithShape="0" blurRad="50800" dist="12700" dir="5400000">
-              <a:srgbClr val="BFCEDA">
-                <a:alpha val="35000"/>
-              </a:srgbClr>
-            </a:outerShdw>
-          </a:effectLst>
-        </p:spPr>
-      </p:sp>
-      <p:sp>
-        <p:nvSpPr>
-          <p:cNvPr id="8" name="Text 6"/>
-          <p:cNvSpPr txBox="1"/>
-          <p:nvPr/>
-        </p:nvSpPr>
-        <p:spPr>
-          <a:xfrm>
-            <a:off x="6537960" y="1783080"/>
-            <a:ext cx="4709160" cy="347472"/>
-          </a:xfrm>
-          <a:prstGeom prst="rect">
-            <a:avLst/>
-          </a:prstGeom>
-          <a:noFill/>
-          <a:ln/>
-        </p:spPr>
-        <p:txBody>
-          <a:bodyPr wrap="square" lIns="0" tIns="0" rIns="0" bIns="0" rtlCol="0" anchor="ctr"/>
-          <a:lstStyle/>
-          <a:p>
-            <a:pPr indent="0" marL="0">
-              <a:buNone/>
-            </a:pPr>
-            <a:r>
-              <a:rPr lang="en-US" sz="1500" b="1" dirty="0">
+        </p:spPr>
+      </p:sp>
+      <p:sp>
+        <p:nvSpPr>
+          <p:cNvPr id="12" name="Text 10"/>
+          <p:cNvSpPr txBox="1"/>
+          <p:nvPr/>
+        </p:nvSpPr>
+        <p:spPr>
+          <a:xfrm>
+            <a:off x="914400" y="2624328"/>
+            <a:ext cx="3657600" cy="292608"/>
+          </a:xfrm>
+          <a:prstGeom prst="rect">
+            <a:avLst/>
+          </a:prstGeom>
+          <a:noFill/>
+          <a:ln/>
+        </p:spPr>
+        <p:txBody>
+          <a:bodyPr wrap="square" lIns="0" tIns="0" rIns="0" bIns="0" rtlCol="0" anchor="ctr"/>
+          <a:lstStyle/>
+          <a:p>
+            <a:pPr indent="0" marL="0">
+              <a:buNone/>
+            </a:pPr>
+            <a:r>
+              <a:rPr lang="en-US" sz="1350" b="1" dirty="0">
+                <a:solidFill>
+                  <a:srgbClr val="13233B"/>
+                </a:solidFill>
+                <a:latin typeface="Calibri" pitchFamily="34" charset="0"/>
+                <a:ea typeface="Calibri" pitchFamily="34" charset="-122"/>
+                <a:cs typeface="Calibri" pitchFamily="34" charset="-120"/>
+              </a:rPr>
+              <a:t>5 Mbit/s</a:t>
+            </a:r>
+            <a:endParaRPr lang="en-US" sz="1350" dirty="0"/>
+          </a:p>
+        </p:txBody>
+      </p:sp>
+      <p:sp>
+        <p:nvSpPr>
+          <p:cNvPr id="13" name="Text 11"/>
+          <p:cNvSpPr txBox="1"/>
+          <p:nvPr/>
+        </p:nvSpPr>
+        <p:spPr>
+          <a:xfrm>
+            <a:off x="4846320" y="2624328"/>
+            <a:ext cx="3657600" cy="292608"/>
+          </a:xfrm>
+          <a:prstGeom prst="rect">
+            <a:avLst/>
+          </a:prstGeom>
+          <a:noFill/>
+          <a:ln/>
+        </p:spPr>
+        <p:txBody>
+          <a:bodyPr wrap="square" lIns="0" tIns="0" rIns="0" bIns="0" rtlCol="0" anchor="ctr"/>
+          <a:lstStyle/>
+          <a:p>
+            <a:pPr indent="0" marL="0">
+              <a:buNone/>
+            </a:pPr>
+            <a:r>
+              <a:rPr lang="en-US" sz="1350" b="1" dirty="0">
                 <a:solidFill>
                   <a:srgbClr val="2C7A5A"/>
                 </a:solidFill>
-                <a:latin typeface="Cambria" pitchFamily="34" charset="0"/>
-                <a:ea typeface="Cambria" pitchFamily="34" charset="-122"/>
-                <a:cs typeface="Cambria" pitchFamily="34" charset="-120"/>
-              </a:rPr>
-              <a:t>Not done by anyone — our claim</a:t>
-            </a:r>
-            <a:endParaRPr lang="en-US" sz="1500" dirty="0"/>
-          </a:p>
-        </p:txBody>
-      </p:sp>
-      <p:sp>
-        <p:nvSpPr>
-          <p:cNvPr id="9" name="Text 7"/>
-          <p:cNvSpPr txBox="1"/>
-          <p:nvPr/>
-        </p:nvSpPr>
-        <p:spPr>
-          <a:xfrm>
-            <a:off x="6537960" y="2194560"/>
-            <a:ext cx="4709160" cy="1554480"/>
-          </a:xfrm>
-          <a:prstGeom prst="rect">
-            <a:avLst/>
-          </a:prstGeom>
-          <a:noFill/>
-          <a:ln/>
-        </p:spPr>
-        <p:txBody>
-          <a:bodyPr wrap="square" lIns="0" tIns="0" rIns="0" bIns="0" rtlCol="0" anchor="ctr"/>
-          <a:lstStyle/>
-          <a:p>
-            <a:pPr marL="342900" indent="-342900">
-              <a:spcAft>
-                <a:spcPts val="600"/>
-              </a:spcAft>
-              <a:buSzPct val="100000"/>
-              <a:buChar char="•"/>
-            </a:pPr>
-            <a:r>
-              <a:rPr lang="en-US" sz="1200" dirty="0">
+                <a:latin typeface="Calibri" pitchFamily="34" charset="0"/>
+                <a:ea typeface="Calibri" pitchFamily="34" charset="-122"/>
+                <a:cs typeface="Calibri" pitchFamily="34" charset="-120"/>
+              </a:rPr>
+              <a:t>+18.2 %</a:t>
+            </a:r>
+            <a:endParaRPr lang="en-US" sz="1350" dirty="0"/>
+          </a:p>
+        </p:txBody>
+      </p:sp>
+      <p:sp>
+        <p:nvSpPr>
+          <p:cNvPr id="14" name="Text 12"/>
+          <p:cNvSpPr txBox="1"/>
+          <p:nvPr/>
+        </p:nvSpPr>
+        <p:spPr>
+          <a:xfrm>
+            <a:off x="8686800" y="2624328"/>
+            <a:ext cx="3657600" cy="292608"/>
+          </a:xfrm>
+          <a:prstGeom prst="rect">
+            <a:avLst/>
+          </a:prstGeom>
+          <a:noFill/>
+          <a:ln/>
+        </p:spPr>
+        <p:txBody>
+          <a:bodyPr wrap="square" lIns="0" tIns="0" rIns="0" bIns="0" rtlCol="0" anchor="ctr"/>
+          <a:lstStyle/>
+          <a:p>
+            <a:pPr indent="0" marL="0">
+              <a:buNone/>
+            </a:pPr>
+            <a:r>
+              <a:rPr lang="en-US" sz="1350" dirty="0">
                 <a:solidFill>
                   <a:srgbClr val="3A4A5F"/>
                 </a:solidFill>
@@ -7786,89 +7189,458 @@
                 <a:ea typeface="Calibri" pitchFamily="34" charset="-122"/>
                 <a:cs typeface="Calibri" pitchFamily="34" charset="-120"/>
               </a:rPr>
-              <a:t>A sham-controller condition separating CPU cost from decisions</a:t>
-            </a:r>
-            <a:endParaRPr lang="en-US" sz="1200" dirty="0"/>
-          </a:p>
-          <a:p>
-            <a:pPr marL="342900" indent="-342900">
-              <a:spcAft>
-                <a:spcPts val="600"/>
-              </a:spcAft>
-              <a:buSzPct val="100000"/>
-              <a:buChar char="•"/>
-            </a:pPr>
-            <a:r>
-              <a:rPr lang="en-US" sz="1200" dirty="0">
-                <a:solidFill>
-                  <a:srgbClr val="3A4A5F"/>
-                </a:solidFill>
-                <a:latin typeface="Calibri" pitchFamily="34" charset="0"/>
-                <a:ea typeface="Calibri" pitchFamily="34" charset="-122"/>
-                <a:cs typeface="Calibri" pitchFamily="34" charset="-120"/>
-              </a:rPr>
-              <a:t>Sparse-probe and bulk-flow latency reported separately</a:t>
-            </a:r>
-            <a:endParaRPr lang="en-US" sz="1200" dirty="0"/>
-          </a:p>
-          <a:p>
-            <a:pPr marL="342900" indent="-342900">
-              <a:spcAft>
-                <a:spcPts val="600"/>
-              </a:spcAft>
-              <a:buSzPct val="100000"/>
-              <a:buChar char="•"/>
-            </a:pPr>
-            <a:r>
-              <a:rPr lang="en-US" sz="1200" dirty="0">
-                <a:solidFill>
-                  <a:srgbClr val="3A4A5F"/>
-                </a:solidFill>
-                <a:latin typeface="Calibri" pitchFamily="34" charset="0"/>
-                <a:ea typeface="Calibri" pitchFamily="34" charset="-122"/>
-                <a:cs typeface="Calibri" pitchFamily="34" charset="-120"/>
-              </a:rPr>
-              <a:t>Comparison against eight alternative disciplines</a:t>
-            </a:r>
-            <a:endParaRPr lang="en-US" sz="1200" dirty="0"/>
-          </a:p>
-          <a:p>
-            <a:pPr marL="342900" indent="-342900">
-              <a:spcAft>
-                <a:spcPts val="600"/>
-              </a:spcAft>
-              <a:buSzPct val="100000"/>
-              <a:buChar char="•"/>
-            </a:pPr>
-            <a:r>
-              <a:rPr lang="en-US" sz="1200" dirty="0">
-                <a:solidFill>
-                  <a:srgbClr val="3A4A5F"/>
-                </a:solidFill>
-                <a:latin typeface="Calibri" pitchFamily="34" charset="0"/>
-                <a:ea typeface="Calibri" pitchFamily="34" charset="-122"/>
-                <a:cs typeface="Calibri" pitchFamily="34" charset="-120"/>
-              </a:rPr>
-              <a:t>A published null result for the adaptation itself</a:t>
-            </a:r>
-            <a:endParaRPr lang="en-US" sz="1200" dirty="0"/>
-          </a:p>
-        </p:txBody>
-      </p:sp>
-      <p:sp>
-        <p:nvSpPr>
-          <p:cNvPr id="10" name="Shape 8"/>
+              <a:t>&lt; 0.0001</a:t>
+            </a:r>
+            <a:endParaRPr lang="en-US" sz="1350" dirty="0"/>
+          </a:p>
+        </p:txBody>
+      </p:sp>
+      <p:sp>
+        <p:nvSpPr>
+          <p:cNvPr id="15" name="Shape 13"/>
           <p:cNvSpPr/>
           <p:nvPr/>
         </p:nvSpPr>
         <p:spPr>
           <a:xfrm>
-            <a:off x="640080" y="4114800"/>
-            <a:ext cx="10881360" cy="1554480"/>
+            <a:off x="640080" y="3063240"/>
+            <a:ext cx="10881360" cy="475488"/>
           </a:xfrm>
           <a:prstGeom prst="roundRect">
             <a:avLst>
-              <a:gd name="adj" fmla="val 4706"/>
+              <a:gd name="adj" fmla="val 9615"/>
+            </a:avLst>
+          </a:prstGeom>
+          <a:solidFill>
+            <a:srgbClr val="EEF4F8"/>
+          </a:solidFill>
+          <a:ln w="6350">
+            <a:solidFill>
+              <a:srgbClr val="E2ECF2"/>
+            </a:solidFill>
+            <a:prstDash val="solid"/>
+          </a:ln>
+        </p:spPr>
+      </p:sp>
+      <p:sp>
+        <p:nvSpPr>
+          <p:cNvPr id="16" name="Text 14"/>
+          <p:cNvSpPr txBox="1"/>
+          <p:nvPr/>
+        </p:nvSpPr>
+        <p:spPr>
+          <a:xfrm>
+            <a:off x="914400" y="3172968"/>
+            <a:ext cx="3657600" cy="292608"/>
+          </a:xfrm>
+          <a:prstGeom prst="rect">
+            <a:avLst/>
+          </a:prstGeom>
+          <a:noFill/>
+          <a:ln/>
+        </p:spPr>
+        <p:txBody>
+          <a:bodyPr wrap="square" lIns="0" tIns="0" rIns="0" bIns="0" rtlCol="0" anchor="ctr"/>
+          <a:lstStyle/>
+          <a:p>
+            <a:pPr indent="0" marL="0">
+              <a:buNone/>
+            </a:pPr>
+            <a:r>
+              <a:rPr lang="en-US" sz="1350" b="1" dirty="0">
+                <a:solidFill>
+                  <a:srgbClr val="13233B"/>
+                </a:solidFill>
+                <a:latin typeface="Calibri" pitchFamily="34" charset="0"/>
+                <a:ea typeface="Calibri" pitchFamily="34" charset="-122"/>
+                <a:cs typeface="Calibri" pitchFamily="34" charset="-120"/>
+              </a:rPr>
+              <a:t>10 Mbit/s</a:t>
+            </a:r>
+            <a:endParaRPr lang="en-US" sz="1350" dirty="0"/>
+          </a:p>
+        </p:txBody>
+      </p:sp>
+      <p:sp>
+        <p:nvSpPr>
+          <p:cNvPr id="17" name="Text 15"/>
+          <p:cNvSpPr txBox="1"/>
+          <p:nvPr/>
+        </p:nvSpPr>
+        <p:spPr>
+          <a:xfrm>
+            <a:off x="4846320" y="3172968"/>
+            <a:ext cx="3657600" cy="292608"/>
+          </a:xfrm>
+          <a:prstGeom prst="rect">
+            <a:avLst/>
+          </a:prstGeom>
+          <a:noFill/>
+          <a:ln/>
+        </p:spPr>
+        <p:txBody>
+          <a:bodyPr wrap="square" lIns="0" tIns="0" rIns="0" bIns="0" rtlCol="0" anchor="ctr"/>
+          <a:lstStyle/>
+          <a:p>
+            <a:pPr indent="0" marL="0">
+              <a:buNone/>
+            </a:pPr>
+            <a:r>
+              <a:rPr lang="en-US" sz="1350" b="1" dirty="0">
+                <a:solidFill>
+                  <a:srgbClr val="2C7A5A"/>
+                </a:solidFill>
+                <a:latin typeface="Calibri" pitchFamily="34" charset="0"/>
+                <a:ea typeface="Calibri" pitchFamily="34" charset="-122"/>
+                <a:cs typeface="Calibri" pitchFamily="34" charset="-120"/>
+              </a:rPr>
+              <a:t>+18.0 %</a:t>
+            </a:r>
+            <a:endParaRPr lang="en-US" sz="1350" dirty="0"/>
+          </a:p>
+        </p:txBody>
+      </p:sp>
+      <p:sp>
+        <p:nvSpPr>
+          <p:cNvPr id="18" name="Text 16"/>
+          <p:cNvSpPr txBox="1"/>
+          <p:nvPr/>
+        </p:nvSpPr>
+        <p:spPr>
+          <a:xfrm>
+            <a:off x="8686800" y="3172968"/>
+            <a:ext cx="3657600" cy="292608"/>
+          </a:xfrm>
+          <a:prstGeom prst="rect">
+            <a:avLst/>
+          </a:prstGeom>
+          <a:noFill/>
+          <a:ln/>
+        </p:spPr>
+        <p:txBody>
+          <a:bodyPr wrap="square" lIns="0" tIns="0" rIns="0" bIns="0" rtlCol="0" anchor="ctr"/>
+          <a:lstStyle/>
+          <a:p>
+            <a:pPr indent="0" marL="0">
+              <a:buNone/>
+            </a:pPr>
+            <a:r>
+              <a:rPr lang="en-US" sz="1350" dirty="0">
+                <a:solidFill>
+                  <a:srgbClr val="3A4A5F"/>
+                </a:solidFill>
+                <a:latin typeface="Calibri" pitchFamily="34" charset="0"/>
+                <a:ea typeface="Calibri" pitchFamily="34" charset="-122"/>
+                <a:cs typeface="Calibri" pitchFamily="34" charset="-120"/>
+              </a:rPr>
+              <a:t>&lt; 0.0001</a:t>
+            </a:r>
+            <a:endParaRPr lang="en-US" sz="1350" dirty="0"/>
+          </a:p>
+        </p:txBody>
+      </p:sp>
+      <p:sp>
+        <p:nvSpPr>
+          <p:cNvPr id="19" name="Shape 17"/>
+          <p:cNvSpPr/>
+          <p:nvPr/>
+        </p:nvSpPr>
+        <p:spPr>
+          <a:xfrm>
+            <a:off x="640080" y="3611880"/>
+            <a:ext cx="10881360" cy="475488"/>
+          </a:xfrm>
+          <a:prstGeom prst="roundRect">
+            <a:avLst>
+              <a:gd name="adj" fmla="val 9615"/>
+            </a:avLst>
+          </a:prstGeom>
+          <a:solidFill>
+            <a:srgbClr val="F6FAFC"/>
+          </a:solidFill>
+          <a:ln w="6350">
+            <a:solidFill>
+              <a:srgbClr val="E2ECF2"/>
+            </a:solidFill>
+            <a:prstDash val="solid"/>
+          </a:ln>
+        </p:spPr>
+      </p:sp>
+      <p:sp>
+        <p:nvSpPr>
+          <p:cNvPr id="20" name="Text 18"/>
+          <p:cNvSpPr txBox="1"/>
+          <p:nvPr/>
+        </p:nvSpPr>
+        <p:spPr>
+          <a:xfrm>
+            <a:off x="914400" y="3721608"/>
+            <a:ext cx="3657600" cy="292608"/>
+          </a:xfrm>
+          <a:prstGeom prst="rect">
+            <a:avLst/>
+          </a:prstGeom>
+          <a:noFill/>
+          <a:ln/>
+        </p:spPr>
+        <p:txBody>
+          <a:bodyPr wrap="square" lIns="0" tIns="0" rIns="0" bIns="0" rtlCol="0" anchor="ctr"/>
+          <a:lstStyle/>
+          <a:p>
+            <a:pPr indent="0" marL="0">
+              <a:buNone/>
+            </a:pPr>
+            <a:r>
+              <a:rPr lang="en-US" sz="1350" b="1" dirty="0">
+                <a:solidFill>
+                  <a:srgbClr val="13233B"/>
+                </a:solidFill>
+                <a:latin typeface="Calibri" pitchFamily="34" charset="0"/>
+                <a:ea typeface="Calibri" pitchFamily="34" charset="-122"/>
+                <a:cs typeface="Calibri" pitchFamily="34" charset="-120"/>
+              </a:rPr>
+              <a:t>20 Mbit/s</a:t>
+            </a:r>
+            <a:endParaRPr lang="en-US" sz="1350" dirty="0"/>
+          </a:p>
+        </p:txBody>
+      </p:sp>
+      <p:sp>
+        <p:nvSpPr>
+          <p:cNvPr id="21" name="Text 19"/>
+          <p:cNvSpPr txBox="1"/>
+          <p:nvPr/>
+        </p:nvSpPr>
+        <p:spPr>
+          <a:xfrm>
+            <a:off x="4846320" y="3721608"/>
+            <a:ext cx="3657600" cy="292608"/>
+          </a:xfrm>
+          <a:prstGeom prst="rect">
+            <a:avLst/>
+          </a:prstGeom>
+          <a:noFill/>
+          <a:ln/>
+        </p:spPr>
+        <p:txBody>
+          <a:bodyPr wrap="square" lIns="0" tIns="0" rIns="0" bIns="0" rtlCol="0" anchor="ctr"/>
+          <a:lstStyle/>
+          <a:p>
+            <a:pPr indent="0" marL="0">
+              <a:buNone/>
+            </a:pPr>
+            <a:r>
+              <a:rPr lang="en-US" sz="1350" b="1" dirty="0">
+                <a:solidFill>
+                  <a:srgbClr val="2C7A5A"/>
+                </a:solidFill>
+                <a:latin typeface="Calibri" pitchFamily="34" charset="0"/>
+                <a:ea typeface="Calibri" pitchFamily="34" charset="-122"/>
+                <a:cs typeface="Calibri" pitchFamily="34" charset="-120"/>
+              </a:rPr>
+              <a:t>+14.1 %</a:t>
+            </a:r>
+            <a:endParaRPr lang="en-US" sz="1350" dirty="0"/>
+          </a:p>
+        </p:txBody>
+      </p:sp>
+      <p:sp>
+        <p:nvSpPr>
+          <p:cNvPr id="22" name="Text 20"/>
+          <p:cNvSpPr txBox="1"/>
+          <p:nvPr/>
+        </p:nvSpPr>
+        <p:spPr>
+          <a:xfrm>
+            <a:off x="8686800" y="3721608"/>
+            <a:ext cx="3657600" cy="292608"/>
+          </a:xfrm>
+          <a:prstGeom prst="rect">
+            <a:avLst/>
+          </a:prstGeom>
+          <a:noFill/>
+          <a:ln/>
+        </p:spPr>
+        <p:txBody>
+          <a:bodyPr wrap="square" lIns="0" tIns="0" rIns="0" bIns="0" rtlCol="0" anchor="ctr"/>
+          <a:lstStyle/>
+          <a:p>
+            <a:pPr indent="0" marL="0">
+              <a:buNone/>
+            </a:pPr>
+            <a:r>
+              <a:rPr lang="en-US" sz="1350" dirty="0">
+                <a:solidFill>
+                  <a:srgbClr val="3A4A5F"/>
+                </a:solidFill>
+                <a:latin typeface="Calibri" pitchFamily="34" charset="0"/>
+                <a:ea typeface="Calibri" pitchFamily="34" charset="-122"/>
+                <a:cs typeface="Calibri" pitchFamily="34" charset="-120"/>
+              </a:rPr>
+              <a:t>0.0004</a:t>
+            </a:r>
+            <a:endParaRPr lang="en-US" sz="1350" dirty="0"/>
+          </a:p>
+        </p:txBody>
+      </p:sp>
+      <p:sp>
+        <p:nvSpPr>
+          <p:cNvPr id="23" name="Shape 21"/>
+          <p:cNvSpPr/>
+          <p:nvPr/>
+        </p:nvSpPr>
+        <p:spPr>
+          <a:xfrm>
+            <a:off x="640080" y="4160520"/>
+            <a:ext cx="10881360" cy="475488"/>
+          </a:xfrm>
+          <a:prstGeom prst="roundRect">
+            <a:avLst>
+              <a:gd name="adj" fmla="val 9615"/>
+            </a:avLst>
+          </a:prstGeom>
+          <a:solidFill>
+            <a:srgbClr val="EEF4F8"/>
+          </a:solidFill>
+          <a:ln w="6350">
+            <a:solidFill>
+              <a:srgbClr val="E2ECF2"/>
+            </a:solidFill>
+            <a:prstDash val="solid"/>
+          </a:ln>
+        </p:spPr>
+      </p:sp>
+      <p:sp>
+        <p:nvSpPr>
+          <p:cNvPr id="24" name="Text 22"/>
+          <p:cNvSpPr txBox="1"/>
+          <p:nvPr/>
+        </p:nvSpPr>
+        <p:spPr>
+          <a:xfrm>
+            <a:off x="914400" y="4270248"/>
+            <a:ext cx="3657600" cy="292608"/>
+          </a:xfrm>
+          <a:prstGeom prst="rect">
+            <a:avLst/>
+          </a:prstGeom>
+          <a:noFill/>
+          <a:ln/>
+        </p:spPr>
+        <p:txBody>
+          <a:bodyPr wrap="square" lIns="0" tIns="0" rIns="0" bIns="0" rtlCol="0" anchor="ctr"/>
+          <a:lstStyle/>
+          <a:p>
+            <a:pPr indent="0" marL="0">
+              <a:buNone/>
+            </a:pPr>
+            <a:r>
+              <a:rPr lang="en-US" sz="1350" b="1" dirty="0">
+                <a:solidFill>
+                  <a:srgbClr val="13233B"/>
+                </a:solidFill>
+                <a:latin typeface="Calibri" pitchFamily="34" charset="0"/>
+                <a:ea typeface="Calibri" pitchFamily="34" charset="-122"/>
+                <a:cs typeface="Calibri" pitchFamily="34" charset="-120"/>
+              </a:rPr>
+              <a:t>50 Mbit/s</a:t>
+            </a:r>
+            <a:endParaRPr lang="en-US" sz="1350" dirty="0"/>
+          </a:p>
+        </p:txBody>
+      </p:sp>
+      <p:sp>
+        <p:nvSpPr>
+          <p:cNvPr id="25" name="Text 23"/>
+          <p:cNvSpPr txBox="1"/>
+          <p:nvPr/>
+        </p:nvSpPr>
+        <p:spPr>
+          <a:xfrm>
+            <a:off x="4846320" y="4270248"/>
+            <a:ext cx="3657600" cy="292608"/>
+          </a:xfrm>
+          <a:prstGeom prst="rect">
+            <a:avLst/>
+          </a:prstGeom>
+          <a:noFill/>
+          <a:ln/>
+        </p:spPr>
+        <p:txBody>
+          <a:bodyPr wrap="square" lIns="0" tIns="0" rIns="0" bIns="0" rtlCol="0" anchor="ctr"/>
+          <a:lstStyle/>
+          <a:p>
+            <a:pPr indent="0" marL="0">
+              <a:buNone/>
+            </a:pPr>
+            <a:r>
+              <a:rPr lang="en-US" sz="1350" b="1" dirty="0">
+                <a:solidFill>
+                  <a:srgbClr val="2C7A5A"/>
+                </a:solidFill>
+                <a:latin typeface="Calibri" pitchFamily="34" charset="0"/>
+                <a:ea typeface="Calibri" pitchFamily="34" charset="-122"/>
+                <a:cs typeface="Calibri" pitchFamily="34" charset="-120"/>
+              </a:rPr>
+              <a:t>+7.1 %</a:t>
+            </a:r>
+            <a:endParaRPr lang="en-US" sz="1350" dirty="0"/>
+          </a:p>
+        </p:txBody>
+      </p:sp>
+      <p:sp>
+        <p:nvSpPr>
+          <p:cNvPr id="26" name="Text 24"/>
+          <p:cNvSpPr txBox="1"/>
+          <p:nvPr/>
+        </p:nvSpPr>
+        <p:spPr>
+          <a:xfrm>
+            <a:off x="8686800" y="4270248"/>
+            <a:ext cx="3657600" cy="292608"/>
+          </a:xfrm>
+          <a:prstGeom prst="rect">
+            <a:avLst/>
+          </a:prstGeom>
+          <a:noFill/>
+          <a:ln/>
+        </p:spPr>
+        <p:txBody>
+          <a:bodyPr wrap="square" lIns="0" tIns="0" rIns="0" bIns="0" rtlCol="0" anchor="ctr"/>
+          <a:lstStyle/>
+          <a:p>
+            <a:pPr indent="0" marL="0">
+              <a:buNone/>
+            </a:pPr>
+            <a:r>
+              <a:rPr lang="en-US" sz="1350" dirty="0">
+                <a:solidFill>
+                  <a:srgbClr val="3A4A5F"/>
+                </a:solidFill>
+                <a:latin typeface="Calibri" pitchFamily="34" charset="0"/>
+                <a:ea typeface="Calibri" pitchFamily="34" charset="-122"/>
+                <a:cs typeface="Calibri" pitchFamily="34" charset="-120"/>
+              </a:rPr>
+              <a:t>0.0172</a:t>
+            </a:r>
+            <a:endParaRPr lang="en-US" sz="1350" dirty="0"/>
+          </a:p>
+        </p:txBody>
+      </p:sp>
+      <p:sp>
+        <p:nvSpPr>
+          <p:cNvPr id="27" name="Shape 25"/>
+          <p:cNvSpPr/>
+          <p:nvPr/>
+        </p:nvSpPr>
+        <p:spPr>
+          <a:xfrm>
+            <a:off x="640080" y="4846320"/>
+            <a:ext cx="10881360" cy="1280160"/>
+          </a:xfrm>
+          <a:prstGeom prst="roundRect">
+            <a:avLst>
+              <a:gd name="adj" fmla="val 5714"/>
             </a:avLst>
           </a:prstGeom>
           <a:solidFill>
@@ -7891,79 +7663,40 @@
       </p:sp>
       <p:sp>
         <p:nvSpPr>
-          <p:cNvPr id="11" name="Text 9"/>
-          <p:cNvSpPr txBox="1"/>
-          <p:nvPr/>
-        </p:nvSpPr>
-        <p:spPr>
-          <a:xfrm>
-            <a:off x="960120" y="4279392"/>
-            <a:ext cx="10515600" cy="320040"/>
-          </a:xfrm>
-          <a:prstGeom prst="rect">
-            <a:avLst/>
-          </a:prstGeom>
-          <a:noFill/>
-          <a:ln/>
-        </p:spPr>
-        <p:txBody>
-          <a:bodyPr wrap="square" lIns="0" tIns="0" rIns="0" bIns="0" rtlCol="0" anchor="ctr"/>
-          <a:lstStyle/>
-          <a:p>
-            <a:pPr indent="0" marL="0">
-              <a:buNone/>
-            </a:pPr>
-            <a:r>
-              <a:rPr lang="en-US" sz="1400" b="1" spc="100" kern="0" dirty="0">
-                <a:solidFill>
-                  <a:srgbClr val="065A82"/>
-                </a:solidFill>
-                <a:latin typeface="Calibri" pitchFamily="34" charset="0"/>
-                <a:ea typeface="Calibri" pitchFamily="34" charset="-122"/>
-                <a:cs typeface="Calibri" pitchFamily="34" charset="-120"/>
-              </a:rPr>
-              <a:t>The claim we can defend</a:t>
+          <p:cNvPr id="28" name="Text 26"/>
+          <p:cNvSpPr txBox="1"/>
+          <p:nvPr/>
+        </p:nvSpPr>
+        <p:spPr>
+          <a:xfrm>
+            <a:off x="960120" y="5029200"/>
+            <a:ext cx="10515600" cy="914400"/>
+          </a:xfrm>
+          <a:prstGeom prst="rect">
+            <a:avLst/>
+          </a:prstGeom>
+          <a:noFill/>
+          <a:ln/>
+        </p:spPr>
+        <p:txBody>
+          <a:bodyPr wrap="square" lIns="0" tIns="0" rIns="0" bIns="0" rtlCol="0" anchor="ctr"/>
+          <a:lstStyle/>
+          <a:p>
+            <a:pPr indent="0" marL="0">
+              <a:buNone/>
+            </a:pPr>
+            <a:r>
+              <a:rPr lang="en-US" sz="1400" dirty="0">
+                <a:solidFill>
+                  <a:srgbClr val="13233B"/>
+                </a:solidFill>
+                <a:latin typeface="Calibri" pitchFamily="34" charset="0"/>
+                <a:ea typeface="Calibri" pitchFamily="34" charset="-122"/>
+                <a:cs typeface="Calibri" pitchFamily="34" charset="-120"/>
+              </a:rPr>
+              <a:t>An 11-point spread, against the 5-point threshold we used to call the RTT comparison consistent. Every cell is significant, so this is real. The fitted ceiling of 20.5 % is the ceiling at 10 Mbit/s, not a constant of the mechanism.</a:t>
             </a:r>
             <a:endParaRPr lang="en-US" sz="1400" dirty="0"/>
-          </a:p>
-        </p:txBody>
-      </p:sp>
-      <p:sp>
-        <p:nvSpPr>
-          <p:cNvPr id="12" name="Text 10"/>
-          <p:cNvSpPr txBox="1"/>
-          <p:nvPr/>
-        </p:nvSpPr>
-        <p:spPr>
-          <a:xfrm>
-            <a:off x="960120" y="4617720"/>
-            <a:ext cx="10515600" cy="914400"/>
-          </a:xfrm>
-          <a:prstGeom prst="rect">
-            <a:avLst/>
-          </a:prstGeom>
-          <a:noFill/>
-          <a:ln/>
-        </p:spPr>
-        <p:txBody>
-          <a:bodyPr wrap="square" lIns="0" tIns="0" rIns="0" bIns="0" rtlCol="0" anchor="ctr"/>
-          <a:lstStyle/>
-          <a:p>
-            <a:pPr indent="0" marL="0">
-              <a:buNone/>
-            </a:pPr>
-            <a:r>
-              <a:rPr lang="en-US" sz="1700" b="1" dirty="0">
-                <a:solidFill>
-                  <a:srgbClr val="13233B"/>
-                </a:solidFill>
-                <a:latin typeface="Cambria" pitchFamily="34" charset="0"/>
-                <a:ea typeface="Cambria" pitchFamily="34" charset="-122"/>
-                <a:cs typeface="Cambria" pitchFamily="34" charset="-120"/>
-              </a:rPr>
-              <a:t>The first controlled evaluation of runtime parameter adaptation for a flow-queueing AQM on stock Linux — and the finding that it does not measurably help.</a:t>
-            </a:r>
-            <a:endParaRPr lang="en-US" sz="1700" dirty="0"/>
           </a:p>
         </p:txBody>
       </p:sp>
@@ -8032,7 +7765,7 @@
                 <a:ea typeface="Calibri" pitchFamily="34" charset="-122"/>
                 <a:cs typeface="Calibri" pitchFamily="34" charset="-120"/>
               </a:rPr>
-              <a:t>CONCLUSION</a:t>
+              <a:t>INTEGRITY</a:t>
             </a:r>
             <a:endParaRPr lang="en-US" sz="1500" dirty="0"/>
           </a:p>
@@ -8071,11 +7804,155 @@
                 <a:ea typeface="Cambria" pitchFamily="34" charset="-122"/>
                 <a:cs typeface="Cambria" pitchFamily="34" charset="-120"/>
               </a:rPr>
-              <a:t>What we are left with</a:t>
+              <a:t>What did not survive verification</a:t>
             </a:r>
             <a:endParaRPr lang="en-US" sz="4200" dirty="0"/>
           </a:p>
         </p:txBody>
+      </p:sp>
+      <p:sp>
+        <p:nvSpPr>
+          <p:cNvPr id="4" name="Text 2"/>
+          <p:cNvSpPr txBox="1"/>
+          <p:nvPr/>
+        </p:nvSpPr>
+        <p:spPr>
+          <a:xfrm>
+            <a:off x="640080" y="3931920"/>
+            <a:ext cx="10881360" cy="640080"/>
+          </a:xfrm>
+          <a:prstGeom prst="rect">
+            <a:avLst/>
+          </a:prstGeom>
+          <a:noFill/>
+          <a:ln/>
+        </p:spPr>
+        <p:txBody>
+          <a:bodyPr wrap="square" rtlCol="0" anchor="ctr"/>
+          <a:lstStyle/>
+          <a:p>
+            <a:pPr indent="0" marL="0">
+              <a:buNone/>
+            </a:pPr>
+            <a:r>
+              <a:rPr lang="en-US" sz="1600" i="1" dirty="0">
+                <a:solidFill>
+                  <a:srgbClr val="A9C3DE"/>
+                </a:solidFill>
+                <a:latin typeface="Calibri" pitchFamily="34" charset="0"/>
+                <a:ea typeface="Calibri" pitchFamily="34" charset="-122"/>
+                <a:cs typeface="Calibri" pitchFamily="34" charset="-120"/>
+              </a:rPr>
+              <a:t>Seven classes of silent failure. Each produced results that were confident, internally consistent, and wrong.</a:t>
+            </a:r>
+            <a:endParaRPr lang="en-US" sz="1600" dirty="0"/>
+          </a:p>
+        </p:txBody>
+      </p:sp>
+    </p:spTree>
+  </p:cSld>
+  <p:clrMapOvr>
+    <a:masterClrMapping/>
+  </p:clrMapOvr>
+</p:sld>
+</file>
+
+<file path=ppt/slides/slide19.xml><?xml version="1.0" encoding="utf-8"?>
+<p:sld xmlns:a="http://schemas.openxmlformats.org/drawingml/2006/main" xmlns:r="http://schemas.openxmlformats.org/officeDocument/2006/relationships" xmlns:p="http://schemas.openxmlformats.org/presentationml/2006/main">
+  <p:cSld name="Slide 19">
+    <p:bg>
+      <p:bgPr>
+        <a:solidFill>
+          <a:srgbClr val="FFFFFF"/>
+        </a:solidFill>
+      </p:bgPr>
+    </p:bg>
+    <p:spTree>
+      <p:nvGrpSpPr>
+        <p:cNvPr id="1" name=""/>
+        <p:cNvGrpSpPr/>
+        <p:nvPr/>
+      </p:nvGrpSpPr>
+      <p:grpSpPr>
+        <a:xfrm>
+          <a:off x="0" y="0"/>
+          <a:ext cx="0" cy="0"/>
+          <a:chOff x="0" y="0"/>
+          <a:chExt cx="0" cy="0"/>
+        </a:xfrm>
+      </p:grpSpPr>
+      <p:sp>
+        <p:nvSpPr>
+          <p:cNvPr id="2" name="Text 0"/>
+          <p:cNvSpPr txBox="1"/>
+          <p:nvPr/>
+        </p:nvSpPr>
+        <p:spPr>
+          <a:xfrm>
+            <a:off x="640080" y="411480"/>
+            <a:ext cx="10881360" cy="731520"/>
+          </a:xfrm>
+          <a:prstGeom prst="rect">
+            <a:avLst/>
+          </a:prstGeom>
+          <a:noFill/>
+          <a:ln/>
+        </p:spPr>
+        <p:txBody>
+          <a:bodyPr wrap="square" rtlCol="0" anchor="ctr"/>
+          <a:lstStyle/>
+          <a:p>
+            <a:pPr indent="0" marL="0">
+              <a:buNone/>
+            </a:pPr>
+            <a:r>
+              <a:rPr lang="en-US" sz="3200" b="1" dirty="0">
+                <a:solidFill>
+                  <a:srgbClr val="13233B"/>
+                </a:solidFill>
+                <a:latin typeface="Cambria" pitchFamily="34" charset="0"/>
+                <a:ea typeface="Cambria" pitchFamily="34" charset="-122"/>
+                <a:cs typeface="Cambria" pitchFamily="34" charset="-120"/>
+              </a:rPr>
+              <a:t>The seven defects</a:t>
+            </a:r>
+            <a:endParaRPr lang="en-US" sz="3200" dirty="0"/>
+          </a:p>
+        </p:txBody>
+      </p:sp>
+      <p:sp>
+        <p:nvSpPr>
+          <p:cNvPr id="3" name="Shape 1"/>
+          <p:cNvSpPr/>
+          <p:nvPr/>
+        </p:nvSpPr>
+        <p:spPr>
+          <a:xfrm>
+            <a:off x="640080" y="1143000"/>
+            <a:ext cx="5349240" cy="932688"/>
+          </a:xfrm>
+          <a:prstGeom prst="roundRect">
+            <a:avLst>
+              <a:gd name="adj" fmla="val 7843"/>
+            </a:avLst>
+          </a:prstGeom>
+          <a:solidFill>
+            <a:srgbClr val="EEF4F8"/>
+          </a:solidFill>
+          <a:ln w="9525">
+            <a:solidFill>
+              <a:srgbClr val="D8E4EC"/>
+            </a:solidFill>
+            <a:prstDash val="solid"/>
+          </a:ln>
+          <a:effectLst>
+            <a:outerShdw sx="100000" sy="100000" kx="0" ky="0" algn="bl" rotWithShape="0" blurRad="50800" dist="12700" dir="5400000">
+              <a:srgbClr val="BFCEDA">
+                <a:alpha val="35000"/>
+              </a:srgbClr>
+            </a:outerShdw>
+          </a:effectLst>
+        </p:spPr>
       </p:sp>
       <p:sp>
         <p:nvSpPr>
@@ -8085,16 +7962,14 @@
         </p:nvSpPr>
         <p:spPr>
           <a:xfrm>
-            <a:off x="640080" y="3794760"/>
-            <a:ext cx="10881360" cy="749808"/>
-          </a:xfrm>
-          <a:prstGeom prst="roundRect">
-            <a:avLst>
-              <a:gd name="adj" fmla="val 8537"/>
-            </a:avLst>
+            <a:off x="868680" y="1389888"/>
+            <a:ext cx="420624" cy="420624"/>
+          </a:xfrm>
+          <a:prstGeom prst="ellipse">
+            <a:avLst/>
           </a:prstGeom>
           <a:solidFill>
-            <a:srgbClr val="2C3568"/>
+            <a:srgbClr val="065A82"/>
           </a:solidFill>
           <a:ln w="12700">
             <a:solidFill>
@@ -8106,20 +7981,171 @@
       </p:sp>
       <p:sp>
         <p:nvSpPr>
-          <p:cNvPr id="5" name="Shape 3"/>
+          <p:cNvPr id="5" name="Text 3"/>
+          <p:cNvSpPr txBox="1"/>
+          <p:nvPr/>
+        </p:nvSpPr>
+        <p:spPr>
+          <a:xfrm>
+            <a:off x="868680" y="1389888"/>
+            <a:ext cx="420624" cy="420624"/>
+          </a:xfrm>
+          <a:prstGeom prst="rect">
+            <a:avLst/>
+          </a:prstGeom>
+          <a:noFill/>
+          <a:ln/>
+        </p:spPr>
+        <p:txBody>
+          <a:bodyPr wrap="square" lIns="0" tIns="0" rIns="0" bIns="0" rtlCol="0" anchor="ctr"/>
+          <a:lstStyle/>
+          <a:p>
+            <a:pPr algn="ctr" indent="0" marL="0">
+              <a:buNone/>
+            </a:pPr>
+            <a:r>
+              <a:rPr lang="en-US" sz="1300" b="1" dirty="0">
+                <a:solidFill>
+                  <a:srgbClr val="FFFFFF"/>
+                </a:solidFill>
+                <a:latin typeface="Calibri" pitchFamily="34" charset="0"/>
+                <a:ea typeface="Calibri" pitchFamily="34" charset="-122"/>
+                <a:cs typeface="Calibri" pitchFamily="34" charset="-120"/>
+              </a:rPr>
+              <a:t>1</a:t>
+            </a:r>
+            <a:endParaRPr lang="en-US" sz="1300" dirty="0"/>
+          </a:p>
+        </p:txBody>
+      </p:sp>
+      <p:sp>
+        <p:nvSpPr>
+          <p:cNvPr id="6" name="Text 4"/>
+          <p:cNvSpPr txBox="1"/>
+          <p:nvPr/>
+        </p:nvSpPr>
+        <p:spPr>
+          <a:xfrm>
+            <a:off x="1417320" y="1234440"/>
+            <a:ext cx="4434840" cy="301752"/>
+          </a:xfrm>
+          <a:prstGeom prst="rect">
+            <a:avLst/>
+          </a:prstGeom>
+          <a:noFill/>
+          <a:ln/>
+        </p:spPr>
+        <p:txBody>
+          <a:bodyPr wrap="square" lIns="0" tIns="0" rIns="0" bIns="0" rtlCol="0" anchor="ctr"/>
+          <a:lstStyle/>
+          <a:p>
+            <a:pPr indent="0" marL="0">
+              <a:buNone/>
+            </a:pPr>
+            <a:r>
+              <a:rPr lang="en-US" sz="1400" b="1" dirty="0">
+                <a:solidFill>
+                  <a:srgbClr val="13233B"/>
+                </a:solidFill>
+                <a:latin typeface="Calibri" pitchFamily="34" charset="0"/>
+                <a:ea typeface="Calibri" pitchFamily="34" charset="-122"/>
+                <a:cs typeface="Calibri" pitchFamily="34" charset="-120"/>
+              </a:rPr>
+              <a:t>Loopback traffic</a:t>
+            </a:r>
+            <a:endParaRPr lang="en-US" sz="1400" dirty="0"/>
+          </a:p>
+        </p:txBody>
+      </p:sp>
+      <p:sp>
+        <p:nvSpPr>
+          <p:cNvPr id="7" name="Text 5"/>
+          <p:cNvSpPr txBox="1"/>
+          <p:nvPr/>
+        </p:nvSpPr>
+        <p:spPr>
+          <a:xfrm>
+            <a:off x="1417320" y="1545336"/>
+            <a:ext cx="4434840" cy="475488"/>
+          </a:xfrm>
+          <a:prstGeom prst="rect">
+            <a:avLst/>
+          </a:prstGeom>
+          <a:noFill/>
+          <a:ln/>
+        </p:spPr>
+        <p:txBody>
+          <a:bodyPr wrap="square" lIns="0" tIns="0" rIns="0" bIns="0" rtlCol="0" anchor="ctr"/>
+          <a:lstStyle/>
+          <a:p>
+            <a:pPr indent="0" marL="0">
+              <a:buNone/>
+            </a:pPr>
+            <a:r>
+              <a:rPr lang="en-US" sz="1150" dirty="0">
+                <a:solidFill>
+                  <a:srgbClr val="3A4A5F"/>
+                </a:solidFill>
+                <a:latin typeface="Calibri" pitchFamily="34" charset="0"/>
+                <a:ea typeface="Calibri" pitchFamily="34" charset="-122"/>
+                <a:cs typeface="Calibri" pitchFamily="34" charset="-120"/>
+              </a:rPr>
+              <a:t>Parts 1–3 ran iperf3 to 127.0.0.1 at 93–219 Gbit/s. No qdisc was ever in the path.</a:t>
+            </a:r>
+            <a:endParaRPr lang="en-US" sz="1150" dirty="0"/>
+          </a:p>
+        </p:txBody>
+      </p:sp>
+      <p:sp>
+        <p:nvSpPr>
+          <p:cNvPr id="8" name="Shape 6"/>
           <p:cNvSpPr/>
           <p:nvPr/>
         </p:nvSpPr>
         <p:spPr>
           <a:xfrm>
-            <a:off x="914400" y="3977640"/>
-            <a:ext cx="384048" cy="384048"/>
+            <a:off x="6217920" y="1143000"/>
+            <a:ext cx="5349240" cy="932688"/>
+          </a:xfrm>
+          <a:prstGeom prst="roundRect">
+            <a:avLst>
+              <a:gd name="adj" fmla="val 7843"/>
+            </a:avLst>
+          </a:prstGeom>
+          <a:solidFill>
+            <a:srgbClr val="EEF4F8"/>
+          </a:solidFill>
+          <a:ln w="9525">
+            <a:solidFill>
+              <a:srgbClr val="D8E4EC"/>
+            </a:solidFill>
+            <a:prstDash val="solid"/>
+          </a:ln>
+          <a:effectLst>
+            <a:outerShdw sx="100000" sy="100000" kx="0" ky="0" algn="bl" rotWithShape="0" blurRad="50800" dist="12700" dir="5400000">
+              <a:srgbClr val="BFCEDA">
+                <a:alpha val="35000"/>
+              </a:srgbClr>
+            </a:outerShdw>
+          </a:effectLst>
+        </p:spPr>
+      </p:sp>
+      <p:sp>
+        <p:nvSpPr>
+          <p:cNvPr id="9" name="Shape 7"/>
+          <p:cNvSpPr/>
+          <p:nvPr/>
+        </p:nvSpPr>
+        <p:spPr>
+          <a:xfrm>
+            <a:off x="6446520" y="1389888"/>
+            <a:ext cx="420624" cy="420624"/>
           </a:xfrm>
           <a:prstGeom prst="ellipse">
             <a:avLst/>
           </a:prstGeom>
           <a:solidFill>
-            <a:srgbClr val="1C7293"/>
+            <a:srgbClr val="065A82"/>
           </a:solidFill>
           <a:ln w="12700">
             <a:solidFill>
@@ -8131,14 +8157,14 @@
       </p:sp>
       <p:sp>
         <p:nvSpPr>
-          <p:cNvPr id="6" name="Text 4"/>
-          <p:cNvSpPr txBox="1"/>
-          <p:nvPr/>
-        </p:nvSpPr>
-        <p:spPr>
-          <a:xfrm>
-            <a:off x="914400" y="3977640"/>
-            <a:ext cx="384048" cy="384048"/>
+          <p:cNvPr id="10" name="Text 8"/>
+          <p:cNvSpPr txBox="1"/>
+          <p:nvPr/>
+        </p:nvSpPr>
+        <p:spPr>
+          <a:xfrm>
+            <a:off x="6446520" y="1389888"/>
+            <a:ext cx="420624" cy="420624"/>
           </a:xfrm>
           <a:prstGeom prst="rect">
             <a:avLst/>
@@ -8162,7 +8188,7 @@
                 <a:ea typeface="Calibri" pitchFamily="34" charset="-122"/>
                 <a:cs typeface="Calibri" pitchFamily="34" charset="-120"/>
               </a:rPr>
-              <a:t>1</a:t>
+              <a:t>2</a:t>
             </a:r>
             <a:endParaRPr lang="en-US" sz="1300" dirty="0"/>
           </a:p>
@@ -8170,100 +8196,132 @@
       </p:sp>
       <p:sp>
         <p:nvSpPr>
-          <p:cNvPr id="7" name="Text 5"/>
-          <p:cNvSpPr txBox="1"/>
-          <p:nvPr/>
-        </p:nvSpPr>
-        <p:spPr>
-          <a:xfrm>
-            <a:off x="1508760" y="3867912"/>
-            <a:ext cx="10058400" cy="329184"/>
-          </a:xfrm>
-          <a:prstGeom prst="rect">
-            <a:avLst/>
-          </a:prstGeom>
-          <a:noFill/>
-          <a:ln/>
-        </p:spPr>
-        <p:txBody>
-          <a:bodyPr wrap="square" lIns="0" tIns="0" rIns="0" bIns="0" rtlCol="0" anchor="ctr"/>
-          <a:lstStyle/>
-          <a:p>
-            <a:pPr indent="0" marL="0">
-              <a:buNone/>
-            </a:pPr>
-            <a:r>
-              <a:rPr lang="en-US" sz="1500" b="1" dirty="0">
-                <a:solidFill>
-                  <a:srgbClr val="FFFFFF"/>
-                </a:solidFill>
-                <a:latin typeface="Calibri" pitchFamily="34" charset="0"/>
-                <a:ea typeface="Calibri" pitchFamily="34" charset="-122"/>
-                <a:cs typeface="Calibri" pitchFamily="34" charset="-120"/>
-              </a:rPr>
-              <a:t>Flow queueing with a delay target is what matters</a:t>
-            </a:r>
-            <a:endParaRPr lang="en-US" sz="1500" dirty="0"/>
-          </a:p>
-        </p:txBody>
-      </p:sp>
-      <p:sp>
-        <p:nvSpPr>
-          <p:cNvPr id="8" name="Text 6"/>
-          <p:cNvSpPr txBox="1"/>
-          <p:nvPr/>
-        </p:nvSpPr>
-        <p:spPr>
-          <a:xfrm>
-            <a:off x="1508760" y="4197096"/>
-            <a:ext cx="10058400" cy="301752"/>
-          </a:xfrm>
-          <a:prstGeom prst="rect">
-            <a:avLst/>
-          </a:prstGeom>
-          <a:noFill/>
-          <a:ln/>
-        </p:spPr>
-        <p:txBody>
-          <a:bodyPr wrap="square" lIns="0" tIns="0" rIns="0" bIns="0" rtlCol="0" anchor="ctr"/>
-          <a:lstStyle/>
-          <a:p>
-            <a:pPr indent="0" marL="0">
-              <a:buNone/>
-            </a:pPr>
-            <a:r>
-              <a:rPr lang="en-US" sz="1250" dirty="0">
-                <a:solidFill>
-                  <a:srgbClr val="A9C3DE"/>
-                </a:solidFill>
-                <a:latin typeface="Calibri" pitchFamily="34" charset="0"/>
-                <a:ea typeface="Calibri" pitchFamily="34" charset="-122"/>
-                <a:cs typeface="Calibri" pitchFamily="34" charset="-120"/>
-              </a:rPr>
-              <a:t>~100× tail-latency reduction at zero goodput cost</a:t>
-            </a:r>
-            <a:endParaRPr lang="en-US" sz="1250" dirty="0"/>
-          </a:p>
-        </p:txBody>
-      </p:sp>
-      <p:sp>
-        <p:nvSpPr>
-          <p:cNvPr id="9" name="Shape 7"/>
+          <p:cNvPr id="11" name="Text 9"/>
+          <p:cNvSpPr txBox="1"/>
+          <p:nvPr/>
+        </p:nvSpPr>
+        <p:spPr>
+          <a:xfrm>
+            <a:off x="6995160" y="1234440"/>
+            <a:ext cx="4434840" cy="301752"/>
+          </a:xfrm>
+          <a:prstGeom prst="rect">
+            <a:avLst/>
+          </a:prstGeom>
+          <a:noFill/>
+          <a:ln/>
+        </p:spPr>
+        <p:txBody>
+          <a:bodyPr wrap="square" lIns="0" tIns="0" rIns="0" bIns="0" rtlCol="0" anchor="ctr"/>
+          <a:lstStyle/>
+          <a:p>
+            <a:pPr indent="0" marL="0">
+              <a:buNone/>
+            </a:pPr>
+            <a:r>
+              <a:rPr lang="en-US" sz="1400" b="1" dirty="0">
+                <a:solidFill>
+                  <a:srgbClr val="13233B"/>
+                </a:solidFill>
+                <a:latin typeface="Calibri" pitchFamily="34" charset="0"/>
+                <a:ea typeface="Calibri" pitchFamily="34" charset="-122"/>
+                <a:cs typeface="Calibri" pitchFamily="34" charset="-120"/>
+              </a:rPr>
+              <a:t>ACK-path bottleneck</a:t>
+            </a:r>
+            <a:endParaRPr lang="en-US" sz="1400" dirty="0"/>
+          </a:p>
+        </p:txBody>
+      </p:sp>
+      <p:sp>
+        <p:nvSpPr>
+          <p:cNvPr id="12" name="Text 10"/>
+          <p:cNvSpPr txBox="1"/>
+          <p:nvPr/>
+        </p:nvSpPr>
+        <p:spPr>
+          <a:xfrm>
+            <a:off x="6995160" y="1545336"/>
+            <a:ext cx="4434840" cy="475488"/>
+          </a:xfrm>
+          <a:prstGeom prst="rect">
+            <a:avLst/>
+          </a:prstGeom>
+          <a:noFill/>
+          <a:ln/>
+        </p:spPr>
+        <p:txBody>
+          <a:bodyPr wrap="square" lIns="0" tIns="0" rIns="0" bIns="0" rtlCol="0" anchor="ctr"/>
+          <a:lstStyle/>
+          <a:p>
+            <a:pPr indent="0" marL="0">
+              <a:buNone/>
+            </a:pPr>
+            <a:r>
+              <a:rPr lang="en-US" sz="1150" dirty="0">
+                <a:solidFill>
+                  <a:srgbClr val="3A4A5F"/>
+                </a:solidFill>
+                <a:latin typeface="Calibri" pitchFamily="34" charset="0"/>
+                <a:ea typeface="Calibri" pitchFamily="34" charset="-122"/>
+                <a:cs typeface="Calibri" pitchFamily="34" charset="-120"/>
+              </a:rPr>
+              <a:t>Parts 2–4 shaped the acknowledgement direction. 66 bytes/packet.</a:t>
+            </a:r>
+            <a:endParaRPr lang="en-US" sz="1150" dirty="0"/>
+          </a:p>
+        </p:txBody>
+      </p:sp>
+      <p:sp>
+        <p:nvSpPr>
+          <p:cNvPr id="13" name="Shape 11"/>
           <p:cNvSpPr/>
           <p:nvPr/>
         </p:nvSpPr>
         <p:spPr>
           <a:xfrm>
-            <a:off x="640080" y="4663440"/>
-            <a:ext cx="10881360" cy="749808"/>
+            <a:off x="640080" y="2203704"/>
+            <a:ext cx="5349240" cy="932688"/>
           </a:xfrm>
           <a:prstGeom prst="roundRect">
             <a:avLst>
-              <a:gd name="adj" fmla="val 8537"/>
+              <a:gd name="adj" fmla="val 7843"/>
             </a:avLst>
           </a:prstGeom>
           <a:solidFill>
-            <a:srgbClr val="2C3568"/>
+            <a:srgbClr val="EEF4F8"/>
+          </a:solidFill>
+          <a:ln w="9525">
+            <a:solidFill>
+              <a:srgbClr val="D8E4EC"/>
+            </a:solidFill>
+            <a:prstDash val="solid"/>
+          </a:ln>
+          <a:effectLst>
+            <a:outerShdw sx="100000" sy="100000" kx="0" ky="0" algn="bl" rotWithShape="0" blurRad="50800" dist="12700" dir="5400000">
+              <a:srgbClr val="BFCEDA">
+                <a:alpha val="35000"/>
+              </a:srgbClr>
+            </a:outerShdw>
+          </a:effectLst>
+        </p:spPr>
+      </p:sp>
+      <p:sp>
+        <p:nvSpPr>
+          <p:cNvPr id="14" name="Shape 12"/>
+          <p:cNvSpPr/>
+          <p:nvPr/>
+        </p:nvSpPr>
+        <p:spPr>
+          <a:xfrm>
+            <a:off x="868680" y="2450592"/>
+            <a:ext cx="420624" cy="420624"/>
+          </a:xfrm>
+          <a:prstGeom prst="ellipse">
+            <a:avLst/>
+          </a:prstGeom>
+          <a:solidFill>
+            <a:srgbClr val="065A82"/>
           </a:solidFill>
           <a:ln w="12700">
             <a:solidFill>
@@ -8275,20 +8333,171 @@
       </p:sp>
       <p:sp>
         <p:nvSpPr>
-          <p:cNvPr id="10" name="Shape 8"/>
+          <p:cNvPr id="15" name="Text 13"/>
+          <p:cNvSpPr txBox="1"/>
+          <p:nvPr/>
+        </p:nvSpPr>
+        <p:spPr>
+          <a:xfrm>
+            <a:off x="868680" y="2450592"/>
+            <a:ext cx="420624" cy="420624"/>
+          </a:xfrm>
+          <a:prstGeom prst="rect">
+            <a:avLst/>
+          </a:prstGeom>
+          <a:noFill/>
+          <a:ln/>
+        </p:spPr>
+        <p:txBody>
+          <a:bodyPr wrap="square" lIns="0" tIns="0" rIns="0" bIns="0" rtlCol="0" anchor="ctr"/>
+          <a:lstStyle/>
+          <a:p>
+            <a:pPr algn="ctr" indent="0" marL="0">
+              <a:buNone/>
+            </a:pPr>
+            <a:r>
+              <a:rPr lang="en-US" sz="1300" b="1" dirty="0">
+                <a:solidFill>
+                  <a:srgbClr val="FFFFFF"/>
+                </a:solidFill>
+                <a:latin typeface="Calibri" pitchFamily="34" charset="0"/>
+                <a:ea typeface="Calibri" pitchFamily="34" charset="-122"/>
+                <a:cs typeface="Calibri" pitchFamily="34" charset="-120"/>
+              </a:rPr>
+              <a:t>3</a:t>
+            </a:r>
+            <a:endParaRPr lang="en-US" sz="1300" dirty="0"/>
+          </a:p>
+        </p:txBody>
+      </p:sp>
+      <p:sp>
+        <p:nvSpPr>
+          <p:cNvPr id="16" name="Text 14"/>
+          <p:cNvSpPr txBox="1"/>
+          <p:nvPr/>
+        </p:nvSpPr>
+        <p:spPr>
+          <a:xfrm>
+            <a:off x="1417320" y="2295144"/>
+            <a:ext cx="4434840" cy="301752"/>
+          </a:xfrm>
+          <a:prstGeom prst="rect">
+            <a:avLst/>
+          </a:prstGeom>
+          <a:noFill/>
+          <a:ln/>
+        </p:spPr>
+        <p:txBody>
+          <a:bodyPr wrap="square" lIns="0" tIns="0" rIns="0" bIns="0" rtlCol="0" anchor="ctr"/>
+          <a:lstStyle/>
+          <a:p>
+            <a:pPr indent="0" marL="0">
+              <a:buNone/>
+            </a:pPr>
+            <a:r>
+              <a:rPr lang="en-US" sz="1400" b="1" dirty="0">
+                <a:solidFill>
+                  <a:srgbClr val="13233B"/>
+                </a:solidFill>
+                <a:latin typeface="Calibri" pitchFamily="34" charset="0"/>
+                <a:ea typeface="Calibri" pitchFamily="34" charset="-122"/>
+                <a:cs typeface="Calibri" pitchFamily="34" charset="-120"/>
+              </a:rPr>
+              <a:t>No RTT ever measured</a:t>
+            </a:r>
+            <a:endParaRPr lang="en-US" sz="1400" dirty="0"/>
+          </a:p>
+        </p:txBody>
+      </p:sp>
+      <p:sp>
+        <p:nvSpPr>
+          <p:cNvPr id="17" name="Text 15"/>
+          <p:cNvSpPr txBox="1"/>
+          <p:nvPr/>
+        </p:nvSpPr>
+        <p:spPr>
+          <a:xfrm>
+            <a:off x="1417320" y="2606040"/>
+            <a:ext cx="4434840" cy="475488"/>
+          </a:xfrm>
+          <a:prstGeom prst="rect">
+            <a:avLst/>
+          </a:prstGeom>
+          <a:noFill/>
+          <a:ln/>
+        </p:spPr>
+        <p:txBody>
+          <a:bodyPr wrap="square" lIns="0" tIns="0" rIns="0" bIns="0" rtlCol="0" anchor="ctr"/>
+          <a:lstStyle/>
+          <a:p>
+            <a:pPr indent="0" marL="0">
+              <a:buNone/>
+            </a:pPr>
+            <a:r>
+              <a:rPr lang="en-US" sz="1150" dirty="0">
+                <a:solidFill>
+                  <a:srgbClr val="3A4A5F"/>
+                </a:solidFill>
+                <a:latin typeface="Calibri" pitchFamily="34" charset="0"/>
+                <a:ea typeface="Calibri" pitchFamily="34" charset="-122"/>
+                <a:cs typeface="Calibri" pitchFamily="34" charset="-120"/>
+              </a:rPr>
+              <a:t>The reported 0.541 / 2.200 / 2.445 ms have no source anywhere in the repository.</a:t>
+            </a:r>
+            <a:endParaRPr lang="en-US" sz="1150" dirty="0"/>
+          </a:p>
+        </p:txBody>
+      </p:sp>
+      <p:sp>
+        <p:nvSpPr>
+          <p:cNvPr id="18" name="Shape 16"/>
           <p:cNvSpPr/>
           <p:nvPr/>
         </p:nvSpPr>
         <p:spPr>
           <a:xfrm>
-            <a:off x="914400" y="4846320"/>
-            <a:ext cx="384048" cy="384048"/>
+            <a:off x="6217920" y="2203704"/>
+            <a:ext cx="5349240" cy="932688"/>
+          </a:xfrm>
+          <a:prstGeom prst="roundRect">
+            <a:avLst>
+              <a:gd name="adj" fmla="val 7843"/>
+            </a:avLst>
+          </a:prstGeom>
+          <a:solidFill>
+            <a:srgbClr val="EEF4F8"/>
+          </a:solidFill>
+          <a:ln w="9525">
+            <a:solidFill>
+              <a:srgbClr val="D8E4EC"/>
+            </a:solidFill>
+            <a:prstDash val="solid"/>
+          </a:ln>
+          <a:effectLst>
+            <a:outerShdw sx="100000" sy="100000" kx="0" ky="0" algn="bl" rotWithShape="0" blurRad="50800" dist="12700" dir="5400000">
+              <a:srgbClr val="BFCEDA">
+                <a:alpha val="35000"/>
+              </a:srgbClr>
+            </a:outerShdw>
+          </a:effectLst>
+        </p:spPr>
+      </p:sp>
+      <p:sp>
+        <p:nvSpPr>
+          <p:cNvPr id="19" name="Shape 17"/>
+          <p:cNvSpPr/>
+          <p:nvPr/>
+        </p:nvSpPr>
+        <p:spPr>
+          <a:xfrm>
+            <a:off x="6446520" y="2450592"/>
+            <a:ext cx="420624" cy="420624"/>
           </a:xfrm>
           <a:prstGeom prst="ellipse">
             <a:avLst/>
           </a:prstGeom>
           <a:solidFill>
-            <a:srgbClr val="1C7293"/>
+            <a:srgbClr val="065A82"/>
           </a:solidFill>
           <a:ln w="12700">
             <a:solidFill>
@@ -8300,14 +8509,14 @@
       </p:sp>
       <p:sp>
         <p:nvSpPr>
-          <p:cNvPr id="11" name="Text 9"/>
-          <p:cNvSpPr txBox="1"/>
-          <p:nvPr/>
-        </p:nvSpPr>
-        <p:spPr>
-          <a:xfrm>
-            <a:off x="914400" y="4846320"/>
-            <a:ext cx="384048" cy="384048"/>
+          <p:cNvPr id="20" name="Text 18"/>
+          <p:cNvSpPr txBox="1"/>
+          <p:nvPr/>
+        </p:nvSpPr>
+        <p:spPr>
+          <a:xfrm>
+            <a:off x="6446520" y="2450592"/>
+            <a:ext cx="420624" cy="420624"/>
           </a:xfrm>
           <a:prstGeom prst="rect">
             <a:avLst/>
@@ -8331,7 +8540,7 @@
                 <a:ea typeface="Calibri" pitchFamily="34" charset="-122"/>
                 <a:cs typeface="Calibri" pitchFamily="34" charset="-120"/>
               </a:rPr>
-              <a:t>2</a:t>
+              <a:t>4</a:t>
             </a:r>
             <a:endParaRPr lang="en-US" sz="1300" dirty="0"/>
           </a:p>
@@ -8339,100 +8548,132 @@
       </p:sp>
       <p:sp>
         <p:nvSpPr>
-          <p:cNvPr id="12" name="Text 10"/>
-          <p:cNvSpPr txBox="1"/>
-          <p:nvPr/>
-        </p:nvSpPr>
-        <p:spPr>
-          <a:xfrm>
-            <a:off x="1508760" y="4736592"/>
-            <a:ext cx="10058400" cy="329184"/>
-          </a:xfrm>
-          <a:prstGeom prst="rect">
-            <a:avLst/>
-          </a:prstGeom>
-          <a:noFill/>
-          <a:ln/>
-        </p:spPr>
-        <p:txBody>
-          <a:bodyPr wrap="square" lIns="0" tIns="0" rIns="0" bIns="0" rtlCol="0" anchor="ctr"/>
-          <a:lstStyle/>
-          <a:p>
-            <a:pPr indent="0" marL="0">
-              <a:buNone/>
-            </a:pPr>
-            <a:r>
-              <a:rPr lang="en-US" sz="1500" b="1" dirty="0">
-                <a:solidFill>
-                  <a:srgbClr val="FFFFFF"/>
-                </a:solidFill>
-                <a:latin typeface="Calibri" pitchFamily="34" charset="0"/>
-                <a:ea typeface="Calibri" pitchFamily="34" charset="-122"/>
-                <a:cs typeface="Calibri" pitchFamily="34" charset="-120"/>
-              </a:rPr>
-              <a:t>Tuning its parameters is not</a:t>
-            </a:r>
-            <a:endParaRPr lang="en-US" sz="1500" dirty="0"/>
-          </a:p>
-        </p:txBody>
-      </p:sp>
-      <p:sp>
-        <p:nvSpPr>
-          <p:cNvPr id="13" name="Text 11"/>
-          <p:cNvSpPr txBox="1"/>
-          <p:nvPr/>
-        </p:nvSpPr>
-        <p:spPr>
-          <a:xfrm>
-            <a:off x="1508760" y="5065776"/>
-            <a:ext cx="10058400" cy="301752"/>
-          </a:xfrm>
-          <a:prstGeom prst="rect">
-            <a:avLst/>
-          </a:prstGeom>
-          <a:noFill/>
-          <a:ln/>
-        </p:spPr>
-        <p:txBody>
-          <a:bodyPr wrap="square" lIns="0" tIns="0" rIns="0" bIns="0" rtlCol="0" anchor="ctr"/>
-          <a:lstStyle/>
-          <a:p>
-            <a:pPr indent="0" marL="0">
-              <a:buNone/>
-            </a:pPr>
-            <a:r>
-              <a:rPr lang="en-US" sz="1250" dirty="0">
-                <a:solidFill>
-                  <a:srgbClr val="A9C3DE"/>
-                </a:solidFill>
-                <a:latin typeface="Calibri" pitchFamily="34" charset="0"/>
-                <a:ea typeface="Calibri" pitchFamily="34" charset="-122"/>
-                <a:cs typeface="Calibri" pitchFamily="34" charset="-120"/>
-              </a:rPr>
-              <a:t>Backlog -9.6% under steady load, nothing under a changing one; CAKE beats it outright</a:t>
-            </a:r>
-            <a:endParaRPr lang="en-US" sz="1250" dirty="0"/>
-          </a:p>
-        </p:txBody>
-      </p:sp>
-      <p:sp>
-        <p:nvSpPr>
-          <p:cNvPr id="14" name="Shape 12"/>
+          <p:cNvPr id="21" name="Text 19"/>
+          <p:cNvSpPr txBox="1"/>
+          <p:nvPr/>
+        </p:nvSpPr>
+        <p:spPr>
+          <a:xfrm>
+            <a:off x="6995160" y="2295144"/>
+            <a:ext cx="4434840" cy="301752"/>
+          </a:xfrm>
+          <a:prstGeom prst="rect">
+            <a:avLst/>
+          </a:prstGeom>
+          <a:noFill/>
+          <a:ln/>
+        </p:spPr>
+        <p:txBody>
+          <a:bodyPr wrap="square" lIns="0" tIns="0" rIns="0" bIns="0" rtlCol="0" anchor="ctr"/>
+          <a:lstStyle/>
+          <a:p>
+            <a:pPr indent="0" marL="0">
+              <a:buNone/>
+            </a:pPr>
+            <a:r>
+              <a:rPr lang="en-US" sz="1400" b="1" dirty="0">
+                <a:solidFill>
+                  <a:srgbClr val="13233B"/>
+                </a:solidFill>
+                <a:latin typeface="Calibri" pitchFamily="34" charset="0"/>
+                <a:ea typeface="Calibri" pitchFamily="34" charset="-122"/>
+                <a:cs typeface="Calibri" pitchFamily="34" charset="-120"/>
+              </a:rPr>
+              <a:t>eBPF telemetry read zero</a:t>
+            </a:r>
+            <a:endParaRPr lang="en-US" sz="1400" dirty="0"/>
+          </a:p>
+        </p:txBody>
+      </p:sp>
+      <p:sp>
+        <p:nvSpPr>
+          <p:cNvPr id="22" name="Text 20"/>
+          <p:cNvSpPr txBox="1"/>
+          <p:nvPr/>
+        </p:nvSpPr>
+        <p:spPr>
+          <a:xfrm>
+            <a:off x="6995160" y="2606040"/>
+            <a:ext cx="4434840" cy="475488"/>
+          </a:xfrm>
+          <a:prstGeom prst="rect">
+            <a:avLst/>
+          </a:prstGeom>
+          <a:noFill/>
+          <a:ln/>
+        </p:spPr>
+        <p:txBody>
+          <a:bodyPr wrap="square" lIns="0" tIns="0" rIns="0" bIns="0" rtlCol="0" anchor="ctr"/>
+          <a:lstStyle/>
+          <a:p>
+            <a:pPr indent="0" marL="0">
+              <a:buNone/>
+            </a:pPr>
+            <a:r>
+              <a:rPr lang="en-US" sz="1150" dirty="0">
+                <a:solidFill>
+                  <a:srgbClr val="3A4A5F"/>
+                </a:solidFill>
+                <a:latin typeface="Calibri" pitchFamily="34" charset="0"/>
+                <a:ea typeface="Calibri" pitchFamily="34" charset="-122"/>
+                <a:cs typeface="Calibri" pitchFamily="34" charset="-120"/>
+              </a:rPr>
+              <a:t>Three decode bugs: hex strings into a bare except, wrong struct offsets, CLOCK_REALTIME vs CLOCK_MONOTONIC (age = 56.8 years).</a:t>
+            </a:r>
+            <a:endParaRPr lang="en-US" sz="1150" dirty="0"/>
+          </a:p>
+        </p:txBody>
+      </p:sp>
+      <p:sp>
+        <p:nvSpPr>
+          <p:cNvPr id="23" name="Shape 21"/>
           <p:cNvSpPr/>
           <p:nvPr/>
         </p:nvSpPr>
         <p:spPr>
           <a:xfrm>
-            <a:off x="640080" y="5532120"/>
-            <a:ext cx="10881360" cy="749808"/>
+            <a:off x="640080" y="3264408"/>
+            <a:ext cx="5349240" cy="932688"/>
           </a:xfrm>
           <a:prstGeom prst="roundRect">
             <a:avLst>
-              <a:gd name="adj" fmla="val 8537"/>
+              <a:gd name="adj" fmla="val 7843"/>
             </a:avLst>
           </a:prstGeom>
           <a:solidFill>
-            <a:srgbClr val="2C3568"/>
+            <a:srgbClr val="EEF4F8"/>
+          </a:solidFill>
+          <a:ln w="9525">
+            <a:solidFill>
+              <a:srgbClr val="D8E4EC"/>
+            </a:solidFill>
+            <a:prstDash val="solid"/>
+          </a:ln>
+          <a:effectLst>
+            <a:outerShdw sx="100000" sy="100000" kx="0" ky="0" algn="bl" rotWithShape="0" blurRad="50800" dist="12700" dir="5400000">
+              <a:srgbClr val="BFCEDA">
+                <a:alpha val="35000"/>
+              </a:srgbClr>
+            </a:outerShdw>
+          </a:effectLst>
+        </p:spPr>
+      </p:sp>
+      <p:sp>
+        <p:nvSpPr>
+          <p:cNvPr id="24" name="Shape 22"/>
+          <p:cNvSpPr/>
+          <p:nvPr/>
+        </p:nvSpPr>
+        <p:spPr>
+          <a:xfrm>
+            <a:off x="868680" y="3511296"/>
+            <a:ext cx="420624" cy="420624"/>
+          </a:xfrm>
+          <a:prstGeom prst="ellipse">
+            <a:avLst/>
+          </a:prstGeom>
+          <a:solidFill>
+            <a:srgbClr val="065A82"/>
           </a:solidFill>
           <a:ln w="12700">
             <a:solidFill>
@@ -8444,20 +8685,171 @@
       </p:sp>
       <p:sp>
         <p:nvSpPr>
-          <p:cNvPr id="15" name="Shape 13"/>
+          <p:cNvPr id="25" name="Text 23"/>
+          <p:cNvSpPr txBox="1"/>
+          <p:nvPr/>
+        </p:nvSpPr>
+        <p:spPr>
+          <a:xfrm>
+            <a:off x="868680" y="3511296"/>
+            <a:ext cx="420624" cy="420624"/>
+          </a:xfrm>
+          <a:prstGeom prst="rect">
+            <a:avLst/>
+          </a:prstGeom>
+          <a:noFill/>
+          <a:ln/>
+        </p:spPr>
+        <p:txBody>
+          <a:bodyPr wrap="square" lIns="0" tIns="0" rIns="0" bIns="0" rtlCol="0" anchor="ctr"/>
+          <a:lstStyle/>
+          <a:p>
+            <a:pPr algn="ctr" indent="0" marL="0">
+              <a:buNone/>
+            </a:pPr>
+            <a:r>
+              <a:rPr lang="en-US" sz="1300" b="1" dirty="0">
+                <a:solidFill>
+                  <a:srgbClr val="FFFFFF"/>
+                </a:solidFill>
+                <a:latin typeface="Calibri" pitchFamily="34" charset="0"/>
+                <a:ea typeface="Calibri" pitchFamily="34" charset="-122"/>
+                <a:cs typeface="Calibri" pitchFamily="34" charset="-120"/>
+              </a:rPr>
+              <a:t>5</a:t>
+            </a:r>
+            <a:endParaRPr lang="en-US" sz="1300" dirty="0"/>
+          </a:p>
+        </p:txBody>
+      </p:sp>
+      <p:sp>
+        <p:nvSpPr>
+          <p:cNvPr id="26" name="Text 24"/>
+          <p:cNvSpPr txBox="1"/>
+          <p:nvPr/>
+        </p:nvSpPr>
+        <p:spPr>
+          <a:xfrm>
+            <a:off x="1417320" y="3355848"/>
+            <a:ext cx="4434840" cy="301752"/>
+          </a:xfrm>
+          <a:prstGeom prst="rect">
+            <a:avLst/>
+          </a:prstGeom>
+          <a:noFill/>
+          <a:ln/>
+        </p:spPr>
+        <p:txBody>
+          <a:bodyPr wrap="square" lIns="0" tIns="0" rIns="0" bIns="0" rtlCol="0" anchor="ctr"/>
+          <a:lstStyle/>
+          <a:p>
+            <a:pPr indent="0" marL="0">
+              <a:buNone/>
+            </a:pPr>
+            <a:r>
+              <a:rPr lang="en-US" sz="1400" b="1" dirty="0">
+                <a:solidFill>
+                  <a:srgbClr val="13233B"/>
+                </a:solidFill>
+                <a:latin typeface="Calibri" pitchFamily="34" charset="0"/>
+                <a:ea typeface="Calibri" pitchFamily="34" charset="-122"/>
+                <a:cs typeface="Calibri" pitchFamily="34" charset="-120"/>
+              </a:rPr>
+              <a:t>Elephant threshold unreachable</a:t>
+            </a:r>
+            <a:endParaRPr lang="en-US" sz="1400" dirty="0"/>
+          </a:p>
+        </p:txBody>
+      </p:sp>
+      <p:sp>
+        <p:nvSpPr>
+          <p:cNvPr id="27" name="Text 25"/>
+          <p:cNvSpPr txBox="1"/>
+          <p:nvPr/>
+        </p:nvSpPr>
+        <p:spPr>
+          <a:xfrm>
+            <a:off x="1417320" y="3666744"/>
+            <a:ext cx="4434840" cy="475488"/>
+          </a:xfrm>
+          <a:prstGeom prst="rect">
+            <a:avLst/>
+          </a:prstGeom>
+          <a:noFill/>
+          <a:ln/>
+        </p:spPr>
+        <p:txBody>
+          <a:bodyPr wrap="square" lIns="0" tIns="0" rIns="0" bIns="0" rtlCol="0" anchor="ctr"/>
+          <a:lstStyle/>
+          <a:p>
+            <a:pPr indent="0" marL="0">
+              <a:buNone/>
+            </a:pPr>
+            <a:r>
+              <a:rPr lang="en-US" sz="1150" dirty="0">
+                <a:solidFill>
+                  <a:srgbClr val="3A4A5F"/>
+                </a:solidFill>
+                <a:latin typeface="Calibri" pitchFamily="34" charset="0"/>
+                <a:ea typeface="Calibri" pitchFamily="34" charset="-122"/>
+                <a:cs typeface="Calibri" pitchFamily="34" charset="-120"/>
+              </a:rPr>
+              <a:t>10 MB threshold, 9.38 MB maximum possible flow share. The classifier could never fire.</a:t>
+            </a:r>
+            <a:endParaRPr lang="en-US" sz="1150" dirty="0"/>
+          </a:p>
+        </p:txBody>
+      </p:sp>
+      <p:sp>
+        <p:nvSpPr>
+          <p:cNvPr id="28" name="Shape 26"/>
           <p:cNvSpPr/>
           <p:nvPr/>
         </p:nvSpPr>
         <p:spPr>
           <a:xfrm>
-            <a:off x="914400" y="5715000"/>
-            <a:ext cx="384048" cy="384048"/>
+            <a:off x="6217920" y="3264408"/>
+            <a:ext cx="5349240" cy="932688"/>
+          </a:xfrm>
+          <a:prstGeom prst="roundRect">
+            <a:avLst>
+              <a:gd name="adj" fmla="val 7843"/>
+            </a:avLst>
+          </a:prstGeom>
+          <a:solidFill>
+            <a:srgbClr val="EEF4F8"/>
+          </a:solidFill>
+          <a:ln w="9525">
+            <a:solidFill>
+              <a:srgbClr val="D8E4EC"/>
+            </a:solidFill>
+            <a:prstDash val="solid"/>
+          </a:ln>
+          <a:effectLst>
+            <a:outerShdw sx="100000" sy="100000" kx="0" ky="0" algn="bl" rotWithShape="0" blurRad="50800" dist="12700" dir="5400000">
+              <a:srgbClr val="BFCEDA">
+                <a:alpha val="35000"/>
+              </a:srgbClr>
+            </a:outerShdw>
+          </a:effectLst>
+        </p:spPr>
+      </p:sp>
+      <p:sp>
+        <p:nvSpPr>
+          <p:cNvPr id="29" name="Shape 27"/>
+          <p:cNvSpPr/>
+          <p:nvPr/>
+        </p:nvSpPr>
+        <p:spPr>
+          <a:xfrm>
+            <a:off x="6446520" y="3511296"/>
+            <a:ext cx="420624" cy="420624"/>
           </a:xfrm>
           <a:prstGeom prst="ellipse">
             <a:avLst/>
           </a:prstGeom>
           <a:solidFill>
-            <a:srgbClr val="1C7293"/>
+            <a:srgbClr val="065A82"/>
           </a:solidFill>
           <a:ln w="12700">
             <a:solidFill>
@@ -8469,14 +8861,14 @@
       </p:sp>
       <p:sp>
         <p:nvSpPr>
-          <p:cNvPr id="16" name="Text 14"/>
-          <p:cNvSpPr txBox="1"/>
-          <p:nvPr/>
-        </p:nvSpPr>
-        <p:spPr>
-          <a:xfrm>
-            <a:off x="914400" y="5715000"/>
-            <a:ext cx="384048" cy="384048"/>
+          <p:cNvPr id="30" name="Text 28"/>
+          <p:cNvSpPr txBox="1"/>
+          <p:nvPr/>
+        </p:nvSpPr>
+        <p:spPr>
+          <a:xfrm>
+            <a:off x="6446520" y="3511296"/>
+            <a:ext cx="420624" cy="420624"/>
           </a:xfrm>
           <a:prstGeom prst="rect">
             <a:avLst/>
@@ -8500,7 +8892,7 @@
                 <a:ea typeface="Calibri" pitchFamily="34" charset="-122"/>
                 <a:cs typeface="Calibri" pitchFamily="34" charset="-120"/>
               </a:rPr>
-              <a:t>3</a:t>
+              <a:t>6</a:t>
             </a:r>
             <a:endParaRPr lang="en-US" sz="1300" dirty="0"/>
           </a:p>
@@ -8508,30 +8900,167 @@
       </p:sp>
       <p:sp>
         <p:nvSpPr>
-          <p:cNvPr id="17" name="Text 15"/>
-          <p:cNvSpPr txBox="1"/>
-          <p:nvPr/>
-        </p:nvSpPr>
-        <p:spPr>
-          <a:xfrm>
-            <a:off x="1508760" y="5605272"/>
-            <a:ext cx="10058400" cy="329184"/>
-          </a:xfrm>
-          <a:prstGeom prst="rect">
-            <a:avLst/>
-          </a:prstGeom>
-          <a:noFill/>
-          <a:ln/>
-        </p:spPr>
-        <p:txBody>
-          <a:bodyPr wrap="square" lIns="0" tIns="0" rIns="0" bIns="0" rtlCol="0" anchor="ctr"/>
-          <a:lstStyle/>
-          <a:p>
-            <a:pPr indent="0" marL="0">
-              <a:buNone/>
-            </a:pPr>
-            <a:r>
-              <a:rPr lang="en-US" sz="1500" b="1" dirty="0">
+          <p:cNvPr id="31" name="Text 29"/>
+          <p:cNvSpPr txBox="1"/>
+          <p:nvPr/>
+        </p:nvSpPr>
+        <p:spPr>
+          <a:xfrm>
+            <a:off x="6995160" y="3355848"/>
+            <a:ext cx="4434840" cy="301752"/>
+          </a:xfrm>
+          <a:prstGeom prst="rect">
+            <a:avLst/>
+          </a:prstGeom>
+          <a:noFill/>
+          <a:ln/>
+        </p:spPr>
+        <p:txBody>
+          <a:bodyPr wrap="square" lIns="0" tIns="0" rIns="0" bIns="0" rtlCol="0" anchor="ctr"/>
+          <a:lstStyle/>
+          <a:p>
+            <a:pPr indent="0" marL="0">
+              <a:buNone/>
+            </a:pPr>
+            <a:r>
+              <a:rPr lang="en-US" sz="1400" b="1" dirty="0">
+                <a:solidFill>
+                  <a:srgbClr val="13233B"/>
+                </a:solidFill>
+                <a:latin typeface="Calibri" pitchFamily="34" charset="0"/>
+                <a:ea typeface="Calibri" pitchFamily="34" charset="-122"/>
+                <a:cs typeface="Calibri" pitchFamily="34" charset="-120"/>
+              </a:rPr>
+              <a:t>Prediction had no effect</a:t>
+            </a:r>
+            <a:endParaRPr lang="en-US" sz="1400" dirty="0"/>
+          </a:p>
+        </p:txBody>
+      </p:sp>
+      <p:sp>
+        <p:nvSpPr>
+          <p:cNvPr id="32" name="Text 30"/>
+          <p:cNvSpPr txBox="1"/>
+          <p:nvPr/>
+        </p:nvSpPr>
+        <p:spPr>
+          <a:xfrm>
+            <a:off x="6995160" y="3666744"/>
+            <a:ext cx="4434840" cy="475488"/>
+          </a:xfrm>
+          <a:prstGeom prst="rect">
+            <a:avLst/>
+          </a:prstGeom>
+          <a:noFill/>
+          <a:ln/>
+        </p:spPr>
+        <p:txBody>
+          <a:bodyPr wrap="square" lIns="0" tIns="0" rIns="0" bIns="0" rtlCol="0" anchor="ctr"/>
+          <a:lstStyle/>
+          <a:p>
+            <a:pPr indent="0" marL="0">
+              <a:buNone/>
+            </a:pPr>
+            <a:r>
+              <a:rPr lang="en-US" sz="1150" dirty="0">
+                <a:solidFill>
+                  <a:srgbClr val="3A4A5F"/>
+                </a:solidFill>
+                <a:latin typeface="Calibri" pitchFamily="34" charset="0"/>
+                <a:ea typeface="Calibri" pitchFamily="34" charset="-122"/>
+                <a:cs typeface="Calibri" pitchFamily="34" charset="-120"/>
+              </a:rPr>
+              <a:t>All 375 logged adjustments applied the identical action.</a:t>
+            </a:r>
+            <a:endParaRPr lang="en-US" sz="1150" dirty="0"/>
+          </a:p>
+        </p:txBody>
+      </p:sp>
+      <p:sp>
+        <p:nvSpPr>
+          <p:cNvPr id="33" name="Shape 31"/>
+          <p:cNvSpPr/>
+          <p:nvPr/>
+        </p:nvSpPr>
+        <p:spPr>
+          <a:xfrm>
+            <a:off x="640080" y="4325112"/>
+            <a:ext cx="10881360" cy="932688"/>
+          </a:xfrm>
+          <a:prstGeom prst="roundRect">
+            <a:avLst>
+              <a:gd name="adj" fmla="val 7843"/>
+            </a:avLst>
+          </a:prstGeom>
+          <a:solidFill>
+            <a:srgbClr val="FBEEF0"/>
+          </a:solidFill>
+          <a:ln w="9525">
+            <a:solidFill>
+              <a:srgbClr val="D8E4EC"/>
+            </a:solidFill>
+            <a:prstDash val="solid"/>
+          </a:ln>
+          <a:effectLst>
+            <a:outerShdw sx="100000" sy="100000" kx="0" ky="0" algn="bl" rotWithShape="0" blurRad="50800" dist="12700" dir="5400000">
+              <a:srgbClr val="BFCEDA">
+                <a:alpha val="35000"/>
+              </a:srgbClr>
+            </a:outerShdw>
+          </a:effectLst>
+        </p:spPr>
+      </p:sp>
+      <p:sp>
+        <p:nvSpPr>
+          <p:cNvPr id="34" name="Shape 32"/>
+          <p:cNvSpPr/>
+          <p:nvPr/>
+        </p:nvSpPr>
+        <p:spPr>
+          <a:xfrm>
+            <a:off x="896112" y="4572000"/>
+            <a:ext cx="420624" cy="420624"/>
+          </a:xfrm>
+          <a:prstGeom prst="ellipse">
+            <a:avLst/>
+          </a:prstGeom>
+          <a:solidFill>
+            <a:srgbClr val="B23A48"/>
+          </a:solidFill>
+          <a:ln w="12700">
+            <a:solidFill>
+              <a:srgbClr val="333333"/>
+            </a:solidFill>
+            <a:prstDash val="solid"/>
+          </a:ln>
+        </p:spPr>
+      </p:sp>
+      <p:sp>
+        <p:nvSpPr>
+          <p:cNvPr id="35" name="Text 33"/>
+          <p:cNvSpPr txBox="1"/>
+          <p:nvPr/>
+        </p:nvSpPr>
+        <p:spPr>
+          <a:xfrm>
+            <a:off x="896112" y="4572000"/>
+            <a:ext cx="420624" cy="420624"/>
+          </a:xfrm>
+          <a:prstGeom prst="rect">
+            <a:avLst/>
+          </a:prstGeom>
+          <a:noFill/>
+          <a:ln/>
+        </p:spPr>
+        <p:txBody>
+          <a:bodyPr wrap="square" lIns="0" tIns="0" rIns="0" bIns="0" rtlCol="0" anchor="ctr"/>
+          <a:lstStyle/>
+          <a:p>
+            <a:pPr algn="ctr" indent="0" marL="0">
+              <a:buNone/>
+            </a:pPr>
+            <a:r>
+              <a:rPr lang="en-US" sz="1300" b="1" dirty="0">
                 <a:solidFill>
                   <a:srgbClr val="FFFFFF"/>
                 </a:solidFill>
@@ -8539,61 +9068,100 @@
                 <a:ea typeface="Calibri" pitchFamily="34" charset="-122"/>
                 <a:cs typeface="Calibri" pitchFamily="34" charset="-120"/>
               </a:rPr>
-              <a:t>The methodology is the contribution</a:t>
-            </a:r>
-            <a:endParaRPr lang="en-US" sz="1500" dirty="0"/>
-          </a:p>
-        </p:txBody>
-      </p:sp>
-      <p:sp>
-        <p:nvSpPr>
-          <p:cNvPr id="18" name="Text 16"/>
-          <p:cNvSpPr txBox="1"/>
-          <p:nvPr/>
-        </p:nvSpPr>
-        <p:spPr>
-          <a:xfrm>
-            <a:off x="1508760" y="5934456"/>
-            <a:ext cx="10058400" cy="301752"/>
-          </a:xfrm>
-          <a:prstGeom prst="rect">
-            <a:avLst/>
-          </a:prstGeom>
-          <a:noFill/>
-          <a:ln/>
-        </p:spPr>
-        <p:txBody>
-          <a:bodyPr wrap="square" lIns="0" tIns="0" rIns="0" bIns="0" rtlCol="0" anchor="ctr"/>
-          <a:lstStyle/>
-          <a:p>
-            <a:pPr indent="0" marL="0">
-              <a:buNone/>
-            </a:pPr>
-            <a:r>
-              <a:rPr lang="en-US" sz="1250" dirty="0">
-                <a:solidFill>
-                  <a:srgbClr val="A9C3DE"/>
-                </a:solidFill>
-                <a:latin typeface="Calibri" pitchFamily="34" charset="0"/>
-                <a:ea typeface="Calibri" pitchFamily="34" charset="-122"/>
-                <a:cs typeface="Calibri" pitchFamily="34" charset="-120"/>
-              </a:rPr>
-              <a:t>Seven silent failure classes, the invariants that catch them, and a released artefact</a:t>
-            </a:r>
-            <a:endParaRPr lang="en-US" sz="1250" dirty="0"/>
-          </a:p>
-        </p:txBody>
-      </p:sp>
-      <p:sp>
-        <p:nvSpPr>
-          <p:cNvPr id="19" name="Text 17"/>
-          <p:cNvSpPr txBox="1"/>
-          <p:nvPr/>
-        </p:nvSpPr>
-        <p:spPr>
-          <a:xfrm>
-            <a:off x="640080" y="6400800"/>
-            <a:ext cx="10881360" cy="320040"/>
+              <a:t>7</a:t>
+            </a:r>
+            <a:endParaRPr lang="en-US" sz="1300" dirty="0"/>
+          </a:p>
+        </p:txBody>
+      </p:sp>
+      <p:sp>
+        <p:nvSpPr>
+          <p:cNvPr id="36" name="Text 34"/>
+          <p:cNvSpPr txBox="1"/>
+          <p:nvPr/>
+        </p:nvSpPr>
+        <p:spPr>
+          <a:xfrm>
+            <a:off x="1481328" y="4416552"/>
+            <a:ext cx="9966960" cy="301752"/>
+          </a:xfrm>
+          <a:prstGeom prst="rect">
+            <a:avLst/>
+          </a:prstGeom>
+          <a:noFill/>
+          <a:ln/>
+        </p:spPr>
+        <p:txBody>
+          <a:bodyPr wrap="square" lIns="0" tIns="0" rIns="0" bIns="0" rtlCol="0" anchor="ctr"/>
+          <a:lstStyle/>
+          <a:p>
+            <a:pPr indent="0" marL="0">
+              <a:buNone/>
+            </a:pPr>
+            <a:r>
+              <a:rPr lang="en-US" sz="1400" b="1" dirty="0">
+                <a:solidFill>
+                  <a:srgbClr val="B23A48"/>
+                </a:solidFill>
+                <a:latin typeface="Calibri" pitchFamily="34" charset="0"/>
+                <a:ea typeface="Calibri" pitchFamily="34" charset="-122"/>
+                <a:cs typeface="Calibri" pitchFamily="34" charset="-120"/>
+              </a:rPr>
+              <a:t>Headline figures hardcoded</a:t>
+            </a:r>
+            <a:endParaRPr lang="en-US" sz="1400" dirty="0"/>
+          </a:p>
+        </p:txBody>
+      </p:sp>
+      <p:sp>
+        <p:nvSpPr>
+          <p:cNvPr id="37" name="Text 35"/>
+          <p:cNvSpPr txBox="1"/>
+          <p:nvPr/>
+        </p:nvSpPr>
+        <p:spPr>
+          <a:xfrm>
+            <a:off x="1481328" y="4727448"/>
+            <a:ext cx="9966960" cy="457200"/>
+          </a:xfrm>
+          <a:prstGeom prst="rect">
+            <a:avLst/>
+          </a:prstGeom>
+          <a:noFill/>
+          <a:ln/>
+        </p:spPr>
+        <p:txBody>
+          <a:bodyPr wrap="square" lIns="0" tIns="0" rIns="0" bIns="0" rtlCol="0" anchor="ctr"/>
+          <a:lstStyle/>
+          <a:p>
+            <a:pPr indent="0" marL="0">
+              <a:buNone/>
+            </a:pPr>
+            <a:r>
+              <a:rPr lang="en-US" sz="1200" dirty="0">
+                <a:solidFill>
+                  <a:srgbClr val="3A4A5F"/>
+                </a:solidFill>
+                <a:latin typeface="Calibri" pitchFamily="34" charset="0"/>
+                <a:ea typeface="Calibri" pitchFamily="34" charset="-122"/>
+                <a:cs typeface="Calibri" pitchFamily="34" charset="-120"/>
+              </a:rPr>
+              <a:t>"12× faster" is the literal array [120, 70, 60, 5]. No stabilisation time was ever measured.</a:t>
+            </a:r>
+            <a:endParaRPr lang="en-US" sz="1200" dirty="0"/>
+          </a:p>
+        </p:txBody>
+      </p:sp>
+      <p:sp>
+        <p:nvSpPr>
+          <p:cNvPr id="38" name="Text 36"/>
+          <p:cNvSpPr txBox="1"/>
+          <p:nvPr/>
+        </p:nvSpPr>
+        <p:spPr>
+          <a:xfrm>
+            <a:off x="640080" y="5852160"/>
+            <a:ext cx="10881360" cy="365760"/>
           </a:xfrm>
           <a:prstGeom prst="rect">
             <a:avLst/>
@@ -8609,17 +9177,17 @@
               <a:buNone/>
             </a:pPr>
             <a:r>
-              <a:rPr lang="en-US" sz="1200" dirty="0">
-                <a:solidFill>
-                  <a:srgbClr val="7F97B8"/>
-                </a:solidFill>
-                <a:latin typeface="Calibri" pitchFamily="34" charset="0"/>
-                <a:ea typeface="Calibri" pitchFamily="34" charset="-122"/>
-                <a:cs typeface="Calibri" pitchFamily="34" charset="-120"/>
-              </a:rPr>
-              <a:t>github.com/Amritha902/ccn-linux-qdisc-study   ·   every number in the paper generated from the logs</a:t>
-            </a:r>
-            <a:endParaRPr lang="en-US" sz="1200" dirty="0"/>
+              <a:rPr lang="en-US" sz="1300" i="1" dirty="0">
+                <a:solidFill>
+                  <a:srgbClr val="7B8A9C"/>
+                </a:solidFill>
+                <a:latin typeface="Calibri" pitchFamily="34" charset="0"/>
+                <a:ea typeface="Calibri" pitchFamily="34" charset="-122"/>
+                <a:cs typeface="Calibri" pitchFamily="34" charset="-120"/>
+              </a:rPr>
+              <a:t>All seven are pinned by regression tests that fail against the original behaviour.</a:t>
+            </a:r>
+            <a:endParaRPr lang="en-US" sz="1300" dirty="0"/>
           </a:p>
         </p:txBody>
       </p:sp>
@@ -9446,6 +10014,2120 @@
               <a:t>We built the controller, built the apparatus to test it honestly, and measured. The answer matters either way.</a:t>
             </a:r>
             <a:endParaRPr lang="en-US" sz="1400" dirty="0"/>
+          </a:p>
+        </p:txBody>
+      </p:sp>
+    </p:spTree>
+  </p:cSld>
+  <p:clrMapOvr>
+    <a:masterClrMapping/>
+  </p:clrMapOvr>
+</p:sld>
+</file>
+
+<file path=ppt/slides/slide20.xml><?xml version="1.0" encoding="utf-8"?>
+<p:sld xmlns:a="http://schemas.openxmlformats.org/drawingml/2006/main" xmlns:r="http://schemas.openxmlformats.org/officeDocument/2006/relationships" xmlns:p="http://schemas.openxmlformats.org/presentationml/2006/main">
+  <p:cSld name="Slide 20">
+    <p:bg>
+      <p:bgPr>
+        <a:solidFill>
+          <a:srgbClr val="FFFFFF"/>
+        </a:solidFill>
+      </p:bgPr>
+    </p:bg>
+    <p:spTree>
+      <p:nvGrpSpPr>
+        <p:cNvPr id="1" name=""/>
+        <p:cNvGrpSpPr/>
+        <p:nvPr/>
+      </p:nvGrpSpPr>
+      <p:grpSpPr>
+        <a:xfrm>
+          <a:off x="0" y="0"/>
+          <a:ext cx="0" cy="0"/>
+          <a:chOff x="0" y="0"/>
+          <a:chExt cx="0" cy="0"/>
+        </a:xfrm>
+      </p:grpSpPr>
+      <p:sp>
+        <p:nvSpPr>
+          <p:cNvPr id="2" name="Text 0"/>
+          <p:cNvSpPr txBox="1"/>
+          <p:nvPr/>
+        </p:nvSpPr>
+        <p:spPr>
+          <a:xfrm>
+            <a:off x="640080" y="411480"/>
+            <a:ext cx="10881360" cy="731520"/>
+          </a:xfrm>
+          <a:prstGeom prst="rect">
+            <a:avLst/>
+          </a:prstGeom>
+          <a:noFill/>
+          <a:ln/>
+        </p:spPr>
+        <p:txBody>
+          <a:bodyPr wrap="square" rtlCol="0" anchor="ctr"/>
+          <a:lstStyle/>
+          <a:p>
+            <a:pPr indent="0" marL="0">
+              <a:buNone/>
+            </a:pPr>
+            <a:r>
+              <a:rPr lang="en-US" sz="3200" b="1" dirty="0">
+                <a:solidFill>
+                  <a:srgbClr val="13233B"/>
+                </a:solidFill>
+                <a:latin typeface="Cambria" pitchFamily="34" charset="0"/>
+                <a:ea typeface="Cambria" pitchFamily="34" charset="-122"/>
+                <a:cs typeface="Cambria" pitchFamily="34" charset="-120"/>
+              </a:rPr>
+              <a:t>How each was caught</a:t>
+            </a:r>
+            <a:endParaRPr lang="en-US" sz="3200" dirty="0"/>
+          </a:p>
+        </p:txBody>
+      </p:sp>
+      <p:sp>
+        <p:nvSpPr>
+          <p:cNvPr id="3" name="Text 1"/>
+          <p:cNvSpPr txBox="1"/>
+          <p:nvPr/>
+        </p:nvSpPr>
+        <p:spPr>
+          <a:xfrm>
+            <a:off x="640080" y="1097280"/>
+            <a:ext cx="10881360" cy="411480"/>
+          </a:xfrm>
+          <a:prstGeom prst="rect">
+            <a:avLst/>
+          </a:prstGeom>
+          <a:noFill/>
+          <a:ln/>
+        </p:spPr>
+        <p:txBody>
+          <a:bodyPr wrap="square" rtlCol="0" anchor="ctr"/>
+          <a:lstStyle/>
+          <a:p>
+            <a:pPr indent="0" marL="0">
+              <a:buNone/>
+            </a:pPr>
+            <a:r>
+              <a:rPr lang="en-US" sz="1500" dirty="0">
+                <a:solidFill>
+                  <a:srgbClr val="3A4A5F"/>
+                </a:solidFill>
+                <a:latin typeface="Calibri" pitchFamily="34" charset="0"/>
+                <a:ea typeface="Calibri" pitchFamily="34" charset="-122"/>
+                <a:cs typeface="Calibri" pitchFamily="34" charset="-120"/>
+              </a:rPr>
+              <a:t>Not one was visible from a summary statistic. Every one was found by checking a physical invariant.</a:t>
+            </a:r>
+            <a:endParaRPr lang="en-US" sz="1500" dirty="0"/>
+          </a:p>
+        </p:txBody>
+      </p:sp>
+      <p:sp>
+        <p:nvSpPr>
+          <p:cNvPr id="4" name="Shape 2"/>
+          <p:cNvSpPr/>
+          <p:nvPr/>
+        </p:nvSpPr>
+        <p:spPr>
+          <a:xfrm>
+            <a:off x="640080" y="1691640"/>
+            <a:ext cx="10881360" cy="749808"/>
+          </a:xfrm>
+          <a:prstGeom prst="roundRect">
+            <a:avLst>
+              <a:gd name="adj" fmla="val 9756"/>
+            </a:avLst>
+          </a:prstGeom>
+          <a:solidFill>
+            <a:srgbClr val="EEF4F8"/>
+          </a:solidFill>
+          <a:ln w="9525">
+            <a:solidFill>
+              <a:srgbClr val="D8E4EC"/>
+            </a:solidFill>
+            <a:prstDash val="solid"/>
+          </a:ln>
+          <a:effectLst>
+            <a:outerShdw sx="100000" sy="100000" kx="0" ky="0" algn="bl" rotWithShape="0" blurRad="50800" dist="12700" dir="5400000">
+              <a:srgbClr val="BFCEDA">
+                <a:alpha val="35000"/>
+              </a:srgbClr>
+            </a:outerShdw>
+          </a:effectLst>
+        </p:spPr>
+      </p:sp>
+      <p:sp>
+        <p:nvSpPr>
+          <p:cNvPr id="5" name="Text 3"/>
+          <p:cNvSpPr txBox="1"/>
+          <p:nvPr/>
+        </p:nvSpPr>
+        <p:spPr>
+          <a:xfrm>
+            <a:off x="960120" y="1764792"/>
+            <a:ext cx="5394960" cy="347472"/>
+          </a:xfrm>
+          <a:prstGeom prst="rect">
+            <a:avLst/>
+          </a:prstGeom>
+          <a:noFill/>
+          <a:ln/>
+        </p:spPr>
+        <p:txBody>
+          <a:bodyPr wrap="square" lIns="0" tIns="0" rIns="0" bIns="0" rtlCol="0" anchor="ctr"/>
+          <a:lstStyle/>
+          <a:p>
+            <a:pPr indent="0" marL="0">
+              <a:buNone/>
+            </a:pPr>
+            <a:r>
+              <a:rPr lang="en-US" sz="1400" b="1" dirty="0">
+                <a:solidFill>
+                  <a:srgbClr val="065A82"/>
+                </a:solidFill>
+                <a:latin typeface="Calibri" pitchFamily="34" charset="0"/>
+                <a:ea typeface="Calibri" pitchFamily="34" charset="-122"/>
+                <a:cs typeface="Calibri" pitchFamily="34" charset="-120"/>
+              </a:rPr>
+              <a:t>Bytes ÷ packets on the monitored queue</a:t>
+            </a:r>
+            <a:endParaRPr lang="en-US" sz="1400" dirty="0"/>
+          </a:p>
+        </p:txBody>
+      </p:sp>
+      <p:sp>
+        <p:nvSpPr>
+          <p:cNvPr id="6" name="Text 4"/>
+          <p:cNvSpPr txBox="1"/>
+          <p:nvPr/>
+        </p:nvSpPr>
+        <p:spPr>
+          <a:xfrm>
+            <a:off x="960120" y="2093976"/>
+            <a:ext cx="10241280" cy="310896"/>
+          </a:xfrm>
+          <a:prstGeom prst="rect">
+            <a:avLst/>
+          </a:prstGeom>
+          <a:noFill/>
+          <a:ln/>
+        </p:spPr>
+        <p:txBody>
+          <a:bodyPr wrap="square" lIns="0" tIns="0" rIns="0" bIns="0" rtlCol="0" anchor="ctr"/>
+          <a:lstStyle/>
+          <a:p>
+            <a:pPr indent="0" marL="0">
+              <a:buNone/>
+            </a:pPr>
+            <a:r>
+              <a:rPr lang="en-US" sz="1250" dirty="0">
+                <a:solidFill>
+                  <a:srgbClr val="3A4A5F"/>
+                </a:solidFill>
+                <a:latin typeface="Calibri" pitchFamily="34" charset="0"/>
+                <a:ea typeface="Calibri" pitchFamily="34" charset="-122"/>
+                <a:cs typeface="Calibri" pitchFamily="34" charset="-120"/>
+              </a:rPr>
+              <a:t>66 B means you are queueing ACKs, not data</a:t>
+            </a:r>
+            <a:endParaRPr lang="en-US" sz="1250" dirty="0"/>
+          </a:p>
+        </p:txBody>
+      </p:sp>
+      <p:sp>
+        <p:nvSpPr>
+          <p:cNvPr id="7" name="Shape 5"/>
+          <p:cNvSpPr/>
+          <p:nvPr/>
+        </p:nvSpPr>
+        <p:spPr>
+          <a:xfrm>
+            <a:off x="640080" y="2560320"/>
+            <a:ext cx="10881360" cy="749808"/>
+          </a:xfrm>
+          <a:prstGeom prst="roundRect">
+            <a:avLst>
+              <a:gd name="adj" fmla="val 9756"/>
+            </a:avLst>
+          </a:prstGeom>
+          <a:solidFill>
+            <a:srgbClr val="EEF4F8"/>
+          </a:solidFill>
+          <a:ln w="9525">
+            <a:solidFill>
+              <a:srgbClr val="D8E4EC"/>
+            </a:solidFill>
+            <a:prstDash val="solid"/>
+          </a:ln>
+          <a:effectLst>
+            <a:outerShdw sx="100000" sy="100000" kx="0" ky="0" algn="bl" rotWithShape="0" blurRad="50800" dist="12700" dir="5400000">
+              <a:srgbClr val="BFCEDA">
+                <a:alpha val="35000"/>
+              </a:srgbClr>
+            </a:outerShdw>
+          </a:effectLst>
+        </p:spPr>
+      </p:sp>
+      <p:sp>
+        <p:nvSpPr>
+          <p:cNvPr id="8" name="Text 6"/>
+          <p:cNvSpPr txBox="1"/>
+          <p:nvPr/>
+        </p:nvSpPr>
+        <p:spPr>
+          <a:xfrm>
+            <a:off x="960120" y="2633472"/>
+            <a:ext cx="5394960" cy="347472"/>
+          </a:xfrm>
+          <a:prstGeom prst="rect">
+            <a:avLst/>
+          </a:prstGeom>
+          <a:noFill/>
+          <a:ln/>
+        </p:spPr>
+        <p:txBody>
+          <a:bodyPr wrap="square" lIns="0" tIns="0" rIns="0" bIns="0" rtlCol="0" anchor="ctr"/>
+          <a:lstStyle/>
+          <a:p>
+            <a:pPr indent="0" marL="0">
+              <a:buNone/>
+            </a:pPr>
+            <a:r>
+              <a:rPr lang="en-US" sz="1400" b="1" dirty="0">
+                <a:solidFill>
+                  <a:srgbClr val="065A82"/>
+                </a:solidFill>
+                <a:latin typeface="Calibri" pitchFamily="34" charset="0"/>
+                <a:ea typeface="Calibri" pitchFamily="34" charset="-122"/>
+                <a:cs typeface="Calibri" pitchFamily="34" charset="-120"/>
+              </a:rPr>
+              <a:t>Drop rate vs the link's packet rate</a:t>
+            </a:r>
+            <a:endParaRPr lang="en-US" sz="1400" dirty="0"/>
+          </a:p>
+        </p:txBody>
+      </p:sp>
+      <p:sp>
+        <p:nvSpPr>
+          <p:cNvPr id="9" name="Text 7"/>
+          <p:cNvSpPr txBox="1"/>
+          <p:nvPr/>
+        </p:nvSpPr>
+        <p:spPr>
+          <a:xfrm>
+            <a:off x="960120" y="2962656"/>
+            <a:ext cx="10241280" cy="310896"/>
+          </a:xfrm>
+          <a:prstGeom prst="rect">
+            <a:avLst/>
+          </a:prstGeom>
+          <a:noFill/>
+          <a:ln/>
+        </p:spPr>
+        <p:txBody>
+          <a:bodyPr wrap="square" lIns="0" tIns="0" rIns="0" bIns="0" rtlCol="0" anchor="ctr"/>
+          <a:lstStyle/>
+          <a:p>
+            <a:pPr indent="0" marL="0">
+              <a:buNone/>
+            </a:pPr>
+            <a:r>
+              <a:rPr lang="en-US" sz="1250" dirty="0">
+                <a:solidFill>
+                  <a:srgbClr val="3A4A5F"/>
+                </a:solidFill>
+                <a:latin typeface="Calibri" pitchFamily="34" charset="0"/>
+                <a:ea typeface="Calibri" pitchFamily="34" charset="-122"/>
+                <a:cs typeface="Calibri" pitchFamily="34" charset="-120"/>
+              </a:rPr>
+              <a:t>A 10 Mbit link passes 826 pkt/s; 130,000 drops/s is impossible</a:t>
+            </a:r>
+            <a:endParaRPr lang="en-US" sz="1250" dirty="0"/>
+          </a:p>
+        </p:txBody>
+      </p:sp>
+      <p:sp>
+        <p:nvSpPr>
+          <p:cNvPr id="10" name="Shape 8"/>
+          <p:cNvSpPr/>
+          <p:nvPr/>
+        </p:nvSpPr>
+        <p:spPr>
+          <a:xfrm>
+            <a:off x="640080" y="3429000"/>
+            <a:ext cx="10881360" cy="749808"/>
+          </a:xfrm>
+          <a:prstGeom prst="roundRect">
+            <a:avLst>
+              <a:gd name="adj" fmla="val 9756"/>
+            </a:avLst>
+          </a:prstGeom>
+          <a:solidFill>
+            <a:srgbClr val="EEF4F8"/>
+          </a:solidFill>
+          <a:ln w="9525">
+            <a:solidFill>
+              <a:srgbClr val="D8E4EC"/>
+            </a:solidFill>
+            <a:prstDash val="solid"/>
+          </a:ln>
+          <a:effectLst>
+            <a:outerShdw sx="100000" sy="100000" kx="0" ky="0" algn="bl" rotWithShape="0" blurRad="50800" dist="12700" dir="5400000">
+              <a:srgbClr val="BFCEDA">
+                <a:alpha val="35000"/>
+              </a:srgbClr>
+            </a:outerShdw>
+          </a:effectLst>
+        </p:spPr>
+      </p:sp>
+      <p:sp>
+        <p:nvSpPr>
+          <p:cNvPr id="11" name="Text 9"/>
+          <p:cNvSpPr txBox="1"/>
+          <p:nvPr/>
+        </p:nvSpPr>
+        <p:spPr>
+          <a:xfrm>
+            <a:off x="960120" y="3502152"/>
+            <a:ext cx="5394960" cy="347472"/>
+          </a:xfrm>
+          <a:prstGeom prst="rect">
+            <a:avLst/>
+          </a:prstGeom>
+          <a:noFill/>
+          <a:ln/>
+        </p:spPr>
+        <p:txBody>
+          <a:bodyPr wrap="square" lIns="0" tIns="0" rIns="0" bIns="0" rtlCol="0" anchor="ctr"/>
+          <a:lstStyle/>
+          <a:p>
+            <a:pPr indent="0" marL="0">
+              <a:buNone/>
+            </a:pPr>
+            <a:r>
+              <a:rPr lang="en-US" sz="1400" b="1" dirty="0">
+                <a:solidFill>
+                  <a:srgbClr val="065A82"/>
+                </a:solidFill>
+                <a:latin typeface="Calibri" pitchFamily="34" charset="0"/>
+                <a:ea typeface="Calibri" pitchFamily="34" charset="-122"/>
+                <a:cs typeface="Calibri" pitchFamily="34" charset="-120"/>
+              </a:rPr>
+              <a:t>Does varying a control input change the output?</a:t>
+            </a:r>
+            <a:endParaRPr lang="en-US" sz="1400" dirty="0"/>
+          </a:p>
+        </p:txBody>
+      </p:sp>
+      <p:sp>
+        <p:nvSpPr>
+          <p:cNvPr id="12" name="Text 10"/>
+          <p:cNvSpPr txBox="1"/>
+          <p:nvPr/>
+        </p:nvSpPr>
+        <p:spPr>
+          <a:xfrm>
+            <a:off x="960120" y="3831336"/>
+            <a:ext cx="10241280" cy="310896"/>
+          </a:xfrm>
+          <a:prstGeom prst="rect">
+            <a:avLst/>
+          </a:prstGeom>
+          <a:noFill/>
+          <a:ln/>
+        </p:spPr>
+        <p:txBody>
+          <a:bodyPr wrap="square" lIns="0" tIns="0" rIns="0" bIns="0" rtlCol="0" anchor="ctr"/>
+          <a:lstStyle/>
+          <a:p>
+            <a:pPr indent="0" marL="0">
+              <a:buNone/>
+            </a:pPr>
+            <a:r>
+              <a:rPr lang="en-US" sz="1250" dirty="0">
+                <a:solidFill>
+                  <a:srgbClr val="3A4A5F"/>
+                </a:solidFill>
+                <a:latin typeface="Calibri" pitchFamily="34" charset="0"/>
+                <a:ea typeface="Calibri" pitchFamily="34" charset="-122"/>
+                <a:cs typeface="Calibri" pitchFamily="34" charset="-120"/>
+              </a:rPr>
+              <a:t>If not, the control path is inert however it is labelled</a:t>
+            </a:r>
+            <a:endParaRPr lang="en-US" sz="1250" dirty="0"/>
+          </a:p>
+        </p:txBody>
+      </p:sp>
+      <p:sp>
+        <p:nvSpPr>
+          <p:cNvPr id="13" name="Shape 11"/>
+          <p:cNvSpPr/>
+          <p:nvPr/>
+        </p:nvSpPr>
+        <p:spPr>
+          <a:xfrm>
+            <a:off x="640080" y="4297680"/>
+            <a:ext cx="10881360" cy="749808"/>
+          </a:xfrm>
+          <a:prstGeom prst="roundRect">
+            <a:avLst>
+              <a:gd name="adj" fmla="val 9756"/>
+            </a:avLst>
+          </a:prstGeom>
+          <a:solidFill>
+            <a:srgbClr val="EEF4F8"/>
+          </a:solidFill>
+          <a:ln w="9525">
+            <a:solidFill>
+              <a:srgbClr val="D8E4EC"/>
+            </a:solidFill>
+            <a:prstDash val="solid"/>
+          </a:ln>
+          <a:effectLst>
+            <a:outerShdw sx="100000" sy="100000" kx="0" ky="0" algn="bl" rotWithShape="0" blurRad="50800" dist="12700" dir="5400000">
+              <a:srgbClr val="BFCEDA">
+                <a:alpha val="35000"/>
+              </a:srgbClr>
+            </a:outerShdw>
+          </a:effectLst>
+        </p:spPr>
+      </p:sp>
+      <p:sp>
+        <p:nvSpPr>
+          <p:cNvPr id="14" name="Text 12"/>
+          <p:cNvSpPr txBox="1"/>
+          <p:nvPr/>
+        </p:nvSpPr>
+        <p:spPr>
+          <a:xfrm>
+            <a:off x="960120" y="4370832"/>
+            <a:ext cx="5394960" cy="347472"/>
+          </a:xfrm>
+          <a:prstGeom prst="rect">
+            <a:avLst/>
+          </a:prstGeom>
+          <a:noFill/>
+          <a:ln/>
+        </p:spPr>
+        <p:txBody>
+          <a:bodyPr wrap="square" lIns="0" tIns="0" rIns="0" bIns="0" rtlCol="0" anchor="ctr"/>
+          <a:lstStyle/>
+          <a:p>
+            <a:pPr indent="0" marL="0">
+              <a:buNone/>
+            </a:pPr>
+            <a:r>
+              <a:rPr lang="en-US" sz="1400" b="1" dirty="0">
+                <a:solidFill>
+                  <a:srgbClr val="065A82"/>
+                </a:solidFill>
+                <a:latin typeface="Calibri" pitchFamily="34" charset="0"/>
+                <a:ea typeface="Calibri" pitchFamily="34" charset="-122"/>
+                <a:cs typeface="Calibri" pitchFamily="34" charset="-120"/>
+              </a:rPr>
+              <a:t>Is the threshold reachable at all?</a:t>
+            </a:r>
+            <a:endParaRPr lang="en-US" sz="1400" dirty="0"/>
+          </a:p>
+        </p:txBody>
+      </p:sp>
+      <p:sp>
+        <p:nvSpPr>
+          <p:cNvPr id="15" name="Text 13"/>
+          <p:cNvSpPr txBox="1"/>
+          <p:nvPr/>
+        </p:nvSpPr>
+        <p:spPr>
+          <a:xfrm>
+            <a:off x="960120" y="4700016"/>
+            <a:ext cx="10241280" cy="310896"/>
+          </a:xfrm>
+          <a:prstGeom prst="rect">
+            <a:avLst/>
+          </a:prstGeom>
+          <a:noFill/>
+          <a:ln/>
+        </p:spPr>
+        <p:txBody>
+          <a:bodyPr wrap="square" lIns="0" tIns="0" rIns="0" bIns="0" rtlCol="0" anchor="ctr"/>
+          <a:lstStyle/>
+          <a:p>
+            <a:pPr indent="0" marL="0">
+              <a:buNone/>
+            </a:pPr>
+            <a:r>
+              <a:rPr lang="en-US" sz="1250" dirty="0">
+                <a:solidFill>
+                  <a:srgbClr val="3A4A5F"/>
+                </a:solidFill>
+                <a:latin typeface="Calibri" pitchFamily="34" charset="0"/>
+                <a:ea typeface="Calibri" pitchFamily="34" charset="-122"/>
+                <a:cs typeface="Calibri" pitchFamily="34" charset="-120"/>
+              </a:rPr>
+              <a:t>10 MB elephant threshold, 9.38 MB maximum flow share</a:t>
+            </a:r>
+            <a:endParaRPr lang="en-US" sz="1250" dirty="0"/>
+          </a:p>
+        </p:txBody>
+      </p:sp>
+      <p:sp>
+        <p:nvSpPr>
+          <p:cNvPr id="16" name="Shape 14"/>
+          <p:cNvSpPr/>
+          <p:nvPr/>
+        </p:nvSpPr>
+        <p:spPr>
+          <a:xfrm>
+            <a:off x="640080" y="5166360"/>
+            <a:ext cx="10881360" cy="749808"/>
+          </a:xfrm>
+          <a:prstGeom prst="roundRect">
+            <a:avLst>
+              <a:gd name="adj" fmla="val 9756"/>
+            </a:avLst>
+          </a:prstGeom>
+          <a:solidFill>
+            <a:srgbClr val="EEF4F8"/>
+          </a:solidFill>
+          <a:ln w="9525">
+            <a:solidFill>
+              <a:srgbClr val="D8E4EC"/>
+            </a:solidFill>
+            <a:prstDash val="solid"/>
+          </a:ln>
+          <a:effectLst>
+            <a:outerShdw sx="100000" sy="100000" kx="0" ky="0" algn="bl" rotWithShape="0" blurRad="50800" dist="12700" dir="5400000">
+              <a:srgbClr val="BFCEDA">
+                <a:alpha val="35000"/>
+              </a:srgbClr>
+            </a:outerShdw>
+          </a:effectLst>
+        </p:spPr>
+      </p:sp>
+      <p:sp>
+        <p:nvSpPr>
+          <p:cNvPr id="17" name="Text 15"/>
+          <p:cNvSpPr txBox="1"/>
+          <p:nvPr/>
+        </p:nvSpPr>
+        <p:spPr>
+          <a:xfrm>
+            <a:off x="960120" y="5239512"/>
+            <a:ext cx="5394960" cy="347472"/>
+          </a:xfrm>
+          <a:prstGeom prst="rect">
+            <a:avLst/>
+          </a:prstGeom>
+          <a:noFill/>
+          <a:ln/>
+        </p:spPr>
+        <p:txBody>
+          <a:bodyPr wrap="square" lIns="0" tIns="0" rIns="0" bIns="0" rtlCol="0" anchor="ctr"/>
+          <a:lstStyle/>
+          <a:p>
+            <a:pPr indent="0" marL="0">
+              <a:buNone/>
+            </a:pPr>
+            <a:r>
+              <a:rPr lang="en-US" sz="1400" b="1" dirty="0">
+                <a:solidFill>
+                  <a:srgbClr val="065A82"/>
+                </a:solidFill>
+                <a:latin typeface="Calibri" pitchFamily="34" charset="0"/>
+                <a:ea typeface="Calibri" pitchFamily="34" charset="-122"/>
+                <a:cs typeface="Calibri" pitchFamily="34" charset="-120"/>
+              </a:rPr>
+              <a:t>Does the reported value reach the kernel?</a:t>
+            </a:r>
+            <a:endParaRPr lang="en-US" sz="1400" dirty="0"/>
+          </a:p>
+        </p:txBody>
+      </p:sp>
+      <p:sp>
+        <p:nvSpPr>
+          <p:cNvPr id="18" name="Text 16"/>
+          <p:cNvSpPr txBox="1"/>
+          <p:nvPr/>
+        </p:nvSpPr>
+        <p:spPr>
+          <a:xfrm>
+            <a:off x="960120" y="5568696"/>
+            <a:ext cx="10241280" cy="310896"/>
+          </a:xfrm>
+          <a:prstGeom prst="rect">
+            <a:avLst/>
+          </a:prstGeom>
+          <a:noFill/>
+          <a:ln/>
+        </p:spPr>
+        <p:txBody>
+          <a:bodyPr wrap="square" lIns="0" tIns="0" rIns="0" bIns="0" rtlCol="0" anchor="ctr"/>
+          <a:lstStyle/>
+          <a:p>
+            <a:pPr indent="0" marL="0">
+              <a:buNone/>
+            </a:pPr>
+            <a:r>
+              <a:rPr lang="en-US" sz="1250" dirty="0">
+                <a:solidFill>
+                  <a:srgbClr val="3A4A5F"/>
+                </a:solidFill>
+                <a:latin typeface="Calibri" pitchFamily="34" charset="0"/>
+                <a:ea typeface="Calibri" pitchFamily="34" charset="-122"/>
+                <a:cs typeface="Calibri" pitchFamily="34" charset="-120"/>
+              </a:rPr>
+              <a:t>A float in userspace is not the qdisc parameter</a:t>
+            </a:r>
+            <a:endParaRPr lang="en-US" sz="1250" dirty="0"/>
+          </a:p>
+        </p:txBody>
+      </p:sp>
+      <p:sp>
+        <p:nvSpPr>
+          <p:cNvPr id="19" name="Text 17"/>
+          <p:cNvSpPr txBox="1"/>
+          <p:nvPr/>
+        </p:nvSpPr>
+        <p:spPr>
+          <a:xfrm>
+            <a:off x="640080" y="6080760"/>
+            <a:ext cx="10881360" cy="365760"/>
+          </a:xfrm>
+          <a:prstGeom prst="rect">
+            <a:avLst/>
+          </a:prstGeom>
+          <a:noFill/>
+          <a:ln/>
+        </p:spPr>
+        <p:txBody>
+          <a:bodyPr wrap="square" rtlCol="0" anchor="ctr"/>
+          <a:lstStyle/>
+          <a:p>
+            <a:pPr indent="0" marL="0">
+              <a:buNone/>
+            </a:pPr>
+            <a:r>
+              <a:rPr lang="en-US" sz="1400" i="1" dirty="0">
+                <a:solidFill>
+                  <a:srgbClr val="13233B"/>
+                </a:solidFill>
+                <a:latin typeface="Calibri" pitchFamily="34" charset="0"/>
+                <a:ea typeface="Calibri" pitchFamily="34" charset="-122"/>
+                <a:cs typeface="Calibri" pitchFamily="34" charset="-120"/>
+              </a:rPr>
+              <a:t>We think this is the most transferable part of the work.</a:t>
+            </a:r>
+            <a:endParaRPr lang="en-US" sz="1400" dirty="0"/>
+          </a:p>
+        </p:txBody>
+      </p:sp>
+    </p:spTree>
+  </p:cSld>
+  <p:clrMapOvr>
+    <a:masterClrMapping/>
+  </p:clrMapOvr>
+</p:sld>
+</file>
+
+<file path=ppt/slides/slide21.xml><?xml version="1.0" encoding="utf-8"?>
+<p:sld xmlns:a="http://schemas.openxmlformats.org/drawingml/2006/main" xmlns:r="http://schemas.openxmlformats.org/officeDocument/2006/relationships" xmlns:p="http://schemas.openxmlformats.org/presentationml/2006/main">
+  <p:cSld name="Slide 21">
+    <p:bg>
+      <p:bgPr>
+        <a:solidFill>
+          <a:srgbClr val="FFFFFF"/>
+        </a:solidFill>
+      </p:bgPr>
+    </p:bg>
+    <p:spTree>
+      <p:nvGrpSpPr>
+        <p:cNvPr id="1" name=""/>
+        <p:cNvGrpSpPr/>
+        <p:nvPr/>
+      </p:nvGrpSpPr>
+      <p:grpSpPr>
+        <a:xfrm>
+          <a:off x="0" y="0"/>
+          <a:ext cx="0" cy="0"/>
+          <a:chOff x="0" y="0"/>
+          <a:chExt cx="0" cy="0"/>
+        </a:xfrm>
+      </p:grpSpPr>
+      <p:sp>
+        <p:nvSpPr>
+          <p:cNvPr id="2" name="Text 0"/>
+          <p:cNvSpPr txBox="1"/>
+          <p:nvPr/>
+        </p:nvSpPr>
+        <p:spPr>
+          <a:xfrm>
+            <a:off x="640080" y="411480"/>
+            <a:ext cx="10881360" cy="731520"/>
+          </a:xfrm>
+          <a:prstGeom prst="rect">
+            <a:avLst/>
+          </a:prstGeom>
+          <a:noFill/>
+          <a:ln/>
+        </p:spPr>
+        <p:txBody>
+          <a:bodyPr wrap="square" rtlCol="0" anchor="ctr"/>
+          <a:lstStyle/>
+          <a:p>
+            <a:pPr indent="0" marL="0">
+              <a:buNone/>
+            </a:pPr>
+            <a:r>
+              <a:rPr lang="en-US" sz="3200" b="1" dirty="0">
+                <a:solidFill>
+                  <a:srgbClr val="13233B"/>
+                </a:solidFill>
+                <a:latin typeface="Cambria" pitchFamily="34" charset="0"/>
+                <a:ea typeface="Cambria" pitchFamily="34" charset="-122"/>
+                <a:cs typeface="Cambria" pitchFamily="34" charset="-120"/>
+              </a:rPr>
+              <a:t>Where this sits against recent work</a:t>
+            </a:r>
+            <a:endParaRPr lang="en-US" sz="3200" dirty="0"/>
+          </a:p>
+        </p:txBody>
+      </p:sp>
+      <p:sp>
+        <p:nvSpPr>
+          <p:cNvPr id="3" name="Text 1"/>
+          <p:cNvSpPr txBox="1"/>
+          <p:nvPr/>
+        </p:nvSpPr>
+        <p:spPr>
+          <a:xfrm>
+            <a:off x="640080" y="1097280"/>
+            <a:ext cx="10881360" cy="365760"/>
+          </a:xfrm>
+          <a:prstGeom prst="rect">
+            <a:avLst/>
+          </a:prstGeom>
+          <a:noFill/>
+          <a:ln/>
+        </p:spPr>
+        <p:txBody>
+          <a:bodyPr wrap="square" rtlCol="0" anchor="ctr"/>
+          <a:lstStyle/>
+          <a:p>
+            <a:pPr indent="0" marL="0">
+              <a:buNone/>
+            </a:pPr>
+            <a:r>
+              <a:rPr lang="en-US" sz="1500" dirty="0">
+                <a:solidFill>
+                  <a:srgbClr val="3A4A5F"/>
+                </a:solidFill>
+                <a:latin typeface="Calibri" pitchFamily="34" charset="0"/>
+                <a:ea typeface="Calibri" pitchFamily="34" charset="-122"/>
+                <a:cs typeface="Calibri" pitchFamily="34" charset="-120"/>
+              </a:rPr>
+              <a:t>2023–2026 · what is taken, and what is not</a:t>
+            </a:r>
+            <a:endParaRPr lang="en-US" sz="1500" dirty="0"/>
+          </a:p>
+        </p:txBody>
+      </p:sp>
+      <p:sp>
+        <p:nvSpPr>
+          <p:cNvPr id="4" name="Shape 2"/>
+          <p:cNvSpPr/>
+          <p:nvPr/>
+        </p:nvSpPr>
+        <p:spPr>
+          <a:xfrm>
+            <a:off x="640080" y="1600200"/>
+            <a:ext cx="5349240" cy="2240280"/>
+          </a:xfrm>
+          <a:prstGeom prst="roundRect">
+            <a:avLst>
+              <a:gd name="adj" fmla="val 3265"/>
+            </a:avLst>
+          </a:prstGeom>
+          <a:solidFill>
+            <a:srgbClr val="FBEEF0"/>
+          </a:solidFill>
+          <a:ln w="9525">
+            <a:solidFill>
+              <a:srgbClr val="D8E4EC"/>
+            </a:solidFill>
+            <a:prstDash val="solid"/>
+          </a:ln>
+          <a:effectLst>
+            <a:outerShdw sx="100000" sy="100000" kx="0" ky="0" algn="bl" rotWithShape="0" blurRad="50800" dist="12700" dir="5400000">
+              <a:srgbClr val="BFCEDA">
+                <a:alpha val="35000"/>
+              </a:srgbClr>
+            </a:outerShdw>
+          </a:effectLst>
+        </p:spPr>
+      </p:sp>
+      <p:sp>
+        <p:nvSpPr>
+          <p:cNvPr id="5" name="Text 3"/>
+          <p:cNvSpPr txBox="1"/>
+          <p:nvPr/>
+        </p:nvSpPr>
+        <p:spPr>
+          <a:xfrm>
+            <a:off x="914400" y="1783080"/>
+            <a:ext cx="4800600" cy="347472"/>
+          </a:xfrm>
+          <a:prstGeom prst="rect">
+            <a:avLst/>
+          </a:prstGeom>
+          <a:noFill/>
+          <a:ln/>
+        </p:spPr>
+        <p:txBody>
+          <a:bodyPr wrap="square" lIns="0" tIns="0" rIns="0" bIns="0" rtlCol="0" anchor="ctr"/>
+          <a:lstStyle/>
+          <a:p>
+            <a:pPr indent="0" marL="0">
+              <a:buNone/>
+            </a:pPr>
+            <a:r>
+              <a:rPr lang="en-US" sz="1500" b="1" dirty="0">
+                <a:solidFill>
+                  <a:srgbClr val="B23A48"/>
+                </a:solidFill>
+                <a:latin typeface="Cambria" pitchFamily="34" charset="0"/>
+                <a:ea typeface="Cambria" pitchFamily="34" charset="-122"/>
+                <a:cs typeface="Cambria" pitchFamily="34" charset="-120"/>
+              </a:rPr>
+              <a:t>Already done — cannot claim</a:t>
+            </a:r>
+            <a:endParaRPr lang="en-US" sz="1500" dirty="0"/>
+          </a:p>
+        </p:txBody>
+      </p:sp>
+      <p:sp>
+        <p:nvSpPr>
+          <p:cNvPr id="6" name="Text 4"/>
+          <p:cNvSpPr txBox="1"/>
+          <p:nvPr/>
+        </p:nvSpPr>
+        <p:spPr>
+          <a:xfrm>
+            <a:off x="914400" y="2194560"/>
+            <a:ext cx="4800600" cy="1554480"/>
+          </a:xfrm>
+          <a:prstGeom prst="rect">
+            <a:avLst/>
+          </a:prstGeom>
+          <a:noFill/>
+          <a:ln/>
+        </p:spPr>
+        <p:txBody>
+          <a:bodyPr wrap="square" lIns="0" tIns="0" rIns="0" bIns="0" rtlCol="0" anchor="ctr"/>
+          <a:lstStyle/>
+          <a:p>
+            <a:pPr marL="342900" indent="-342900">
+              <a:spcAft>
+                <a:spcPts val="600"/>
+              </a:spcAft>
+              <a:buSzPct val="100000"/>
+              <a:buChar char="•"/>
+            </a:pPr>
+            <a:r>
+              <a:rPr lang="en-US" sz="1200" dirty="0">
+                <a:solidFill>
+                  <a:srgbClr val="3A4A5F"/>
+                </a:solidFill>
+                <a:latin typeface="Calibri" pitchFamily="34" charset="0"/>
+                <a:ea typeface="Calibri" pitchFamily="34" charset="-122"/>
+                <a:cs typeface="Calibri" pitchFamily="34" charset="-120"/>
+              </a:rPr>
+              <a:t>DESiRED (2024) adapts an AQM target at runtime with DRL + INT on P4</a:t>
+            </a:r>
+            <a:endParaRPr lang="en-US" sz="1200" dirty="0"/>
+          </a:p>
+          <a:p>
+            <a:pPr marL="342900" indent="-342900">
+              <a:spcAft>
+                <a:spcPts val="600"/>
+              </a:spcAft>
+              <a:buSzPct val="100000"/>
+              <a:buChar char="•"/>
+            </a:pPr>
+            <a:r>
+              <a:rPr lang="en-US" sz="1200" dirty="0">
+                <a:solidFill>
+                  <a:srgbClr val="3A4A5F"/>
+                </a:solidFill>
+                <a:latin typeface="Calibri" pitchFamily="34" charset="0"/>
+                <a:ea typeface="Calibri" pitchFamily="34" charset="-122"/>
+                <a:cs typeface="Calibri" pitchFamily="34" charset="-120"/>
+              </a:rPr>
+              <a:t>Adaptive RED (2001) is the AIMD rule we borrow</a:t>
+            </a:r>
+            <a:endParaRPr lang="en-US" sz="1200" dirty="0"/>
+          </a:p>
+          <a:p>
+            <a:pPr marL="342900" indent="-342900">
+              <a:spcAft>
+                <a:spcPts val="600"/>
+              </a:spcAft>
+              <a:buSzPct val="100000"/>
+              <a:buChar char="•"/>
+            </a:pPr>
+            <a:r>
+              <a:rPr lang="en-US" sz="1200" dirty="0">
+                <a:solidFill>
+                  <a:srgbClr val="3A4A5F"/>
+                </a:solidFill>
+                <a:latin typeface="Calibri" pitchFamily="34" charset="0"/>
+                <a:ea typeface="Calibri" pitchFamily="34" charset="-122"/>
+                <a:cs typeface="Calibri" pitchFamily="34" charset="-120"/>
+              </a:rPr>
+              <a:t>ACoDel (2020) adapts CoDel's interval — with a stability proof we lack</a:t>
+            </a:r>
+            <a:endParaRPr lang="en-US" sz="1200" dirty="0"/>
+          </a:p>
+          <a:p>
+            <a:pPr marL="342900" indent="-342900">
+              <a:spcAft>
+                <a:spcPts val="600"/>
+              </a:spcAft>
+              <a:buSzPct val="100000"/>
+              <a:buChar char="•"/>
+            </a:pPr>
+            <a:r>
+              <a:rPr lang="en-US" sz="1200" dirty="0">
+                <a:solidFill>
+                  <a:srgbClr val="3A4A5F"/>
+                </a:solidFill>
+                <a:latin typeface="Calibri" pitchFamily="34" charset="0"/>
+                <a:ea typeface="Calibri" pitchFamily="34" charset="-122"/>
+                <a:cs typeface="Calibri" pitchFamily="34" charset="-120"/>
+              </a:rPr>
+              <a:t>QueuePilot (2023), AQM-LLM (2026) learn AQM policies</a:t>
+            </a:r>
+            <a:endParaRPr lang="en-US" sz="1200" dirty="0"/>
+          </a:p>
+        </p:txBody>
+      </p:sp>
+      <p:sp>
+        <p:nvSpPr>
+          <p:cNvPr id="7" name="Shape 5"/>
+          <p:cNvSpPr/>
+          <p:nvPr/>
+        </p:nvSpPr>
+        <p:spPr>
+          <a:xfrm>
+            <a:off x="6263640" y="1600200"/>
+            <a:ext cx="5257800" cy="2240280"/>
+          </a:xfrm>
+          <a:prstGeom prst="roundRect">
+            <a:avLst>
+              <a:gd name="adj" fmla="val 3265"/>
+            </a:avLst>
+          </a:prstGeom>
+          <a:solidFill>
+            <a:srgbClr val="EAF4EE"/>
+          </a:solidFill>
+          <a:ln w="9525">
+            <a:solidFill>
+              <a:srgbClr val="D8E4EC"/>
+            </a:solidFill>
+            <a:prstDash val="solid"/>
+          </a:ln>
+          <a:effectLst>
+            <a:outerShdw sx="100000" sy="100000" kx="0" ky="0" algn="bl" rotWithShape="0" blurRad="50800" dist="12700" dir="5400000">
+              <a:srgbClr val="BFCEDA">
+                <a:alpha val="35000"/>
+              </a:srgbClr>
+            </a:outerShdw>
+          </a:effectLst>
+        </p:spPr>
+      </p:sp>
+      <p:sp>
+        <p:nvSpPr>
+          <p:cNvPr id="8" name="Text 6"/>
+          <p:cNvSpPr txBox="1"/>
+          <p:nvPr/>
+        </p:nvSpPr>
+        <p:spPr>
+          <a:xfrm>
+            <a:off x="6537960" y="1783080"/>
+            <a:ext cx="4709160" cy="347472"/>
+          </a:xfrm>
+          <a:prstGeom prst="rect">
+            <a:avLst/>
+          </a:prstGeom>
+          <a:noFill/>
+          <a:ln/>
+        </p:spPr>
+        <p:txBody>
+          <a:bodyPr wrap="square" lIns="0" tIns="0" rIns="0" bIns="0" rtlCol="0" anchor="ctr"/>
+          <a:lstStyle/>
+          <a:p>
+            <a:pPr indent="0" marL="0">
+              <a:buNone/>
+            </a:pPr>
+            <a:r>
+              <a:rPr lang="en-US" sz="1500" b="1" dirty="0">
+                <a:solidFill>
+                  <a:srgbClr val="2C7A5A"/>
+                </a:solidFill>
+                <a:latin typeface="Cambria" pitchFamily="34" charset="0"/>
+                <a:ea typeface="Cambria" pitchFamily="34" charset="-122"/>
+                <a:cs typeface="Cambria" pitchFamily="34" charset="-120"/>
+              </a:rPr>
+              <a:t>Not done by anyone — our claim</a:t>
+            </a:r>
+            <a:endParaRPr lang="en-US" sz="1500" dirty="0"/>
+          </a:p>
+        </p:txBody>
+      </p:sp>
+      <p:sp>
+        <p:nvSpPr>
+          <p:cNvPr id="9" name="Text 7"/>
+          <p:cNvSpPr txBox="1"/>
+          <p:nvPr/>
+        </p:nvSpPr>
+        <p:spPr>
+          <a:xfrm>
+            <a:off x="6537960" y="2194560"/>
+            <a:ext cx="4709160" cy="1554480"/>
+          </a:xfrm>
+          <a:prstGeom prst="rect">
+            <a:avLst/>
+          </a:prstGeom>
+          <a:noFill/>
+          <a:ln/>
+        </p:spPr>
+        <p:txBody>
+          <a:bodyPr wrap="square" lIns="0" tIns="0" rIns="0" bIns="0" rtlCol="0" anchor="ctr"/>
+          <a:lstStyle/>
+          <a:p>
+            <a:pPr marL="342900" indent="-342900">
+              <a:spcAft>
+                <a:spcPts val="600"/>
+              </a:spcAft>
+              <a:buSzPct val="100000"/>
+              <a:buChar char="•"/>
+            </a:pPr>
+            <a:r>
+              <a:rPr lang="en-US" sz="1200" dirty="0">
+                <a:solidFill>
+                  <a:srgbClr val="3A4A5F"/>
+                </a:solidFill>
+                <a:latin typeface="Calibri" pitchFamily="34" charset="0"/>
+                <a:ea typeface="Calibri" pitchFamily="34" charset="-122"/>
+                <a:cs typeface="Calibri" pitchFamily="34" charset="-120"/>
+              </a:rPr>
+              <a:t>A sham-controller condition separating CPU cost from decisions</a:t>
+            </a:r>
+            <a:endParaRPr lang="en-US" sz="1200" dirty="0"/>
+          </a:p>
+          <a:p>
+            <a:pPr marL="342900" indent="-342900">
+              <a:spcAft>
+                <a:spcPts val="600"/>
+              </a:spcAft>
+              <a:buSzPct val="100000"/>
+              <a:buChar char="•"/>
+            </a:pPr>
+            <a:r>
+              <a:rPr lang="en-US" sz="1200" dirty="0">
+                <a:solidFill>
+                  <a:srgbClr val="3A4A5F"/>
+                </a:solidFill>
+                <a:latin typeface="Calibri" pitchFamily="34" charset="0"/>
+                <a:ea typeface="Calibri" pitchFamily="34" charset="-122"/>
+                <a:cs typeface="Calibri" pitchFamily="34" charset="-120"/>
+              </a:rPr>
+              <a:t>Sparse-probe and bulk-flow latency reported separately</a:t>
+            </a:r>
+            <a:endParaRPr lang="en-US" sz="1200" dirty="0"/>
+          </a:p>
+          <a:p>
+            <a:pPr marL="342900" indent="-342900">
+              <a:spcAft>
+                <a:spcPts val="600"/>
+              </a:spcAft>
+              <a:buSzPct val="100000"/>
+              <a:buChar char="•"/>
+            </a:pPr>
+            <a:r>
+              <a:rPr lang="en-US" sz="1200" dirty="0">
+                <a:solidFill>
+                  <a:srgbClr val="3A4A5F"/>
+                </a:solidFill>
+                <a:latin typeface="Calibri" pitchFamily="34" charset="0"/>
+                <a:ea typeface="Calibri" pitchFamily="34" charset="-122"/>
+                <a:cs typeface="Calibri" pitchFamily="34" charset="-120"/>
+              </a:rPr>
+              <a:t>Comparison against eight alternative disciplines</a:t>
+            </a:r>
+            <a:endParaRPr lang="en-US" sz="1200" dirty="0"/>
+          </a:p>
+          <a:p>
+            <a:pPr marL="342900" indent="-342900">
+              <a:spcAft>
+                <a:spcPts val="600"/>
+              </a:spcAft>
+              <a:buSzPct val="100000"/>
+              <a:buChar char="•"/>
+            </a:pPr>
+            <a:r>
+              <a:rPr lang="en-US" sz="1200" dirty="0">
+                <a:solidFill>
+                  <a:srgbClr val="3A4A5F"/>
+                </a:solidFill>
+                <a:latin typeface="Calibri" pitchFamily="34" charset="0"/>
+                <a:ea typeface="Calibri" pitchFamily="34" charset="-122"/>
+                <a:cs typeface="Calibri" pitchFamily="34" charset="-120"/>
+              </a:rPr>
+              <a:t>A published null result for the adaptation itself</a:t>
+            </a:r>
+            <a:endParaRPr lang="en-US" sz="1200" dirty="0"/>
+          </a:p>
+        </p:txBody>
+      </p:sp>
+      <p:sp>
+        <p:nvSpPr>
+          <p:cNvPr id="10" name="Shape 8"/>
+          <p:cNvSpPr/>
+          <p:nvPr/>
+        </p:nvSpPr>
+        <p:spPr>
+          <a:xfrm>
+            <a:off x="640080" y="4114800"/>
+            <a:ext cx="10881360" cy="1554480"/>
+          </a:xfrm>
+          <a:prstGeom prst="roundRect">
+            <a:avLst>
+              <a:gd name="adj" fmla="val 4706"/>
+            </a:avLst>
+          </a:prstGeom>
+          <a:solidFill>
+            <a:srgbClr val="E8F1F6"/>
+          </a:solidFill>
+          <a:ln w="9525">
+            <a:solidFill>
+              <a:srgbClr val="D8E4EC"/>
+            </a:solidFill>
+            <a:prstDash val="solid"/>
+          </a:ln>
+          <a:effectLst>
+            <a:outerShdw sx="100000" sy="100000" kx="0" ky="0" algn="bl" rotWithShape="0" blurRad="50800" dist="12700" dir="5400000">
+              <a:srgbClr val="BFCEDA">
+                <a:alpha val="35000"/>
+              </a:srgbClr>
+            </a:outerShdw>
+          </a:effectLst>
+        </p:spPr>
+      </p:sp>
+      <p:sp>
+        <p:nvSpPr>
+          <p:cNvPr id="11" name="Text 9"/>
+          <p:cNvSpPr txBox="1"/>
+          <p:nvPr/>
+        </p:nvSpPr>
+        <p:spPr>
+          <a:xfrm>
+            <a:off x="960120" y="4279392"/>
+            <a:ext cx="10515600" cy="320040"/>
+          </a:xfrm>
+          <a:prstGeom prst="rect">
+            <a:avLst/>
+          </a:prstGeom>
+          <a:noFill/>
+          <a:ln/>
+        </p:spPr>
+        <p:txBody>
+          <a:bodyPr wrap="square" lIns="0" tIns="0" rIns="0" bIns="0" rtlCol="0" anchor="ctr"/>
+          <a:lstStyle/>
+          <a:p>
+            <a:pPr indent="0" marL="0">
+              <a:buNone/>
+            </a:pPr>
+            <a:r>
+              <a:rPr lang="en-US" sz="1400" b="1" spc="100" kern="0" dirty="0">
+                <a:solidFill>
+                  <a:srgbClr val="065A82"/>
+                </a:solidFill>
+                <a:latin typeface="Calibri" pitchFamily="34" charset="0"/>
+                <a:ea typeface="Calibri" pitchFamily="34" charset="-122"/>
+                <a:cs typeface="Calibri" pitchFamily="34" charset="-120"/>
+              </a:rPr>
+              <a:t>The claim we can defend</a:t>
+            </a:r>
+            <a:endParaRPr lang="en-US" sz="1400" dirty="0"/>
+          </a:p>
+        </p:txBody>
+      </p:sp>
+      <p:sp>
+        <p:nvSpPr>
+          <p:cNvPr id="12" name="Text 10"/>
+          <p:cNvSpPr txBox="1"/>
+          <p:nvPr/>
+        </p:nvSpPr>
+        <p:spPr>
+          <a:xfrm>
+            <a:off x="960120" y="4617720"/>
+            <a:ext cx="10515600" cy="914400"/>
+          </a:xfrm>
+          <a:prstGeom prst="rect">
+            <a:avLst/>
+          </a:prstGeom>
+          <a:noFill/>
+          <a:ln/>
+        </p:spPr>
+        <p:txBody>
+          <a:bodyPr wrap="square" lIns="0" tIns="0" rIns="0" bIns="0" rtlCol="0" anchor="ctr"/>
+          <a:lstStyle/>
+          <a:p>
+            <a:pPr indent="0" marL="0">
+              <a:buNone/>
+            </a:pPr>
+            <a:r>
+              <a:rPr lang="en-US" sz="1700" b="1" dirty="0">
+                <a:solidFill>
+                  <a:srgbClr val="13233B"/>
+                </a:solidFill>
+                <a:latin typeface="Cambria" pitchFamily="34" charset="0"/>
+                <a:ea typeface="Cambria" pitchFamily="34" charset="-122"/>
+                <a:cs typeface="Cambria" pitchFamily="34" charset="-120"/>
+              </a:rPr>
+              <a:t>A falsifiable predicate for when adapting an AQM's parameters pays, pre-registered and tested to destruction, with the controlled apparatus needed to establish it.</a:t>
+            </a:r>
+            <a:endParaRPr lang="en-US" sz="1700" dirty="0"/>
+          </a:p>
+        </p:txBody>
+      </p:sp>
+    </p:spTree>
+  </p:cSld>
+  <p:clrMapOvr>
+    <a:masterClrMapping/>
+  </p:clrMapOvr>
+</p:sld>
+</file>
+
+<file path=ppt/slides/slide22.xml><?xml version="1.0" encoding="utf-8"?>
+<p:sld xmlns:a="http://schemas.openxmlformats.org/drawingml/2006/main" xmlns:r="http://schemas.openxmlformats.org/officeDocument/2006/relationships" xmlns:p="http://schemas.openxmlformats.org/presentationml/2006/main">
+  <p:cSld name="Slide 22">
+    <p:bg>
+      <p:bgPr>
+        <a:solidFill>
+          <a:srgbClr val="21295C"/>
+        </a:solidFill>
+      </p:bgPr>
+    </p:bg>
+    <p:spTree>
+      <p:nvGrpSpPr>
+        <p:cNvPr id="1" name=""/>
+        <p:cNvGrpSpPr/>
+        <p:nvPr/>
+      </p:nvGrpSpPr>
+      <p:grpSpPr>
+        <a:xfrm>
+          <a:off x="0" y="0"/>
+          <a:ext cx="0" cy="0"/>
+          <a:chOff x="0" y="0"/>
+          <a:chExt cx="0" cy="0"/>
+        </a:xfrm>
+      </p:grpSpPr>
+      <p:sp>
+        <p:nvSpPr>
+          <p:cNvPr id="2" name="Text 0"/>
+          <p:cNvSpPr txBox="1"/>
+          <p:nvPr/>
+        </p:nvSpPr>
+        <p:spPr>
+          <a:xfrm>
+            <a:off x="640080" y="1737360"/>
+            <a:ext cx="10881360" cy="365760"/>
+          </a:xfrm>
+          <a:prstGeom prst="rect">
+            <a:avLst/>
+          </a:prstGeom>
+          <a:noFill/>
+          <a:ln/>
+        </p:spPr>
+        <p:txBody>
+          <a:bodyPr wrap="square" rtlCol="0" anchor="ctr"/>
+          <a:lstStyle/>
+          <a:p>
+            <a:pPr indent="0" marL="0">
+              <a:buNone/>
+            </a:pPr>
+            <a:r>
+              <a:rPr lang="en-US" sz="1500" spc="200" kern="0" dirty="0">
+                <a:solidFill>
+                  <a:srgbClr val="9DB8D6"/>
+                </a:solidFill>
+                <a:latin typeface="Calibri" pitchFamily="34" charset="0"/>
+                <a:ea typeface="Calibri" pitchFamily="34" charset="-122"/>
+                <a:cs typeface="Calibri" pitchFamily="34" charset="-120"/>
+              </a:rPr>
+              <a:t>CONCLUSION</a:t>
+            </a:r>
+            <a:endParaRPr lang="en-US" sz="1500" dirty="0"/>
+          </a:p>
+        </p:txBody>
+      </p:sp>
+      <p:sp>
+        <p:nvSpPr>
+          <p:cNvPr id="3" name="Text 1"/>
+          <p:cNvSpPr txBox="1"/>
+          <p:nvPr/>
+        </p:nvSpPr>
+        <p:spPr>
+          <a:xfrm>
+            <a:off x="640080" y="2194560"/>
+            <a:ext cx="10881360" cy="1645920"/>
+          </a:xfrm>
+          <a:prstGeom prst="rect">
+            <a:avLst/>
+          </a:prstGeom>
+          <a:noFill/>
+          <a:ln/>
+        </p:spPr>
+        <p:txBody>
+          <a:bodyPr wrap="square" rtlCol="0" anchor="ctr"/>
+          <a:lstStyle/>
+          <a:p>
+            <a:pPr indent="0" marL="0">
+              <a:buNone/>
+            </a:pPr>
+            <a:r>
+              <a:rPr lang="en-US" sz="4200" b="1" dirty="0">
+                <a:solidFill>
+                  <a:srgbClr val="FFFFFF"/>
+                </a:solidFill>
+                <a:latin typeface="Cambria" pitchFamily="34" charset="0"/>
+                <a:ea typeface="Cambria" pitchFamily="34" charset="-122"/>
+                <a:cs typeface="Cambria" pitchFamily="34" charset="-120"/>
+              </a:rPr>
+              <a:t>What we are left with</a:t>
+            </a:r>
+            <a:endParaRPr lang="en-US" sz="4200" dirty="0"/>
+          </a:p>
+        </p:txBody>
+      </p:sp>
+      <p:sp>
+        <p:nvSpPr>
+          <p:cNvPr id="4" name="Shape 2"/>
+          <p:cNvSpPr/>
+          <p:nvPr/>
+        </p:nvSpPr>
+        <p:spPr>
+          <a:xfrm>
+            <a:off x="640080" y="3456432"/>
+            <a:ext cx="10881360" cy="658368"/>
+          </a:xfrm>
+          <a:prstGeom prst="roundRect">
+            <a:avLst>
+              <a:gd name="adj" fmla="val 9722"/>
+            </a:avLst>
+          </a:prstGeom>
+          <a:solidFill>
+            <a:srgbClr val="2C3568"/>
+          </a:solidFill>
+          <a:ln w="12700">
+            <a:solidFill>
+              <a:srgbClr val="333333"/>
+            </a:solidFill>
+            <a:prstDash val="solid"/>
+          </a:ln>
+        </p:spPr>
+      </p:sp>
+      <p:sp>
+        <p:nvSpPr>
+          <p:cNvPr id="5" name="Shape 3"/>
+          <p:cNvSpPr/>
+          <p:nvPr/>
+        </p:nvSpPr>
+        <p:spPr>
+          <a:xfrm>
+            <a:off x="914400" y="3602736"/>
+            <a:ext cx="365760" cy="365760"/>
+          </a:xfrm>
+          <a:prstGeom prst="ellipse">
+            <a:avLst/>
+          </a:prstGeom>
+          <a:solidFill>
+            <a:srgbClr val="1C7293"/>
+          </a:solidFill>
+          <a:ln w="12700">
+            <a:solidFill>
+              <a:srgbClr val="333333"/>
+            </a:solidFill>
+            <a:prstDash val="solid"/>
+          </a:ln>
+        </p:spPr>
+      </p:sp>
+      <p:sp>
+        <p:nvSpPr>
+          <p:cNvPr id="6" name="Text 4"/>
+          <p:cNvSpPr txBox="1"/>
+          <p:nvPr/>
+        </p:nvSpPr>
+        <p:spPr>
+          <a:xfrm>
+            <a:off x="914400" y="3602736"/>
+            <a:ext cx="365760" cy="365760"/>
+          </a:xfrm>
+          <a:prstGeom prst="rect">
+            <a:avLst/>
+          </a:prstGeom>
+          <a:noFill/>
+          <a:ln/>
+        </p:spPr>
+        <p:txBody>
+          <a:bodyPr wrap="square" lIns="0" tIns="0" rIns="0" bIns="0" rtlCol="0" anchor="ctr"/>
+          <a:lstStyle/>
+          <a:p>
+            <a:pPr algn="ctr" indent="0" marL="0">
+              <a:buNone/>
+            </a:pPr>
+            <a:r>
+              <a:rPr lang="en-US" sz="1300" b="1" dirty="0">
+                <a:solidFill>
+                  <a:srgbClr val="FFFFFF"/>
+                </a:solidFill>
+                <a:latin typeface="Calibri" pitchFamily="34" charset="0"/>
+                <a:ea typeface="Calibri" pitchFamily="34" charset="-122"/>
+                <a:cs typeface="Calibri" pitchFamily="34" charset="-120"/>
+              </a:rPr>
+              <a:t>1</a:t>
+            </a:r>
+            <a:endParaRPr lang="en-US" sz="1300" dirty="0"/>
+          </a:p>
+        </p:txBody>
+      </p:sp>
+      <p:sp>
+        <p:nvSpPr>
+          <p:cNvPr id="7" name="Text 5"/>
+          <p:cNvSpPr txBox="1"/>
+          <p:nvPr/>
+        </p:nvSpPr>
+        <p:spPr>
+          <a:xfrm>
+            <a:off x="1508760" y="3502152"/>
+            <a:ext cx="10058400" cy="310896"/>
+          </a:xfrm>
+          <a:prstGeom prst="rect">
+            <a:avLst/>
+          </a:prstGeom>
+          <a:noFill/>
+          <a:ln/>
+        </p:spPr>
+        <p:txBody>
+          <a:bodyPr wrap="square" lIns="0" tIns="0" rIns="0" bIns="0" rtlCol="0" anchor="ctr"/>
+          <a:lstStyle/>
+          <a:p>
+            <a:pPr indent="0" marL="0">
+              <a:buNone/>
+            </a:pPr>
+            <a:r>
+              <a:rPr lang="en-US" sz="1400" b="1" dirty="0">
+                <a:solidFill>
+                  <a:srgbClr val="FFFFFF"/>
+                </a:solidFill>
+                <a:latin typeface="Calibri" pitchFamily="34" charset="0"/>
+                <a:ea typeface="Calibri" pitchFamily="34" charset="-122"/>
+                <a:cs typeface="Calibri" pitchFamily="34" charset="-120"/>
+              </a:rPr>
+              <a:t>Flow queueing with a delay target is what matters</a:t>
+            </a:r>
+            <a:endParaRPr lang="en-US" sz="1400" dirty="0"/>
+          </a:p>
+        </p:txBody>
+      </p:sp>
+      <p:sp>
+        <p:nvSpPr>
+          <p:cNvPr id="8" name="Text 6"/>
+          <p:cNvSpPr txBox="1"/>
+          <p:nvPr/>
+        </p:nvSpPr>
+        <p:spPr>
+          <a:xfrm>
+            <a:off x="1508760" y="3803904"/>
+            <a:ext cx="10058400" cy="283464"/>
+          </a:xfrm>
+          <a:prstGeom prst="rect">
+            <a:avLst/>
+          </a:prstGeom>
+          <a:noFill/>
+          <a:ln/>
+        </p:spPr>
+        <p:txBody>
+          <a:bodyPr wrap="square" lIns="0" tIns="0" rIns="0" bIns="0" rtlCol="0" anchor="ctr"/>
+          <a:lstStyle/>
+          <a:p>
+            <a:pPr indent="0" marL="0">
+              <a:buNone/>
+            </a:pPr>
+            <a:r>
+              <a:rPr lang="en-US" sz="1150" dirty="0">
+                <a:solidFill>
+                  <a:srgbClr val="A9C3DE"/>
+                </a:solidFill>
+                <a:latin typeface="Calibri" pitchFamily="34" charset="0"/>
+                <a:ea typeface="Calibri" pitchFamily="34" charset="-122"/>
+                <a:cs typeface="Calibri" pitchFamily="34" charset="-120"/>
+              </a:rPr>
+              <a:t>About 100x tail-latency reduction at no goodput cost</a:t>
+            </a:r>
+            <a:endParaRPr lang="en-US" sz="1150" dirty="0"/>
+          </a:p>
+        </p:txBody>
+      </p:sp>
+      <p:sp>
+        <p:nvSpPr>
+          <p:cNvPr id="9" name="Shape 7"/>
+          <p:cNvSpPr/>
+          <p:nvPr/>
+        </p:nvSpPr>
+        <p:spPr>
+          <a:xfrm>
+            <a:off x="640080" y="4187952"/>
+            <a:ext cx="10881360" cy="658368"/>
+          </a:xfrm>
+          <a:prstGeom prst="roundRect">
+            <a:avLst>
+              <a:gd name="adj" fmla="val 9722"/>
+            </a:avLst>
+          </a:prstGeom>
+          <a:solidFill>
+            <a:srgbClr val="2C3568"/>
+          </a:solidFill>
+          <a:ln w="12700">
+            <a:solidFill>
+              <a:srgbClr val="333333"/>
+            </a:solidFill>
+            <a:prstDash val="solid"/>
+          </a:ln>
+        </p:spPr>
+      </p:sp>
+      <p:sp>
+        <p:nvSpPr>
+          <p:cNvPr id="10" name="Shape 8"/>
+          <p:cNvSpPr/>
+          <p:nvPr/>
+        </p:nvSpPr>
+        <p:spPr>
+          <a:xfrm>
+            <a:off x="914400" y="4334256"/>
+            <a:ext cx="365760" cy="365760"/>
+          </a:xfrm>
+          <a:prstGeom prst="ellipse">
+            <a:avLst/>
+          </a:prstGeom>
+          <a:solidFill>
+            <a:srgbClr val="1C7293"/>
+          </a:solidFill>
+          <a:ln w="12700">
+            <a:solidFill>
+              <a:srgbClr val="333333"/>
+            </a:solidFill>
+            <a:prstDash val="solid"/>
+          </a:ln>
+        </p:spPr>
+      </p:sp>
+      <p:sp>
+        <p:nvSpPr>
+          <p:cNvPr id="11" name="Text 9"/>
+          <p:cNvSpPr txBox="1"/>
+          <p:nvPr/>
+        </p:nvSpPr>
+        <p:spPr>
+          <a:xfrm>
+            <a:off x="914400" y="4334256"/>
+            <a:ext cx="365760" cy="365760"/>
+          </a:xfrm>
+          <a:prstGeom prst="rect">
+            <a:avLst/>
+          </a:prstGeom>
+          <a:noFill/>
+          <a:ln/>
+        </p:spPr>
+        <p:txBody>
+          <a:bodyPr wrap="square" lIns="0" tIns="0" rIns="0" bIns="0" rtlCol="0" anchor="ctr"/>
+          <a:lstStyle/>
+          <a:p>
+            <a:pPr algn="ctr" indent="0" marL="0">
+              <a:buNone/>
+            </a:pPr>
+            <a:r>
+              <a:rPr lang="en-US" sz="1300" b="1" dirty="0">
+                <a:solidFill>
+                  <a:srgbClr val="FFFFFF"/>
+                </a:solidFill>
+                <a:latin typeface="Calibri" pitchFamily="34" charset="0"/>
+                <a:ea typeface="Calibri" pitchFamily="34" charset="-122"/>
+                <a:cs typeface="Calibri" pitchFamily="34" charset="-120"/>
+              </a:rPr>
+              <a:t>2</a:t>
+            </a:r>
+            <a:endParaRPr lang="en-US" sz="1300" dirty="0"/>
+          </a:p>
+        </p:txBody>
+      </p:sp>
+      <p:sp>
+        <p:nvSpPr>
+          <p:cNvPr id="12" name="Text 10"/>
+          <p:cNvSpPr txBox="1"/>
+          <p:nvPr/>
+        </p:nvSpPr>
+        <p:spPr>
+          <a:xfrm>
+            <a:off x="1508760" y="4233672"/>
+            <a:ext cx="10058400" cy="310896"/>
+          </a:xfrm>
+          <a:prstGeom prst="rect">
+            <a:avLst/>
+          </a:prstGeom>
+          <a:noFill/>
+          <a:ln/>
+        </p:spPr>
+        <p:txBody>
+          <a:bodyPr wrap="square" lIns="0" tIns="0" rIns="0" bIns="0" rtlCol="0" anchor="ctr"/>
+          <a:lstStyle/>
+          <a:p>
+            <a:pPr indent="0" marL="0">
+              <a:buNone/>
+            </a:pPr>
+            <a:r>
+              <a:rPr lang="en-US" sz="1400" b="1" dirty="0">
+                <a:solidFill>
+                  <a:srgbClr val="FFFFFF"/>
+                </a:solidFill>
+                <a:latin typeface="Calibri" pitchFamily="34" charset="0"/>
+                <a:ea typeface="Calibri" pitchFamily="34" charset="-122"/>
+                <a:cs typeface="Calibri" pitchFamily="34" charset="-120"/>
+              </a:rPr>
+              <a:t>Whether tuning helps is decided by r = target/RTT</a:t>
+            </a:r>
+            <a:endParaRPr lang="en-US" sz="1400" dirty="0"/>
+          </a:p>
+        </p:txBody>
+      </p:sp>
+      <p:sp>
+        <p:nvSpPr>
+          <p:cNvPr id="13" name="Text 11"/>
+          <p:cNvSpPr txBox="1"/>
+          <p:nvPr/>
+        </p:nvSpPr>
+        <p:spPr>
+          <a:xfrm>
+            <a:off x="1508760" y="4535424"/>
+            <a:ext cx="10058400" cy="283464"/>
+          </a:xfrm>
+          <a:prstGeom prst="rect">
+            <a:avLst/>
+          </a:prstGeom>
+          <a:noFill/>
+          <a:ln/>
+        </p:spPr>
+        <p:txBody>
+          <a:bodyPr wrap="square" lIns="0" tIns="0" rIns="0" bIns="0" rtlCol="0" anchor="ctr"/>
+          <a:lstStyle/>
+          <a:p>
+            <a:pPr indent="0" marL="0">
+              <a:buNone/>
+            </a:pPr>
+            <a:r>
+              <a:rPr lang="en-US" sz="1150" dirty="0">
+                <a:solidFill>
+                  <a:srgbClr val="A9C3DE"/>
+                </a:solidFill>
+                <a:latin typeface="Calibri" pitchFamily="34" charset="0"/>
+                <a:ea typeface="Calibri" pitchFamily="34" charset="-122"/>
+                <a:cs typeface="Calibri" pitchFamily="34" charset="-120"/>
+              </a:rPr>
+              <a:t>Half the benefit at r = 0.50; correct configuration sits five to ten times below that</a:t>
+            </a:r>
+            <a:endParaRPr lang="en-US" sz="1150" dirty="0"/>
+          </a:p>
+        </p:txBody>
+      </p:sp>
+      <p:sp>
+        <p:nvSpPr>
+          <p:cNvPr id="14" name="Shape 12"/>
+          <p:cNvSpPr/>
+          <p:nvPr/>
+        </p:nvSpPr>
+        <p:spPr>
+          <a:xfrm>
+            <a:off x="640080" y="4919472"/>
+            <a:ext cx="10881360" cy="658368"/>
+          </a:xfrm>
+          <a:prstGeom prst="roundRect">
+            <a:avLst>
+              <a:gd name="adj" fmla="val 9722"/>
+            </a:avLst>
+          </a:prstGeom>
+          <a:solidFill>
+            <a:srgbClr val="2C3568"/>
+          </a:solidFill>
+          <a:ln w="12700">
+            <a:solidFill>
+              <a:srgbClr val="333333"/>
+            </a:solidFill>
+            <a:prstDash val="solid"/>
+          </a:ln>
+        </p:spPr>
+      </p:sp>
+      <p:sp>
+        <p:nvSpPr>
+          <p:cNvPr id="15" name="Shape 13"/>
+          <p:cNvSpPr/>
+          <p:nvPr/>
+        </p:nvSpPr>
+        <p:spPr>
+          <a:xfrm>
+            <a:off x="914400" y="5065776"/>
+            <a:ext cx="365760" cy="365760"/>
+          </a:xfrm>
+          <a:prstGeom prst="ellipse">
+            <a:avLst/>
+          </a:prstGeom>
+          <a:solidFill>
+            <a:srgbClr val="1C7293"/>
+          </a:solidFill>
+          <a:ln w="12700">
+            <a:solidFill>
+              <a:srgbClr val="333333"/>
+            </a:solidFill>
+            <a:prstDash val="solid"/>
+          </a:ln>
+        </p:spPr>
+      </p:sp>
+      <p:sp>
+        <p:nvSpPr>
+          <p:cNvPr id="16" name="Text 14"/>
+          <p:cNvSpPr txBox="1"/>
+          <p:nvPr/>
+        </p:nvSpPr>
+        <p:spPr>
+          <a:xfrm>
+            <a:off x="914400" y="5065776"/>
+            <a:ext cx="365760" cy="365760"/>
+          </a:xfrm>
+          <a:prstGeom prst="rect">
+            <a:avLst/>
+          </a:prstGeom>
+          <a:noFill/>
+          <a:ln/>
+        </p:spPr>
+        <p:txBody>
+          <a:bodyPr wrap="square" lIns="0" tIns="0" rIns="0" bIns="0" rtlCol="0" anchor="ctr"/>
+          <a:lstStyle/>
+          <a:p>
+            <a:pPr algn="ctr" indent="0" marL="0">
+              <a:buNone/>
+            </a:pPr>
+            <a:r>
+              <a:rPr lang="en-US" sz="1300" b="1" dirty="0">
+                <a:solidFill>
+                  <a:srgbClr val="FFFFFF"/>
+                </a:solidFill>
+                <a:latin typeface="Calibri" pitchFamily="34" charset="0"/>
+                <a:ea typeface="Calibri" pitchFamily="34" charset="-122"/>
+                <a:cs typeface="Calibri" pitchFamily="34" charset="-120"/>
+              </a:rPr>
+              <a:t>3</a:t>
+            </a:r>
+            <a:endParaRPr lang="en-US" sz="1300" dirty="0"/>
+          </a:p>
+        </p:txBody>
+      </p:sp>
+      <p:sp>
+        <p:nvSpPr>
+          <p:cNvPr id="17" name="Text 15"/>
+          <p:cNvSpPr txBox="1"/>
+          <p:nvPr/>
+        </p:nvSpPr>
+        <p:spPr>
+          <a:xfrm>
+            <a:off x="1508760" y="4965192"/>
+            <a:ext cx="10058400" cy="310896"/>
+          </a:xfrm>
+          <a:prstGeom prst="rect">
+            <a:avLst/>
+          </a:prstGeom>
+          <a:noFill/>
+          <a:ln/>
+        </p:spPr>
+        <p:txBody>
+          <a:bodyPr wrap="square" lIns="0" tIns="0" rIns="0" bIns="0" rtlCol="0" anchor="ctr"/>
+          <a:lstStyle/>
+          <a:p>
+            <a:pPr indent="0" marL="0">
+              <a:buNone/>
+            </a:pPr>
+            <a:r>
+              <a:rPr lang="en-US" sz="1400" b="1" dirty="0">
+                <a:solidFill>
+                  <a:srgbClr val="FFFFFF"/>
+                </a:solidFill>
+                <a:latin typeface="Calibri" pitchFamily="34" charset="0"/>
+                <a:ea typeface="Calibri" pitchFamily="34" charset="-122"/>
+                <a:cs typeface="Calibri" pitchFamily="34" charset="-120"/>
+              </a:rPr>
+              <a:t>The ratio fixes the shape, not the ceiling</a:t>
+            </a:r>
+            <a:endParaRPr lang="en-US" sz="1400" dirty="0"/>
+          </a:p>
+        </p:txBody>
+      </p:sp>
+      <p:sp>
+        <p:nvSpPr>
+          <p:cNvPr id="18" name="Text 16"/>
+          <p:cNvSpPr txBox="1"/>
+          <p:nvPr/>
+        </p:nvSpPr>
+        <p:spPr>
+          <a:xfrm>
+            <a:off x="1508760" y="5266944"/>
+            <a:ext cx="10058400" cy="283464"/>
+          </a:xfrm>
+          <a:prstGeom prst="rect">
+            <a:avLst/>
+          </a:prstGeom>
+          <a:noFill/>
+          <a:ln/>
+        </p:spPr>
+        <p:txBody>
+          <a:bodyPr wrap="square" lIns="0" tIns="0" rIns="0" bIns="0" rtlCol="0" anchor="ctr"/>
+          <a:lstStyle/>
+          <a:p>
+            <a:pPr indent="0" marL="0">
+              <a:buNone/>
+            </a:pPr>
+            <a:r>
+              <a:rPr lang="en-US" sz="1150" dirty="0">
+                <a:solidFill>
+                  <a:srgbClr val="A9C3DE"/>
+                </a:solidFill>
+                <a:latin typeface="Calibri" pitchFamily="34" charset="0"/>
+                <a:ea typeface="Calibri" pitchFamily="34" charset="-122"/>
+                <a:cs typeface="Calibri" pitchFamily="34" charset="-120"/>
+              </a:rPr>
+              <a:t>At r = 1 the benefit still runs 7.1 to 18.2% across a 25-fold change in link rate</a:t>
+            </a:r>
+            <a:endParaRPr lang="en-US" sz="1150" dirty="0"/>
+          </a:p>
+        </p:txBody>
+      </p:sp>
+      <p:sp>
+        <p:nvSpPr>
+          <p:cNvPr id="19" name="Shape 17"/>
+          <p:cNvSpPr/>
+          <p:nvPr/>
+        </p:nvSpPr>
+        <p:spPr>
+          <a:xfrm>
+            <a:off x="640080" y="5650992"/>
+            <a:ext cx="10881360" cy="658368"/>
+          </a:xfrm>
+          <a:prstGeom prst="roundRect">
+            <a:avLst>
+              <a:gd name="adj" fmla="val 9722"/>
+            </a:avLst>
+          </a:prstGeom>
+          <a:solidFill>
+            <a:srgbClr val="2C3568"/>
+          </a:solidFill>
+          <a:ln w="12700">
+            <a:solidFill>
+              <a:srgbClr val="333333"/>
+            </a:solidFill>
+            <a:prstDash val="solid"/>
+          </a:ln>
+        </p:spPr>
+      </p:sp>
+      <p:sp>
+        <p:nvSpPr>
+          <p:cNvPr id="20" name="Shape 18"/>
+          <p:cNvSpPr/>
+          <p:nvPr/>
+        </p:nvSpPr>
+        <p:spPr>
+          <a:xfrm>
+            <a:off x="914400" y="5797296"/>
+            <a:ext cx="365760" cy="365760"/>
+          </a:xfrm>
+          <a:prstGeom prst="ellipse">
+            <a:avLst/>
+          </a:prstGeom>
+          <a:solidFill>
+            <a:srgbClr val="1C7293"/>
+          </a:solidFill>
+          <a:ln w="12700">
+            <a:solidFill>
+              <a:srgbClr val="333333"/>
+            </a:solidFill>
+            <a:prstDash val="solid"/>
+          </a:ln>
+        </p:spPr>
+      </p:sp>
+      <p:sp>
+        <p:nvSpPr>
+          <p:cNvPr id="21" name="Text 19"/>
+          <p:cNvSpPr txBox="1"/>
+          <p:nvPr/>
+        </p:nvSpPr>
+        <p:spPr>
+          <a:xfrm>
+            <a:off x="914400" y="5797296"/>
+            <a:ext cx="365760" cy="365760"/>
+          </a:xfrm>
+          <a:prstGeom prst="rect">
+            <a:avLst/>
+          </a:prstGeom>
+          <a:noFill/>
+          <a:ln/>
+        </p:spPr>
+        <p:txBody>
+          <a:bodyPr wrap="square" lIns="0" tIns="0" rIns="0" bIns="0" rtlCol="0" anchor="ctr"/>
+          <a:lstStyle/>
+          <a:p>
+            <a:pPr algn="ctr" indent="0" marL="0">
+              <a:buNone/>
+            </a:pPr>
+            <a:r>
+              <a:rPr lang="en-US" sz="1300" b="1" dirty="0">
+                <a:solidFill>
+                  <a:srgbClr val="FFFFFF"/>
+                </a:solidFill>
+                <a:latin typeface="Calibri" pitchFamily="34" charset="0"/>
+                <a:ea typeface="Calibri" pitchFamily="34" charset="-122"/>
+                <a:cs typeface="Calibri" pitchFamily="34" charset="-120"/>
+              </a:rPr>
+              <a:t>4</a:t>
+            </a:r>
+            <a:endParaRPr lang="en-US" sz="1300" dirty="0"/>
+          </a:p>
+        </p:txBody>
+      </p:sp>
+      <p:sp>
+        <p:nvSpPr>
+          <p:cNvPr id="22" name="Text 20"/>
+          <p:cNvSpPr txBox="1"/>
+          <p:nvPr/>
+        </p:nvSpPr>
+        <p:spPr>
+          <a:xfrm>
+            <a:off x="1508760" y="5696712"/>
+            <a:ext cx="10058400" cy="310896"/>
+          </a:xfrm>
+          <a:prstGeom prst="rect">
+            <a:avLst/>
+          </a:prstGeom>
+          <a:noFill/>
+          <a:ln/>
+        </p:spPr>
+        <p:txBody>
+          <a:bodyPr wrap="square" lIns="0" tIns="0" rIns="0" bIns="0" rtlCol="0" anchor="ctr"/>
+          <a:lstStyle/>
+          <a:p>
+            <a:pPr indent="0" marL="0">
+              <a:buNone/>
+            </a:pPr>
+            <a:r>
+              <a:rPr lang="en-US" sz="1400" b="1" dirty="0">
+                <a:solidFill>
+                  <a:srgbClr val="FFFFFF"/>
+                </a:solidFill>
+                <a:latin typeface="Calibri" pitchFamily="34" charset="0"/>
+                <a:ea typeface="Calibri" pitchFamily="34" charset="-122"/>
+                <a:cs typeface="Calibri" pitchFamily="34" charset="-120"/>
+              </a:rPr>
+              <a:t>Where r is small, switch discipline instead</a:t>
+            </a:r>
+            <a:endParaRPr lang="en-US" sz="1400" dirty="0"/>
+          </a:p>
+        </p:txBody>
+      </p:sp>
+      <p:sp>
+        <p:nvSpPr>
+          <p:cNvPr id="23" name="Text 21"/>
+          <p:cNvSpPr txBox="1"/>
+          <p:nvPr/>
+        </p:nvSpPr>
+        <p:spPr>
+          <a:xfrm>
+            <a:off x="1508760" y="5998464"/>
+            <a:ext cx="10058400" cy="283464"/>
+          </a:xfrm>
+          <a:prstGeom prst="rect">
+            <a:avLst/>
+          </a:prstGeom>
+          <a:noFill/>
+          <a:ln/>
+        </p:spPr>
+        <p:txBody>
+          <a:bodyPr wrap="square" lIns="0" tIns="0" rIns="0" bIns="0" rtlCol="0" anchor="ctr"/>
+          <a:lstStyle/>
+          <a:p>
+            <a:pPr indent="0" marL="0">
+              <a:buNone/>
+            </a:pPr>
+            <a:r>
+              <a:rPr lang="en-US" sz="1150" dirty="0">
+                <a:solidFill>
+                  <a:srgbClr val="A9C3DE"/>
+                </a:solidFill>
+                <a:latin typeface="Calibri" pitchFamily="34" charset="0"/>
+                <a:ea typeface="Calibri" pitchFamily="34" charset="-122"/>
+                <a:cs typeface="Calibri" pitchFamily="34" charset="-120"/>
+              </a:rPr>
+              <a:t>CAKE needs no controller and beats the adapted system at every RTT tested</a:t>
+            </a:r>
+            <a:endParaRPr lang="en-US" sz="1150" dirty="0"/>
+          </a:p>
+        </p:txBody>
+      </p:sp>
+      <p:sp>
+        <p:nvSpPr>
+          <p:cNvPr id="24" name="Text 22"/>
+          <p:cNvSpPr txBox="1"/>
+          <p:nvPr/>
+        </p:nvSpPr>
+        <p:spPr>
+          <a:xfrm>
+            <a:off x="640080" y="6446520"/>
+            <a:ext cx="10881360" cy="320040"/>
+          </a:xfrm>
+          <a:prstGeom prst="rect">
+            <a:avLst/>
+          </a:prstGeom>
+          <a:noFill/>
+          <a:ln/>
+        </p:spPr>
+        <p:txBody>
+          <a:bodyPr wrap="square" rtlCol="0" anchor="ctr"/>
+          <a:lstStyle/>
+          <a:p>
+            <a:pPr indent="0" marL="0">
+              <a:buNone/>
+            </a:pPr>
+            <a:r>
+              <a:rPr lang="en-US" sz="1200" dirty="0">
+                <a:solidFill>
+                  <a:srgbClr val="7F97B8"/>
+                </a:solidFill>
+                <a:latin typeface="Calibri" pitchFamily="34" charset="0"/>
+                <a:ea typeface="Calibri" pitchFamily="34" charset="-122"/>
+                <a:cs typeface="Calibri" pitchFamily="34" charset="-120"/>
+              </a:rPr>
+              <a:t>github.com/Amritha902/ccn-linux-qdisc-study   ·   every number in the paper generated from the logs</a:t>
+            </a:r>
+            <a:endParaRPr lang="en-US" sz="1200" dirty="0"/>
           </a:p>
         </p:txBody>
       </p:sp>

--- a/deck/ACAPE_2026.pptx
+++ b/deck/ACAPE_2026.pptx
@@ -2872,7 +2872,7 @@
                 <a:ea typeface="Calibri" pitchFamily="34" charset="-122"/>
                 <a:cs typeface="Calibri" pitchFamily="34" charset="-120"/>
               </a:rPr>
-              <a:t>A measured evaluation on stock Linux — and what the measurements had to survive</a:t>
+              <a:t>A measured evaluation on stock Linux, and what the measurements had to survive</a:t>
             </a:r>
             <a:endParaRPr lang="en-US" sz="1700" dirty="0"/>
           </a:p>
@@ -2886,7 +2886,7 @@
         </p:nvSpPr>
         <p:spPr>
           <a:xfrm>
-            <a:off x="640080" y="5029200"/>
+            <a:off x="640080" y="4919472"/>
             <a:ext cx="10881360" cy="365760"/>
           </a:xfrm>
           <a:prstGeom prst="rect">
@@ -2914,6 +2914,45 @@
               <a:t>Amritha S   ·   Yugeshwaran P   ·   Deepti Annuncia</a:t>
             </a:r>
             <a:endParaRPr lang="en-US" sz="1400" dirty="0"/>
+          </a:p>
+        </p:txBody>
+      </p:sp>
+      <p:sp>
+        <p:nvSpPr>
+          <p:cNvPr id="6" name="Text 4"/>
+          <p:cNvSpPr txBox="1"/>
+          <p:nvPr/>
+        </p:nvSpPr>
+        <p:spPr>
+          <a:xfrm>
+            <a:off x="640080" y="5285232"/>
+            <a:ext cx="10881360" cy="310896"/>
+          </a:xfrm>
+          <a:prstGeom prst="rect">
+            <a:avLst/>
+          </a:prstGeom>
+          <a:noFill/>
+          <a:ln/>
+        </p:spPr>
+        <p:txBody>
+          <a:bodyPr wrap="square" rtlCol="0" anchor="ctr"/>
+          <a:lstStyle/>
+          <a:p>
+            <a:pPr indent="0" marL="0">
+              <a:buNone/>
+            </a:pPr>
+            <a:r>
+              <a:rPr lang="en-US" sz="1000" dirty="0">
+                <a:solidFill>
+                  <a:srgbClr val="6C87A6"/>
+                </a:solidFill>
+                <a:latin typeface="Calibri" pitchFamily="34" charset="0"/>
+                <a:ea typeface="Calibri" pitchFamily="34" charset="-122"/>
+                <a:cs typeface="Calibri" pitchFamily="34" charset="-120"/>
+              </a:rPr>
+              <a:t>amritha.s2023@vitstudent.ac.in   ·   yugeshwaran.p2023@vitstudent.ac.in   ·   deepti.annucia2023@vitstudent.ac.in</a:t>
+            </a:r>
+            <a:endParaRPr lang="en-US" sz="1000" dirty="0"/>
           </a:p>
         </p:txBody>
       </p:sp>
@@ -3170,7 +3209,7 @@
                 <a:ea typeface="Calibri" pitchFamily="34" charset="-122"/>
                 <a:cs typeface="Calibri" pitchFamily="34" charset="-120"/>
               </a:rPr>
-              <a:t>Presence or absence of a flow-queueing AQM — not the tuning of one</a:t>
+              <a:t>Presence or absence of a flow-queueing AQM, not the tuning of one</a:t>
             </a:r>
             <a:endParaRPr lang="en-US" sz="1500" dirty="0"/>
           </a:p>
@@ -3764,7 +3803,7 @@
                 <a:ea typeface="Calibri" pitchFamily="34" charset="-122"/>
                 <a:cs typeface="Calibri" pitchFamily="34" charset="-120"/>
               </a:rPr>
-              <a:t>Every flow-queueing discipline with a delay target — fq_codel, FQ-PIE, CAKE — lands near 23 ms. Single-queue AQMs (CoDel, PIE) land near 45 ms. SFQ, which has fair queueing but no AQM, bloats to 115 packets. The AQM and the scheduler each do a distinct job, and both matter far more than parameter choice.</a:t>
+              <a:t>Every flow-queueing discipline with a delay target (fq_codel, FQ-PIE, CAKE) lands near 23 ms. Single-queue AQMs (CoDel, PIE) land near 45 ms. SFQ, which has fair queueing but no AQM, bloats to 115 packets. The AQM and the scheduler each do a distinct job, and both matter far more than parameter choice.</a:t>
             </a:r>
             <a:endParaRPr lang="en-US" sz="1400" dirty="0"/>
           </a:p>
@@ -10903,7 +10942,7 @@
                 <a:ea typeface="Cambria" pitchFamily="34" charset="-122"/>
                 <a:cs typeface="Cambria" pitchFamily="34" charset="-120"/>
               </a:rPr>
-              <a:t>Already done — cannot claim</a:t>
+              <a:t>Already done: cannot claim</a:t>
             </a:r>
             <a:endParaRPr lang="en-US" sz="1500" dirty="0"/>
           </a:p>
@@ -10988,7 +11027,7 @@
                 <a:ea typeface="Calibri" pitchFamily="34" charset="-122"/>
                 <a:cs typeface="Calibri" pitchFamily="34" charset="-120"/>
               </a:rPr>
-              <a:t>ACoDel (2020) adapts CoDel's interval — with a stability proof we lack</a:t>
+              <a:t>ACoDel (2020) adapts CoDel's interval, with a stability proof we lack</a:t>
             </a:r>
             <a:endParaRPr lang="en-US" sz="1200" dirty="0"/>
           </a:p>
@@ -11082,7 +11121,7 @@
                 <a:ea typeface="Cambria" pitchFamily="34" charset="-122"/>
                 <a:cs typeface="Cambria" pitchFamily="34" charset="-120"/>
               </a:rPr>
-              <a:t>Not done by anyone — our claim</a:t>
+              <a:t>Not done by anyone: our claim</a:t>
             </a:r>
             <a:endParaRPr lang="en-US" sz="1500" dirty="0"/>
           </a:p>
@@ -12601,7 +12640,7 @@
                 <a:ea typeface="Calibri" pitchFamily="34" charset="-122"/>
                 <a:cs typeface="Calibri" pitchFamily="34" charset="-120"/>
               </a:rPr>
-              <a:t>66 bytes/packet — pure TCP ACKs</a:t>
+              <a:t>66 bytes/packet, pure TCP ACKs</a:t>
             </a:r>
             <a:endParaRPr lang="en-US" sz="1300" dirty="0"/>
           </a:p>
@@ -12818,7 +12857,7 @@
                 <a:ea typeface="Calibri" pitchFamily="34" charset="-122"/>
                 <a:cs typeface="Calibri" pitchFamily="34" charset="-120"/>
               </a:rPr>
-              <a:t>1509 bytes/packet — real data</a:t>
+              <a:t>1509 bytes/packet, real data</a:t>
             </a:r>
             <a:endParaRPr lang="en-US" sz="1300" dirty="0"/>
           </a:p>
@@ -12838,7 +12877,7 @@
                 <a:ea typeface="Calibri" pitchFamily="34" charset="-122"/>
                 <a:cs typeface="Calibri" pitchFamily="34" charset="-120"/>
               </a:rPr>
-              <a:t>~19 drops/s — physically plausible</a:t>
+              <a:t>~19 drops/s, physically plausible</a:t>
             </a:r>
             <a:endParaRPr lang="en-US" sz="1300" dirty="0"/>
           </a:p>
@@ -13026,7 +13065,7 @@
                 <a:ea typeface="Calibri" pitchFamily="34" charset="-122"/>
                 <a:cs typeface="Calibri" pitchFamily="34" charset="-120"/>
               </a:rPr>
-              <a:t>fq_codel's new-flow heuristic deliberately privileges sparse flows. A ping is a sparse flow, so it measures the best case — not what the bulk traffic sees.</a:t>
+              <a:t>fq_codel's new-flow heuristic deliberately privileges sparse flows. A ping is a sparse flow, so it measures the best case, not what the bulk traffic sees.</a:t>
             </a:r>
             <a:endParaRPr lang="en-US" sz="1450" dirty="0"/>
           </a:p>
@@ -14209,7 +14248,7 @@
                 <a:ea typeface="Calibri" pitchFamily="34" charset="-122"/>
                 <a:cs typeface="Calibri" pitchFamily="34" charset="-120"/>
               </a:rPr>
-              <a:t>By probe RTT, SFQ (30.7 ms) beats CoDel (39.2 ms). By what the data flows actually experience, SFQ is 294 ms against CoDel's 44 ms — nearly 7x worse. SFQ gives the probe its own short queue but has no AQM, so the bulk queues sit at its 127-packet limit throughout.</a:t>
+              <a:t>By probe RTT, SFQ (30.7 ms) beats CoDel (39.2 ms). By what the data flows actually experience, SFQ is 294 ms against CoDel's 44 ms, nearly 7x worse. SFQ gives the probe its own short queue but has no AQM, so the bulk queues sit at its 127-packet limit throughout.</a:t>
             </a:r>
             <a:endParaRPr lang="en-US" sz="1250" dirty="0"/>
           </a:p>
@@ -14319,7 +14358,7 @@
                 <a:ea typeface="Calibri" pitchFamily="34" charset="-122"/>
                 <a:cs typeface="Calibri" pitchFamily="34" charset="-120"/>
               </a:rPr>
-              <a:t>CHOICE  ·  a sham condition — the controller polls at the same cadence but applies no change</a:t>
+              <a:t>CHOICE  ·  a sham condition: the controller polls at the same cadence but applies no change</a:t>
             </a:r>
             <a:endParaRPr lang="en-US" sz="1400" dirty="0"/>
           </a:p>
@@ -15422,7 +15461,7 @@
                 <a:ea typeface="Calibri" pitchFamily="34" charset="-122"/>
                 <a:cs typeface="Calibri" pitchFamily="34" charset="-120"/>
               </a:rPr>
-              <a:t>tick restored to 0.709 s — 4.5× faster</a:t>
+              <a:t>tick restored to 0.709 s, 4.5× faster</a:t>
             </a:r>
             <a:endParaRPr lang="en-US" sz="1300" dirty="0"/>
           </a:p>
@@ -15684,7 +15723,7 @@
                 <a:ea typeface="Calibri" pitchFamily="34" charset="-122"/>
                 <a:cs typeface="Calibri" pitchFamily="34" charset="-120"/>
               </a:rPr>
-              <a:t>CHOICE  ·  a staged load — 2 flows, then 24, then back to 2</a:t>
+              <a:t>CHOICE  ·  a staged load: 2 flows, then 24, then back to 2</a:t>
             </a:r>
             <a:endParaRPr lang="en-US" sz="1400" dirty="0"/>
           </a:p>
@@ -16072,7 +16111,7 @@
                 <a:ea typeface="Calibri" pitchFamily="34" charset="-122"/>
                 <a:cs typeface="Calibri" pitchFamily="34" charset="-120"/>
               </a:rPr>
-              <a:t>Under constant overload the original controller ratcheted target to its floor every run and stopped — always exactly 15 adjustments, which is just the number of ×0.9 steps from 5 ms to 1 ms. That is a constant, not a measurement.</a:t>
+              <a:t>Under constant overload the original controller ratcheted target to its floor every run and stopped, always exactly 15 adjustments, which is just the number of ×0.9 steps from 5 ms to 1 ms. That is a constant, not a measurement.</a:t>
             </a:r>
             <a:endParaRPr lang="en-US" sz="1400" dirty="0"/>
           </a:p>
@@ -16319,7 +16358,7 @@
                 <a:ea typeface="Calibri" pitchFamily="34" charset="-122"/>
                 <a:cs typeface="Calibri" pitchFamily="34" charset="-120"/>
               </a:rPr>
-              <a:t>iperf3's sum_sent counts bytes handed to the socket. Under pfifo it read 12.16 Mbps on a 10 Mbit link — the sender filling a bloated buffer. Only sum_received crossed the bottleneck.</a:t>
+              <a:t>iperf3's sum_sent counts bytes handed to the socket. Under pfifo it read 12.16 Mbps on a 10 Mbit link, the sender filling a bloated buffer. Only sum_received crossed the bottleneck.</a:t>
             </a:r>
             <a:endParaRPr lang="en-US" sz="1300" dirty="0"/>
           </a:p>
@@ -16495,7 +16534,7 @@
                 <a:ea typeface="Calibri" pitchFamily="34" charset="-122"/>
                 <a:cs typeface="Calibri" pitchFamily="34" charset="-120"/>
               </a:rPr>
-              <a:t>pfifo, SFQ, RED, CoDel, PIE, FQ-PIE, CAKE, fq_codel, fq_codel+ACAPE. A comparison that omits the obvious alternatives is not a comparison — and PIE and CAKE are genuinely competitive.</a:t>
+              <a:t>pfifo, SFQ, RED, CoDel, PIE, FQ-PIE, CAKE, fq_codel, fq_codel+ACAPE. A comparison that omits the obvious alternatives is not a comparison, and PIE and CAKE are genuinely competitive.</a:t>
             </a:r>
             <a:endParaRPr lang="en-US" sz="1300" dirty="0"/>
           </a:p>
@@ -16671,7 +16710,7 @@
                 <a:ea typeface="Calibri" pitchFamily="34" charset="-122"/>
                 <a:cs typeface="Calibri" pitchFamily="34" charset="-120"/>
               </a:rPr>
-              <a:t>Confidence intervals from Student's t via the incomplete beta function, not a normal approximation — which at n=3 overstates significance and flipped one of our own conclusions.</a:t>
+              <a:t>Confidence intervals from Student's t via the incomplete beta function, not a normal approximation, which at n=3 overstates significance and flipped one of our own conclusions.</a:t>
             </a:r>
             <a:endParaRPr lang="en-US" sz="1300" dirty="0"/>
           </a:p>
